--- a/output/wordlabs-correct-3day.pptx
+++ b/output/wordlabs-correct-3day.pptx
@@ -6040,7 +6040,7 @@
                 <a:ea typeface="Calibri" pitchFamily="34" charset="-122"/>
                 <a:cs typeface="Calibri" pitchFamily="34" charset="-120"/>
               </a:rPr>
-              <a:t>Can you make a </a:t>
+              <a:t>The teacher asked us to </a:t>
             </a:r>
             <a:pPr algn="l" indent="0" marL="0">
               <a:buNone/>
@@ -6057,7 +6057,7 @@
                 <a:ea typeface="Calibri" pitchFamily="34" charset="-122"/>
                 <a:cs typeface="Calibri" pitchFamily="34" charset="-120"/>
               </a:rPr>
-              <a:t>correction</a:t>
+              <a:t>correct</a:t>
             </a:r>
             <a:pPr algn="l" indent="0" marL="0">
               <a:buNone/>
@@ -6071,7 +6071,7 @@
                 <a:ea typeface="Calibri" pitchFamily="34" charset="-122"/>
                 <a:cs typeface="Calibri" pitchFamily="34" charset="-120"/>
               </a:rPr>
-              <a:t> to your work and then write the answer </a:t>
+              <a:t> our spelling, and she praised us for working so </a:t>
             </a:r>
             <a:pPr algn="l" indent="0" marL="0">
               <a:buNone/>
@@ -6102,7 +6102,7 @@
                 <a:ea typeface="Calibri" pitchFamily="34" charset="-122"/>
                 <a:cs typeface="Calibri" pitchFamily="34" charset="-120"/>
               </a:rPr>
-              <a:t>?</a:t>
+              <a:t>.</a:t>
             </a:r>
             <a:endParaRPr lang="en-US" sz="1800" dirty="0"/>
           </a:p>
@@ -6257,7 +6257,7 @@
                 <a:ea typeface="Trebuchet MS" pitchFamily="34" charset="-122"/>
                 <a:cs typeface="Trebuchet MS" pitchFamily="34" charset="-120"/>
               </a:rPr>
-              <a:t>correction</a:t>
+              <a:t>correct</a:t>
             </a:r>
             <a:endParaRPr lang="en-US" sz="1400" dirty="0"/>
           </a:p>
@@ -6855,7 +6855,7 @@
                 <a:ea typeface="Trebuchet MS" pitchFamily="34" charset="-122"/>
                 <a:cs typeface="Trebuchet MS" pitchFamily="34" charset="-120"/>
               </a:rPr>
-              <a:t>correction</a:t>
+              <a:t>correct</a:t>
             </a:r>
             <a:endParaRPr lang="en-US" sz="2800" dirty="0"/>
           </a:p>
@@ -7682,7 +7682,7 @@
                 <a:ea typeface="Trebuchet MS" pitchFamily="34" charset="-122"/>
                 <a:cs typeface="Trebuchet MS" pitchFamily="34" charset="-120"/>
               </a:rPr>
-              <a:t>correction</a:t>
+              <a:t>correct</a:t>
             </a:r>
             <a:endParaRPr lang="en-US" sz="2800" dirty="0"/>
           </a:p>
@@ -7762,7 +7762,7 @@
         </p:nvSpPr>
         <p:spPr>
           <a:xfrm>
-            <a:off x="2938272" y="2258568"/>
+            <a:off x="4370832" y="2258568"/>
             <a:ext cx="1828800" cy="292608"/>
           </a:xfrm>
           <a:prstGeom prst="rect">
@@ -7796,7 +7796,7 @@
         </p:nvSpPr>
         <p:spPr>
           <a:xfrm>
-            <a:off x="2938272" y="2258568"/>
+            <a:off x="4370832" y="2258568"/>
             <a:ext cx="1828800" cy="292608"/>
           </a:xfrm>
           <a:prstGeom prst="rect">
@@ -7835,7 +7835,7 @@
         </p:nvSpPr>
         <p:spPr>
           <a:xfrm>
-            <a:off x="2938272" y="2569464"/>
+            <a:off x="4370832" y="2569464"/>
             <a:ext cx="1828800" cy="201168"/>
           </a:xfrm>
           <a:prstGeom prst="rect">
@@ -7860,7 +7860,7 @@
                 <a:ea typeface="Calibri" pitchFamily="34" charset="-122"/>
                 <a:cs typeface="Calibri" pitchFamily="34" charset="-120"/>
               </a:rPr>
-              <a:t>right, accurate</a:t>
+              <a:t>right, free from error</a:t>
             </a:r>
             <a:endParaRPr lang="en-US" sz="850" dirty="0"/>
           </a:p>
@@ -7874,30 +7874,23 @@
         </p:nvSpPr>
         <p:spPr>
           <a:xfrm>
-            <a:off x="5803392" y="2258568"/>
-            <a:ext cx="1828800" cy="292608"/>
+            <a:off x="365760" y="3273552"/>
+            <a:ext cx="1371600" cy="658368"/>
           </a:xfrm>
           <a:prstGeom prst="rect">
             <a:avLst>
-              <a:gd name="adj" fmla="val 25000"/>
+              <a:gd name="adj" fmla="val 8333"/>
             </a:avLst>
           </a:prstGeom>
           <a:solidFill>
-            <a:srgbClr val="FCE7F3"/>
-          </a:solidFill>
-          <a:ln w="19050">
-            <a:solidFill>
-              <a:srgbClr val="DB2777"/>
-            </a:solidFill>
-            <a:prstDash val="solid"/>
-          </a:ln>
-          <a:effectLst>
-            <a:outerShdw sx="100000" sy="100000" kx="0" ky="0" algn="bl" rotWithShape="0" blurRad="101600" dist="38100" dir="8100000">
-              <a:srgbClr val="000000">
-                <a:alpha val="12000"/>
-              </a:srgbClr>
-            </a:outerShdw>
-          </a:effectLst>
+            <a:srgbClr val="E2E8F0"/>
+          </a:solidFill>
+          <a:ln w="12700">
+            <a:solidFill>
+              <a:srgbClr val="E2E8F0"/>
+            </a:solidFill>
+            <a:prstDash val="solid"/>
+          </a:ln>
         </p:spPr>
       </p:sp>
       <p:sp>
@@ -7908,90 +7901,117 @@
         </p:nvSpPr>
         <p:spPr>
           <a:xfrm>
-            <a:off x="5803392" y="2258568"/>
-            <a:ext cx="1828800" cy="292608"/>
-          </a:xfrm>
-          <a:prstGeom prst="rect">
-            <a:avLst/>
-          </a:prstGeom>
-          <a:noFill/>
-          <a:ln/>
-        </p:spPr>
-        <p:txBody>
-          <a:bodyPr wrap="square" lIns="0" tIns="0" rIns="0" bIns="0" rtlCol="0" anchor="ctr"/>
-          <a:lstStyle/>
-          <a:p>
-            <a:pPr algn="ctr" indent="0" marL="0">
-              <a:buNone/>
-            </a:pPr>
-            <a:r>
-              <a:rPr lang="en-US" sz="1300" b="1" dirty="0">
-                <a:solidFill>
-                  <a:srgbClr val="9D174D"/>
+            <a:off x="365760" y="3273552"/>
+            <a:ext cx="1371600" cy="658368"/>
+          </a:xfrm>
+          <a:prstGeom prst="rect">
+            <a:avLst/>
+          </a:prstGeom>
+          <a:noFill/>
+          <a:ln/>
+        </p:spPr>
+        <p:txBody>
+          <a:bodyPr wrap="square" lIns="0" tIns="0" rIns="0" bIns="0" rtlCol="0" anchor="ctr"/>
+          <a:lstStyle/>
+          <a:p>
+            <a:pPr algn="ctr" indent="0" marL="0">
+              <a:buNone/>
+            </a:pPr>
+            <a:r>
+              <a:rPr lang="en-US" sz="1100" b="1" dirty="0">
+                <a:solidFill>
+                  <a:srgbClr val="475569"/>
                 </a:solidFill>
                 <a:latin typeface="Trebuchet MS" pitchFamily="34" charset="0"/>
                 <a:ea typeface="Trebuchet MS" pitchFamily="34" charset="-122"/>
                 <a:cs typeface="Trebuchet MS" pitchFamily="34" charset="-120"/>
               </a:rPr>
-              <a:t>ion</a:t>
-            </a:r>
-            <a:endParaRPr lang="en-US" sz="1300" dirty="0"/>
-          </a:p>
-        </p:txBody>
-      </p:sp>
-      <p:sp>
-        <p:nvSpPr>
-          <p:cNvPr id="21" name="Text 19"/>
-          <p:cNvSpPr/>
-          <p:nvPr/>
-        </p:nvSpPr>
-        <p:spPr>
-          <a:xfrm>
-            <a:off x="5803392" y="2569464"/>
-            <a:ext cx="1828800" cy="201168"/>
-          </a:xfrm>
-          <a:prstGeom prst="rect">
-            <a:avLst/>
-          </a:prstGeom>
-          <a:noFill/>
-          <a:ln/>
-        </p:spPr>
-        <p:txBody>
-          <a:bodyPr wrap="square" lIns="0" tIns="0" rIns="0" bIns="0" rtlCol="0" anchor="t"/>
-          <a:lstStyle/>
-          <a:p>
-            <a:pPr algn="ctr" indent="0" marL="0">
-              <a:buNone/>
-            </a:pPr>
-            <a:r>
-              <a:rPr lang="en-US" sz="850" dirty="0">
-                <a:solidFill>
-                  <a:srgbClr val="475569"/>
+              <a:t>Syllables</a:t>
+            </a:r>
+            <a:endParaRPr lang="en-US" sz="1100" dirty="0"/>
+          </a:p>
+        </p:txBody>
+      </p:sp>
+      <p:sp>
+        <p:nvSpPr>
+          <p:cNvPr id="21" name="Shape 19"/>
+          <p:cNvSpPr/>
+          <p:nvPr/>
+        </p:nvSpPr>
+        <p:spPr>
+          <a:xfrm>
+            <a:off x="1874520" y="3273552"/>
+            <a:ext cx="6903720" cy="658368"/>
+          </a:xfrm>
+          <a:prstGeom prst="rect">
+            <a:avLst>
+              <a:gd name="adj" fmla="val 8333"/>
+            </a:avLst>
+          </a:prstGeom>
+          <a:solidFill>
+            <a:srgbClr val="F8FAFC"/>
+          </a:solidFill>
+          <a:ln w="12700">
+            <a:solidFill>
+              <a:srgbClr val="E2E8F0"/>
+            </a:solidFill>
+            <a:prstDash val="dash"/>
+          </a:ln>
+        </p:spPr>
+      </p:sp>
+      <p:sp>
+        <p:nvSpPr>
+          <p:cNvPr id="22" name="Text 20"/>
+          <p:cNvSpPr/>
+          <p:nvPr/>
+        </p:nvSpPr>
+        <p:spPr>
+          <a:xfrm>
+            <a:off x="1874520" y="3273552"/>
+            <a:ext cx="6903720" cy="658368"/>
+          </a:xfrm>
+          <a:prstGeom prst="rect">
+            <a:avLst/>
+          </a:prstGeom>
+          <a:noFill/>
+          <a:ln/>
+        </p:spPr>
+        <p:txBody>
+          <a:bodyPr wrap="square" rtlCol="0" anchor="ctr"/>
+          <a:lstStyle/>
+          <a:p>
+            <a:pPr algn="ctr" indent="0" marL="0">
+              <a:buNone/>
+            </a:pPr>
+            <a:r>
+              <a:rPr lang="en-US" sz="1100" i="1" dirty="0">
+                <a:solidFill>
+                  <a:srgbClr val="CBD5E1"/>
                 </a:solidFill>
                 <a:latin typeface="Calibri" pitchFamily="34" charset="0"/>
                 <a:ea typeface="Calibri" pitchFamily="34" charset="-122"/>
                 <a:cs typeface="Calibri" pitchFamily="34" charset="-120"/>
               </a:rPr>
-              <a:t>act or result of</a:t>
-            </a:r>
-            <a:endParaRPr lang="en-US" sz="850" dirty="0"/>
-          </a:p>
-        </p:txBody>
-      </p:sp>
-      <p:sp>
-        <p:nvSpPr>
-          <p:cNvPr id="22" name="Shape 20"/>
-          <p:cNvSpPr/>
-          <p:nvPr/>
-        </p:nvSpPr>
-        <p:spPr>
-          <a:xfrm>
-            <a:off x="365760" y="3273552"/>
-            <a:ext cx="1371600" cy="658368"/>
+              <a:t>Write here...</a:t>
+            </a:r>
+            <a:endParaRPr lang="en-US" sz="1100" dirty="0"/>
+          </a:p>
+        </p:txBody>
+      </p:sp>
+      <p:sp>
+        <p:nvSpPr>
+          <p:cNvPr id="23" name="Shape 21"/>
+          <p:cNvSpPr/>
+          <p:nvPr/>
+        </p:nvSpPr>
+        <p:spPr>
+          <a:xfrm>
+            <a:off x="365760" y="4096512"/>
+            <a:ext cx="1371600" cy="804672"/>
           </a:xfrm>
           <a:prstGeom prst="rect">
             <a:avLst>
-              <a:gd name="adj" fmla="val 8333"/>
+              <a:gd name="adj" fmla="val 6818"/>
             </a:avLst>
           </a:prstGeom>
           <a:solidFill>
@@ -8007,14 +8027,14 @@
       </p:sp>
       <p:sp>
         <p:nvSpPr>
-          <p:cNvPr id="23" name="Text 21"/>
-          <p:cNvSpPr/>
-          <p:nvPr/>
-        </p:nvSpPr>
-        <p:spPr>
-          <a:xfrm>
-            <a:off x="365760" y="3273552"/>
-            <a:ext cx="1371600" cy="658368"/>
+          <p:cNvPr id="24" name="Text 22"/>
+          <p:cNvSpPr/>
+          <p:nvPr/>
+        </p:nvSpPr>
+        <p:spPr>
+          <a:xfrm>
+            <a:off x="365760" y="4096512"/>
+            <a:ext cx="1371600" cy="804672"/>
           </a:xfrm>
           <a:prstGeom prst="rect">
             <a:avLst/>
@@ -8038,7 +8058,7 @@
                 <a:ea typeface="Trebuchet MS" pitchFamily="34" charset="-122"/>
                 <a:cs typeface="Trebuchet MS" pitchFamily="34" charset="-120"/>
               </a:rPr>
-              <a:t>Syllables</a:t>
+              <a:t>Phonemes</a:t>
             </a:r>
             <a:endParaRPr lang="en-US" sz="1100" dirty="0"/>
           </a:p>
@@ -8046,80 +8066,14 @@
       </p:sp>
       <p:sp>
         <p:nvSpPr>
-          <p:cNvPr id="24" name="Shape 22"/>
-          <p:cNvSpPr/>
-          <p:nvPr/>
-        </p:nvSpPr>
-        <p:spPr>
-          <a:xfrm>
-            <a:off x="1874520" y="3273552"/>
-            <a:ext cx="6903720" cy="658368"/>
-          </a:xfrm>
-          <a:prstGeom prst="rect">
-            <a:avLst>
-              <a:gd name="adj" fmla="val 8333"/>
-            </a:avLst>
-          </a:prstGeom>
-          <a:solidFill>
-            <a:srgbClr val="F8FAFC"/>
-          </a:solidFill>
-          <a:ln w="12700">
-            <a:solidFill>
-              <a:srgbClr val="E2E8F0"/>
-            </a:solidFill>
-            <a:prstDash val="dash"/>
-          </a:ln>
-        </p:spPr>
-      </p:sp>
-      <p:sp>
-        <p:nvSpPr>
-          <p:cNvPr id="25" name="Text 23"/>
-          <p:cNvSpPr/>
-          <p:nvPr/>
-        </p:nvSpPr>
-        <p:spPr>
-          <a:xfrm>
-            <a:off x="1874520" y="3273552"/>
-            <a:ext cx="6903720" cy="658368"/>
-          </a:xfrm>
-          <a:prstGeom prst="rect">
-            <a:avLst/>
-          </a:prstGeom>
-          <a:noFill/>
-          <a:ln/>
-        </p:spPr>
-        <p:txBody>
-          <a:bodyPr wrap="square" rtlCol="0" anchor="ctr"/>
-          <a:lstStyle/>
-          <a:p>
-            <a:pPr algn="ctr" indent="0" marL="0">
-              <a:buNone/>
-            </a:pPr>
-            <a:r>
-              <a:rPr lang="en-US" sz="1100" i="1" dirty="0">
-                <a:solidFill>
-                  <a:srgbClr val="CBD5E1"/>
-                </a:solidFill>
-                <a:latin typeface="Calibri" pitchFamily="34" charset="0"/>
-                <a:ea typeface="Calibri" pitchFamily="34" charset="-122"/>
-                <a:cs typeface="Calibri" pitchFamily="34" charset="-120"/>
-              </a:rPr>
-              <a:t>Write here...</a:t>
-            </a:r>
-            <a:endParaRPr lang="en-US" sz="1100" dirty="0"/>
-          </a:p>
-        </p:txBody>
-      </p:sp>
-      <p:sp>
-        <p:nvSpPr>
-          <p:cNvPr id="26" name="Shape 24"/>
-          <p:cNvSpPr/>
-          <p:nvPr/>
-        </p:nvSpPr>
-        <p:spPr>
-          <a:xfrm>
-            <a:off x="365760" y="4096512"/>
-            <a:ext cx="1371600" cy="804672"/>
+          <p:cNvPr id="25" name="Shape 23"/>
+          <p:cNvSpPr/>
+          <p:nvPr/>
+        </p:nvSpPr>
+        <p:spPr>
+          <a:xfrm>
+            <a:off x="1874520" y="4096512"/>
+            <a:ext cx="6903720" cy="804672"/>
           </a:xfrm>
           <a:prstGeom prst="rect">
             <a:avLst>
@@ -8127,85 +8081,19 @@
             </a:avLst>
           </a:prstGeom>
           <a:solidFill>
-            <a:srgbClr val="E2E8F0"/>
+            <a:srgbClr val="F8FAFC"/>
           </a:solidFill>
           <a:ln w="12700">
             <a:solidFill>
               <a:srgbClr val="E2E8F0"/>
             </a:solidFill>
-            <a:prstDash val="solid"/>
-          </a:ln>
-        </p:spPr>
-      </p:sp>
-      <p:sp>
-        <p:nvSpPr>
-          <p:cNvPr id="27" name="Text 25"/>
-          <p:cNvSpPr/>
-          <p:nvPr/>
-        </p:nvSpPr>
-        <p:spPr>
-          <a:xfrm>
-            <a:off x="365760" y="4096512"/>
-            <a:ext cx="1371600" cy="804672"/>
-          </a:xfrm>
-          <a:prstGeom prst="rect">
-            <a:avLst/>
-          </a:prstGeom>
-          <a:noFill/>
-          <a:ln/>
-        </p:spPr>
-        <p:txBody>
-          <a:bodyPr wrap="square" lIns="0" tIns="0" rIns="0" bIns="0" rtlCol="0" anchor="ctr"/>
-          <a:lstStyle/>
-          <a:p>
-            <a:pPr algn="ctr" indent="0" marL="0">
-              <a:buNone/>
-            </a:pPr>
-            <a:r>
-              <a:rPr lang="en-US" sz="1100" b="1" dirty="0">
-                <a:solidFill>
-                  <a:srgbClr val="475569"/>
-                </a:solidFill>
-                <a:latin typeface="Trebuchet MS" pitchFamily="34" charset="0"/>
-                <a:ea typeface="Trebuchet MS" pitchFamily="34" charset="-122"/>
-                <a:cs typeface="Trebuchet MS" pitchFamily="34" charset="-120"/>
-              </a:rPr>
-              <a:t>Phonemes</a:t>
-            </a:r>
-            <a:endParaRPr lang="en-US" sz="1100" dirty="0"/>
-          </a:p>
-        </p:txBody>
-      </p:sp>
-      <p:sp>
-        <p:nvSpPr>
-          <p:cNvPr id="28" name="Shape 26"/>
-          <p:cNvSpPr/>
-          <p:nvPr/>
-        </p:nvSpPr>
-        <p:spPr>
-          <a:xfrm>
-            <a:off x="1874520" y="4096512"/>
-            <a:ext cx="6903720" cy="804672"/>
-          </a:xfrm>
-          <a:prstGeom prst="rect">
-            <a:avLst>
-              <a:gd name="adj" fmla="val 6818"/>
-            </a:avLst>
-          </a:prstGeom>
-          <a:solidFill>
-            <a:srgbClr val="F8FAFC"/>
-          </a:solidFill>
-          <a:ln w="12700">
-            <a:solidFill>
-              <a:srgbClr val="E2E8F0"/>
-            </a:solidFill>
             <a:prstDash val="dash"/>
           </a:ln>
         </p:spPr>
       </p:sp>
       <p:sp>
         <p:nvSpPr>
-          <p:cNvPr id="29" name="Text 27"/>
+          <p:cNvPr id="26" name="Text 24"/>
           <p:cNvSpPr/>
           <p:nvPr/>
         </p:nvSpPr>
@@ -8667,7 +8555,7 @@
                 <a:ea typeface="Trebuchet MS" pitchFamily="34" charset="-122"/>
                 <a:cs typeface="Trebuchet MS" pitchFamily="34" charset="-120"/>
               </a:rPr>
-              <a:t>correction</a:t>
+              <a:t>correct</a:t>
             </a:r>
             <a:endParaRPr lang="en-US" sz="2800" dirty="0"/>
           </a:p>
@@ -8747,7 +8635,7 @@
         </p:nvSpPr>
         <p:spPr>
           <a:xfrm>
-            <a:off x="2938272" y="2258568"/>
+            <a:off x="4370832" y="2258568"/>
             <a:ext cx="1828800" cy="292608"/>
           </a:xfrm>
           <a:prstGeom prst="rect">
@@ -8781,7 +8669,7 @@
         </p:nvSpPr>
         <p:spPr>
           <a:xfrm>
-            <a:off x="2938272" y="2258568"/>
+            <a:off x="4370832" y="2258568"/>
             <a:ext cx="1828800" cy="292608"/>
           </a:xfrm>
           <a:prstGeom prst="rect">
@@ -8820,7 +8708,7 @@
         </p:nvSpPr>
         <p:spPr>
           <a:xfrm>
-            <a:off x="2938272" y="2569464"/>
+            <a:off x="4370832" y="2569464"/>
             <a:ext cx="1828800" cy="201168"/>
           </a:xfrm>
           <a:prstGeom prst="rect">
@@ -8845,7 +8733,7 @@
                 <a:ea typeface="Calibri" pitchFamily="34" charset="-122"/>
                 <a:cs typeface="Calibri" pitchFamily="34" charset="-120"/>
               </a:rPr>
-              <a:t>right, accurate</a:t>
+              <a:t>right, free from error</a:t>
             </a:r>
             <a:endParaRPr lang="en-US" sz="850" dirty="0"/>
           </a:p>
@@ -8859,30 +8747,23 @@
         </p:nvSpPr>
         <p:spPr>
           <a:xfrm>
-            <a:off x="5803392" y="2258568"/>
-            <a:ext cx="1828800" cy="292608"/>
+            <a:off x="365760" y="3273552"/>
+            <a:ext cx="1371600" cy="658368"/>
           </a:xfrm>
           <a:prstGeom prst="rect">
             <a:avLst>
-              <a:gd name="adj" fmla="val 25000"/>
+              <a:gd name="adj" fmla="val 8333"/>
             </a:avLst>
           </a:prstGeom>
           <a:solidFill>
-            <a:srgbClr val="FCE7F3"/>
-          </a:solidFill>
-          <a:ln w="19050">
-            <a:solidFill>
-              <a:srgbClr val="DB2777"/>
-            </a:solidFill>
-            <a:prstDash val="solid"/>
-          </a:ln>
-          <a:effectLst>
-            <a:outerShdw sx="100000" sy="100000" kx="0" ky="0" algn="bl" rotWithShape="0" blurRad="101600" dist="38100" dir="8100000">
-              <a:srgbClr val="000000">
-                <a:alpha val="12000"/>
-              </a:srgbClr>
-            </a:outerShdw>
-          </a:effectLst>
+            <a:srgbClr val="E2E8F0"/>
+          </a:solidFill>
+          <a:ln w="12700">
+            <a:solidFill>
+              <a:srgbClr val="E2E8F0"/>
+            </a:solidFill>
+            <a:prstDash val="solid"/>
+          </a:ln>
         </p:spPr>
       </p:sp>
       <p:sp>
@@ -8893,86 +8774,47 @@
         </p:nvSpPr>
         <p:spPr>
           <a:xfrm>
-            <a:off x="5803392" y="2258568"/>
-            <a:ext cx="1828800" cy="292608"/>
-          </a:xfrm>
-          <a:prstGeom prst="rect">
-            <a:avLst/>
-          </a:prstGeom>
-          <a:noFill/>
-          <a:ln/>
-        </p:spPr>
-        <p:txBody>
-          <a:bodyPr wrap="square" lIns="0" tIns="0" rIns="0" bIns="0" rtlCol="0" anchor="ctr"/>
-          <a:lstStyle/>
-          <a:p>
-            <a:pPr algn="ctr" indent="0" marL="0">
-              <a:buNone/>
-            </a:pPr>
-            <a:r>
-              <a:rPr lang="en-US" sz="1300" b="1" dirty="0">
-                <a:solidFill>
-                  <a:srgbClr val="9D174D"/>
+            <a:off x="365760" y="3273552"/>
+            <a:ext cx="1371600" cy="658368"/>
+          </a:xfrm>
+          <a:prstGeom prst="rect">
+            <a:avLst/>
+          </a:prstGeom>
+          <a:noFill/>
+          <a:ln/>
+        </p:spPr>
+        <p:txBody>
+          <a:bodyPr wrap="square" lIns="0" tIns="0" rIns="0" bIns="0" rtlCol="0" anchor="ctr"/>
+          <a:lstStyle/>
+          <a:p>
+            <a:pPr algn="ctr" indent="0" marL="0">
+              <a:buNone/>
+            </a:pPr>
+            <a:r>
+              <a:rPr lang="en-US" sz="1100" b="1" dirty="0">
+                <a:solidFill>
+                  <a:srgbClr val="475569"/>
                 </a:solidFill>
                 <a:latin typeface="Trebuchet MS" pitchFamily="34" charset="0"/>
                 <a:ea typeface="Trebuchet MS" pitchFamily="34" charset="-122"/>
                 <a:cs typeface="Trebuchet MS" pitchFamily="34" charset="-120"/>
               </a:rPr>
-              <a:t>ion</a:t>
-            </a:r>
-            <a:endParaRPr lang="en-US" sz="1300" dirty="0"/>
-          </a:p>
-        </p:txBody>
-      </p:sp>
-      <p:sp>
-        <p:nvSpPr>
-          <p:cNvPr id="21" name="Text 19"/>
-          <p:cNvSpPr/>
-          <p:nvPr/>
-        </p:nvSpPr>
-        <p:spPr>
-          <a:xfrm>
-            <a:off x="5803392" y="2569464"/>
-            <a:ext cx="1828800" cy="201168"/>
-          </a:xfrm>
-          <a:prstGeom prst="rect">
-            <a:avLst/>
-          </a:prstGeom>
-          <a:noFill/>
-          <a:ln/>
-        </p:spPr>
-        <p:txBody>
-          <a:bodyPr wrap="square" lIns="0" tIns="0" rIns="0" bIns="0" rtlCol="0" anchor="t"/>
-          <a:lstStyle/>
-          <a:p>
-            <a:pPr algn="ctr" indent="0" marL="0">
-              <a:buNone/>
-            </a:pPr>
-            <a:r>
-              <a:rPr lang="en-US" sz="850" dirty="0">
-                <a:solidFill>
-                  <a:srgbClr val="475569"/>
-                </a:solidFill>
-                <a:latin typeface="Calibri" pitchFamily="34" charset="0"/>
-                <a:ea typeface="Calibri" pitchFamily="34" charset="-122"/>
-                <a:cs typeface="Calibri" pitchFamily="34" charset="-120"/>
-              </a:rPr>
-              <a:t>act or result of</a:t>
-            </a:r>
-            <a:endParaRPr lang="en-US" sz="850" dirty="0"/>
-          </a:p>
-        </p:txBody>
-      </p:sp>
-      <p:sp>
-        <p:nvSpPr>
-          <p:cNvPr id="22" name="Shape 20"/>
-          <p:cNvSpPr/>
-          <p:nvPr/>
-        </p:nvSpPr>
-        <p:spPr>
-          <a:xfrm>
-            <a:off x="365760" y="3273552"/>
-            <a:ext cx="1371600" cy="658368"/>
+              <a:t>Syllables</a:t>
+            </a:r>
+            <a:endParaRPr lang="en-US" sz="1100" dirty="0"/>
+          </a:p>
+        </p:txBody>
+      </p:sp>
+      <p:sp>
+        <p:nvSpPr>
+          <p:cNvPr id="21" name="Shape 19"/>
+          <p:cNvSpPr/>
+          <p:nvPr/>
+        </p:nvSpPr>
+        <p:spPr>
+          <a:xfrm>
+            <a:off x="1874520" y="3273552"/>
+            <a:ext cx="6903720" cy="658368"/>
           </a:xfrm>
           <a:prstGeom prst="rect">
             <a:avLst>
@@ -8980,11 +8822,38 @@
             </a:avLst>
           </a:prstGeom>
           <a:solidFill>
-            <a:srgbClr val="E2E8F0"/>
-          </a:solidFill>
-          <a:ln w="12700">
-            <a:solidFill>
-              <a:srgbClr val="E2E8F0"/>
+            <a:srgbClr val="CCFBF1"/>
+          </a:solidFill>
+          <a:ln w="12700">
+            <a:solidFill>
+              <a:srgbClr val="0D9488"/>
+            </a:solidFill>
+            <a:prstDash val="solid"/>
+          </a:ln>
+        </p:spPr>
+      </p:sp>
+      <p:sp>
+        <p:nvSpPr>
+          <p:cNvPr id="22" name="Shape 20"/>
+          <p:cNvSpPr/>
+          <p:nvPr/>
+        </p:nvSpPr>
+        <p:spPr>
+          <a:xfrm>
+            <a:off x="2999232" y="3364992"/>
+            <a:ext cx="1645920" cy="475488"/>
+          </a:xfrm>
+          <a:prstGeom prst="rect">
+            <a:avLst>
+              <a:gd name="adj" fmla="val 9615"/>
+            </a:avLst>
+          </a:prstGeom>
+          <a:solidFill>
+            <a:srgbClr val="FFFFFF"/>
+          </a:solidFill>
+          <a:ln w="12700">
+            <a:solidFill>
+              <a:srgbClr val="0D9488"/>
             </a:solidFill>
             <a:prstDash val="solid"/>
           </a:ln>
@@ -8998,63 +8867,75 @@
         </p:nvSpPr>
         <p:spPr>
           <a:xfrm>
-            <a:off x="365760" y="3273552"/>
-            <a:ext cx="1371600" cy="658368"/>
-          </a:xfrm>
-          <a:prstGeom prst="rect">
-            <a:avLst/>
-          </a:prstGeom>
-          <a:noFill/>
-          <a:ln/>
-        </p:spPr>
-        <p:txBody>
-          <a:bodyPr wrap="square" lIns="0" tIns="0" rIns="0" bIns="0" rtlCol="0" anchor="ctr"/>
-          <a:lstStyle/>
-          <a:p>
-            <a:pPr algn="ctr" indent="0" marL="0">
-              <a:buNone/>
-            </a:pPr>
-            <a:r>
-              <a:rPr lang="en-US" sz="1100" b="1" dirty="0">
-                <a:solidFill>
-                  <a:srgbClr val="475569"/>
+            <a:off x="2999232" y="3364992"/>
+            <a:ext cx="1645920" cy="475488"/>
+          </a:xfrm>
+          <a:prstGeom prst="rect">
+            <a:avLst/>
+          </a:prstGeom>
+          <a:noFill/>
+          <a:ln/>
+        </p:spPr>
+        <p:txBody>
+          <a:bodyPr wrap="square" lIns="0" tIns="0" rIns="0" bIns="0" rtlCol="0" anchor="ctr"/>
+          <a:lstStyle/>
+          <a:p>
+            <a:pPr algn="ctr" indent="0" marL="0">
+              <a:buNone/>
+            </a:pPr>
+            <a:r>
+              <a:rPr lang="en-US" sz="1400" b="1" dirty="0">
+                <a:solidFill>
+                  <a:srgbClr val="0D9488"/>
                 </a:solidFill>
                 <a:latin typeface="Trebuchet MS" pitchFamily="34" charset="0"/>
                 <a:ea typeface="Trebuchet MS" pitchFamily="34" charset="-122"/>
                 <a:cs typeface="Trebuchet MS" pitchFamily="34" charset="-120"/>
               </a:rPr>
-              <a:t>Syllables</a:t>
-            </a:r>
-            <a:endParaRPr lang="en-US" sz="1100" dirty="0"/>
-          </a:p>
-        </p:txBody>
-      </p:sp>
-      <p:sp>
-        <p:nvSpPr>
-          <p:cNvPr id="24" name="Shape 22"/>
-          <p:cNvSpPr/>
-          <p:nvPr/>
-        </p:nvSpPr>
-        <p:spPr>
-          <a:xfrm>
-            <a:off x="1874520" y="3273552"/>
-            <a:ext cx="6903720" cy="658368"/>
-          </a:xfrm>
-          <a:prstGeom prst="rect">
-            <a:avLst>
-              <a:gd name="adj" fmla="val 8333"/>
-            </a:avLst>
-          </a:prstGeom>
-          <a:solidFill>
-            <a:srgbClr val="CCFBF1"/>
-          </a:solidFill>
-          <a:ln w="12700">
-            <a:solidFill>
-              <a:srgbClr val="0D9488"/>
-            </a:solidFill>
-            <a:prstDash val="solid"/>
-          </a:ln>
-        </p:spPr>
+              <a:t>cor</a:t>
+            </a:r>
+            <a:endParaRPr lang="en-US" sz="1400" dirty="0"/>
+          </a:p>
+        </p:txBody>
+      </p:sp>
+      <p:sp>
+        <p:nvSpPr>
+          <p:cNvPr id="24" name="Text 22"/>
+          <p:cNvSpPr/>
+          <p:nvPr/>
+        </p:nvSpPr>
+        <p:spPr>
+          <a:xfrm>
+            <a:off x="4645152" y="3364992"/>
+            <a:ext cx="1097280" cy="475488"/>
+          </a:xfrm>
+          <a:prstGeom prst="rect">
+            <a:avLst/>
+          </a:prstGeom>
+          <a:noFill/>
+          <a:ln/>
+        </p:spPr>
+        <p:txBody>
+          <a:bodyPr wrap="square" lIns="0" tIns="0" rIns="0" bIns="0" rtlCol="0" anchor="ctr"/>
+          <a:lstStyle/>
+          <a:p>
+            <a:pPr algn="ctr" indent="0" marL="0">
+              <a:buNone/>
+            </a:pPr>
+            <a:r>
+              <a:rPr lang="en-US" sz="1600" b="1" dirty="0">
+                <a:solidFill>
+                  <a:srgbClr val="0D9488"/>
+                </a:solidFill>
+                <a:latin typeface="Trebuchet MS" pitchFamily="34" charset="0"/>
+                <a:ea typeface="Trebuchet MS" pitchFamily="34" charset="-122"/>
+                <a:cs typeface="Trebuchet MS" pitchFamily="34" charset="-120"/>
+              </a:rPr>
+              <a:t>·</a:t>
+            </a:r>
+            <a:endParaRPr lang="en-US" sz="1600" dirty="0"/>
+          </a:p>
+        </p:txBody>
       </p:sp>
       <p:sp>
         <p:nvSpPr>
@@ -9064,7 +8945,7 @@
         </p:nvSpPr>
         <p:spPr>
           <a:xfrm>
-            <a:off x="2313432" y="3364992"/>
+            <a:off x="5742432" y="3364992"/>
             <a:ext cx="1645920" cy="475488"/>
           </a:xfrm>
           <a:prstGeom prst="rect">
@@ -9091,7 +8972,7 @@
         </p:nvSpPr>
         <p:spPr>
           <a:xfrm>
-            <a:off x="2313432" y="3364992"/>
+            <a:off x="5742432" y="3364992"/>
             <a:ext cx="1645920" cy="475488"/>
           </a:xfrm>
           <a:prstGeom prst="rect">
@@ -9116,7 +8997,7 @@
                 <a:ea typeface="Trebuchet MS" pitchFamily="34" charset="-122"/>
                 <a:cs typeface="Trebuchet MS" pitchFamily="34" charset="-120"/>
               </a:rPr>
-              <a:t>cor</a:t>
+              <a:t>rect</a:t>
             </a:r>
             <a:endParaRPr lang="en-US" sz="1400" dirty="0"/>
           </a:p>
@@ -9124,224 +9005,80 @@
       </p:sp>
       <p:sp>
         <p:nvSpPr>
-          <p:cNvPr id="27" name="Text 25"/>
-          <p:cNvSpPr/>
-          <p:nvPr/>
-        </p:nvSpPr>
-        <p:spPr>
-          <a:xfrm>
-            <a:off x="3959352" y="3364992"/>
-            <a:ext cx="411480" cy="475488"/>
-          </a:xfrm>
-          <a:prstGeom prst="rect">
-            <a:avLst/>
-          </a:prstGeom>
-          <a:noFill/>
-          <a:ln/>
-        </p:spPr>
-        <p:txBody>
-          <a:bodyPr wrap="square" lIns="0" tIns="0" rIns="0" bIns="0" rtlCol="0" anchor="ctr"/>
-          <a:lstStyle/>
-          <a:p>
-            <a:pPr algn="ctr" indent="0" marL="0">
-              <a:buNone/>
-            </a:pPr>
-            <a:r>
-              <a:rPr lang="en-US" sz="1600" b="1" dirty="0">
-                <a:solidFill>
-                  <a:srgbClr val="0D9488"/>
+          <p:cNvPr id="27" name="Shape 25"/>
+          <p:cNvSpPr/>
+          <p:nvPr/>
+        </p:nvSpPr>
+        <p:spPr>
+          <a:xfrm>
+            <a:off x="365760" y="4096512"/>
+            <a:ext cx="1371600" cy="804672"/>
+          </a:xfrm>
+          <a:prstGeom prst="rect">
+            <a:avLst>
+              <a:gd name="adj" fmla="val 6818"/>
+            </a:avLst>
+          </a:prstGeom>
+          <a:solidFill>
+            <a:srgbClr val="E2E8F0"/>
+          </a:solidFill>
+          <a:ln w="12700">
+            <a:solidFill>
+              <a:srgbClr val="E2E8F0"/>
+            </a:solidFill>
+            <a:prstDash val="solid"/>
+          </a:ln>
+        </p:spPr>
+      </p:sp>
+      <p:sp>
+        <p:nvSpPr>
+          <p:cNvPr id="28" name="Text 26"/>
+          <p:cNvSpPr/>
+          <p:nvPr/>
+        </p:nvSpPr>
+        <p:spPr>
+          <a:xfrm>
+            <a:off x="365760" y="4096512"/>
+            <a:ext cx="1371600" cy="804672"/>
+          </a:xfrm>
+          <a:prstGeom prst="rect">
+            <a:avLst/>
+          </a:prstGeom>
+          <a:noFill/>
+          <a:ln/>
+        </p:spPr>
+        <p:txBody>
+          <a:bodyPr wrap="square" lIns="0" tIns="0" rIns="0" bIns="0" rtlCol="0" anchor="ctr"/>
+          <a:lstStyle/>
+          <a:p>
+            <a:pPr algn="ctr" indent="0" marL="0">
+              <a:buNone/>
+            </a:pPr>
+            <a:r>
+              <a:rPr lang="en-US" sz="1100" b="1" dirty="0">
+                <a:solidFill>
+                  <a:srgbClr val="475569"/>
                 </a:solidFill>
                 <a:latin typeface="Trebuchet MS" pitchFamily="34" charset="0"/>
                 <a:ea typeface="Trebuchet MS" pitchFamily="34" charset="-122"/>
                 <a:cs typeface="Trebuchet MS" pitchFamily="34" charset="-120"/>
               </a:rPr>
-              <a:t>·</a:t>
-            </a:r>
-            <a:endParaRPr lang="en-US" sz="1600" dirty="0"/>
-          </a:p>
-        </p:txBody>
-      </p:sp>
-      <p:sp>
-        <p:nvSpPr>
-          <p:cNvPr id="28" name="Shape 26"/>
-          <p:cNvSpPr/>
-          <p:nvPr/>
-        </p:nvSpPr>
-        <p:spPr>
-          <a:xfrm>
-            <a:off x="4370832" y="3364992"/>
-            <a:ext cx="1645920" cy="475488"/>
-          </a:xfrm>
-          <a:prstGeom prst="rect">
-            <a:avLst>
-              <a:gd name="adj" fmla="val 9615"/>
-            </a:avLst>
-          </a:prstGeom>
-          <a:solidFill>
-            <a:srgbClr val="FFFFFF"/>
-          </a:solidFill>
-          <a:ln w="12700">
-            <a:solidFill>
-              <a:srgbClr val="0D9488"/>
-            </a:solidFill>
-            <a:prstDash val="solid"/>
-          </a:ln>
-        </p:spPr>
-      </p:sp>
-      <p:sp>
-        <p:nvSpPr>
-          <p:cNvPr id="29" name="Text 27"/>
-          <p:cNvSpPr/>
-          <p:nvPr/>
-        </p:nvSpPr>
-        <p:spPr>
-          <a:xfrm>
-            <a:off x="4370832" y="3364992"/>
-            <a:ext cx="1645920" cy="475488"/>
-          </a:xfrm>
-          <a:prstGeom prst="rect">
-            <a:avLst/>
-          </a:prstGeom>
-          <a:noFill/>
-          <a:ln/>
-        </p:spPr>
-        <p:txBody>
-          <a:bodyPr wrap="square" lIns="0" tIns="0" rIns="0" bIns="0" rtlCol="0" anchor="ctr"/>
-          <a:lstStyle/>
-          <a:p>
-            <a:pPr algn="ctr" indent="0" marL="0">
-              <a:buNone/>
-            </a:pPr>
-            <a:r>
-              <a:rPr lang="en-US" sz="1400" b="1" dirty="0">
-                <a:solidFill>
-                  <a:srgbClr val="0D9488"/>
-                </a:solidFill>
-                <a:latin typeface="Trebuchet MS" pitchFamily="34" charset="0"/>
-                <a:ea typeface="Trebuchet MS" pitchFamily="34" charset="-122"/>
-                <a:cs typeface="Trebuchet MS" pitchFamily="34" charset="-120"/>
-              </a:rPr>
-              <a:t>rec</a:t>
-            </a:r>
-            <a:endParaRPr lang="en-US" sz="1400" dirty="0"/>
-          </a:p>
-        </p:txBody>
-      </p:sp>
-      <p:sp>
-        <p:nvSpPr>
-          <p:cNvPr id="30" name="Text 28"/>
-          <p:cNvSpPr/>
-          <p:nvPr/>
-        </p:nvSpPr>
-        <p:spPr>
-          <a:xfrm>
-            <a:off x="6016752" y="3364992"/>
-            <a:ext cx="411480" cy="475488"/>
-          </a:xfrm>
-          <a:prstGeom prst="rect">
-            <a:avLst/>
-          </a:prstGeom>
-          <a:noFill/>
-          <a:ln/>
-        </p:spPr>
-        <p:txBody>
-          <a:bodyPr wrap="square" lIns="0" tIns="0" rIns="0" bIns="0" rtlCol="0" anchor="ctr"/>
-          <a:lstStyle/>
-          <a:p>
-            <a:pPr algn="ctr" indent="0" marL="0">
-              <a:buNone/>
-            </a:pPr>
-            <a:r>
-              <a:rPr lang="en-US" sz="1600" b="1" dirty="0">
-                <a:solidFill>
-                  <a:srgbClr val="0D9488"/>
-                </a:solidFill>
-                <a:latin typeface="Trebuchet MS" pitchFamily="34" charset="0"/>
-                <a:ea typeface="Trebuchet MS" pitchFamily="34" charset="-122"/>
-                <a:cs typeface="Trebuchet MS" pitchFamily="34" charset="-120"/>
-              </a:rPr>
-              <a:t>·</a:t>
-            </a:r>
-            <a:endParaRPr lang="en-US" sz="1600" dirty="0"/>
-          </a:p>
-        </p:txBody>
-      </p:sp>
-      <p:sp>
-        <p:nvSpPr>
-          <p:cNvPr id="31" name="Shape 29"/>
-          <p:cNvSpPr/>
-          <p:nvPr/>
-        </p:nvSpPr>
-        <p:spPr>
-          <a:xfrm>
-            <a:off x="6428232" y="3364992"/>
-            <a:ext cx="1645920" cy="475488"/>
-          </a:xfrm>
-          <a:prstGeom prst="rect">
-            <a:avLst>
-              <a:gd name="adj" fmla="val 9615"/>
-            </a:avLst>
-          </a:prstGeom>
-          <a:solidFill>
-            <a:srgbClr val="FFFFFF"/>
-          </a:solidFill>
-          <a:ln w="12700">
-            <a:solidFill>
-              <a:srgbClr val="0D9488"/>
-            </a:solidFill>
-            <a:prstDash val="solid"/>
-          </a:ln>
-        </p:spPr>
-      </p:sp>
-      <p:sp>
-        <p:nvSpPr>
-          <p:cNvPr id="32" name="Text 30"/>
-          <p:cNvSpPr/>
-          <p:nvPr/>
-        </p:nvSpPr>
-        <p:spPr>
-          <a:xfrm>
-            <a:off x="6428232" y="3364992"/>
-            <a:ext cx="1645920" cy="475488"/>
-          </a:xfrm>
-          <a:prstGeom prst="rect">
-            <a:avLst/>
-          </a:prstGeom>
-          <a:noFill/>
-          <a:ln/>
-        </p:spPr>
-        <p:txBody>
-          <a:bodyPr wrap="square" lIns="0" tIns="0" rIns="0" bIns="0" rtlCol="0" anchor="ctr"/>
-          <a:lstStyle/>
-          <a:p>
-            <a:pPr algn="ctr" indent="0" marL="0">
-              <a:buNone/>
-            </a:pPr>
-            <a:r>
-              <a:rPr lang="en-US" sz="1400" b="1" dirty="0">
-                <a:solidFill>
-                  <a:srgbClr val="0D9488"/>
-                </a:solidFill>
-                <a:latin typeface="Trebuchet MS" pitchFamily="34" charset="0"/>
-                <a:ea typeface="Trebuchet MS" pitchFamily="34" charset="-122"/>
-                <a:cs typeface="Trebuchet MS" pitchFamily="34" charset="-120"/>
-              </a:rPr>
-              <a:t>tion</a:t>
-            </a:r>
-            <a:endParaRPr lang="en-US" sz="1400" dirty="0"/>
-          </a:p>
-        </p:txBody>
-      </p:sp>
-      <p:sp>
-        <p:nvSpPr>
-          <p:cNvPr id="33" name="Shape 31"/>
-          <p:cNvSpPr/>
-          <p:nvPr/>
-        </p:nvSpPr>
-        <p:spPr>
-          <a:xfrm>
-            <a:off x="365760" y="4096512"/>
-            <a:ext cx="1371600" cy="804672"/>
+              <a:t>Phonemes</a:t>
+            </a:r>
+            <a:endParaRPr lang="en-US" sz="1100" dirty="0"/>
+          </a:p>
+        </p:txBody>
+      </p:sp>
+      <p:sp>
+        <p:nvSpPr>
+          <p:cNvPr id="29" name="Shape 27"/>
+          <p:cNvSpPr/>
+          <p:nvPr/>
+        </p:nvSpPr>
+        <p:spPr>
+          <a:xfrm>
+            <a:off x="1874520" y="4096512"/>
+            <a:ext cx="6903720" cy="804672"/>
           </a:xfrm>
           <a:prstGeom prst="rect">
             <a:avLst>
@@ -9349,85 +9086,19 @@
             </a:avLst>
           </a:prstGeom>
           <a:solidFill>
-            <a:srgbClr val="E2E8F0"/>
+            <a:srgbClr val="F8FAFC"/>
           </a:solidFill>
           <a:ln w="12700">
             <a:solidFill>
               <a:srgbClr val="E2E8F0"/>
             </a:solidFill>
-            <a:prstDash val="solid"/>
-          </a:ln>
-        </p:spPr>
-      </p:sp>
-      <p:sp>
-        <p:nvSpPr>
-          <p:cNvPr id="34" name="Text 32"/>
-          <p:cNvSpPr/>
-          <p:nvPr/>
-        </p:nvSpPr>
-        <p:spPr>
-          <a:xfrm>
-            <a:off x="365760" y="4096512"/>
-            <a:ext cx="1371600" cy="804672"/>
-          </a:xfrm>
-          <a:prstGeom prst="rect">
-            <a:avLst/>
-          </a:prstGeom>
-          <a:noFill/>
-          <a:ln/>
-        </p:spPr>
-        <p:txBody>
-          <a:bodyPr wrap="square" lIns="0" tIns="0" rIns="0" bIns="0" rtlCol="0" anchor="ctr"/>
-          <a:lstStyle/>
-          <a:p>
-            <a:pPr algn="ctr" indent="0" marL="0">
-              <a:buNone/>
-            </a:pPr>
-            <a:r>
-              <a:rPr lang="en-US" sz="1100" b="1" dirty="0">
-                <a:solidFill>
-                  <a:srgbClr val="475569"/>
-                </a:solidFill>
-                <a:latin typeface="Trebuchet MS" pitchFamily="34" charset="0"/>
-                <a:ea typeface="Trebuchet MS" pitchFamily="34" charset="-122"/>
-                <a:cs typeface="Trebuchet MS" pitchFamily="34" charset="-120"/>
-              </a:rPr>
-              <a:t>Phonemes</a:t>
-            </a:r>
-            <a:endParaRPr lang="en-US" sz="1100" dirty="0"/>
-          </a:p>
-        </p:txBody>
-      </p:sp>
-      <p:sp>
-        <p:nvSpPr>
-          <p:cNvPr id="35" name="Shape 33"/>
-          <p:cNvSpPr/>
-          <p:nvPr/>
-        </p:nvSpPr>
-        <p:spPr>
-          <a:xfrm>
-            <a:off x="1874520" y="4096512"/>
-            <a:ext cx="6903720" cy="804672"/>
-          </a:xfrm>
-          <a:prstGeom prst="rect">
-            <a:avLst>
-              <a:gd name="adj" fmla="val 6818"/>
-            </a:avLst>
-          </a:prstGeom>
-          <a:solidFill>
-            <a:srgbClr val="F8FAFC"/>
-          </a:solidFill>
-          <a:ln w="12700">
-            <a:solidFill>
-              <a:srgbClr val="E2E8F0"/>
-            </a:solidFill>
             <a:prstDash val="dash"/>
           </a:ln>
         </p:spPr>
       </p:sp>
       <p:sp>
         <p:nvSpPr>
-          <p:cNvPr id="36" name="Text 34"/>
+          <p:cNvPr id="30" name="Text 28"/>
           <p:cNvSpPr/>
           <p:nvPr/>
         </p:nvSpPr>
@@ -9889,7 +9560,7 @@
                 <a:ea typeface="Trebuchet MS" pitchFamily="34" charset="-122"/>
                 <a:cs typeface="Trebuchet MS" pitchFamily="34" charset="-120"/>
               </a:rPr>
-              <a:t>correction</a:t>
+              <a:t>correct</a:t>
             </a:r>
             <a:endParaRPr lang="en-US" sz="2800" dirty="0"/>
           </a:p>
@@ -9969,7 +9640,7 @@
         </p:nvSpPr>
         <p:spPr>
           <a:xfrm>
-            <a:off x="2938272" y="2258568"/>
+            <a:off x="4370832" y="2258568"/>
             <a:ext cx="1828800" cy="292608"/>
           </a:xfrm>
           <a:prstGeom prst="rect">
@@ -10003,7 +9674,7 @@
         </p:nvSpPr>
         <p:spPr>
           <a:xfrm>
-            <a:off x="2938272" y="2258568"/>
+            <a:off x="4370832" y="2258568"/>
             <a:ext cx="1828800" cy="292608"/>
           </a:xfrm>
           <a:prstGeom prst="rect">
@@ -10042,7 +9713,7 @@
         </p:nvSpPr>
         <p:spPr>
           <a:xfrm>
-            <a:off x="2938272" y="2569464"/>
+            <a:off x="4370832" y="2569464"/>
             <a:ext cx="1828800" cy="201168"/>
           </a:xfrm>
           <a:prstGeom prst="rect">
@@ -10067,7 +9738,7 @@
                 <a:ea typeface="Calibri" pitchFamily="34" charset="-122"/>
                 <a:cs typeface="Calibri" pitchFamily="34" charset="-120"/>
               </a:rPr>
-              <a:t>right, accurate</a:t>
+              <a:t>right, free from error</a:t>
             </a:r>
             <a:endParaRPr lang="en-US" sz="850" dirty="0"/>
           </a:p>
@@ -10081,30 +9752,23 @@
         </p:nvSpPr>
         <p:spPr>
           <a:xfrm>
-            <a:off x="5803392" y="2258568"/>
-            <a:ext cx="1828800" cy="292608"/>
+            <a:off x="365760" y="3273552"/>
+            <a:ext cx="1371600" cy="658368"/>
           </a:xfrm>
           <a:prstGeom prst="rect">
             <a:avLst>
-              <a:gd name="adj" fmla="val 25000"/>
+              <a:gd name="adj" fmla="val 8333"/>
             </a:avLst>
           </a:prstGeom>
           <a:solidFill>
-            <a:srgbClr val="FCE7F3"/>
-          </a:solidFill>
-          <a:ln w="19050">
-            <a:solidFill>
-              <a:srgbClr val="DB2777"/>
-            </a:solidFill>
-            <a:prstDash val="solid"/>
-          </a:ln>
-          <a:effectLst>
-            <a:outerShdw sx="100000" sy="100000" kx="0" ky="0" algn="bl" rotWithShape="0" blurRad="101600" dist="38100" dir="8100000">
-              <a:srgbClr val="000000">
-                <a:alpha val="12000"/>
-              </a:srgbClr>
-            </a:outerShdw>
-          </a:effectLst>
+            <a:srgbClr val="E2E8F0"/>
+          </a:solidFill>
+          <a:ln w="12700">
+            <a:solidFill>
+              <a:srgbClr val="E2E8F0"/>
+            </a:solidFill>
+            <a:prstDash val="solid"/>
+          </a:ln>
         </p:spPr>
       </p:sp>
       <p:sp>
@@ -10115,47 +9779,404 @@
         </p:nvSpPr>
         <p:spPr>
           <a:xfrm>
-            <a:off x="5803392" y="2258568"/>
-            <a:ext cx="1828800" cy="292608"/>
-          </a:xfrm>
-          <a:prstGeom prst="rect">
-            <a:avLst/>
-          </a:prstGeom>
-          <a:noFill/>
-          <a:ln/>
-        </p:spPr>
-        <p:txBody>
-          <a:bodyPr wrap="square" lIns="0" tIns="0" rIns="0" bIns="0" rtlCol="0" anchor="ctr"/>
-          <a:lstStyle/>
-          <a:p>
-            <a:pPr algn="ctr" indent="0" marL="0">
-              <a:buNone/>
-            </a:pPr>
-            <a:r>
-              <a:rPr lang="en-US" sz="1300" b="1" dirty="0">
-                <a:solidFill>
-                  <a:srgbClr val="9D174D"/>
+            <a:off x="365760" y="3273552"/>
+            <a:ext cx="1371600" cy="658368"/>
+          </a:xfrm>
+          <a:prstGeom prst="rect">
+            <a:avLst/>
+          </a:prstGeom>
+          <a:noFill/>
+          <a:ln/>
+        </p:spPr>
+        <p:txBody>
+          <a:bodyPr wrap="square" lIns="0" tIns="0" rIns="0" bIns="0" rtlCol="0" anchor="ctr"/>
+          <a:lstStyle/>
+          <a:p>
+            <a:pPr algn="ctr" indent="0" marL="0">
+              <a:buNone/>
+            </a:pPr>
+            <a:r>
+              <a:rPr lang="en-US" sz="1100" b="1" dirty="0">
+                <a:solidFill>
+                  <a:srgbClr val="475569"/>
                 </a:solidFill>
                 <a:latin typeface="Trebuchet MS" pitchFamily="34" charset="0"/>
                 <a:ea typeface="Trebuchet MS" pitchFamily="34" charset="-122"/>
                 <a:cs typeface="Trebuchet MS" pitchFamily="34" charset="-120"/>
               </a:rPr>
-              <a:t>ion</a:t>
-            </a:r>
-            <a:endParaRPr lang="en-US" sz="1300" dirty="0"/>
-          </a:p>
-        </p:txBody>
-      </p:sp>
-      <p:sp>
-        <p:nvSpPr>
-          <p:cNvPr id="21" name="Text 19"/>
-          <p:cNvSpPr/>
-          <p:nvPr/>
-        </p:nvSpPr>
-        <p:spPr>
-          <a:xfrm>
-            <a:off x="5803392" y="2569464"/>
-            <a:ext cx="1828800" cy="201168"/>
+              <a:t>Syllables</a:t>
+            </a:r>
+            <a:endParaRPr lang="en-US" sz="1100" dirty="0"/>
+          </a:p>
+        </p:txBody>
+      </p:sp>
+      <p:sp>
+        <p:nvSpPr>
+          <p:cNvPr id="21" name="Shape 19"/>
+          <p:cNvSpPr/>
+          <p:nvPr/>
+        </p:nvSpPr>
+        <p:spPr>
+          <a:xfrm>
+            <a:off x="1874520" y="3273552"/>
+            <a:ext cx="6903720" cy="658368"/>
+          </a:xfrm>
+          <a:prstGeom prst="rect">
+            <a:avLst>
+              <a:gd name="adj" fmla="val 8333"/>
+            </a:avLst>
+          </a:prstGeom>
+          <a:solidFill>
+            <a:srgbClr val="CCFBF1"/>
+          </a:solidFill>
+          <a:ln w="12700">
+            <a:solidFill>
+              <a:srgbClr val="0D9488"/>
+            </a:solidFill>
+            <a:prstDash val="solid"/>
+          </a:ln>
+        </p:spPr>
+      </p:sp>
+      <p:sp>
+        <p:nvSpPr>
+          <p:cNvPr id="22" name="Shape 20"/>
+          <p:cNvSpPr/>
+          <p:nvPr/>
+        </p:nvSpPr>
+        <p:spPr>
+          <a:xfrm>
+            <a:off x="2999232" y="3364992"/>
+            <a:ext cx="1645920" cy="475488"/>
+          </a:xfrm>
+          <a:prstGeom prst="rect">
+            <a:avLst>
+              <a:gd name="adj" fmla="val 9615"/>
+            </a:avLst>
+          </a:prstGeom>
+          <a:solidFill>
+            <a:srgbClr val="FFFFFF"/>
+          </a:solidFill>
+          <a:ln w="12700">
+            <a:solidFill>
+              <a:srgbClr val="0D9488"/>
+            </a:solidFill>
+            <a:prstDash val="solid"/>
+          </a:ln>
+        </p:spPr>
+      </p:sp>
+      <p:sp>
+        <p:nvSpPr>
+          <p:cNvPr id="23" name="Text 21"/>
+          <p:cNvSpPr/>
+          <p:nvPr/>
+        </p:nvSpPr>
+        <p:spPr>
+          <a:xfrm>
+            <a:off x="2999232" y="3364992"/>
+            <a:ext cx="1645920" cy="475488"/>
+          </a:xfrm>
+          <a:prstGeom prst="rect">
+            <a:avLst/>
+          </a:prstGeom>
+          <a:noFill/>
+          <a:ln/>
+        </p:spPr>
+        <p:txBody>
+          <a:bodyPr wrap="square" lIns="0" tIns="0" rIns="0" bIns="0" rtlCol="0" anchor="ctr"/>
+          <a:lstStyle/>
+          <a:p>
+            <a:pPr algn="ctr" indent="0" marL="0">
+              <a:buNone/>
+            </a:pPr>
+            <a:r>
+              <a:rPr lang="en-US" sz="1400" b="1" dirty="0">
+                <a:solidFill>
+                  <a:srgbClr val="0D9488"/>
+                </a:solidFill>
+                <a:latin typeface="Trebuchet MS" pitchFamily="34" charset="0"/>
+                <a:ea typeface="Trebuchet MS" pitchFamily="34" charset="-122"/>
+                <a:cs typeface="Trebuchet MS" pitchFamily="34" charset="-120"/>
+              </a:rPr>
+              <a:t>cor</a:t>
+            </a:r>
+            <a:endParaRPr lang="en-US" sz="1400" dirty="0"/>
+          </a:p>
+        </p:txBody>
+      </p:sp>
+      <p:sp>
+        <p:nvSpPr>
+          <p:cNvPr id="24" name="Text 22"/>
+          <p:cNvSpPr/>
+          <p:nvPr/>
+        </p:nvSpPr>
+        <p:spPr>
+          <a:xfrm>
+            <a:off x="4645152" y="3364992"/>
+            <a:ext cx="1097280" cy="475488"/>
+          </a:xfrm>
+          <a:prstGeom prst="rect">
+            <a:avLst/>
+          </a:prstGeom>
+          <a:noFill/>
+          <a:ln/>
+        </p:spPr>
+        <p:txBody>
+          <a:bodyPr wrap="square" lIns="0" tIns="0" rIns="0" bIns="0" rtlCol="0" anchor="ctr"/>
+          <a:lstStyle/>
+          <a:p>
+            <a:pPr algn="ctr" indent="0" marL="0">
+              <a:buNone/>
+            </a:pPr>
+            <a:r>
+              <a:rPr lang="en-US" sz="1600" b="1" dirty="0">
+                <a:solidFill>
+                  <a:srgbClr val="0D9488"/>
+                </a:solidFill>
+                <a:latin typeface="Trebuchet MS" pitchFamily="34" charset="0"/>
+                <a:ea typeface="Trebuchet MS" pitchFamily="34" charset="-122"/>
+                <a:cs typeface="Trebuchet MS" pitchFamily="34" charset="-120"/>
+              </a:rPr>
+              <a:t>·</a:t>
+            </a:r>
+            <a:endParaRPr lang="en-US" sz="1600" dirty="0"/>
+          </a:p>
+        </p:txBody>
+      </p:sp>
+      <p:sp>
+        <p:nvSpPr>
+          <p:cNvPr id="25" name="Shape 23"/>
+          <p:cNvSpPr/>
+          <p:nvPr/>
+        </p:nvSpPr>
+        <p:spPr>
+          <a:xfrm>
+            <a:off x="5742432" y="3364992"/>
+            <a:ext cx="1645920" cy="475488"/>
+          </a:xfrm>
+          <a:prstGeom prst="rect">
+            <a:avLst>
+              <a:gd name="adj" fmla="val 9615"/>
+            </a:avLst>
+          </a:prstGeom>
+          <a:solidFill>
+            <a:srgbClr val="FFFFFF"/>
+          </a:solidFill>
+          <a:ln w="12700">
+            <a:solidFill>
+              <a:srgbClr val="0D9488"/>
+            </a:solidFill>
+            <a:prstDash val="solid"/>
+          </a:ln>
+        </p:spPr>
+      </p:sp>
+      <p:sp>
+        <p:nvSpPr>
+          <p:cNvPr id="26" name="Text 24"/>
+          <p:cNvSpPr/>
+          <p:nvPr/>
+        </p:nvSpPr>
+        <p:spPr>
+          <a:xfrm>
+            <a:off x="5742432" y="3364992"/>
+            <a:ext cx="1645920" cy="475488"/>
+          </a:xfrm>
+          <a:prstGeom prst="rect">
+            <a:avLst/>
+          </a:prstGeom>
+          <a:noFill/>
+          <a:ln/>
+        </p:spPr>
+        <p:txBody>
+          <a:bodyPr wrap="square" lIns="0" tIns="0" rIns="0" bIns="0" rtlCol="0" anchor="ctr"/>
+          <a:lstStyle/>
+          <a:p>
+            <a:pPr algn="ctr" indent="0" marL="0">
+              <a:buNone/>
+            </a:pPr>
+            <a:r>
+              <a:rPr lang="en-US" sz="1400" b="1" dirty="0">
+                <a:solidFill>
+                  <a:srgbClr val="0D9488"/>
+                </a:solidFill>
+                <a:latin typeface="Trebuchet MS" pitchFamily="34" charset="0"/>
+                <a:ea typeface="Trebuchet MS" pitchFamily="34" charset="-122"/>
+                <a:cs typeface="Trebuchet MS" pitchFamily="34" charset="-120"/>
+              </a:rPr>
+              <a:t>rect</a:t>
+            </a:r>
+            <a:endParaRPr lang="en-US" sz="1400" dirty="0"/>
+          </a:p>
+        </p:txBody>
+      </p:sp>
+      <p:sp>
+        <p:nvSpPr>
+          <p:cNvPr id="27" name="Shape 25"/>
+          <p:cNvSpPr/>
+          <p:nvPr/>
+        </p:nvSpPr>
+        <p:spPr>
+          <a:xfrm>
+            <a:off x="365760" y="4096512"/>
+            <a:ext cx="1371600" cy="804672"/>
+          </a:xfrm>
+          <a:prstGeom prst="rect">
+            <a:avLst>
+              <a:gd name="adj" fmla="val 6818"/>
+            </a:avLst>
+          </a:prstGeom>
+          <a:solidFill>
+            <a:srgbClr val="E2E8F0"/>
+          </a:solidFill>
+          <a:ln w="12700">
+            <a:solidFill>
+              <a:srgbClr val="E2E8F0"/>
+            </a:solidFill>
+            <a:prstDash val="solid"/>
+          </a:ln>
+        </p:spPr>
+      </p:sp>
+      <p:sp>
+        <p:nvSpPr>
+          <p:cNvPr id="28" name="Text 26"/>
+          <p:cNvSpPr/>
+          <p:nvPr/>
+        </p:nvSpPr>
+        <p:spPr>
+          <a:xfrm>
+            <a:off x="365760" y="4096512"/>
+            <a:ext cx="1371600" cy="804672"/>
+          </a:xfrm>
+          <a:prstGeom prst="rect">
+            <a:avLst/>
+          </a:prstGeom>
+          <a:noFill/>
+          <a:ln/>
+        </p:spPr>
+        <p:txBody>
+          <a:bodyPr wrap="square" lIns="0" tIns="0" rIns="0" bIns="0" rtlCol="0" anchor="ctr"/>
+          <a:lstStyle/>
+          <a:p>
+            <a:pPr algn="ctr" indent="0" marL="0">
+              <a:buNone/>
+            </a:pPr>
+            <a:r>
+              <a:rPr lang="en-US" sz="1100" b="1" dirty="0">
+                <a:solidFill>
+                  <a:srgbClr val="475569"/>
+                </a:solidFill>
+                <a:latin typeface="Trebuchet MS" pitchFamily="34" charset="0"/>
+                <a:ea typeface="Trebuchet MS" pitchFamily="34" charset="-122"/>
+                <a:cs typeface="Trebuchet MS" pitchFamily="34" charset="-120"/>
+              </a:rPr>
+              <a:t>Phonemes</a:t>
+            </a:r>
+            <a:endParaRPr lang="en-US" sz="1100" dirty="0"/>
+          </a:p>
+        </p:txBody>
+      </p:sp>
+      <p:sp>
+        <p:nvSpPr>
+          <p:cNvPr id="29" name="Shape 27"/>
+          <p:cNvSpPr/>
+          <p:nvPr/>
+        </p:nvSpPr>
+        <p:spPr>
+          <a:xfrm>
+            <a:off x="1874520" y="4096512"/>
+            <a:ext cx="6903720" cy="804672"/>
+          </a:xfrm>
+          <a:prstGeom prst="rect">
+            <a:avLst>
+              <a:gd name="adj" fmla="val 6818"/>
+            </a:avLst>
+          </a:prstGeom>
+          <a:solidFill>
+            <a:srgbClr val="FCE7F3"/>
+          </a:solidFill>
+          <a:ln w="12700">
+            <a:solidFill>
+              <a:srgbClr val="DB2777"/>
+            </a:solidFill>
+            <a:prstDash val="solid"/>
+          </a:ln>
+        </p:spPr>
+      </p:sp>
+      <p:sp>
+        <p:nvSpPr>
+          <p:cNvPr id="30" name="Shape 28"/>
+          <p:cNvSpPr/>
+          <p:nvPr/>
+        </p:nvSpPr>
+        <p:spPr>
+          <a:xfrm>
+            <a:off x="2254649" y="4169664"/>
+            <a:ext cx="685800" cy="384048"/>
+          </a:xfrm>
+          <a:prstGeom prst="rect">
+            <a:avLst>
+              <a:gd name="adj" fmla="val 9524"/>
+            </a:avLst>
+          </a:prstGeom>
+          <a:solidFill>
+            <a:srgbClr val="FFFFFF"/>
+          </a:solidFill>
+          <a:ln w="12700">
+            <a:solidFill>
+              <a:srgbClr val="DB2777"/>
+            </a:solidFill>
+            <a:prstDash val="solid"/>
+          </a:ln>
+        </p:spPr>
+      </p:sp>
+      <p:sp>
+        <p:nvSpPr>
+          <p:cNvPr id="31" name="Text 29"/>
+          <p:cNvSpPr/>
+          <p:nvPr/>
+        </p:nvSpPr>
+        <p:spPr>
+          <a:xfrm>
+            <a:off x="2254649" y="4169664"/>
+            <a:ext cx="685800" cy="384048"/>
+          </a:xfrm>
+          <a:prstGeom prst="rect">
+            <a:avLst/>
+          </a:prstGeom>
+          <a:noFill/>
+          <a:ln/>
+        </p:spPr>
+        <p:txBody>
+          <a:bodyPr wrap="square" lIns="0" tIns="0" rIns="0" bIns="0" rtlCol="0" anchor="ctr"/>
+          <a:lstStyle/>
+          <a:p>
+            <a:pPr algn="ctr" indent="0" marL="0">
+              <a:buNone/>
+            </a:pPr>
+            <a:r>
+              <a:rPr lang="en-US" sz="900" b="1" dirty="0">
+                <a:solidFill>
+                  <a:srgbClr val="9D174D"/>
+                </a:solidFill>
+                <a:latin typeface="Trebuchet MS" pitchFamily="34" charset="0"/>
+                <a:ea typeface="Trebuchet MS" pitchFamily="34" charset="-122"/>
+                <a:cs typeface="Trebuchet MS" pitchFamily="34" charset="-120"/>
+              </a:rPr>
+              <a:t>c</a:t>
+            </a:r>
+            <a:endParaRPr lang="en-US" sz="900" dirty="0"/>
+          </a:p>
+        </p:txBody>
+      </p:sp>
+      <p:sp>
+        <p:nvSpPr>
+          <p:cNvPr id="32" name="Text 30"/>
+          <p:cNvSpPr/>
+          <p:nvPr/>
+        </p:nvSpPr>
+        <p:spPr>
+          <a:xfrm>
+            <a:off x="2254649" y="4572000"/>
+            <a:ext cx="685800" cy="219456"/>
           </a:xfrm>
           <a:prstGeom prst="rect">
             <a:avLst/>
@@ -10171,232 +10192,232 @@
               <a:buNone/>
             </a:pPr>
             <a:r>
-              <a:rPr lang="en-US" sz="850" dirty="0">
-                <a:solidFill>
-                  <a:srgbClr val="475569"/>
+              <a:rPr lang="en-US" sz="750" i="1" dirty="0">
+                <a:solidFill>
+                  <a:srgbClr val="94A3B8"/>
                 </a:solidFill>
                 <a:latin typeface="Calibri" pitchFamily="34" charset="0"/>
                 <a:ea typeface="Calibri" pitchFamily="34" charset="-122"/>
                 <a:cs typeface="Calibri" pitchFamily="34" charset="-120"/>
               </a:rPr>
-              <a:t>act or result of</a:t>
-            </a:r>
-            <a:endParaRPr lang="en-US" sz="850" dirty="0"/>
-          </a:p>
-        </p:txBody>
-      </p:sp>
-      <p:sp>
-        <p:nvSpPr>
-          <p:cNvPr id="22" name="Shape 20"/>
-          <p:cNvSpPr/>
-          <p:nvPr/>
-        </p:nvSpPr>
-        <p:spPr>
-          <a:xfrm>
-            <a:off x="365760" y="3273552"/>
-            <a:ext cx="1371600" cy="658368"/>
+              <a:t>/k/</a:t>
+            </a:r>
+            <a:endParaRPr lang="en-US" sz="750" dirty="0"/>
+          </a:p>
+        </p:txBody>
+      </p:sp>
+      <p:sp>
+        <p:nvSpPr>
+          <p:cNvPr id="33" name="Shape 31"/>
+          <p:cNvSpPr/>
+          <p:nvPr/>
+        </p:nvSpPr>
+        <p:spPr>
+          <a:xfrm>
+            <a:off x="3293146" y="4169664"/>
+            <a:ext cx="685800" cy="384048"/>
           </a:xfrm>
           <a:prstGeom prst="rect">
             <a:avLst>
-              <a:gd name="adj" fmla="val 8333"/>
+              <a:gd name="adj" fmla="val 9524"/>
             </a:avLst>
           </a:prstGeom>
           <a:solidFill>
-            <a:srgbClr val="E2E8F0"/>
-          </a:solidFill>
-          <a:ln w="12700">
-            <a:solidFill>
-              <a:srgbClr val="E2E8F0"/>
-            </a:solidFill>
-            <a:prstDash val="solid"/>
-          </a:ln>
-        </p:spPr>
-      </p:sp>
-      <p:sp>
-        <p:nvSpPr>
-          <p:cNvPr id="23" name="Text 21"/>
-          <p:cNvSpPr/>
-          <p:nvPr/>
-        </p:nvSpPr>
-        <p:spPr>
-          <a:xfrm>
-            <a:off x="365760" y="3273552"/>
-            <a:ext cx="1371600" cy="658368"/>
-          </a:xfrm>
-          <a:prstGeom prst="rect">
-            <a:avLst/>
-          </a:prstGeom>
-          <a:noFill/>
-          <a:ln/>
-        </p:spPr>
-        <p:txBody>
-          <a:bodyPr wrap="square" lIns="0" tIns="0" rIns="0" bIns="0" rtlCol="0" anchor="ctr"/>
-          <a:lstStyle/>
-          <a:p>
-            <a:pPr algn="ctr" indent="0" marL="0">
-              <a:buNone/>
-            </a:pPr>
-            <a:r>
-              <a:rPr lang="en-US" sz="1100" b="1" dirty="0">
-                <a:solidFill>
-                  <a:srgbClr val="475569"/>
+            <a:srgbClr val="FFFFFF"/>
+          </a:solidFill>
+          <a:ln w="12700">
+            <a:solidFill>
+              <a:srgbClr val="DB2777"/>
+            </a:solidFill>
+            <a:prstDash val="solid"/>
+          </a:ln>
+        </p:spPr>
+      </p:sp>
+      <p:sp>
+        <p:nvSpPr>
+          <p:cNvPr id="34" name="Text 32"/>
+          <p:cNvSpPr/>
+          <p:nvPr/>
+        </p:nvSpPr>
+        <p:spPr>
+          <a:xfrm>
+            <a:off x="3293146" y="4169664"/>
+            <a:ext cx="685800" cy="384048"/>
+          </a:xfrm>
+          <a:prstGeom prst="rect">
+            <a:avLst/>
+          </a:prstGeom>
+          <a:noFill/>
+          <a:ln/>
+        </p:spPr>
+        <p:txBody>
+          <a:bodyPr wrap="square" lIns="0" tIns="0" rIns="0" bIns="0" rtlCol="0" anchor="ctr"/>
+          <a:lstStyle/>
+          <a:p>
+            <a:pPr algn="ctr" indent="0" marL="0">
+              <a:buNone/>
+            </a:pPr>
+            <a:r>
+              <a:rPr lang="en-US" sz="900" b="1" dirty="0">
+                <a:solidFill>
+                  <a:srgbClr val="9D174D"/>
                 </a:solidFill>
                 <a:latin typeface="Trebuchet MS" pitchFamily="34" charset="0"/>
                 <a:ea typeface="Trebuchet MS" pitchFamily="34" charset="-122"/>
                 <a:cs typeface="Trebuchet MS" pitchFamily="34" charset="-120"/>
               </a:rPr>
-              <a:t>Syllables</a:t>
-            </a:r>
-            <a:endParaRPr lang="en-US" sz="1100" dirty="0"/>
-          </a:p>
-        </p:txBody>
-      </p:sp>
-      <p:sp>
-        <p:nvSpPr>
-          <p:cNvPr id="24" name="Shape 22"/>
-          <p:cNvSpPr/>
-          <p:nvPr/>
-        </p:nvSpPr>
-        <p:spPr>
-          <a:xfrm>
-            <a:off x="1874520" y="3273552"/>
-            <a:ext cx="6903720" cy="658368"/>
+              <a:t>or</a:t>
+            </a:r>
+            <a:endParaRPr lang="en-US" sz="900" dirty="0"/>
+          </a:p>
+        </p:txBody>
+      </p:sp>
+      <p:sp>
+        <p:nvSpPr>
+          <p:cNvPr id="35" name="Shape 33"/>
+          <p:cNvSpPr/>
+          <p:nvPr/>
+        </p:nvSpPr>
+        <p:spPr>
+          <a:xfrm>
+            <a:off x="4331643" y="4169664"/>
+            <a:ext cx="685800" cy="384048"/>
           </a:xfrm>
           <a:prstGeom prst="rect">
             <a:avLst>
-              <a:gd name="adj" fmla="val 8333"/>
+              <a:gd name="adj" fmla="val 9524"/>
             </a:avLst>
           </a:prstGeom>
           <a:solidFill>
-            <a:srgbClr val="CCFBF1"/>
-          </a:solidFill>
-          <a:ln w="12700">
-            <a:solidFill>
-              <a:srgbClr val="0D9488"/>
-            </a:solidFill>
-            <a:prstDash val="solid"/>
-          </a:ln>
-        </p:spPr>
-      </p:sp>
-      <p:sp>
-        <p:nvSpPr>
-          <p:cNvPr id="25" name="Shape 23"/>
-          <p:cNvSpPr/>
-          <p:nvPr/>
-        </p:nvSpPr>
-        <p:spPr>
-          <a:xfrm>
-            <a:off x="2313432" y="3364992"/>
-            <a:ext cx="1645920" cy="475488"/>
-          </a:xfrm>
-          <a:prstGeom prst="rect">
-            <a:avLst>
-              <a:gd name="adj" fmla="val 9615"/>
-            </a:avLst>
-          </a:prstGeom>
-          <a:solidFill>
             <a:srgbClr val="FFFFFF"/>
           </a:solidFill>
           <a:ln w="12700">
             <a:solidFill>
-              <a:srgbClr val="0D9488"/>
-            </a:solidFill>
-            <a:prstDash val="solid"/>
-          </a:ln>
-        </p:spPr>
-      </p:sp>
-      <p:sp>
-        <p:nvSpPr>
-          <p:cNvPr id="26" name="Text 24"/>
-          <p:cNvSpPr/>
-          <p:nvPr/>
-        </p:nvSpPr>
-        <p:spPr>
-          <a:xfrm>
-            <a:off x="2313432" y="3364992"/>
-            <a:ext cx="1645920" cy="475488"/>
-          </a:xfrm>
-          <a:prstGeom prst="rect">
-            <a:avLst/>
-          </a:prstGeom>
-          <a:noFill/>
-          <a:ln/>
-        </p:spPr>
-        <p:txBody>
-          <a:bodyPr wrap="square" lIns="0" tIns="0" rIns="0" bIns="0" rtlCol="0" anchor="ctr"/>
-          <a:lstStyle/>
-          <a:p>
-            <a:pPr algn="ctr" indent="0" marL="0">
-              <a:buNone/>
-            </a:pPr>
-            <a:r>
-              <a:rPr lang="en-US" sz="1400" b="1" dirty="0">
-                <a:solidFill>
-                  <a:srgbClr val="0D9488"/>
+              <a:srgbClr val="DB2777"/>
+            </a:solidFill>
+            <a:prstDash val="solid"/>
+          </a:ln>
+        </p:spPr>
+      </p:sp>
+      <p:sp>
+        <p:nvSpPr>
+          <p:cNvPr id="36" name="Text 34"/>
+          <p:cNvSpPr/>
+          <p:nvPr/>
+        </p:nvSpPr>
+        <p:spPr>
+          <a:xfrm>
+            <a:off x="4331643" y="4169664"/>
+            <a:ext cx="685800" cy="384048"/>
+          </a:xfrm>
+          <a:prstGeom prst="rect">
+            <a:avLst/>
+          </a:prstGeom>
+          <a:noFill/>
+          <a:ln/>
+        </p:spPr>
+        <p:txBody>
+          <a:bodyPr wrap="square" lIns="0" tIns="0" rIns="0" bIns="0" rtlCol="0" anchor="ctr"/>
+          <a:lstStyle/>
+          <a:p>
+            <a:pPr algn="ctr" indent="0" marL="0">
+              <a:buNone/>
+            </a:pPr>
+            <a:r>
+              <a:rPr lang="en-US" sz="900" b="1" dirty="0">
+                <a:solidFill>
+                  <a:srgbClr val="9D174D"/>
                 </a:solidFill>
                 <a:latin typeface="Trebuchet MS" pitchFamily="34" charset="0"/>
                 <a:ea typeface="Trebuchet MS" pitchFamily="34" charset="-122"/>
                 <a:cs typeface="Trebuchet MS" pitchFamily="34" charset="-120"/>
               </a:rPr>
-              <a:t>cor</a:t>
-            </a:r>
-            <a:endParaRPr lang="en-US" sz="1400" dirty="0"/>
-          </a:p>
-        </p:txBody>
-      </p:sp>
-      <p:sp>
-        <p:nvSpPr>
-          <p:cNvPr id="27" name="Text 25"/>
-          <p:cNvSpPr/>
-          <p:nvPr/>
-        </p:nvSpPr>
-        <p:spPr>
-          <a:xfrm>
-            <a:off x="3959352" y="3364992"/>
-            <a:ext cx="411480" cy="475488"/>
-          </a:xfrm>
-          <a:prstGeom prst="rect">
-            <a:avLst/>
-          </a:prstGeom>
-          <a:noFill/>
-          <a:ln/>
-        </p:spPr>
-        <p:txBody>
-          <a:bodyPr wrap="square" lIns="0" tIns="0" rIns="0" bIns="0" rtlCol="0" anchor="ctr"/>
-          <a:lstStyle/>
-          <a:p>
-            <a:pPr algn="ctr" indent="0" marL="0">
-              <a:buNone/>
-            </a:pPr>
-            <a:r>
-              <a:rPr lang="en-US" sz="1600" b="1" dirty="0">
-                <a:solidFill>
-                  <a:srgbClr val="0D9488"/>
+              <a:t>r</a:t>
+            </a:r>
+            <a:endParaRPr lang="en-US" sz="900" dirty="0"/>
+          </a:p>
+        </p:txBody>
+      </p:sp>
+      <p:sp>
+        <p:nvSpPr>
+          <p:cNvPr id="37" name="Shape 35"/>
+          <p:cNvSpPr/>
+          <p:nvPr/>
+        </p:nvSpPr>
+        <p:spPr>
+          <a:xfrm>
+            <a:off x="5370141" y="4169664"/>
+            <a:ext cx="685800" cy="384048"/>
+          </a:xfrm>
+          <a:prstGeom prst="rect">
+            <a:avLst>
+              <a:gd name="adj" fmla="val 9524"/>
+            </a:avLst>
+          </a:prstGeom>
+          <a:solidFill>
+            <a:srgbClr val="FFFFFF"/>
+          </a:solidFill>
+          <a:ln w="12700">
+            <a:solidFill>
+              <a:srgbClr val="DB2777"/>
+            </a:solidFill>
+            <a:prstDash val="solid"/>
+          </a:ln>
+        </p:spPr>
+      </p:sp>
+      <p:sp>
+        <p:nvSpPr>
+          <p:cNvPr id="38" name="Text 36"/>
+          <p:cNvSpPr/>
+          <p:nvPr/>
+        </p:nvSpPr>
+        <p:spPr>
+          <a:xfrm>
+            <a:off x="5370141" y="4169664"/>
+            <a:ext cx="685800" cy="384048"/>
+          </a:xfrm>
+          <a:prstGeom prst="rect">
+            <a:avLst/>
+          </a:prstGeom>
+          <a:noFill/>
+          <a:ln/>
+        </p:spPr>
+        <p:txBody>
+          <a:bodyPr wrap="square" lIns="0" tIns="0" rIns="0" bIns="0" rtlCol="0" anchor="ctr"/>
+          <a:lstStyle/>
+          <a:p>
+            <a:pPr algn="ctr" indent="0" marL="0">
+              <a:buNone/>
+            </a:pPr>
+            <a:r>
+              <a:rPr lang="en-US" sz="900" b="1" dirty="0">
+                <a:solidFill>
+                  <a:srgbClr val="9D174D"/>
                 </a:solidFill>
                 <a:latin typeface="Trebuchet MS" pitchFamily="34" charset="0"/>
                 <a:ea typeface="Trebuchet MS" pitchFamily="34" charset="-122"/>
                 <a:cs typeface="Trebuchet MS" pitchFamily="34" charset="-120"/>
               </a:rPr>
-              <a:t>·</a:t>
-            </a:r>
-            <a:endParaRPr lang="en-US" sz="1600" dirty="0"/>
-          </a:p>
-        </p:txBody>
-      </p:sp>
-      <p:sp>
-        <p:nvSpPr>
-          <p:cNvPr id="28" name="Shape 26"/>
-          <p:cNvSpPr/>
-          <p:nvPr/>
-        </p:nvSpPr>
-        <p:spPr>
-          <a:xfrm>
-            <a:off x="4370832" y="3364992"/>
-            <a:ext cx="1645920" cy="475488"/>
+              <a:t>e</a:t>
+            </a:r>
+            <a:endParaRPr lang="en-US" sz="900" dirty="0"/>
+          </a:p>
+        </p:txBody>
+      </p:sp>
+      <p:sp>
+        <p:nvSpPr>
+          <p:cNvPr id="39" name="Shape 37"/>
+          <p:cNvSpPr/>
+          <p:nvPr/>
+        </p:nvSpPr>
+        <p:spPr>
+          <a:xfrm>
+            <a:off x="6408638" y="4169664"/>
+            <a:ext cx="685800" cy="384048"/>
           </a:xfrm>
           <a:prstGeom prst="rect">
             <a:avLst>
-              <a:gd name="adj" fmla="val 9615"/>
+              <a:gd name="adj" fmla="val 9524"/>
             </a:avLst>
           </a:prstGeom>
           <a:solidFill>
@@ -10404,889 +10425,151 @@
           </a:solidFill>
           <a:ln w="12700">
             <a:solidFill>
-              <a:srgbClr val="0D9488"/>
-            </a:solidFill>
-            <a:prstDash val="solid"/>
-          </a:ln>
-        </p:spPr>
-      </p:sp>
-      <p:sp>
-        <p:nvSpPr>
-          <p:cNvPr id="29" name="Text 27"/>
-          <p:cNvSpPr/>
-          <p:nvPr/>
-        </p:nvSpPr>
-        <p:spPr>
-          <a:xfrm>
-            <a:off x="4370832" y="3364992"/>
-            <a:ext cx="1645920" cy="475488"/>
-          </a:xfrm>
-          <a:prstGeom prst="rect">
-            <a:avLst/>
-          </a:prstGeom>
-          <a:noFill/>
-          <a:ln/>
-        </p:spPr>
-        <p:txBody>
-          <a:bodyPr wrap="square" lIns="0" tIns="0" rIns="0" bIns="0" rtlCol="0" anchor="ctr"/>
-          <a:lstStyle/>
-          <a:p>
-            <a:pPr algn="ctr" indent="0" marL="0">
-              <a:buNone/>
-            </a:pPr>
-            <a:r>
-              <a:rPr lang="en-US" sz="1400" b="1" dirty="0">
-                <a:solidFill>
-                  <a:srgbClr val="0D9488"/>
+              <a:srgbClr val="DB2777"/>
+            </a:solidFill>
+            <a:prstDash val="solid"/>
+          </a:ln>
+        </p:spPr>
+      </p:sp>
+      <p:sp>
+        <p:nvSpPr>
+          <p:cNvPr id="40" name="Text 38"/>
+          <p:cNvSpPr/>
+          <p:nvPr/>
+        </p:nvSpPr>
+        <p:spPr>
+          <a:xfrm>
+            <a:off x="6408638" y="4169664"/>
+            <a:ext cx="685800" cy="384048"/>
+          </a:xfrm>
+          <a:prstGeom prst="rect">
+            <a:avLst/>
+          </a:prstGeom>
+          <a:noFill/>
+          <a:ln/>
+        </p:spPr>
+        <p:txBody>
+          <a:bodyPr wrap="square" lIns="0" tIns="0" rIns="0" bIns="0" rtlCol="0" anchor="ctr"/>
+          <a:lstStyle/>
+          <a:p>
+            <a:pPr algn="ctr" indent="0" marL="0">
+              <a:buNone/>
+            </a:pPr>
+            <a:r>
+              <a:rPr lang="en-US" sz="900" b="1" dirty="0">
+                <a:solidFill>
+                  <a:srgbClr val="9D174D"/>
                 </a:solidFill>
                 <a:latin typeface="Trebuchet MS" pitchFamily="34" charset="0"/>
                 <a:ea typeface="Trebuchet MS" pitchFamily="34" charset="-122"/>
                 <a:cs typeface="Trebuchet MS" pitchFamily="34" charset="-120"/>
               </a:rPr>
-              <a:t>rec</a:t>
-            </a:r>
-            <a:endParaRPr lang="en-US" sz="1400" dirty="0"/>
-          </a:p>
-        </p:txBody>
-      </p:sp>
-      <p:sp>
-        <p:nvSpPr>
-          <p:cNvPr id="30" name="Text 28"/>
-          <p:cNvSpPr/>
-          <p:nvPr/>
-        </p:nvSpPr>
-        <p:spPr>
-          <a:xfrm>
-            <a:off x="6016752" y="3364992"/>
-            <a:ext cx="411480" cy="475488"/>
-          </a:xfrm>
-          <a:prstGeom prst="rect">
-            <a:avLst/>
-          </a:prstGeom>
-          <a:noFill/>
-          <a:ln/>
-        </p:spPr>
-        <p:txBody>
-          <a:bodyPr wrap="square" lIns="0" tIns="0" rIns="0" bIns="0" rtlCol="0" anchor="ctr"/>
-          <a:lstStyle/>
-          <a:p>
-            <a:pPr algn="ctr" indent="0" marL="0">
-              <a:buNone/>
-            </a:pPr>
-            <a:r>
-              <a:rPr lang="en-US" sz="1600" b="1" dirty="0">
-                <a:solidFill>
-                  <a:srgbClr val="0D9488"/>
+              <a:t>c</a:t>
+            </a:r>
+            <a:endParaRPr lang="en-US" sz="900" dirty="0"/>
+          </a:p>
+        </p:txBody>
+      </p:sp>
+      <p:sp>
+        <p:nvSpPr>
+          <p:cNvPr id="41" name="Text 39"/>
+          <p:cNvSpPr/>
+          <p:nvPr/>
+        </p:nvSpPr>
+        <p:spPr>
+          <a:xfrm>
+            <a:off x="6408638" y="4572000"/>
+            <a:ext cx="685800" cy="219456"/>
+          </a:xfrm>
+          <a:prstGeom prst="rect">
+            <a:avLst/>
+          </a:prstGeom>
+          <a:noFill/>
+          <a:ln/>
+        </p:spPr>
+        <p:txBody>
+          <a:bodyPr wrap="square" lIns="0" tIns="0" rIns="0" bIns="0" rtlCol="0" anchor="t"/>
+          <a:lstStyle/>
+          <a:p>
+            <a:pPr algn="ctr" indent="0" marL="0">
+              <a:buNone/>
+            </a:pPr>
+            <a:r>
+              <a:rPr lang="en-US" sz="750" i="1" dirty="0">
+                <a:solidFill>
+                  <a:srgbClr val="94A3B8"/>
+                </a:solidFill>
+                <a:latin typeface="Calibri" pitchFamily="34" charset="0"/>
+                <a:ea typeface="Calibri" pitchFamily="34" charset="-122"/>
+                <a:cs typeface="Calibri" pitchFamily="34" charset="-120"/>
+              </a:rPr>
+              <a:t>/k/</a:t>
+            </a:r>
+            <a:endParaRPr lang="en-US" sz="750" dirty="0"/>
+          </a:p>
+        </p:txBody>
+      </p:sp>
+      <p:sp>
+        <p:nvSpPr>
+          <p:cNvPr id="42" name="Shape 40"/>
+          <p:cNvSpPr/>
+          <p:nvPr/>
+        </p:nvSpPr>
+        <p:spPr>
+          <a:xfrm>
+            <a:off x="7447135" y="4169664"/>
+            <a:ext cx="685800" cy="384048"/>
+          </a:xfrm>
+          <a:prstGeom prst="rect">
+            <a:avLst>
+              <a:gd name="adj" fmla="val 9524"/>
+            </a:avLst>
+          </a:prstGeom>
+          <a:solidFill>
+            <a:srgbClr val="FFFFFF"/>
+          </a:solidFill>
+          <a:ln w="12700">
+            <a:solidFill>
+              <a:srgbClr val="DB2777"/>
+            </a:solidFill>
+            <a:prstDash val="solid"/>
+          </a:ln>
+        </p:spPr>
+      </p:sp>
+      <p:sp>
+        <p:nvSpPr>
+          <p:cNvPr id="43" name="Text 41"/>
+          <p:cNvSpPr/>
+          <p:nvPr/>
+        </p:nvSpPr>
+        <p:spPr>
+          <a:xfrm>
+            <a:off x="7447135" y="4169664"/>
+            <a:ext cx="685800" cy="384048"/>
+          </a:xfrm>
+          <a:prstGeom prst="rect">
+            <a:avLst/>
+          </a:prstGeom>
+          <a:noFill/>
+          <a:ln/>
+        </p:spPr>
+        <p:txBody>
+          <a:bodyPr wrap="square" lIns="0" tIns="0" rIns="0" bIns="0" rtlCol="0" anchor="ctr"/>
+          <a:lstStyle/>
+          <a:p>
+            <a:pPr algn="ctr" indent="0" marL="0">
+              <a:buNone/>
+            </a:pPr>
+            <a:r>
+              <a:rPr lang="en-US" sz="900" b="1" dirty="0">
+                <a:solidFill>
+                  <a:srgbClr val="9D174D"/>
                 </a:solidFill>
                 <a:latin typeface="Trebuchet MS" pitchFamily="34" charset="0"/>
                 <a:ea typeface="Trebuchet MS" pitchFamily="34" charset="-122"/>
                 <a:cs typeface="Trebuchet MS" pitchFamily="34" charset="-120"/>
               </a:rPr>
-              <a:t>·</a:t>
-            </a:r>
-            <a:endParaRPr lang="en-US" sz="1600" dirty="0"/>
-          </a:p>
-        </p:txBody>
-      </p:sp>
-      <p:sp>
-        <p:nvSpPr>
-          <p:cNvPr id="31" name="Shape 29"/>
-          <p:cNvSpPr/>
-          <p:nvPr/>
-        </p:nvSpPr>
-        <p:spPr>
-          <a:xfrm>
-            <a:off x="6428232" y="3364992"/>
-            <a:ext cx="1645920" cy="475488"/>
-          </a:xfrm>
-          <a:prstGeom prst="rect">
-            <a:avLst>
-              <a:gd name="adj" fmla="val 9615"/>
-            </a:avLst>
-          </a:prstGeom>
-          <a:solidFill>
-            <a:srgbClr val="FFFFFF"/>
-          </a:solidFill>
-          <a:ln w="12700">
-            <a:solidFill>
-              <a:srgbClr val="0D9488"/>
-            </a:solidFill>
-            <a:prstDash val="solid"/>
-          </a:ln>
-        </p:spPr>
-      </p:sp>
-      <p:sp>
-        <p:nvSpPr>
-          <p:cNvPr id="32" name="Text 30"/>
-          <p:cNvSpPr/>
-          <p:nvPr/>
-        </p:nvSpPr>
-        <p:spPr>
-          <a:xfrm>
-            <a:off x="6428232" y="3364992"/>
-            <a:ext cx="1645920" cy="475488"/>
-          </a:xfrm>
-          <a:prstGeom prst="rect">
-            <a:avLst/>
-          </a:prstGeom>
-          <a:noFill/>
-          <a:ln/>
-        </p:spPr>
-        <p:txBody>
-          <a:bodyPr wrap="square" lIns="0" tIns="0" rIns="0" bIns="0" rtlCol="0" anchor="ctr"/>
-          <a:lstStyle/>
-          <a:p>
-            <a:pPr algn="ctr" indent="0" marL="0">
-              <a:buNone/>
-            </a:pPr>
-            <a:r>
-              <a:rPr lang="en-US" sz="1400" b="1" dirty="0">
-                <a:solidFill>
-                  <a:srgbClr val="0D9488"/>
-                </a:solidFill>
-                <a:latin typeface="Trebuchet MS" pitchFamily="34" charset="0"/>
-                <a:ea typeface="Trebuchet MS" pitchFamily="34" charset="-122"/>
-                <a:cs typeface="Trebuchet MS" pitchFamily="34" charset="-120"/>
-              </a:rPr>
-              <a:t>tion</a:t>
-            </a:r>
-            <a:endParaRPr lang="en-US" sz="1400" dirty="0"/>
-          </a:p>
-        </p:txBody>
-      </p:sp>
-      <p:sp>
-        <p:nvSpPr>
-          <p:cNvPr id="33" name="Shape 31"/>
-          <p:cNvSpPr/>
-          <p:nvPr/>
-        </p:nvSpPr>
-        <p:spPr>
-          <a:xfrm>
-            <a:off x="365760" y="4096512"/>
-            <a:ext cx="1371600" cy="804672"/>
-          </a:xfrm>
-          <a:prstGeom prst="rect">
-            <a:avLst>
-              <a:gd name="adj" fmla="val 6818"/>
-            </a:avLst>
-          </a:prstGeom>
-          <a:solidFill>
-            <a:srgbClr val="E2E8F0"/>
-          </a:solidFill>
-          <a:ln w="12700">
-            <a:solidFill>
-              <a:srgbClr val="E2E8F0"/>
-            </a:solidFill>
-            <a:prstDash val="solid"/>
-          </a:ln>
-        </p:spPr>
-      </p:sp>
-      <p:sp>
-        <p:nvSpPr>
-          <p:cNvPr id="34" name="Text 32"/>
-          <p:cNvSpPr/>
-          <p:nvPr/>
-        </p:nvSpPr>
-        <p:spPr>
-          <a:xfrm>
-            <a:off x="365760" y="4096512"/>
-            <a:ext cx="1371600" cy="804672"/>
-          </a:xfrm>
-          <a:prstGeom prst="rect">
-            <a:avLst/>
-          </a:prstGeom>
-          <a:noFill/>
-          <a:ln/>
-        </p:spPr>
-        <p:txBody>
-          <a:bodyPr wrap="square" lIns="0" tIns="0" rIns="0" bIns="0" rtlCol="0" anchor="ctr"/>
-          <a:lstStyle/>
-          <a:p>
-            <a:pPr algn="ctr" indent="0" marL="0">
-              <a:buNone/>
-            </a:pPr>
-            <a:r>
-              <a:rPr lang="en-US" sz="1100" b="1" dirty="0">
-                <a:solidFill>
-                  <a:srgbClr val="475569"/>
-                </a:solidFill>
-                <a:latin typeface="Trebuchet MS" pitchFamily="34" charset="0"/>
-                <a:ea typeface="Trebuchet MS" pitchFamily="34" charset="-122"/>
-                <a:cs typeface="Trebuchet MS" pitchFamily="34" charset="-120"/>
-              </a:rPr>
-              <a:t>Phonemes</a:t>
-            </a:r>
-            <a:endParaRPr lang="en-US" sz="1100" dirty="0"/>
-          </a:p>
-        </p:txBody>
-      </p:sp>
-      <p:sp>
-        <p:nvSpPr>
-          <p:cNvPr id="35" name="Shape 33"/>
-          <p:cNvSpPr/>
-          <p:nvPr/>
-        </p:nvSpPr>
-        <p:spPr>
-          <a:xfrm>
-            <a:off x="1874520" y="4096512"/>
-            <a:ext cx="6903720" cy="804672"/>
-          </a:xfrm>
-          <a:prstGeom prst="rect">
-            <a:avLst>
-              <a:gd name="adj" fmla="val 6818"/>
-            </a:avLst>
-          </a:prstGeom>
-          <a:solidFill>
-            <a:srgbClr val="FCE7F3"/>
-          </a:solidFill>
-          <a:ln w="12700">
-            <a:solidFill>
-              <a:srgbClr val="DB2777"/>
-            </a:solidFill>
-            <a:prstDash val="solid"/>
-          </a:ln>
-        </p:spPr>
-      </p:sp>
-      <p:sp>
-        <p:nvSpPr>
-          <p:cNvPr id="36" name="Shape 34"/>
-          <p:cNvSpPr/>
-          <p:nvPr/>
-        </p:nvSpPr>
-        <p:spPr>
-          <a:xfrm>
-            <a:off x="2023872" y="4169664"/>
-            <a:ext cx="685800" cy="384048"/>
-          </a:xfrm>
-          <a:prstGeom prst="rect">
-            <a:avLst>
-              <a:gd name="adj" fmla="val 9524"/>
-            </a:avLst>
-          </a:prstGeom>
-          <a:solidFill>
-            <a:srgbClr val="FFFFFF"/>
-          </a:solidFill>
-          <a:ln w="12700">
-            <a:solidFill>
-              <a:srgbClr val="DB2777"/>
-            </a:solidFill>
-            <a:prstDash val="solid"/>
-          </a:ln>
-        </p:spPr>
-      </p:sp>
-      <p:sp>
-        <p:nvSpPr>
-          <p:cNvPr id="37" name="Text 35"/>
-          <p:cNvSpPr/>
-          <p:nvPr/>
-        </p:nvSpPr>
-        <p:spPr>
-          <a:xfrm>
-            <a:off x="2023872" y="4169664"/>
-            <a:ext cx="685800" cy="384048"/>
-          </a:xfrm>
-          <a:prstGeom prst="rect">
-            <a:avLst/>
-          </a:prstGeom>
-          <a:noFill/>
-          <a:ln/>
-        </p:spPr>
-        <p:txBody>
-          <a:bodyPr wrap="square" lIns="0" tIns="0" rIns="0" bIns="0" rtlCol="0" anchor="ctr"/>
-          <a:lstStyle/>
-          <a:p>
-            <a:pPr algn="ctr" indent="0" marL="0">
-              <a:buNone/>
-            </a:pPr>
-            <a:r>
-              <a:rPr lang="en-US" sz="900" b="1" dirty="0">
-                <a:solidFill>
-                  <a:srgbClr val="9D174D"/>
-                </a:solidFill>
-                <a:latin typeface="Trebuchet MS" pitchFamily="34" charset="0"/>
-                <a:ea typeface="Trebuchet MS" pitchFamily="34" charset="-122"/>
-                <a:cs typeface="Trebuchet MS" pitchFamily="34" charset="-120"/>
-              </a:rPr>
-              <a:t>c</a:t>
-            </a:r>
-            <a:endParaRPr lang="en-US" sz="900" dirty="0"/>
-          </a:p>
-        </p:txBody>
-      </p:sp>
-      <p:sp>
-        <p:nvSpPr>
-          <p:cNvPr id="38" name="Text 36"/>
-          <p:cNvSpPr/>
-          <p:nvPr/>
-        </p:nvSpPr>
-        <p:spPr>
-          <a:xfrm>
-            <a:off x="2023872" y="4572000"/>
-            <a:ext cx="685800" cy="219456"/>
-          </a:xfrm>
-          <a:prstGeom prst="rect">
-            <a:avLst/>
-          </a:prstGeom>
-          <a:noFill/>
-          <a:ln/>
-        </p:spPr>
-        <p:txBody>
-          <a:bodyPr wrap="square" lIns="0" tIns="0" rIns="0" bIns="0" rtlCol="0" anchor="t"/>
-          <a:lstStyle/>
-          <a:p>
-            <a:pPr algn="ctr" indent="0" marL="0">
-              <a:buNone/>
-            </a:pPr>
-            <a:r>
-              <a:rPr lang="en-US" sz="750" i="1" dirty="0">
-                <a:solidFill>
-                  <a:srgbClr val="94A3B8"/>
-                </a:solidFill>
-                <a:latin typeface="Calibri" pitchFamily="34" charset="0"/>
-                <a:ea typeface="Calibri" pitchFamily="34" charset="-122"/>
-                <a:cs typeface="Calibri" pitchFamily="34" charset="-120"/>
-              </a:rPr>
-              <a:t>/k/</a:t>
-            </a:r>
-            <a:endParaRPr lang="en-US" sz="750" dirty="0"/>
-          </a:p>
-        </p:txBody>
-      </p:sp>
-      <p:sp>
-        <p:nvSpPr>
-          <p:cNvPr id="39" name="Shape 37"/>
-          <p:cNvSpPr/>
-          <p:nvPr/>
-        </p:nvSpPr>
-        <p:spPr>
-          <a:xfrm>
-            <a:off x="2831592" y="4169664"/>
-            <a:ext cx="685800" cy="384048"/>
-          </a:xfrm>
-          <a:prstGeom prst="rect">
-            <a:avLst>
-              <a:gd name="adj" fmla="val 9524"/>
-            </a:avLst>
-          </a:prstGeom>
-          <a:solidFill>
-            <a:srgbClr val="FFFFFF"/>
-          </a:solidFill>
-          <a:ln w="12700">
-            <a:solidFill>
-              <a:srgbClr val="DB2777"/>
-            </a:solidFill>
-            <a:prstDash val="solid"/>
-          </a:ln>
-        </p:spPr>
-      </p:sp>
-      <p:sp>
-        <p:nvSpPr>
-          <p:cNvPr id="40" name="Text 38"/>
-          <p:cNvSpPr/>
-          <p:nvPr/>
-        </p:nvSpPr>
-        <p:spPr>
-          <a:xfrm>
-            <a:off x="2831592" y="4169664"/>
-            <a:ext cx="685800" cy="384048"/>
-          </a:xfrm>
-          <a:prstGeom prst="rect">
-            <a:avLst/>
-          </a:prstGeom>
-          <a:noFill/>
-          <a:ln/>
-        </p:spPr>
-        <p:txBody>
-          <a:bodyPr wrap="square" lIns="0" tIns="0" rIns="0" bIns="0" rtlCol="0" anchor="ctr"/>
-          <a:lstStyle/>
-          <a:p>
-            <a:pPr algn="ctr" indent="0" marL="0">
-              <a:buNone/>
-            </a:pPr>
-            <a:r>
-              <a:rPr lang="en-US" sz="900" b="1" dirty="0">
-                <a:solidFill>
-                  <a:srgbClr val="9D174D"/>
-                </a:solidFill>
-                <a:latin typeface="Trebuchet MS" pitchFamily="34" charset="0"/>
-                <a:ea typeface="Trebuchet MS" pitchFamily="34" charset="-122"/>
-                <a:cs typeface="Trebuchet MS" pitchFamily="34" charset="-120"/>
-              </a:rPr>
-              <a:t>or</a:t>
-            </a:r>
-            <a:endParaRPr lang="en-US" sz="900" dirty="0"/>
-          </a:p>
-        </p:txBody>
-      </p:sp>
-      <p:sp>
-        <p:nvSpPr>
-          <p:cNvPr id="41" name="Shape 39"/>
-          <p:cNvSpPr/>
-          <p:nvPr/>
-        </p:nvSpPr>
-        <p:spPr>
-          <a:xfrm>
-            <a:off x="3639312" y="4169664"/>
-            <a:ext cx="685800" cy="384048"/>
-          </a:xfrm>
-          <a:prstGeom prst="rect">
-            <a:avLst>
-              <a:gd name="adj" fmla="val 9524"/>
-            </a:avLst>
-          </a:prstGeom>
-          <a:solidFill>
-            <a:srgbClr val="FFFFFF"/>
-          </a:solidFill>
-          <a:ln w="12700">
-            <a:solidFill>
-              <a:srgbClr val="DB2777"/>
-            </a:solidFill>
-            <a:prstDash val="solid"/>
-          </a:ln>
-        </p:spPr>
-      </p:sp>
-      <p:sp>
-        <p:nvSpPr>
-          <p:cNvPr id="42" name="Text 40"/>
-          <p:cNvSpPr/>
-          <p:nvPr/>
-        </p:nvSpPr>
-        <p:spPr>
-          <a:xfrm>
-            <a:off x="3639312" y="4169664"/>
-            <a:ext cx="685800" cy="384048"/>
-          </a:xfrm>
-          <a:prstGeom prst="rect">
-            <a:avLst/>
-          </a:prstGeom>
-          <a:noFill/>
-          <a:ln/>
-        </p:spPr>
-        <p:txBody>
-          <a:bodyPr wrap="square" lIns="0" tIns="0" rIns="0" bIns="0" rtlCol="0" anchor="ctr"/>
-          <a:lstStyle/>
-          <a:p>
-            <a:pPr algn="ctr" indent="0" marL="0">
-              <a:buNone/>
-            </a:pPr>
-            <a:r>
-              <a:rPr lang="en-US" sz="900" b="1" dirty="0">
-                <a:solidFill>
-                  <a:srgbClr val="9D174D"/>
-                </a:solidFill>
-                <a:latin typeface="Trebuchet MS" pitchFamily="34" charset="0"/>
-                <a:ea typeface="Trebuchet MS" pitchFamily="34" charset="-122"/>
-                <a:cs typeface="Trebuchet MS" pitchFamily="34" charset="-120"/>
-              </a:rPr>
-              <a:t>r</a:t>
-            </a:r>
-            <a:endParaRPr lang="en-US" sz="900" dirty="0"/>
-          </a:p>
-        </p:txBody>
-      </p:sp>
-      <p:sp>
-        <p:nvSpPr>
-          <p:cNvPr id="43" name="Shape 41"/>
-          <p:cNvSpPr/>
-          <p:nvPr/>
-        </p:nvSpPr>
-        <p:spPr>
-          <a:xfrm>
-            <a:off x="4447032" y="4169664"/>
-            <a:ext cx="685800" cy="384048"/>
-          </a:xfrm>
-          <a:prstGeom prst="rect">
-            <a:avLst>
-              <a:gd name="adj" fmla="val 9524"/>
-            </a:avLst>
-          </a:prstGeom>
-          <a:solidFill>
-            <a:srgbClr val="FFFFFF"/>
-          </a:solidFill>
-          <a:ln w="12700">
-            <a:solidFill>
-              <a:srgbClr val="DB2777"/>
-            </a:solidFill>
-            <a:prstDash val="solid"/>
-          </a:ln>
-        </p:spPr>
-      </p:sp>
-      <p:sp>
-        <p:nvSpPr>
-          <p:cNvPr id="44" name="Text 42"/>
-          <p:cNvSpPr/>
-          <p:nvPr/>
-        </p:nvSpPr>
-        <p:spPr>
-          <a:xfrm>
-            <a:off x="4447032" y="4169664"/>
-            <a:ext cx="685800" cy="384048"/>
-          </a:xfrm>
-          <a:prstGeom prst="rect">
-            <a:avLst/>
-          </a:prstGeom>
-          <a:noFill/>
-          <a:ln/>
-        </p:spPr>
-        <p:txBody>
-          <a:bodyPr wrap="square" lIns="0" tIns="0" rIns="0" bIns="0" rtlCol="0" anchor="ctr"/>
-          <a:lstStyle/>
-          <a:p>
-            <a:pPr algn="ctr" indent="0" marL="0">
-              <a:buNone/>
-            </a:pPr>
-            <a:r>
-              <a:rPr lang="en-US" sz="900" b="1" dirty="0">
-                <a:solidFill>
-                  <a:srgbClr val="9D174D"/>
-                </a:solidFill>
-                <a:latin typeface="Trebuchet MS" pitchFamily="34" charset="0"/>
-                <a:ea typeface="Trebuchet MS" pitchFamily="34" charset="-122"/>
-                <a:cs typeface="Trebuchet MS" pitchFamily="34" charset="-120"/>
-              </a:rPr>
-              <a:t>e</a:t>
-            </a:r>
-            <a:endParaRPr lang="en-US" sz="900" dirty="0"/>
-          </a:p>
-        </p:txBody>
-      </p:sp>
-      <p:sp>
-        <p:nvSpPr>
-          <p:cNvPr id="45" name="Shape 43"/>
-          <p:cNvSpPr/>
-          <p:nvPr/>
-        </p:nvSpPr>
-        <p:spPr>
-          <a:xfrm>
-            <a:off x="5254752" y="4169664"/>
-            <a:ext cx="685800" cy="384048"/>
-          </a:xfrm>
-          <a:prstGeom prst="rect">
-            <a:avLst>
-              <a:gd name="adj" fmla="val 9524"/>
-            </a:avLst>
-          </a:prstGeom>
-          <a:solidFill>
-            <a:srgbClr val="FFFFFF"/>
-          </a:solidFill>
-          <a:ln w="12700">
-            <a:solidFill>
-              <a:srgbClr val="DB2777"/>
-            </a:solidFill>
-            <a:prstDash val="solid"/>
-          </a:ln>
-        </p:spPr>
-      </p:sp>
-      <p:sp>
-        <p:nvSpPr>
-          <p:cNvPr id="46" name="Text 44"/>
-          <p:cNvSpPr/>
-          <p:nvPr/>
-        </p:nvSpPr>
-        <p:spPr>
-          <a:xfrm>
-            <a:off x="5254752" y="4169664"/>
-            <a:ext cx="685800" cy="384048"/>
-          </a:xfrm>
-          <a:prstGeom prst="rect">
-            <a:avLst/>
-          </a:prstGeom>
-          <a:noFill/>
-          <a:ln/>
-        </p:spPr>
-        <p:txBody>
-          <a:bodyPr wrap="square" lIns="0" tIns="0" rIns="0" bIns="0" rtlCol="0" anchor="ctr"/>
-          <a:lstStyle/>
-          <a:p>
-            <a:pPr algn="ctr" indent="0" marL="0">
-              <a:buNone/>
-            </a:pPr>
-            <a:r>
-              <a:rPr lang="en-US" sz="900" b="1" dirty="0">
-                <a:solidFill>
-                  <a:srgbClr val="9D174D"/>
-                </a:solidFill>
-                <a:latin typeface="Trebuchet MS" pitchFamily="34" charset="0"/>
-                <a:ea typeface="Trebuchet MS" pitchFamily="34" charset="-122"/>
-                <a:cs typeface="Trebuchet MS" pitchFamily="34" charset="-120"/>
-              </a:rPr>
-              <a:t>c</a:t>
-            </a:r>
-            <a:endParaRPr lang="en-US" sz="900" dirty="0"/>
-          </a:p>
-        </p:txBody>
-      </p:sp>
-      <p:sp>
-        <p:nvSpPr>
-          <p:cNvPr id="47" name="Text 45"/>
-          <p:cNvSpPr/>
-          <p:nvPr/>
-        </p:nvSpPr>
-        <p:spPr>
-          <a:xfrm>
-            <a:off x="5254752" y="4572000"/>
-            <a:ext cx="685800" cy="219456"/>
-          </a:xfrm>
-          <a:prstGeom prst="rect">
-            <a:avLst/>
-          </a:prstGeom>
-          <a:noFill/>
-          <a:ln/>
-        </p:spPr>
-        <p:txBody>
-          <a:bodyPr wrap="square" lIns="0" tIns="0" rIns="0" bIns="0" rtlCol="0" anchor="t"/>
-          <a:lstStyle/>
-          <a:p>
-            <a:pPr algn="ctr" indent="0" marL="0">
-              <a:buNone/>
-            </a:pPr>
-            <a:r>
-              <a:rPr lang="en-US" sz="750" i="1" dirty="0">
-                <a:solidFill>
-                  <a:srgbClr val="94A3B8"/>
-                </a:solidFill>
-                <a:latin typeface="Calibri" pitchFamily="34" charset="0"/>
-                <a:ea typeface="Calibri" pitchFamily="34" charset="-122"/>
-                <a:cs typeface="Calibri" pitchFamily="34" charset="-120"/>
-              </a:rPr>
-              <a:t>/k/</a:t>
-            </a:r>
-            <a:endParaRPr lang="en-US" sz="750" dirty="0"/>
-          </a:p>
-        </p:txBody>
-      </p:sp>
-      <p:sp>
-        <p:nvSpPr>
-          <p:cNvPr id="48" name="Shape 46"/>
-          <p:cNvSpPr/>
-          <p:nvPr/>
-        </p:nvSpPr>
-        <p:spPr>
-          <a:xfrm>
-            <a:off x="6062472" y="4169664"/>
-            <a:ext cx="685800" cy="384048"/>
-          </a:xfrm>
-          <a:prstGeom prst="rect">
-            <a:avLst>
-              <a:gd name="adj" fmla="val 9524"/>
-            </a:avLst>
-          </a:prstGeom>
-          <a:solidFill>
-            <a:srgbClr val="FFFFFF"/>
-          </a:solidFill>
-          <a:ln w="12700">
-            <a:solidFill>
-              <a:srgbClr val="DB2777"/>
-            </a:solidFill>
-            <a:prstDash val="solid"/>
-          </a:ln>
-        </p:spPr>
-      </p:sp>
-      <p:sp>
-        <p:nvSpPr>
-          <p:cNvPr id="49" name="Text 47"/>
-          <p:cNvSpPr/>
-          <p:nvPr/>
-        </p:nvSpPr>
-        <p:spPr>
-          <a:xfrm>
-            <a:off x="6062472" y="4169664"/>
-            <a:ext cx="685800" cy="384048"/>
-          </a:xfrm>
-          <a:prstGeom prst="rect">
-            <a:avLst/>
-          </a:prstGeom>
-          <a:noFill/>
-          <a:ln/>
-        </p:spPr>
-        <p:txBody>
-          <a:bodyPr wrap="square" lIns="0" tIns="0" rIns="0" bIns="0" rtlCol="0" anchor="ctr"/>
-          <a:lstStyle/>
-          <a:p>
-            <a:pPr algn="ctr" indent="0" marL="0">
-              <a:buNone/>
-            </a:pPr>
-            <a:r>
-              <a:rPr lang="en-US" sz="900" b="1" dirty="0">
-                <a:solidFill>
-                  <a:srgbClr val="9D174D"/>
-                </a:solidFill>
-                <a:latin typeface="Trebuchet MS" pitchFamily="34" charset="0"/>
-                <a:ea typeface="Trebuchet MS" pitchFamily="34" charset="-122"/>
-                <a:cs typeface="Trebuchet MS" pitchFamily="34" charset="-120"/>
-              </a:rPr>
               <a:t>t</a:t>
-            </a:r>
-            <a:endParaRPr lang="en-US" sz="900" dirty="0"/>
-          </a:p>
-        </p:txBody>
-      </p:sp>
-      <p:sp>
-        <p:nvSpPr>
-          <p:cNvPr id="50" name="Shape 48"/>
-          <p:cNvSpPr/>
-          <p:nvPr/>
-        </p:nvSpPr>
-        <p:spPr>
-          <a:xfrm>
-            <a:off x="6870192" y="4169664"/>
-            <a:ext cx="685800" cy="384048"/>
-          </a:xfrm>
-          <a:prstGeom prst="rect">
-            <a:avLst>
-              <a:gd name="adj" fmla="val 9524"/>
-            </a:avLst>
-          </a:prstGeom>
-          <a:solidFill>
-            <a:srgbClr val="FFFFFF"/>
-          </a:solidFill>
-          <a:ln w="12700">
-            <a:solidFill>
-              <a:srgbClr val="DB2777"/>
-            </a:solidFill>
-            <a:prstDash val="solid"/>
-          </a:ln>
-        </p:spPr>
-      </p:sp>
-      <p:sp>
-        <p:nvSpPr>
-          <p:cNvPr id="51" name="Text 49"/>
-          <p:cNvSpPr/>
-          <p:nvPr/>
-        </p:nvSpPr>
-        <p:spPr>
-          <a:xfrm>
-            <a:off x="6870192" y="4169664"/>
-            <a:ext cx="685800" cy="384048"/>
-          </a:xfrm>
-          <a:prstGeom prst="rect">
-            <a:avLst/>
-          </a:prstGeom>
-          <a:noFill/>
-          <a:ln/>
-        </p:spPr>
-        <p:txBody>
-          <a:bodyPr wrap="square" lIns="0" tIns="0" rIns="0" bIns="0" rtlCol="0" anchor="ctr"/>
-          <a:lstStyle/>
-          <a:p>
-            <a:pPr algn="ctr" indent="0" marL="0">
-              <a:buNone/>
-            </a:pPr>
-            <a:r>
-              <a:rPr lang="en-US" sz="900" b="1" dirty="0">
-                <a:solidFill>
-                  <a:srgbClr val="9D174D"/>
-                </a:solidFill>
-                <a:latin typeface="Trebuchet MS" pitchFamily="34" charset="0"/>
-                <a:ea typeface="Trebuchet MS" pitchFamily="34" charset="-122"/>
-                <a:cs typeface="Trebuchet MS" pitchFamily="34" charset="-120"/>
-              </a:rPr>
-              <a:t>io</a:t>
-            </a:r>
-            <a:endParaRPr lang="en-US" sz="900" dirty="0"/>
-          </a:p>
-        </p:txBody>
-      </p:sp>
-      <p:sp>
-        <p:nvSpPr>
-          <p:cNvPr id="52" name="Text 50"/>
-          <p:cNvSpPr/>
-          <p:nvPr/>
-        </p:nvSpPr>
-        <p:spPr>
-          <a:xfrm>
-            <a:off x="6870192" y="4572000"/>
-            <a:ext cx="685800" cy="219456"/>
-          </a:xfrm>
-          <a:prstGeom prst="rect">
-            <a:avLst/>
-          </a:prstGeom>
-          <a:noFill/>
-          <a:ln/>
-        </p:spPr>
-        <p:txBody>
-          <a:bodyPr wrap="square" lIns="0" tIns="0" rIns="0" bIns="0" rtlCol="0" anchor="t"/>
-          <a:lstStyle/>
-          <a:p>
-            <a:pPr algn="ctr" indent="0" marL="0">
-              <a:buNone/>
-            </a:pPr>
-            <a:r>
-              <a:rPr lang="en-US" sz="750" i="1" dirty="0">
-                <a:solidFill>
-                  <a:srgbClr val="94A3B8"/>
-                </a:solidFill>
-                <a:latin typeface="Calibri" pitchFamily="34" charset="0"/>
-                <a:ea typeface="Calibri" pitchFamily="34" charset="-122"/>
-                <a:cs typeface="Calibri" pitchFamily="34" charset="-120"/>
-              </a:rPr>
-              <a:t>/sh/</a:t>
-            </a:r>
-            <a:endParaRPr lang="en-US" sz="750" dirty="0"/>
-          </a:p>
-        </p:txBody>
-      </p:sp>
-      <p:sp>
-        <p:nvSpPr>
-          <p:cNvPr id="53" name="Shape 51"/>
-          <p:cNvSpPr/>
-          <p:nvPr/>
-        </p:nvSpPr>
-        <p:spPr>
-          <a:xfrm>
-            <a:off x="7677912" y="4169664"/>
-            <a:ext cx="685800" cy="384048"/>
-          </a:xfrm>
-          <a:prstGeom prst="rect">
-            <a:avLst>
-              <a:gd name="adj" fmla="val 9524"/>
-            </a:avLst>
-          </a:prstGeom>
-          <a:solidFill>
-            <a:srgbClr val="FFFFFF"/>
-          </a:solidFill>
-          <a:ln w="12700">
-            <a:solidFill>
-              <a:srgbClr val="DB2777"/>
-            </a:solidFill>
-            <a:prstDash val="solid"/>
-          </a:ln>
-        </p:spPr>
-      </p:sp>
-      <p:sp>
-        <p:nvSpPr>
-          <p:cNvPr id="54" name="Text 52"/>
-          <p:cNvSpPr/>
-          <p:nvPr/>
-        </p:nvSpPr>
-        <p:spPr>
-          <a:xfrm>
-            <a:off x="7677912" y="4169664"/>
-            <a:ext cx="685800" cy="384048"/>
-          </a:xfrm>
-          <a:prstGeom prst="rect">
-            <a:avLst/>
-          </a:prstGeom>
-          <a:noFill/>
-          <a:ln/>
-        </p:spPr>
-        <p:txBody>
-          <a:bodyPr wrap="square" lIns="0" tIns="0" rIns="0" bIns="0" rtlCol="0" anchor="ctr"/>
-          <a:lstStyle/>
-          <a:p>
-            <a:pPr algn="ctr" indent="0" marL="0">
-              <a:buNone/>
-            </a:pPr>
-            <a:r>
-              <a:rPr lang="en-US" sz="900" b="1" dirty="0">
-                <a:solidFill>
-                  <a:srgbClr val="9D174D"/>
-                </a:solidFill>
-                <a:latin typeface="Trebuchet MS" pitchFamily="34" charset="0"/>
-                <a:ea typeface="Trebuchet MS" pitchFamily="34" charset="-122"/>
-                <a:cs typeface="Trebuchet MS" pitchFamily="34" charset="-120"/>
-              </a:rPr>
-              <a:t>n</a:t>
             </a:r>
             <a:endParaRPr lang="en-US" sz="900" dirty="0"/>
           </a:p>
@@ -12722,7 +12005,7 @@
                 <a:ea typeface="Calibri" pitchFamily="34" charset="-122"/>
                 <a:cs typeface="Calibri" pitchFamily="34" charset="-120"/>
               </a:rPr>
-              <a:t>right, accurate</a:t>
+              <a:t>right, free from error</a:t>
             </a:r>
             <a:endParaRPr lang="en-US" sz="850" dirty="0"/>
           </a:p>
@@ -13707,7 +12990,7 @@
                 <a:ea typeface="Calibri" pitchFamily="34" charset="-122"/>
                 <a:cs typeface="Calibri" pitchFamily="34" charset="-120"/>
               </a:rPr>
-              <a:t>right, accurate</a:t>
+              <a:t>right, free from error</a:t>
             </a:r>
             <a:endParaRPr lang="en-US" sz="850" dirty="0"/>
           </a:p>
@@ -15194,7 +14477,7 @@
                 <a:ea typeface="Calibri" pitchFamily="34" charset="-122"/>
                 <a:cs typeface="Calibri" pitchFamily="34" charset="-120"/>
               </a:rPr>
-              <a:t>right, accurate</a:t>
+              <a:t>right, free from error</a:t>
             </a:r>
             <a:endParaRPr lang="en-US" sz="850" dirty="0"/>
           </a:p>
@@ -17282,7 +16565,7 @@
                 <a:ea typeface="Trebuchet MS" pitchFamily="34" charset="-122"/>
                 <a:cs typeface="Trebuchet MS" pitchFamily="34" charset="-120"/>
               </a:rPr>
-              <a:t>3</a:t>
+              <a:t>2</a:t>
             </a:r>
             <a:pPr algn="ctr" indent="0" marL="0">
               <a:buNone/>
@@ -17700,7 +16983,7 @@
                 <a:ea typeface="Calibri" pitchFamily="34" charset="-122"/>
                 <a:cs typeface="Calibri" pitchFamily="34" charset="-120"/>
               </a:rPr>
-              <a:t>The teacher said that </a:t>
+              <a:t>After making a </a:t>
             </a:r>
             <a:pPr algn="l" indent="0" marL="0">
               <a:buNone/>
@@ -17717,7 +17000,7 @@
                 <a:ea typeface="Calibri" pitchFamily="34" charset="-122"/>
                 <a:cs typeface="Calibri" pitchFamily="34" charset="-120"/>
               </a:rPr>
-              <a:t>incorrect</a:t>
+              <a:t>correction</a:t>
             </a:r>
             <a:pPr algn="l" indent="0" marL="0">
               <a:buNone/>
@@ -17731,7 +17014,7 @@
                 <a:ea typeface="Calibri" pitchFamily="34" charset="-122"/>
                 <a:cs typeface="Calibri" pitchFamily="34" charset="-120"/>
               </a:rPr>
-              <a:t> spelling is easy to fix: write a </a:t>
+              <a:t> to her work, Sophie realised that </a:t>
             </a:r>
             <a:pPr algn="l" indent="0" marL="0">
               <a:buNone/>
@@ -17748,7 +17031,7 @@
                 <a:ea typeface="Calibri" pitchFamily="34" charset="-122"/>
                 <a:cs typeface="Calibri" pitchFamily="34" charset="-120"/>
               </a:rPr>
-              <a:t>correction</a:t>
+              <a:t>incorrectness</a:t>
             </a:r>
             <a:pPr algn="l" indent="0" marL="0">
               <a:buNone/>
@@ -17762,118 +17045,343 @@
                 <a:ea typeface="Calibri" pitchFamily="34" charset="-122"/>
                 <a:cs typeface="Calibri" pitchFamily="34" charset="-120"/>
               </a:rPr>
-              <a:t>, then practise until you can spell it </a:t>
-            </a:r>
+              <a:t> had caused her to lose marks; she vowed to be more careful.</a:t>
+            </a:r>
+            <a:endParaRPr lang="en-US" sz="1800" dirty="0"/>
+          </a:p>
+        </p:txBody>
+      </p:sp>
+      <p:sp>
+        <p:nvSpPr>
+          <p:cNvPr id="13" name="Shape 11"/>
+          <p:cNvSpPr/>
+          <p:nvPr/>
+        </p:nvSpPr>
+        <p:spPr>
+          <a:xfrm>
+            <a:off x="365760" y="2852928"/>
+            <a:ext cx="8412480" cy="475488"/>
+          </a:xfrm>
+          <a:prstGeom prst="rect">
+            <a:avLst>
+              <a:gd name="adj" fmla="val 15385"/>
+            </a:avLst>
+          </a:prstGeom>
+          <a:solidFill>
+            <a:srgbClr val="CCFBF1"/>
+          </a:solidFill>
+          <a:ln w="12700">
+            <a:solidFill>
+              <a:srgbClr val="0D9488"/>
+            </a:solidFill>
+            <a:prstDash val="solid"/>
+          </a:ln>
+        </p:spPr>
+      </p:sp>
+      <p:sp>
+        <p:nvSpPr>
+          <p:cNvPr id="14" name="Text 12"/>
+          <p:cNvSpPr/>
+          <p:nvPr/>
+        </p:nvSpPr>
+        <p:spPr>
+          <a:xfrm>
+            <a:off x="502920" y="2852928"/>
+            <a:ext cx="8229600" cy="475488"/>
+          </a:xfrm>
+          <a:prstGeom prst="rect">
+            <a:avLst/>
+          </a:prstGeom>
+          <a:noFill/>
+          <a:ln/>
+        </p:spPr>
+        <p:txBody>
+          <a:bodyPr wrap="square" rtlCol="0" anchor="ctr"/>
+          <a:lstStyle/>
+          <a:p>
             <a:pPr algn="l" indent="0" marL="0">
               <a:buNone/>
             </a:pPr>
             <a:r>
-              <a:rPr lang="en-US" sz="1800" b="1" dirty="0">
-                <a:solidFill>
-                  <a:srgbClr val="0D9488"/>
-                </a:solidFill>
-                <a:highlight>
-                  <a:srgbClr val="CCFBF1"/>
-                </a:highlight>
+              <a:rPr lang="en-US" sz="1200" b="1" dirty="0">
+                <a:solidFill>
+                  <a:srgbClr val="0F766E"/>
+                </a:solidFill>
                 <a:latin typeface="Calibri" pitchFamily="34" charset="0"/>
                 <a:ea typeface="Calibri" pitchFamily="34" charset="-122"/>
                 <a:cs typeface="Calibri" pitchFamily="34" charset="-120"/>
               </a:rPr>
-              <a:t>correctly</a:t>
-            </a:r>
-            <a:pPr algn="l" indent="0" marL="0">
-              <a:buNone/>
-            </a:pPr>
-            <a:r>
-              <a:rPr lang="en-US" sz="1800" dirty="0">
-                <a:solidFill>
-                  <a:srgbClr val="0F172A"/>
+              <a:t>Now rewrite each focus word below with space between letters — leave room for your breakdown.</a:t>
+            </a:r>
+            <a:endParaRPr lang="en-US" sz="1200" dirty="0"/>
+          </a:p>
+        </p:txBody>
+      </p:sp>
+      <p:sp>
+        <p:nvSpPr>
+          <p:cNvPr id="15" name="Shape 13"/>
+          <p:cNvSpPr/>
+          <p:nvPr/>
+        </p:nvSpPr>
+        <p:spPr>
+          <a:xfrm>
+            <a:off x="411480" y="3456432"/>
+            <a:ext cx="2499360" cy="1005840"/>
+          </a:xfrm>
+          <a:prstGeom prst="rect">
+            <a:avLst>
+              <a:gd name="adj" fmla="val 7273"/>
+            </a:avLst>
+          </a:prstGeom>
+          <a:solidFill>
+            <a:srgbClr val="F8FAFC"/>
+          </a:solidFill>
+          <a:ln w="12700">
+            <a:solidFill>
+              <a:srgbClr val="E2E8F0"/>
+            </a:solidFill>
+            <a:prstDash val="solid"/>
+          </a:ln>
+        </p:spPr>
+      </p:sp>
+      <p:sp>
+        <p:nvSpPr>
+          <p:cNvPr id="16" name="Shape 14"/>
+          <p:cNvSpPr/>
+          <p:nvPr/>
+        </p:nvSpPr>
+        <p:spPr>
+          <a:xfrm>
+            <a:off x="411480" y="3977640"/>
+            <a:ext cx="2499360" cy="0"/>
+          </a:xfrm>
+          <a:prstGeom prst="line">
+            <a:avLst/>
+          </a:prstGeom>
+          <a:noFill/>
+          <a:ln w="12700">
+            <a:solidFill>
+              <a:srgbClr val="E2E8F0"/>
+            </a:solidFill>
+            <a:prstDash val="dash"/>
+          </a:ln>
+        </p:spPr>
+      </p:sp>
+      <p:sp>
+        <p:nvSpPr>
+          <p:cNvPr id="17" name="Text 15"/>
+          <p:cNvSpPr/>
+          <p:nvPr/>
+        </p:nvSpPr>
+        <p:spPr>
+          <a:xfrm>
+            <a:off x="411480" y="3456432"/>
+            <a:ext cx="2499360" cy="502920"/>
+          </a:xfrm>
+          <a:prstGeom prst="rect">
+            <a:avLst/>
+          </a:prstGeom>
+          <a:noFill/>
+          <a:ln/>
+        </p:spPr>
+        <p:txBody>
+          <a:bodyPr wrap="square" lIns="0" tIns="0" rIns="0" bIns="0" rtlCol="0" anchor="ctr"/>
+          <a:lstStyle/>
+          <a:p>
+            <a:pPr algn="ctr" indent="0" marL="0">
+              <a:buNone/>
+            </a:pPr>
+            <a:r>
+              <a:rPr lang="en-US" sz="1400" b="1" dirty="0">
+                <a:solidFill>
+                  <a:srgbClr val="0D9488"/>
+                </a:solidFill>
+                <a:latin typeface="Trebuchet MS" pitchFamily="34" charset="0"/>
+                <a:ea typeface="Trebuchet MS" pitchFamily="34" charset="-122"/>
+                <a:cs typeface="Trebuchet MS" pitchFamily="34" charset="-120"/>
+              </a:rPr>
+              <a:t>correction</a:t>
+            </a:r>
+            <a:endParaRPr lang="en-US" sz="1400" dirty="0"/>
+          </a:p>
+        </p:txBody>
+      </p:sp>
+      <p:sp>
+        <p:nvSpPr>
+          <p:cNvPr id="18" name="Text 16"/>
+          <p:cNvSpPr/>
+          <p:nvPr/>
+        </p:nvSpPr>
+        <p:spPr>
+          <a:xfrm>
+            <a:off x="411480" y="4005072"/>
+            <a:ext cx="2499360" cy="457200"/>
+          </a:xfrm>
+          <a:prstGeom prst="rect">
+            <a:avLst/>
+          </a:prstGeom>
+          <a:noFill/>
+          <a:ln/>
+        </p:spPr>
+        <p:txBody>
+          <a:bodyPr wrap="square" lIns="0" tIns="0" rIns="0" bIns="0" rtlCol="0" anchor="ctr"/>
+          <a:lstStyle/>
+          <a:p>
+            <a:pPr algn="ctr" indent="0" marL="0">
+              <a:buNone/>
+            </a:pPr>
+            <a:r>
+              <a:rPr lang="en-US" sz="900" i="1" dirty="0">
+                <a:solidFill>
+                  <a:srgbClr val="475569"/>
                 </a:solidFill>
                 <a:latin typeface="Calibri" pitchFamily="34" charset="0"/>
                 <a:ea typeface="Calibri" pitchFamily="34" charset="-122"/>
                 <a:cs typeface="Calibri" pitchFamily="34" charset="-120"/>
               </a:rPr>
-              <a:t>!</a:t>
-            </a:r>
-            <a:endParaRPr lang="en-US" sz="1800" dirty="0"/>
-          </a:p>
-        </p:txBody>
-      </p:sp>
-      <p:sp>
-        <p:nvSpPr>
-          <p:cNvPr id="13" name="Shape 11"/>
-          <p:cNvSpPr/>
-          <p:nvPr/>
-        </p:nvSpPr>
-        <p:spPr>
-          <a:xfrm>
-            <a:off x="365760" y="2852928"/>
-            <a:ext cx="8412480" cy="475488"/>
+              <a:t>write your breakdown below</a:t>
+            </a:r>
+            <a:endParaRPr lang="en-US" sz="900" dirty="0"/>
+          </a:p>
+        </p:txBody>
+      </p:sp>
+      <p:sp>
+        <p:nvSpPr>
+          <p:cNvPr id="19" name="Shape 17"/>
+          <p:cNvSpPr/>
+          <p:nvPr/>
+        </p:nvSpPr>
+        <p:spPr>
+          <a:xfrm>
+            <a:off x="3185160" y="3456432"/>
+            <a:ext cx="2499360" cy="1005840"/>
           </a:xfrm>
           <a:prstGeom prst="rect">
             <a:avLst>
-              <a:gd name="adj" fmla="val 15385"/>
+              <a:gd name="adj" fmla="val 7273"/>
             </a:avLst>
           </a:prstGeom>
           <a:solidFill>
-            <a:srgbClr val="CCFBF1"/>
-          </a:solidFill>
-          <a:ln w="12700">
-            <a:solidFill>
-              <a:srgbClr val="0D9488"/>
-            </a:solidFill>
-            <a:prstDash val="solid"/>
-          </a:ln>
-        </p:spPr>
-      </p:sp>
-      <p:sp>
-        <p:nvSpPr>
-          <p:cNvPr id="14" name="Text 12"/>
-          <p:cNvSpPr/>
-          <p:nvPr/>
-        </p:nvSpPr>
-        <p:spPr>
-          <a:xfrm>
-            <a:off x="502920" y="2852928"/>
-            <a:ext cx="8229600" cy="475488"/>
-          </a:xfrm>
-          <a:prstGeom prst="rect">
-            <a:avLst/>
-          </a:prstGeom>
-          <a:noFill/>
-          <a:ln/>
-        </p:spPr>
-        <p:txBody>
-          <a:bodyPr wrap="square" rtlCol="0" anchor="ctr"/>
-          <a:lstStyle/>
-          <a:p>
-            <a:pPr algn="l" indent="0" marL="0">
-              <a:buNone/>
-            </a:pPr>
-            <a:r>
-              <a:rPr lang="en-US" sz="1200" b="1" dirty="0">
-                <a:solidFill>
-                  <a:srgbClr val="0F766E"/>
+            <a:srgbClr val="F8FAFC"/>
+          </a:solidFill>
+          <a:ln w="12700">
+            <a:solidFill>
+              <a:srgbClr val="E2E8F0"/>
+            </a:solidFill>
+            <a:prstDash val="solid"/>
+          </a:ln>
+        </p:spPr>
+      </p:sp>
+      <p:sp>
+        <p:nvSpPr>
+          <p:cNvPr id="20" name="Shape 18"/>
+          <p:cNvSpPr/>
+          <p:nvPr/>
+        </p:nvSpPr>
+        <p:spPr>
+          <a:xfrm>
+            <a:off x="3185160" y="3977640"/>
+            <a:ext cx="2499360" cy="0"/>
+          </a:xfrm>
+          <a:prstGeom prst="line">
+            <a:avLst/>
+          </a:prstGeom>
+          <a:noFill/>
+          <a:ln w="12700">
+            <a:solidFill>
+              <a:srgbClr val="E2E8F0"/>
+            </a:solidFill>
+            <a:prstDash val="dash"/>
+          </a:ln>
+        </p:spPr>
+      </p:sp>
+      <p:sp>
+        <p:nvSpPr>
+          <p:cNvPr id="21" name="Text 19"/>
+          <p:cNvSpPr/>
+          <p:nvPr/>
+        </p:nvSpPr>
+        <p:spPr>
+          <a:xfrm>
+            <a:off x="3185160" y="3456432"/>
+            <a:ext cx="2499360" cy="502920"/>
+          </a:xfrm>
+          <a:prstGeom prst="rect">
+            <a:avLst/>
+          </a:prstGeom>
+          <a:noFill/>
+          <a:ln/>
+        </p:spPr>
+        <p:txBody>
+          <a:bodyPr wrap="square" lIns="0" tIns="0" rIns="0" bIns="0" rtlCol="0" anchor="ctr"/>
+          <a:lstStyle/>
+          <a:p>
+            <a:pPr algn="ctr" indent="0" marL="0">
+              <a:buNone/>
+            </a:pPr>
+            <a:r>
+              <a:rPr lang="en-US" sz="1400" b="1" dirty="0">
+                <a:solidFill>
+                  <a:srgbClr val="0D9488"/>
+                </a:solidFill>
+                <a:latin typeface="Trebuchet MS" pitchFamily="34" charset="0"/>
+                <a:ea typeface="Trebuchet MS" pitchFamily="34" charset="-122"/>
+                <a:cs typeface="Trebuchet MS" pitchFamily="34" charset="-120"/>
+              </a:rPr>
+              <a:t>incorrectness</a:t>
+            </a:r>
+            <a:endParaRPr lang="en-US" sz="1400" dirty="0"/>
+          </a:p>
+        </p:txBody>
+      </p:sp>
+      <p:sp>
+        <p:nvSpPr>
+          <p:cNvPr id="22" name="Text 20"/>
+          <p:cNvSpPr/>
+          <p:nvPr/>
+        </p:nvSpPr>
+        <p:spPr>
+          <a:xfrm>
+            <a:off x="3185160" y="4005072"/>
+            <a:ext cx="2499360" cy="457200"/>
+          </a:xfrm>
+          <a:prstGeom prst="rect">
+            <a:avLst/>
+          </a:prstGeom>
+          <a:noFill/>
+          <a:ln/>
+        </p:spPr>
+        <p:txBody>
+          <a:bodyPr wrap="square" lIns="0" tIns="0" rIns="0" bIns="0" rtlCol="0" anchor="ctr"/>
+          <a:lstStyle/>
+          <a:p>
+            <a:pPr algn="ctr" indent="0" marL="0">
+              <a:buNone/>
+            </a:pPr>
+            <a:r>
+              <a:rPr lang="en-US" sz="900" i="1" dirty="0">
+                <a:solidFill>
+                  <a:srgbClr val="475569"/>
                 </a:solidFill>
                 <a:latin typeface="Calibri" pitchFamily="34" charset="0"/>
                 <a:ea typeface="Calibri" pitchFamily="34" charset="-122"/>
                 <a:cs typeface="Calibri" pitchFamily="34" charset="-120"/>
               </a:rPr>
-              <a:t>Now rewrite each focus word below with space between letters — leave room for your breakdown.</a:t>
-            </a:r>
-            <a:endParaRPr lang="en-US" sz="1200" dirty="0"/>
-          </a:p>
-        </p:txBody>
-      </p:sp>
-      <p:sp>
-        <p:nvSpPr>
-          <p:cNvPr id="15" name="Shape 13"/>
-          <p:cNvSpPr/>
-          <p:nvPr/>
-        </p:nvSpPr>
-        <p:spPr>
-          <a:xfrm>
-            <a:off x="411480" y="3456432"/>
+              <a:t>write your breakdown below</a:t>
+            </a:r>
+            <a:endParaRPr lang="en-US" sz="900" dirty="0"/>
+          </a:p>
+        </p:txBody>
+      </p:sp>
+      <p:sp>
+        <p:nvSpPr>
+          <p:cNvPr id="23" name="Shape 21"/>
+          <p:cNvSpPr/>
+          <p:nvPr/>
+        </p:nvSpPr>
+        <p:spPr>
+          <a:xfrm>
+            <a:off x="5958840" y="3456432"/>
             <a:ext cx="2499360" cy="1005840"/>
           </a:xfrm>
           <a:prstGeom prst="rect">
@@ -17894,13 +17402,13 @@
       </p:sp>
       <p:sp>
         <p:nvSpPr>
-          <p:cNvPr id="16" name="Shape 14"/>
-          <p:cNvSpPr/>
-          <p:nvPr/>
-        </p:nvSpPr>
-        <p:spPr>
-          <a:xfrm>
-            <a:off x="411480" y="3977640"/>
+          <p:cNvPr id="24" name="Shape 22"/>
+          <p:cNvSpPr/>
+          <p:nvPr/>
+        </p:nvSpPr>
+        <p:spPr>
+          <a:xfrm>
+            <a:off x="5958840" y="3977640"/>
             <a:ext cx="2499360" cy="0"/>
           </a:xfrm>
           <a:prstGeom prst="line">
@@ -17917,13 +17425,13 @@
       </p:sp>
       <p:sp>
         <p:nvSpPr>
-          <p:cNvPr id="17" name="Text 15"/>
-          <p:cNvSpPr/>
-          <p:nvPr/>
-        </p:nvSpPr>
-        <p:spPr>
-          <a:xfrm>
-            <a:off x="411480" y="3456432"/>
+          <p:cNvPr id="25" name="Text 23"/>
+          <p:cNvSpPr/>
+          <p:nvPr/>
+        </p:nvSpPr>
+        <p:spPr>
+          <a:xfrm>
+            <a:off x="5958840" y="3456432"/>
             <a:ext cx="2499360" cy="502920"/>
           </a:xfrm>
           <a:prstGeom prst="rect">
@@ -17948,263 +17456,7 @@
                 <a:ea typeface="Trebuchet MS" pitchFamily="34" charset="-122"/>
                 <a:cs typeface="Trebuchet MS" pitchFamily="34" charset="-120"/>
               </a:rPr>
-              <a:t>incorrect</a:t>
-            </a:r>
-            <a:endParaRPr lang="en-US" sz="1400" dirty="0"/>
-          </a:p>
-        </p:txBody>
-      </p:sp>
-      <p:sp>
-        <p:nvSpPr>
-          <p:cNvPr id="18" name="Text 16"/>
-          <p:cNvSpPr/>
-          <p:nvPr/>
-        </p:nvSpPr>
-        <p:spPr>
-          <a:xfrm>
-            <a:off x="411480" y="4005072"/>
-            <a:ext cx="2499360" cy="457200"/>
-          </a:xfrm>
-          <a:prstGeom prst="rect">
-            <a:avLst/>
-          </a:prstGeom>
-          <a:noFill/>
-          <a:ln/>
-        </p:spPr>
-        <p:txBody>
-          <a:bodyPr wrap="square" lIns="0" tIns="0" rIns="0" bIns="0" rtlCol="0" anchor="ctr"/>
-          <a:lstStyle/>
-          <a:p>
-            <a:pPr algn="ctr" indent="0" marL="0">
-              <a:buNone/>
-            </a:pPr>
-            <a:r>
-              <a:rPr lang="en-US" sz="900" i="1" dirty="0">
-                <a:solidFill>
-                  <a:srgbClr val="475569"/>
-                </a:solidFill>
-                <a:latin typeface="Calibri" pitchFamily="34" charset="0"/>
-                <a:ea typeface="Calibri" pitchFamily="34" charset="-122"/>
-                <a:cs typeface="Calibri" pitchFamily="34" charset="-120"/>
-              </a:rPr>
-              <a:t>write your breakdown below</a:t>
-            </a:r>
-            <a:endParaRPr lang="en-US" sz="900" dirty="0"/>
-          </a:p>
-        </p:txBody>
-      </p:sp>
-      <p:sp>
-        <p:nvSpPr>
-          <p:cNvPr id="19" name="Shape 17"/>
-          <p:cNvSpPr/>
-          <p:nvPr/>
-        </p:nvSpPr>
-        <p:spPr>
-          <a:xfrm>
-            <a:off x="3185160" y="3456432"/>
-            <a:ext cx="2499360" cy="1005840"/>
-          </a:xfrm>
-          <a:prstGeom prst="rect">
-            <a:avLst>
-              <a:gd name="adj" fmla="val 7273"/>
-            </a:avLst>
-          </a:prstGeom>
-          <a:solidFill>
-            <a:srgbClr val="F8FAFC"/>
-          </a:solidFill>
-          <a:ln w="12700">
-            <a:solidFill>
-              <a:srgbClr val="E2E8F0"/>
-            </a:solidFill>
-            <a:prstDash val="solid"/>
-          </a:ln>
-        </p:spPr>
-      </p:sp>
-      <p:sp>
-        <p:nvSpPr>
-          <p:cNvPr id="20" name="Shape 18"/>
-          <p:cNvSpPr/>
-          <p:nvPr/>
-        </p:nvSpPr>
-        <p:spPr>
-          <a:xfrm>
-            <a:off x="3185160" y="3977640"/>
-            <a:ext cx="2499360" cy="0"/>
-          </a:xfrm>
-          <a:prstGeom prst="line">
-            <a:avLst/>
-          </a:prstGeom>
-          <a:noFill/>
-          <a:ln w="12700">
-            <a:solidFill>
-              <a:srgbClr val="E2E8F0"/>
-            </a:solidFill>
-            <a:prstDash val="dash"/>
-          </a:ln>
-        </p:spPr>
-      </p:sp>
-      <p:sp>
-        <p:nvSpPr>
-          <p:cNvPr id="21" name="Text 19"/>
-          <p:cNvSpPr/>
-          <p:nvPr/>
-        </p:nvSpPr>
-        <p:spPr>
-          <a:xfrm>
-            <a:off x="3185160" y="3456432"/>
-            <a:ext cx="2499360" cy="502920"/>
-          </a:xfrm>
-          <a:prstGeom prst="rect">
-            <a:avLst/>
-          </a:prstGeom>
-          <a:noFill/>
-          <a:ln/>
-        </p:spPr>
-        <p:txBody>
-          <a:bodyPr wrap="square" lIns="0" tIns="0" rIns="0" bIns="0" rtlCol="0" anchor="ctr"/>
-          <a:lstStyle/>
-          <a:p>
-            <a:pPr algn="ctr" indent="0" marL="0">
-              <a:buNone/>
-            </a:pPr>
-            <a:r>
-              <a:rPr lang="en-US" sz="1400" b="1" dirty="0">
-                <a:solidFill>
-                  <a:srgbClr val="0D9488"/>
-                </a:solidFill>
-                <a:latin typeface="Trebuchet MS" pitchFamily="34" charset="0"/>
-                <a:ea typeface="Trebuchet MS" pitchFamily="34" charset="-122"/>
-                <a:cs typeface="Trebuchet MS" pitchFamily="34" charset="-120"/>
-              </a:rPr>
-              <a:t>correction</a:t>
-            </a:r>
-            <a:endParaRPr lang="en-US" sz="1400" dirty="0"/>
-          </a:p>
-        </p:txBody>
-      </p:sp>
-      <p:sp>
-        <p:nvSpPr>
-          <p:cNvPr id="22" name="Text 20"/>
-          <p:cNvSpPr/>
-          <p:nvPr/>
-        </p:nvSpPr>
-        <p:spPr>
-          <a:xfrm>
-            <a:off x="3185160" y="4005072"/>
-            <a:ext cx="2499360" cy="457200"/>
-          </a:xfrm>
-          <a:prstGeom prst="rect">
-            <a:avLst/>
-          </a:prstGeom>
-          <a:noFill/>
-          <a:ln/>
-        </p:spPr>
-        <p:txBody>
-          <a:bodyPr wrap="square" lIns="0" tIns="0" rIns="0" bIns="0" rtlCol="0" anchor="ctr"/>
-          <a:lstStyle/>
-          <a:p>
-            <a:pPr algn="ctr" indent="0" marL="0">
-              <a:buNone/>
-            </a:pPr>
-            <a:r>
-              <a:rPr lang="en-US" sz="900" i="1" dirty="0">
-                <a:solidFill>
-                  <a:srgbClr val="475569"/>
-                </a:solidFill>
-                <a:latin typeface="Calibri" pitchFamily="34" charset="0"/>
-                <a:ea typeface="Calibri" pitchFamily="34" charset="-122"/>
-                <a:cs typeface="Calibri" pitchFamily="34" charset="-120"/>
-              </a:rPr>
-              <a:t>write your breakdown below</a:t>
-            </a:r>
-            <a:endParaRPr lang="en-US" sz="900" dirty="0"/>
-          </a:p>
-        </p:txBody>
-      </p:sp>
-      <p:sp>
-        <p:nvSpPr>
-          <p:cNvPr id="23" name="Shape 21"/>
-          <p:cNvSpPr/>
-          <p:nvPr/>
-        </p:nvSpPr>
-        <p:spPr>
-          <a:xfrm>
-            <a:off x="5958840" y="3456432"/>
-            <a:ext cx="2499360" cy="1005840"/>
-          </a:xfrm>
-          <a:prstGeom prst="rect">
-            <a:avLst>
-              <a:gd name="adj" fmla="val 7273"/>
-            </a:avLst>
-          </a:prstGeom>
-          <a:solidFill>
-            <a:srgbClr val="F8FAFC"/>
-          </a:solidFill>
-          <a:ln w="12700">
-            <a:solidFill>
-              <a:srgbClr val="E2E8F0"/>
-            </a:solidFill>
-            <a:prstDash val="solid"/>
-          </a:ln>
-        </p:spPr>
-      </p:sp>
-      <p:sp>
-        <p:nvSpPr>
-          <p:cNvPr id="24" name="Shape 22"/>
-          <p:cNvSpPr/>
-          <p:nvPr/>
-        </p:nvSpPr>
-        <p:spPr>
-          <a:xfrm>
-            <a:off x="5958840" y="3977640"/>
-            <a:ext cx="2499360" cy="0"/>
-          </a:xfrm>
-          <a:prstGeom prst="line">
-            <a:avLst/>
-          </a:prstGeom>
-          <a:noFill/>
-          <a:ln w="12700">
-            <a:solidFill>
-              <a:srgbClr val="E2E8F0"/>
-            </a:solidFill>
-            <a:prstDash val="dash"/>
-          </a:ln>
-        </p:spPr>
-      </p:sp>
-      <p:sp>
-        <p:nvSpPr>
-          <p:cNvPr id="25" name="Text 23"/>
-          <p:cNvSpPr/>
-          <p:nvPr/>
-        </p:nvSpPr>
-        <p:spPr>
-          <a:xfrm>
-            <a:off x="5958840" y="3456432"/>
-            <a:ext cx="2499360" cy="502920"/>
-          </a:xfrm>
-          <a:prstGeom prst="rect">
-            <a:avLst/>
-          </a:prstGeom>
-          <a:noFill/>
-          <a:ln/>
-        </p:spPr>
-        <p:txBody>
-          <a:bodyPr wrap="square" lIns="0" tIns="0" rIns="0" bIns="0" rtlCol="0" anchor="ctr"/>
-          <a:lstStyle/>
-          <a:p>
-            <a:pPr algn="ctr" indent="0" marL="0">
-              <a:buNone/>
-            </a:pPr>
-            <a:r>
-              <a:rPr lang="en-US" sz="1400" b="1" dirty="0">
-                <a:solidFill>
-                  <a:srgbClr val="0D9488"/>
-                </a:solidFill>
-                <a:latin typeface="Trebuchet MS" pitchFamily="34" charset="0"/>
-                <a:ea typeface="Trebuchet MS" pitchFamily="34" charset="-122"/>
-                <a:cs typeface="Trebuchet MS" pitchFamily="34" charset="-120"/>
-              </a:rPr>
-              <a:t>correctly</a:t>
+              <a:t>corrector</a:t>
             </a:r>
             <a:endParaRPr lang="en-US" sz="1400" dirty="0"/>
           </a:p>
@@ -18674,7 +17926,7 @@
                 <a:ea typeface="Trebuchet MS" pitchFamily="34" charset="-122"/>
                 <a:cs typeface="Trebuchet MS" pitchFamily="34" charset="-120"/>
               </a:rPr>
-              <a:t>incorrect</a:t>
+              <a:t>correction</a:t>
             </a:r>
             <a:endParaRPr lang="en-US" sz="2800" dirty="0"/>
           </a:p>
@@ -19501,7 +18753,7 @@
                 <a:ea typeface="Trebuchet MS" pitchFamily="34" charset="-122"/>
                 <a:cs typeface="Trebuchet MS" pitchFamily="34" charset="-120"/>
               </a:rPr>
-              <a:t>incorrect</a:t>
+              <a:t>correction</a:t>
             </a:r>
             <a:endParaRPr lang="en-US" sz="2800" dirty="0"/>
           </a:p>
@@ -19590,11 +18842,11 @@
             </a:avLst>
           </a:prstGeom>
           <a:solidFill>
-            <a:srgbClr val="DDD6FE"/>
+            <a:srgbClr val="CCFBF1"/>
           </a:solidFill>
           <a:ln w="19050">
             <a:solidFill>
-              <a:srgbClr val="7C3AED"/>
+              <a:srgbClr val="0D9488"/>
             </a:solidFill>
             <a:prstDash val="solid"/>
           </a:ln>
@@ -19634,13 +18886,13 @@
             <a:r>
               <a:rPr lang="en-US" sz="1300" b="1" dirty="0">
                 <a:solidFill>
-                  <a:srgbClr val="4C1D95"/>
+                  <a:srgbClr val="0F766E"/>
                 </a:solidFill>
                 <a:latin typeface="Trebuchet MS" pitchFamily="34" charset="0"/>
                 <a:ea typeface="Trebuchet MS" pitchFamily="34" charset="-122"/>
                 <a:cs typeface="Trebuchet MS" pitchFamily="34" charset="-120"/>
               </a:rPr>
-              <a:t>in</a:t>
+              <a:t>correct</a:t>
             </a:r>
             <a:endParaRPr lang="en-US" sz="1300" dirty="0"/>
           </a:p>
@@ -19679,7 +18931,7 @@
                 <a:ea typeface="Calibri" pitchFamily="34" charset="-122"/>
                 <a:cs typeface="Calibri" pitchFamily="34" charset="-120"/>
               </a:rPr>
-              <a:t>not</a:t>
+              <a:t>right, free from error</a:t>
             </a:r>
             <a:endParaRPr lang="en-US" sz="850" dirty="0"/>
           </a:p>
@@ -19702,11 +18954,11 @@
             </a:avLst>
           </a:prstGeom>
           <a:solidFill>
-            <a:srgbClr val="CCFBF1"/>
+            <a:srgbClr val="FCE7F3"/>
           </a:solidFill>
           <a:ln w="19050">
             <a:solidFill>
-              <a:srgbClr val="0D9488"/>
+              <a:srgbClr val="DB2777"/>
             </a:solidFill>
             <a:prstDash val="solid"/>
           </a:ln>
@@ -19746,13 +18998,13 @@
             <a:r>
               <a:rPr lang="en-US" sz="1300" b="1" dirty="0">
                 <a:solidFill>
-                  <a:srgbClr val="0F766E"/>
+                  <a:srgbClr val="9D174D"/>
                 </a:solidFill>
                 <a:latin typeface="Trebuchet MS" pitchFamily="34" charset="0"/>
                 <a:ea typeface="Trebuchet MS" pitchFamily="34" charset="-122"/>
                 <a:cs typeface="Trebuchet MS" pitchFamily="34" charset="-120"/>
               </a:rPr>
-              <a:t>correct</a:t>
+              <a:t>ion</a:t>
             </a:r>
             <a:endParaRPr lang="en-US" sz="1300" dirty="0"/>
           </a:p>
@@ -19791,7 +19043,7 @@
                 <a:ea typeface="Calibri" pitchFamily="34" charset="-122"/>
                 <a:cs typeface="Calibri" pitchFamily="34" charset="-120"/>
               </a:rPr>
-              <a:t>right, accurate</a:t>
+              <a:t>act or result of</a:t>
             </a:r>
             <a:endParaRPr lang="en-US" sz="850" dirty="0"/>
           </a:p>
@@ -20486,7 +19738,7 @@
                 <a:ea typeface="Trebuchet MS" pitchFamily="34" charset="-122"/>
                 <a:cs typeface="Trebuchet MS" pitchFamily="34" charset="-120"/>
               </a:rPr>
-              <a:t>incorrect</a:t>
+              <a:t>correction</a:t>
             </a:r>
             <a:endParaRPr lang="en-US" sz="2800" dirty="0"/>
           </a:p>
@@ -20575,11 +19827,11 @@
             </a:avLst>
           </a:prstGeom>
           <a:solidFill>
-            <a:srgbClr val="DDD6FE"/>
+            <a:srgbClr val="CCFBF1"/>
           </a:solidFill>
           <a:ln w="19050">
             <a:solidFill>
-              <a:srgbClr val="7C3AED"/>
+              <a:srgbClr val="0D9488"/>
             </a:solidFill>
             <a:prstDash val="solid"/>
           </a:ln>
@@ -20619,13 +19871,13 @@
             <a:r>
               <a:rPr lang="en-US" sz="1300" b="1" dirty="0">
                 <a:solidFill>
-                  <a:srgbClr val="4C1D95"/>
+                  <a:srgbClr val="0F766E"/>
                 </a:solidFill>
                 <a:latin typeface="Trebuchet MS" pitchFamily="34" charset="0"/>
                 <a:ea typeface="Trebuchet MS" pitchFamily="34" charset="-122"/>
                 <a:cs typeface="Trebuchet MS" pitchFamily="34" charset="-120"/>
               </a:rPr>
-              <a:t>in</a:t>
+              <a:t>correct</a:t>
             </a:r>
             <a:endParaRPr lang="en-US" sz="1300" dirty="0"/>
           </a:p>
@@ -20664,7 +19916,7 @@
                 <a:ea typeface="Calibri" pitchFamily="34" charset="-122"/>
                 <a:cs typeface="Calibri" pitchFamily="34" charset="-120"/>
               </a:rPr>
-              <a:t>not</a:t>
+              <a:t>right, free from error</a:t>
             </a:r>
             <a:endParaRPr lang="en-US" sz="850" dirty="0"/>
           </a:p>
@@ -20687,11 +19939,11 @@
             </a:avLst>
           </a:prstGeom>
           <a:solidFill>
-            <a:srgbClr val="CCFBF1"/>
+            <a:srgbClr val="FCE7F3"/>
           </a:solidFill>
           <a:ln w="19050">
             <a:solidFill>
-              <a:srgbClr val="0D9488"/>
+              <a:srgbClr val="DB2777"/>
             </a:solidFill>
             <a:prstDash val="solid"/>
           </a:ln>
@@ -20731,13 +19983,13 @@
             <a:r>
               <a:rPr lang="en-US" sz="1300" b="1" dirty="0">
                 <a:solidFill>
-                  <a:srgbClr val="0F766E"/>
+                  <a:srgbClr val="9D174D"/>
                 </a:solidFill>
                 <a:latin typeface="Trebuchet MS" pitchFamily="34" charset="0"/>
                 <a:ea typeface="Trebuchet MS" pitchFamily="34" charset="-122"/>
                 <a:cs typeface="Trebuchet MS" pitchFamily="34" charset="-120"/>
               </a:rPr>
-              <a:t>correct</a:t>
+              <a:t>ion</a:t>
             </a:r>
             <a:endParaRPr lang="en-US" sz="1300" dirty="0"/>
           </a:p>
@@ -20776,7 +20028,7 @@
                 <a:ea typeface="Calibri" pitchFamily="34" charset="-122"/>
                 <a:cs typeface="Calibri" pitchFamily="34" charset="-120"/>
               </a:rPr>
-              <a:t>right, accurate</a:t>
+              <a:t>act or result of</a:t>
             </a:r>
             <a:endParaRPr lang="en-US" sz="850" dirty="0"/>
           </a:p>
@@ -20935,7 +20187,7 @@
                 <a:ea typeface="Trebuchet MS" pitchFamily="34" charset="-122"/>
                 <a:cs typeface="Trebuchet MS" pitchFamily="34" charset="-120"/>
               </a:rPr>
-              <a:t>in</a:t>
+              <a:t>cor</a:t>
             </a:r>
             <a:endParaRPr lang="en-US" sz="1400" dirty="0"/>
           </a:p>
@@ -21040,7 +20292,7 @@
                 <a:ea typeface="Trebuchet MS" pitchFamily="34" charset="-122"/>
                 <a:cs typeface="Trebuchet MS" pitchFamily="34" charset="-120"/>
               </a:rPr>
-              <a:t>cor</a:t>
+              <a:t>rec</a:t>
             </a:r>
             <a:endParaRPr lang="en-US" sz="1400" dirty="0"/>
           </a:p>
@@ -21145,7 +20397,7 @@
                 <a:ea typeface="Trebuchet MS" pitchFamily="34" charset="-122"/>
                 <a:cs typeface="Trebuchet MS" pitchFamily="34" charset="-120"/>
               </a:rPr>
-              <a:t>rect</a:t>
+              <a:t>tion</a:t>
             </a:r>
             <a:endParaRPr lang="en-US" sz="1400" dirty="0"/>
           </a:p>
@@ -21708,7 +20960,7 @@
                 <a:ea typeface="Trebuchet MS" pitchFamily="34" charset="-122"/>
                 <a:cs typeface="Trebuchet MS" pitchFamily="34" charset="-120"/>
               </a:rPr>
-              <a:t>incorrect</a:t>
+              <a:t>correction</a:t>
             </a:r>
             <a:endParaRPr lang="en-US" sz="2800" dirty="0"/>
           </a:p>
@@ -21797,11 +21049,11 @@
             </a:avLst>
           </a:prstGeom>
           <a:solidFill>
-            <a:srgbClr val="DDD6FE"/>
+            <a:srgbClr val="CCFBF1"/>
           </a:solidFill>
           <a:ln w="19050">
             <a:solidFill>
-              <a:srgbClr val="7C3AED"/>
+              <a:srgbClr val="0D9488"/>
             </a:solidFill>
             <a:prstDash val="solid"/>
           </a:ln>
@@ -21841,13 +21093,13 @@
             <a:r>
               <a:rPr lang="en-US" sz="1300" b="1" dirty="0">
                 <a:solidFill>
-                  <a:srgbClr val="4C1D95"/>
+                  <a:srgbClr val="0F766E"/>
                 </a:solidFill>
                 <a:latin typeface="Trebuchet MS" pitchFamily="34" charset="0"/>
                 <a:ea typeface="Trebuchet MS" pitchFamily="34" charset="-122"/>
                 <a:cs typeface="Trebuchet MS" pitchFamily="34" charset="-120"/>
               </a:rPr>
-              <a:t>in</a:t>
+              <a:t>correct</a:t>
             </a:r>
             <a:endParaRPr lang="en-US" sz="1300" dirty="0"/>
           </a:p>
@@ -21886,7 +21138,7 @@
                 <a:ea typeface="Calibri" pitchFamily="34" charset="-122"/>
                 <a:cs typeface="Calibri" pitchFamily="34" charset="-120"/>
               </a:rPr>
-              <a:t>not</a:t>
+              <a:t>right, free from error</a:t>
             </a:r>
             <a:endParaRPr lang="en-US" sz="850" dirty="0"/>
           </a:p>
@@ -21909,11 +21161,11 @@
             </a:avLst>
           </a:prstGeom>
           <a:solidFill>
-            <a:srgbClr val="CCFBF1"/>
+            <a:srgbClr val="FCE7F3"/>
           </a:solidFill>
           <a:ln w="19050">
             <a:solidFill>
-              <a:srgbClr val="0D9488"/>
+              <a:srgbClr val="DB2777"/>
             </a:solidFill>
             <a:prstDash val="solid"/>
           </a:ln>
@@ -21953,13 +21205,13 @@
             <a:r>
               <a:rPr lang="en-US" sz="1300" b="1" dirty="0">
                 <a:solidFill>
-                  <a:srgbClr val="0F766E"/>
+                  <a:srgbClr val="9D174D"/>
                 </a:solidFill>
                 <a:latin typeface="Trebuchet MS" pitchFamily="34" charset="0"/>
                 <a:ea typeface="Trebuchet MS" pitchFamily="34" charset="-122"/>
                 <a:cs typeface="Trebuchet MS" pitchFamily="34" charset="-120"/>
               </a:rPr>
-              <a:t>correct</a:t>
+              <a:t>ion</a:t>
             </a:r>
             <a:endParaRPr lang="en-US" sz="1300" dirty="0"/>
           </a:p>
@@ -21998,7 +21250,7 @@
                 <a:ea typeface="Calibri" pitchFamily="34" charset="-122"/>
                 <a:cs typeface="Calibri" pitchFamily="34" charset="-120"/>
               </a:rPr>
-              <a:t>right, accurate</a:t>
+              <a:t>act or result of</a:t>
             </a:r>
             <a:endParaRPr lang="en-US" sz="850" dirty="0"/>
           </a:p>
@@ -22157,7 +21409,7 @@
                 <a:ea typeface="Trebuchet MS" pitchFamily="34" charset="-122"/>
                 <a:cs typeface="Trebuchet MS" pitchFamily="34" charset="-120"/>
               </a:rPr>
-              <a:t>in</a:t>
+              <a:t>cor</a:t>
             </a:r>
             <a:endParaRPr lang="en-US" sz="1400" dirty="0"/>
           </a:p>
@@ -22262,7 +21514,7 @@
                 <a:ea typeface="Trebuchet MS" pitchFamily="34" charset="-122"/>
                 <a:cs typeface="Trebuchet MS" pitchFamily="34" charset="-120"/>
               </a:rPr>
-              <a:t>cor</a:t>
+              <a:t>rec</a:t>
             </a:r>
             <a:endParaRPr lang="en-US" sz="1400" dirty="0"/>
           </a:p>
@@ -22367,7 +21619,7 @@
                 <a:ea typeface="Trebuchet MS" pitchFamily="34" charset="-122"/>
                 <a:cs typeface="Trebuchet MS" pitchFamily="34" charset="-120"/>
               </a:rPr>
-              <a:t>rect</a:t>
+              <a:t>tion</a:t>
             </a:r>
             <a:endParaRPr lang="en-US" sz="1400" dirty="0"/>
           </a:p>
@@ -22526,7 +21778,7 @@
                 <a:ea typeface="Trebuchet MS" pitchFamily="34" charset="-122"/>
                 <a:cs typeface="Trebuchet MS" pitchFamily="34" charset="-120"/>
               </a:rPr>
-              <a:t>i</a:t>
+              <a:t>c</a:t>
             </a:r>
             <a:endParaRPr lang="en-US" sz="900" dirty="0"/>
           </a:p>
@@ -22534,7 +21786,46 @@
       </p:sp>
       <p:sp>
         <p:nvSpPr>
-          <p:cNvPr id="38" name="Shape 36"/>
+          <p:cNvPr id="38" name="Text 36"/>
+          <p:cNvSpPr/>
+          <p:nvPr/>
+        </p:nvSpPr>
+        <p:spPr>
+          <a:xfrm>
+            <a:off x="2023872" y="4572000"/>
+            <a:ext cx="685800" cy="219456"/>
+          </a:xfrm>
+          <a:prstGeom prst="rect">
+            <a:avLst/>
+          </a:prstGeom>
+          <a:noFill/>
+          <a:ln/>
+        </p:spPr>
+        <p:txBody>
+          <a:bodyPr wrap="square" lIns="0" tIns="0" rIns="0" bIns="0" rtlCol="0" anchor="t"/>
+          <a:lstStyle/>
+          <a:p>
+            <a:pPr algn="ctr" indent="0" marL="0">
+              <a:buNone/>
+            </a:pPr>
+            <a:r>
+              <a:rPr lang="en-US" sz="750" i="1" dirty="0">
+                <a:solidFill>
+                  <a:srgbClr val="94A3B8"/>
+                </a:solidFill>
+                <a:latin typeface="Calibri" pitchFamily="34" charset="0"/>
+                <a:ea typeface="Calibri" pitchFamily="34" charset="-122"/>
+                <a:cs typeface="Calibri" pitchFamily="34" charset="-120"/>
+              </a:rPr>
+              <a:t>/k/</a:t>
+            </a:r>
+            <a:endParaRPr lang="en-US" sz="750" dirty="0"/>
+          </a:p>
+        </p:txBody>
+      </p:sp>
+      <p:sp>
+        <p:nvSpPr>
+          <p:cNvPr id="39" name="Shape 37"/>
           <p:cNvSpPr/>
           <p:nvPr/>
         </p:nvSpPr>
@@ -22561,7 +21852,7 @@
       </p:sp>
       <p:sp>
         <p:nvSpPr>
-          <p:cNvPr id="39" name="Text 37"/>
+          <p:cNvPr id="40" name="Text 38"/>
           <p:cNvSpPr/>
           <p:nvPr/>
         </p:nvSpPr>
@@ -22592,7 +21883,7 @@
                 <a:ea typeface="Trebuchet MS" pitchFamily="34" charset="-122"/>
                 <a:cs typeface="Trebuchet MS" pitchFamily="34" charset="-120"/>
               </a:rPr>
-              <a:t>n</a:t>
+              <a:t>or</a:t>
             </a:r>
             <a:endParaRPr lang="en-US" sz="900" dirty="0"/>
           </a:p>
@@ -22600,7 +21891,7 @@
       </p:sp>
       <p:sp>
         <p:nvSpPr>
-          <p:cNvPr id="40" name="Shape 38"/>
+          <p:cNvPr id="41" name="Shape 39"/>
           <p:cNvSpPr/>
           <p:nvPr/>
         </p:nvSpPr>
@@ -22627,7 +21918,7 @@
       </p:sp>
       <p:sp>
         <p:nvSpPr>
-          <p:cNvPr id="41" name="Text 39"/>
+          <p:cNvPr id="42" name="Text 40"/>
           <p:cNvSpPr/>
           <p:nvPr/>
         </p:nvSpPr>
@@ -22658,6 +21949,138 @@
                 <a:ea typeface="Trebuchet MS" pitchFamily="34" charset="-122"/>
                 <a:cs typeface="Trebuchet MS" pitchFamily="34" charset="-120"/>
               </a:rPr>
+              <a:t>r</a:t>
+            </a:r>
+            <a:endParaRPr lang="en-US" sz="900" dirty="0"/>
+          </a:p>
+        </p:txBody>
+      </p:sp>
+      <p:sp>
+        <p:nvSpPr>
+          <p:cNvPr id="43" name="Shape 41"/>
+          <p:cNvSpPr/>
+          <p:nvPr/>
+        </p:nvSpPr>
+        <p:spPr>
+          <a:xfrm>
+            <a:off x="4447032" y="4169664"/>
+            <a:ext cx="685800" cy="384048"/>
+          </a:xfrm>
+          <a:prstGeom prst="rect">
+            <a:avLst>
+              <a:gd name="adj" fmla="val 9524"/>
+            </a:avLst>
+          </a:prstGeom>
+          <a:solidFill>
+            <a:srgbClr val="FFFFFF"/>
+          </a:solidFill>
+          <a:ln w="12700">
+            <a:solidFill>
+              <a:srgbClr val="DB2777"/>
+            </a:solidFill>
+            <a:prstDash val="solid"/>
+          </a:ln>
+        </p:spPr>
+      </p:sp>
+      <p:sp>
+        <p:nvSpPr>
+          <p:cNvPr id="44" name="Text 42"/>
+          <p:cNvSpPr/>
+          <p:nvPr/>
+        </p:nvSpPr>
+        <p:spPr>
+          <a:xfrm>
+            <a:off x="4447032" y="4169664"/>
+            <a:ext cx="685800" cy="384048"/>
+          </a:xfrm>
+          <a:prstGeom prst="rect">
+            <a:avLst/>
+          </a:prstGeom>
+          <a:noFill/>
+          <a:ln/>
+        </p:spPr>
+        <p:txBody>
+          <a:bodyPr wrap="square" lIns="0" tIns="0" rIns="0" bIns="0" rtlCol="0" anchor="ctr"/>
+          <a:lstStyle/>
+          <a:p>
+            <a:pPr algn="ctr" indent="0" marL="0">
+              <a:buNone/>
+            </a:pPr>
+            <a:r>
+              <a:rPr lang="en-US" sz="900" b="1" dirty="0">
+                <a:solidFill>
+                  <a:srgbClr val="9D174D"/>
+                </a:solidFill>
+                <a:latin typeface="Trebuchet MS" pitchFamily="34" charset="0"/>
+                <a:ea typeface="Trebuchet MS" pitchFamily="34" charset="-122"/>
+                <a:cs typeface="Trebuchet MS" pitchFamily="34" charset="-120"/>
+              </a:rPr>
+              <a:t>e</a:t>
+            </a:r>
+            <a:endParaRPr lang="en-US" sz="900" dirty="0"/>
+          </a:p>
+        </p:txBody>
+      </p:sp>
+      <p:sp>
+        <p:nvSpPr>
+          <p:cNvPr id="45" name="Shape 43"/>
+          <p:cNvSpPr/>
+          <p:nvPr/>
+        </p:nvSpPr>
+        <p:spPr>
+          <a:xfrm>
+            <a:off x="5254752" y="4169664"/>
+            <a:ext cx="685800" cy="384048"/>
+          </a:xfrm>
+          <a:prstGeom prst="rect">
+            <a:avLst>
+              <a:gd name="adj" fmla="val 9524"/>
+            </a:avLst>
+          </a:prstGeom>
+          <a:solidFill>
+            <a:srgbClr val="FFFFFF"/>
+          </a:solidFill>
+          <a:ln w="12700">
+            <a:solidFill>
+              <a:srgbClr val="DB2777"/>
+            </a:solidFill>
+            <a:prstDash val="solid"/>
+          </a:ln>
+        </p:spPr>
+      </p:sp>
+      <p:sp>
+        <p:nvSpPr>
+          <p:cNvPr id="46" name="Text 44"/>
+          <p:cNvSpPr/>
+          <p:nvPr/>
+        </p:nvSpPr>
+        <p:spPr>
+          <a:xfrm>
+            <a:off x="5254752" y="4169664"/>
+            <a:ext cx="685800" cy="384048"/>
+          </a:xfrm>
+          <a:prstGeom prst="rect">
+            <a:avLst/>
+          </a:prstGeom>
+          <a:noFill/>
+          <a:ln/>
+        </p:spPr>
+        <p:txBody>
+          <a:bodyPr wrap="square" lIns="0" tIns="0" rIns="0" bIns="0" rtlCol="0" anchor="ctr"/>
+          <a:lstStyle/>
+          <a:p>
+            <a:pPr algn="ctr" indent="0" marL="0">
+              <a:buNone/>
+            </a:pPr>
+            <a:r>
+              <a:rPr lang="en-US" sz="900" b="1" dirty="0">
+                <a:solidFill>
+                  <a:srgbClr val="9D174D"/>
+                </a:solidFill>
+                <a:latin typeface="Trebuchet MS" pitchFamily="34" charset="0"/>
+                <a:ea typeface="Trebuchet MS" pitchFamily="34" charset="-122"/>
+                <a:cs typeface="Trebuchet MS" pitchFamily="34" charset="-120"/>
+              </a:rPr>
               <a:t>c</a:t>
             </a:r>
             <a:endParaRPr lang="en-US" sz="900" dirty="0"/>
@@ -22666,13 +22089,13 @@
       </p:sp>
       <p:sp>
         <p:nvSpPr>
-          <p:cNvPr id="42" name="Text 40"/>
-          <p:cNvSpPr/>
-          <p:nvPr/>
-        </p:nvSpPr>
-        <p:spPr>
-          <a:xfrm>
-            <a:off x="3639312" y="4572000"/>
+          <p:cNvPr id="47" name="Text 45"/>
+          <p:cNvSpPr/>
+          <p:nvPr/>
+        </p:nvSpPr>
+        <p:spPr>
+          <a:xfrm>
+            <a:off x="5254752" y="4572000"/>
             <a:ext cx="685800" cy="219456"/>
           </a:xfrm>
           <a:prstGeom prst="rect">
@@ -22705,13 +22128,13 @@
       </p:sp>
       <p:sp>
         <p:nvSpPr>
-          <p:cNvPr id="43" name="Shape 41"/>
-          <p:cNvSpPr/>
-          <p:nvPr/>
-        </p:nvSpPr>
-        <p:spPr>
-          <a:xfrm>
-            <a:off x="4447032" y="4169664"/>
+          <p:cNvPr id="48" name="Shape 46"/>
+          <p:cNvSpPr/>
+          <p:nvPr/>
+        </p:nvSpPr>
+        <p:spPr>
+          <a:xfrm>
+            <a:off x="6062472" y="4169664"/>
             <a:ext cx="685800" cy="384048"/>
           </a:xfrm>
           <a:prstGeom prst="rect">
@@ -22732,13 +22155,13 @@
       </p:sp>
       <p:sp>
         <p:nvSpPr>
-          <p:cNvPr id="44" name="Text 42"/>
-          <p:cNvSpPr/>
-          <p:nvPr/>
-        </p:nvSpPr>
-        <p:spPr>
-          <a:xfrm>
-            <a:off x="4447032" y="4169664"/>
+          <p:cNvPr id="49" name="Text 47"/>
+          <p:cNvSpPr/>
+          <p:nvPr/>
+        </p:nvSpPr>
+        <p:spPr>
+          <a:xfrm>
+            <a:off x="6062472" y="4169664"/>
             <a:ext cx="685800" cy="384048"/>
           </a:xfrm>
           <a:prstGeom prst="rect">
@@ -22763,7 +22186,7 @@
                 <a:ea typeface="Trebuchet MS" pitchFamily="34" charset="-122"/>
                 <a:cs typeface="Trebuchet MS" pitchFamily="34" charset="-120"/>
               </a:rPr>
-              <a:t>or</a:t>
+              <a:t>t</a:t>
             </a:r>
             <a:endParaRPr lang="en-US" sz="900" dirty="0"/>
           </a:p>
@@ -22771,13 +22194,52 @@
       </p:sp>
       <p:sp>
         <p:nvSpPr>
-          <p:cNvPr id="45" name="Shape 43"/>
-          <p:cNvSpPr/>
-          <p:nvPr/>
-        </p:nvSpPr>
-        <p:spPr>
-          <a:xfrm>
-            <a:off x="5254752" y="4169664"/>
+          <p:cNvPr id="50" name="Text 48"/>
+          <p:cNvSpPr/>
+          <p:nvPr/>
+        </p:nvSpPr>
+        <p:spPr>
+          <a:xfrm>
+            <a:off x="6062472" y="4572000"/>
+            <a:ext cx="685800" cy="219456"/>
+          </a:xfrm>
+          <a:prstGeom prst="rect">
+            <a:avLst/>
+          </a:prstGeom>
+          <a:noFill/>
+          <a:ln/>
+        </p:spPr>
+        <p:txBody>
+          <a:bodyPr wrap="square" lIns="0" tIns="0" rIns="0" bIns="0" rtlCol="0" anchor="t"/>
+          <a:lstStyle/>
+          <a:p>
+            <a:pPr algn="ctr" indent="0" marL="0">
+              <a:buNone/>
+            </a:pPr>
+            <a:r>
+              <a:rPr lang="en-US" sz="750" i="1" dirty="0">
+                <a:solidFill>
+                  <a:srgbClr val="94A3B8"/>
+                </a:solidFill>
+                <a:latin typeface="Calibri" pitchFamily="34" charset="0"/>
+                <a:ea typeface="Calibri" pitchFamily="34" charset="-122"/>
+                <a:cs typeface="Calibri" pitchFamily="34" charset="-120"/>
+              </a:rPr>
+              <a:t>/sh/</a:t>
+            </a:r>
+            <a:endParaRPr lang="en-US" sz="750" dirty="0"/>
+          </a:p>
+        </p:txBody>
+      </p:sp>
+      <p:sp>
+        <p:nvSpPr>
+          <p:cNvPr id="51" name="Shape 49"/>
+          <p:cNvSpPr/>
+          <p:nvPr/>
+        </p:nvSpPr>
+        <p:spPr>
+          <a:xfrm>
+            <a:off x="6870192" y="4169664"/>
             <a:ext cx="685800" cy="384048"/>
           </a:xfrm>
           <a:prstGeom prst="rect">
@@ -22798,13 +22260,13 @@
       </p:sp>
       <p:sp>
         <p:nvSpPr>
-          <p:cNvPr id="46" name="Text 44"/>
-          <p:cNvSpPr/>
-          <p:nvPr/>
-        </p:nvSpPr>
-        <p:spPr>
-          <a:xfrm>
-            <a:off x="5254752" y="4169664"/>
+          <p:cNvPr id="52" name="Text 50"/>
+          <p:cNvSpPr/>
+          <p:nvPr/>
+        </p:nvSpPr>
+        <p:spPr>
+          <a:xfrm>
+            <a:off x="6870192" y="4169664"/>
             <a:ext cx="685800" cy="384048"/>
           </a:xfrm>
           <a:prstGeom prst="rect">
@@ -22829,7 +22291,7 @@
                 <a:ea typeface="Trebuchet MS" pitchFamily="34" charset="-122"/>
                 <a:cs typeface="Trebuchet MS" pitchFamily="34" charset="-120"/>
               </a:rPr>
-              <a:t>r</a:t>
+              <a:t>io</a:t>
             </a:r>
             <a:endParaRPr lang="en-US" sz="900" dirty="0"/>
           </a:p>
@@ -22837,13 +22299,13 @@
       </p:sp>
       <p:sp>
         <p:nvSpPr>
-          <p:cNvPr id="47" name="Shape 45"/>
-          <p:cNvSpPr/>
-          <p:nvPr/>
-        </p:nvSpPr>
-        <p:spPr>
-          <a:xfrm>
-            <a:off x="6062472" y="4169664"/>
+          <p:cNvPr id="53" name="Shape 51"/>
+          <p:cNvSpPr/>
+          <p:nvPr/>
+        </p:nvSpPr>
+        <p:spPr>
+          <a:xfrm>
+            <a:off x="7677912" y="4169664"/>
             <a:ext cx="685800" cy="384048"/>
           </a:xfrm>
           <a:prstGeom prst="rect">
@@ -22864,13 +22326,13 @@
       </p:sp>
       <p:sp>
         <p:nvSpPr>
-          <p:cNvPr id="48" name="Text 46"/>
-          <p:cNvSpPr/>
-          <p:nvPr/>
-        </p:nvSpPr>
-        <p:spPr>
-          <a:xfrm>
-            <a:off x="6062472" y="4169664"/>
+          <p:cNvPr id="54" name="Text 52"/>
+          <p:cNvSpPr/>
+          <p:nvPr/>
+        </p:nvSpPr>
+        <p:spPr>
+          <a:xfrm>
+            <a:off x="7677912" y="4169664"/>
             <a:ext cx="685800" cy="384048"/>
           </a:xfrm>
           <a:prstGeom prst="rect">
@@ -22895,178 +22357,7 @@
                 <a:ea typeface="Trebuchet MS" pitchFamily="34" charset="-122"/>
                 <a:cs typeface="Trebuchet MS" pitchFamily="34" charset="-120"/>
               </a:rPr>
-              <a:t>e</a:t>
-            </a:r>
-            <a:endParaRPr lang="en-US" sz="900" dirty="0"/>
-          </a:p>
-        </p:txBody>
-      </p:sp>
-      <p:sp>
-        <p:nvSpPr>
-          <p:cNvPr id="49" name="Shape 47"/>
-          <p:cNvSpPr/>
-          <p:nvPr/>
-        </p:nvSpPr>
-        <p:spPr>
-          <a:xfrm>
-            <a:off x="6870192" y="4169664"/>
-            <a:ext cx="685800" cy="384048"/>
-          </a:xfrm>
-          <a:prstGeom prst="rect">
-            <a:avLst>
-              <a:gd name="adj" fmla="val 9524"/>
-            </a:avLst>
-          </a:prstGeom>
-          <a:solidFill>
-            <a:srgbClr val="FFFFFF"/>
-          </a:solidFill>
-          <a:ln w="12700">
-            <a:solidFill>
-              <a:srgbClr val="DB2777"/>
-            </a:solidFill>
-            <a:prstDash val="solid"/>
-          </a:ln>
-        </p:spPr>
-      </p:sp>
-      <p:sp>
-        <p:nvSpPr>
-          <p:cNvPr id="50" name="Text 48"/>
-          <p:cNvSpPr/>
-          <p:nvPr/>
-        </p:nvSpPr>
-        <p:spPr>
-          <a:xfrm>
-            <a:off x="6870192" y="4169664"/>
-            <a:ext cx="685800" cy="384048"/>
-          </a:xfrm>
-          <a:prstGeom prst="rect">
-            <a:avLst/>
-          </a:prstGeom>
-          <a:noFill/>
-          <a:ln/>
-        </p:spPr>
-        <p:txBody>
-          <a:bodyPr wrap="square" lIns="0" tIns="0" rIns="0" bIns="0" rtlCol="0" anchor="ctr"/>
-          <a:lstStyle/>
-          <a:p>
-            <a:pPr algn="ctr" indent="0" marL="0">
-              <a:buNone/>
-            </a:pPr>
-            <a:r>
-              <a:rPr lang="en-US" sz="900" b="1" dirty="0">
-                <a:solidFill>
-                  <a:srgbClr val="9D174D"/>
-                </a:solidFill>
-                <a:latin typeface="Trebuchet MS" pitchFamily="34" charset="0"/>
-                <a:ea typeface="Trebuchet MS" pitchFamily="34" charset="-122"/>
-                <a:cs typeface="Trebuchet MS" pitchFamily="34" charset="-120"/>
-              </a:rPr>
-              <a:t>c</a:t>
-            </a:r>
-            <a:endParaRPr lang="en-US" sz="900" dirty="0"/>
-          </a:p>
-        </p:txBody>
-      </p:sp>
-      <p:sp>
-        <p:nvSpPr>
-          <p:cNvPr id="51" name="Text 49"/>
-          <p:cNvSpPr/>
-          <p:nvPr/>
-        </p:nvSpPr>
-        <p:spPr>
-          <a:xfrm>
-            <a:off x="6870192" y="4572000"/>
-            <a:ext cx="685800" cy="219456"/>
-          </a:xfrm>
-          <a:prstGeom prst="rect">
-            <a:avLst/>
-          </a:prstGeom>
-          <a:noFill/>
-          <a:ln/>
-        </p:spPr>
-        <p:txBody>
-          <a:bodyPr wrap="square" lIns="0" tIns="0" rIns="0" bIns="0" rtlCol="0" anchor="t"/>
-          <a:lstStyle/>
-          <a:p>
-            <a:pPr algn="ctr" indent="0" marL="0">
-              <a:buNone/>
-            </a:pPr>
-            <a:r>
-              <a:rPr lang="en-US" sz="750" i="1" dirty="0">
-                <a:solidFill>
-                  <a:srgbClr val="94A3B8"/>
-                </a:solidFill>
-                <a:latin typeface="Calibri" pitchFamily="34" charset="0"/>
-                <a:ea typeface="Calibri" pitchFamily="34" charset="-122"/>
-                <a:cs typeface="Calibri" pitchFamily="34" charset="-120"/>
-              </a:rPr>
-              <a:t>/k/</a:t>
-            </a:r>
-            <a:endParaRPr lang="en-US" sz="750" dirty="0"/>
-          </a:p>
-        </p:txBody>
-      </p:sp>
-      <p:sp>
-        <p:nvSpPr>
-          <p:cNvPr id="52" name="Shape 50"/>
-          <p:cNvSpPr/>
-          <p:nvPr/>
-        </p:nvSpPr>
-        <p:spPr>
-          <a:xfrm>
-            <a:off x="7677912" y="4169664"/>
-            <a:ext cx="685800" cy="384048"/>
-          </a:xfrm>
-          <a:prstGeom prst="rect">
-            <a:avLst>
-              <a:gd name="adj" fmla="val 9524"/>
-            </a:avLst>
-          </a:prstGeom>
-          <a:solidFill>
-            <a:srgbClr val="FFFFFF"/>
-          </a:solidFill>
-          <a:ln w="12700">
-            <a:solidFill>
-              <a:srgbClr val="DB2777"/>
-            </a:solidFill>
-            <a:prstDash val="solid"/>
-          </a:ln>
-        </p:spPr>
-      </p:sp>
-      <p:sp>
-        <p:nvSpPr>
-          <p:cNvPr id="53" name="Text 51"/>
-          <p:cNvSpPr/>
-          <p:nvPr/>
-        </p:nvSpPr>
-        <p:spPr>
-          <a:xfrm>
-            <a:off x="7677912" y="4169664"/>
-            <a:ext cx="685800" cy="384048"/>
-          </a:xfrm>
-          <a:prstGeom prst="rect">
-            <a:avLst/>
-          </a:prstGeom>
-          <a:noFill/>
-          <a:ln/>
-        </p:spPr>
-        <p:txBody>
-          <a:bodyPr wrap="square" lIns="0" tIns="0" rIns="0" bIns="0" rtlCol="0" anchor="ctr"/>
-          <a:lstStyle/>
-          <a:p>
-            <a:pPr algn="ctr" indent="0" marL="0">
-              <a:buNone/>
-            </a:pPr>
-            <a:r>
-              <a:rPr lang="en-US" sz="900" b="1" dirty="0">
-                <a:solidFill>
-                  <a:srgbClr val="9D174D"/>
-                </a:solidFill>
-                <a:latin typeface="Trebuchet MS" pitchFamily="34" charset="0"/>
-                <a:ea typeface="Trebuchet MS" pitchFamily="34" charset="-122"/>
-                <a:cs typeface="Trebuchet MS" pitchFamily="34" charset="-120"/>
-              </a:rPr>
-              <a:t>t</a:t>
+              <a:t>n</a:t>
             </a:r>
             <a:endParaRPr lang="en-US" sz="900" dirty="0"/>
           </a:p>
@@ -23497,7 +22788,7 @@
                 <a:ea typeface="Trebuchet MS" pitchFamily="34" charset="-122"/>
                 <a:cs typeface="Trebuchet MS" pitchFamily="34" charset="-120"/>
               </a:rPr>
-              <a:t>correction</a:t>
+              <a:t>incorrectness</a:t>
             </a:r>
             <a:endParaRPr lang="en-US" sz="2800" dirty="0"/>
           </a:p>
@@ -24324,7 +23615,7 @@
                 <a:ea typeface="Trebuchet MS" pitchFamily="34" charset="-122"/>
                 <a:cs typeface="Trebuchet MS" pitchFamily="34" charset="-120"/>
               </a:rPr>
-              <a:t>correction</a:t>
+              <a:t>incorrectness</a:t>
             </a:r>
             <a:endParaRPr lang="en-US" sz="2800" dirty="0"/>
           </a:p>
@@ -24404,7 +23695,7 @@
         </p:nvSpPr>
         <p:spPr>
           <a:xfrm>
-            <a:off x="2938272" y="2258568"/>
+            <a:off x="2221992" y="2258568"/>
             <a:ext cx="1828800" cy="292608"/>
           </a:xfrm>
           <a:prstGeom prst="rect">
@@ -24413,11 +23704,11 @@
             </a:avLst>
           </a:prstGeom>
           <a:solidFill>
-            <a:srgbClr val="CCFBF1"/>
+            <a:srgbClr val="DDD6FE"/>
           </a:solidFill>
           <a:ln w="19050">
             <a:solidFill>
-              <a:srgbClr val="0D9488"/>
+              <a:srgbClr val="7C3AED"/>
             </a:solidFill>
             <a:prstDash val="solid"/>
           </a:ln>
@@ -24438,7 +23729,7 @@
         </p:nvSpPr>
         <p:spPr>
           <a:xfrm>
-            <a:off x="2938272" y="2258568"/>
+            <a:off x="2221992" y="2258568"/>
             <a:ext cx="1828800" cy="292608"/>
           </a:xfrm>
           <a:prstGeom prst="rect">
@@ -24457,13 +23748,13 @@
             <a:r>
               <a:rPr lang="en-US" sz="1300" b="1" dirty="0">
                 <a:solidFill>
-                  <a:srgbClr val="0F766E"/>
+                  <a:srgbClr val="4C1D95"/>
                 </a:solidFill>
                 <a:latin typeface="Trebuchet MS" pitchFamily="34" charset="0"/>
                 <a:ea typeface="Trebuchet MS" pitchFamily="34" charset="-122"/>
                 <a:cs typeface="Trebuchet MS" pitchFamily="34" charset="-120"/>
               </a:rPr>
-              <a:t>correct</a:t>
+              <a:t>in</a:t>
             </a:r>
             <a:endParaRPr lang="en-US" sz="1300" dirty="0"/>
           </a:p>
@@ -24477,7 +23768,7 @@
         </p:nvSpPr>
         <p:spPr>
           <a:xfrm>
-            <a:off x="2938272" y="2569464"/>
+            <a:off x="2221992" y="2569464"/>
             <a:ext cx="1828800" cy="201168"/>
           </a:xfrm>
           <a:prstGeom prst="rect">
@@ -24502,7 +23793,7 @@
                 <a:ea typeface="Calibri" pitchFamily="34" charset="-122"/>
                 <a:cs typeface="Calibri" pitchFamily="34" charset="-120"/>
               </a:rPr>
-              <a:t>right, accurate</a:t>
+              <a:t>not</a:t>
             </a:r>
             <a:endParaRPr lang="en-US" sz="850" dirty="0"/>
           </a:p>
@@ -24516,7 +23807,7 @@
         </p:nvSpPr>
         <p:spPr>
           <a:xfrm>
-            <a:off x="5803392" y="2258568"/>
+            <a:off x="4370832" y="2258568"/>
             <a:ext cx="1828800" cy="292608"/>
           </a:xfrm>
           <a:prstGeom prst="rect">
@@ -24525,11 +23816,11 @@
             </a:avLst>
           </a:prstGeom>
           <a:solidFill>
-            <a:srgbClr val="FCE7F3"/>
+            <a:srgbClr val="CCFBF1"/>
           </a:solidFill>
           <a:ln w="19050">
             <a:solidFill>
-              <a:srgbClr val="DB2777"/>
+              <a:srgbClr val="0D9488"/>
             </a:solidFill>
             <a:prstDash val="solid"/>
           </a:ln>
@@ -24550,7 +23841,7 @@
         </p:nvSpPr>
         <p:spPr>
           <a:xfrm>
-            <a:off x="5803392" y="2258568"/>
+            <a:off x="4370832" y="2258568"/>
             <a:ext cx="1828800" cy="292608"/>
           </a:xfrm>
           <a:prstGeom prst="rect">
@@ -24569,13 +23860,13 @@
             <a:r>
               <a:rPr lang="en-US" sz="1300" b="1" dirty="0">
                 <a:solidFill>
-                  <a:srgbClr val="9D174D"/>
+                  <a:srgbClr val="0F766E"/>
                 </a:solidFill>
                 <a:latin typeface="Trebuchet MS" pitchFamily="34" charset="0"/>
                 <a:ea typeface="Trebuchet MS" pitchFamily="34" charset="-122"/>
                 <a:cs typeface="Trebuchet MS" pitchFamily="34" charset="-120"/>
               </a:rPr>
-              <a:t>ion</a:t>
+              <a:t>correct</a:t>
             </a:r>
             <a:endParaRPr lang="en-US" sz="1300" dirty="0"/>
           </a:p>
@@ -24589,7 +23880,7 @@
         </p:nvSpPr>
         <p:spPr>
           <a:xfrm>
-            <a:off x="5803392" y="2569464"/>
+            <a:off x="4370832" y="2569464"/>
             <a:ext cx="1828800" cy="201168"/>
           </a:xfrm>
           <a:prstGeom prst="rect">
@@ -24614,7 +23905,7 @@
                 <a:ea typeface="Calibri" pitchFamily="34" charset="-122"/>
                 <a:cs typeface="Calibri" pitchFamily="34" charset="-120"/>
               </a:rPr>
-              <a:t>act or result of</a:t>
+              <a:t>right, free from error</a:t>
             </a:r>
             <a:endParaRPr lang="en-US" sz="850" dirty="0"/>
           </a:p>
@@ -24623,6 +23914,118 @@
       <p:sp>
         <p:nvSpPr>
           <p:cNvPr id="22" name="Shape 20"/>
+          <p:cNvSpPr/>
+          <p:nvPr/>
+        </p:nvSpPr>
+        <p:spPr>
+          <a:xfrm>
+            <a:off x="6519672" y="2258568"/>
+            <a:ext cx="1828800" cy="292608"/>
+          </a:xfrm>
+          <a:prstGeom prst="rect">
+            <a:avLst>
+              <a:gd name="adj" fmla="val 25000"/>
+            </a:avLst>
+          </a:prstGeom>
+          <a:solidFill>
+            <a:srgbClr val="FCE7F3"/>
+          </a:solidFill>
+          <a:ln w="19050">
+            <a:solidFill>
+              <a:srgbClr val="DB2777"/>
+            </a:solidFill>
+            <a:prstDash val="solid"/>
+          </a:ln>
+          <a:effectLst>
+            <a:outerShdw sx="100000" sy="100000" kx="0" ky="0" algn="bl" rotWithShape="0" blurRad="101600" dist="38100" dir="8100000">
+              <a:srgbClr val="000000">
+                <a:alpha val="12000"/>
+              </a:srgbClr>
+            </a:outerShdw>
+          </a:effectLst>
+        </p:spPr>
+      </p:sp>
+      <p:sp>
+        <p:nvSpPr>
+          <p:cNvPr id="23" name="Text 21"/>
+          <p:cNvSpPr/>
+          <p:nvPr/>
+        </p:nvSpPr>
+        <p:spPr>
+          <a:xfrm>
+            <a:off x="6519672" y="2258568"/>
+            <a:ext cx="1828800" cy="292608"/>
+          </a:xfrm>
+          <a:prstGeom prst="rect">
+            <a:avLst/>
+          </a:prstGeom>
+          <a:noFill/>
+          <a:ln/>
+        </p:spPr>
+        <p:txBody>
+          <a:bodyPr wrap="square" lIns="0" tIns="0" rIns="0" bIns="0" rtlCol="0" anchor="ctr"/>
+          <a:lstStyle/>
+          <a:p>
+            <a:pPr algn="ctr" indent="0" marL="0">
+              <a:buNone/>
+            </a:pPr>
+            <a:r>
+              <a:rPr lang="en-US" sz="1300" b="1" dirty="0">
+                <a:solidFill>
+                  <a:srgbClr val="9D174D"/>
+                </a:solidFill>
+                <a:latin typeface="Trebuchet MS" pitchFamily="34" charset="0"/>
+                <a:ea typeface="Trebuchet MS" pitchFamily="34" charset="-122"/>
+                <a:cs typeface="Trebuchet MS" pitchFamily="34" charset="-120"/>
+              </a:rPr>
+              <a:t>ness</a:t>
+            </a:r>
+            <a:endParaRPr lang="en-US" sz="1300" dirty="0"/>
+          </a:p>
+        </p:txBody>
+      </p:sp>
+      <p:sp>
+        <p:nvSpPr>
+          <p:cNvPr id="24" name="Text 22"/>
+          <p:cNvSpPr/>
+          <p:nvPr/>
+        </p:nvSpPr>
+        <p:spPr>
+          <a:xfrm>
+            <a:off x="6519672" y="2569464"/>
+            <a:ext cx="1828800" cy="201168"/>
+          </a:xfrm>
+          <a:prstGeom prst="rect">
+            <a:avLst/>
+          </a:prstGeom>
+          <a:noFill/>
+          <a:ln/>
+        </p:spPr>
+        <p:txBody>
+          <a:bodyPr wrap="square" lIns="0" tIns="0" rIns="0" bIns="0" rtlCol="0" anchor="t"/>
+          <a:lstStyle/>
+          <a:p>
+            <a:pPr algn="ctr" indent="0" marL="0">
+              <a:buNone/>
+            </a:pPr>
+            <a:r>
+              <a:rPr lang="en-US" sz="850" dirty="0">
+                <a:solidFill>
+                  <a:srgbClr val="475569"/>
+                </a:solidFill>
+                <a:latin typeface="Calibri" pitchFamily="34" charset="0"/>
+                <a:ea typeface="Calibri" pitchFamily="34" charset="-122"/>
+                <a:cs typeface="Calibri" pitchFamily="34" charset="-120"/>
+              </a:rPr>
+              <a:t>state or quality of</a:t>
+            </a:r>
+            <a:endParaRPr lang="en-US" sz="850" dirty="0"/>
+          </a:p>
+        </p:txBody>
+      </p:sp>
+      <p:sp>
+        <p:nvSpPr>
+          <p:cNvPr id="25" name="Shape 23"/>
           <p:cNvSpPr/>
           <p:nvPr/>
         </p:nvSpPr>
@@ -24649,7 +24052,7 @@
       </p:sp>
       <p:sp>
         <p:nvSpPr>
-          <p:cNvPr id="23" name="Text 21"/>
+          <p:cNvPr id="26" name="Text 24"/>
           <p:cNvSpPr/>
           <p:nvPr/>
         </p:nvSpPr>
@@ -24688,7 +24091,7 @@
       </p:sp>
       <p:sp>
         <p:nvSpPr>
-          <p:cNvPr id="24" name="Shape 22"/>
+          <p:cNvPr id="27" name="Shape 25"/>
           <p:cNvSpPr/>
           <p:nvPr/>
         </p:nvSpPr>
@@ -24715,7 +24118,7 @@
       </p:sp>
       <p:sp>
         <p:nvSpPr>
-          <p:cNvPr id="25" name="Text 23"/>
+          <p:cNvPr id="28" name="Text 26"/>
           <p:cNvSpPr/>
           <p:nvPr/>
         </p:nvSpPr>
@@ -24754,7 +24157,7 @@
       </p:sp>
       <p:sp>
         <p:nvSpPr>
-          <p:cNvPr id="26" name="Shape 24"/>
+          <p:cNvPr id="29" name="Shape 27"/>
           <p:cNvSpPr/>
           <p:nvPr/>
         </p:nvSpPr>
@@ -24781,7 +24184,7 @@
       </p:sp>
       <p:sp>
         <p:nvSpPr>
-          <p:cNvPr id="27" name="Text 25"/>
+          <p:cNvPr id="30" name="Text 28"/>
           <p:cNvSpPr/>
           <p:nvPr/>
         </p:nvSpPr>
@@ -24820,7 +24223,7 @@
       </p:sp>
       <p:sp>
         <p:nvSpPr>
-          <p:cNvPr id="28" name="Shape 26"/>
+          <p:cNvPr id="31" name="Shape 29"/>
           <p:cNvSpPr/>
           <p:nvPr/>
         </p:nvSpPr>
@@ -24847,7 +24250,7 @@
       </p:sp>
       <p:sp>
         <p:nvSpPr>
-          <p:cNvPr id="29" name="Text 27"/>
+          <p:cNvPr id="32" name="Text 30"/>
           <p:cNvSpPr/>
           <p:nvPr/>
         </p:nvSpPr>
@@ -26028,7 +25431,7 @@
                 <a:ea typeface="Trebuchet MS" pitchFamily="34" charset="-122"/>
                 <a:cs typeface="Trebuchet MS" pitchFamily="34" charset="-120"/>
               </a:rPr>
-              <a:t>correction</a:t>
+              <a:t>incorrectness</a:t>
             </a:r>
             <a:endParaRPr lang="en-US" sz="2800" dirty="0"/>
           </a:p>
@@ -26108,7 +25511,7 @@
         </p:nvSpPr>
         <p:spPr>
           <a:xfrm>
-            <a:off x="2938272" y="2258568"/>
+            <a:off x="2221992" y="2258568"/>
             <a:ext cx="1828800" cy="292608"/>
           </a:xfrm>
           <a:prstGeom prst="rect">
@@ -26117,11 +25520,11 @@
             </a:avLst>
           </a:prstGeom>
           <a:solidFill>
-            <a:srgbClr val="CCFBF1"/>
+            <a:srgbClr val="DDD6FE"/>
           </a:solidFill>
           <a:ln w="19050">
             <a:solidFill>
-              <a:srgbClr val="0D9488"/>
+              <a:srgbClr val="7C3AED"/>
             </a:solidFill>
             <a:prstDash val="solid"/>
           </a:ln>
@@ -26142,7 +25545,7 @@
         </p:nvSpPr>
         <p:spPr>
           <a:xfrm>
-            <a:off x="2938272" y="2258568"/>
+            <a:off x="2221992" y="2258568"/>
             <a:ext cx="1828800" cy="292608"/>
           </a:xfrm>
           <a:prstGeom prst="rect">
@@ -26161,13 +25564,13 @@
             <a:r>
               <a:rPr lang="en-US" sz="1300" b="1" dirty="0">
                 <a:solidFill>
-                  <a:srgbClr val="0F766E"/>
+                  <a:srgbClr val="4C1D95"/>
                 </a:solidFill>
                 <a:latin typeface="Trebuchet MS" pitchFamily="34" charset="0"/>
                 <a:ea typeface="Trebuchet MS" pitchFamily="34" charset="-122"/>
                 <a:cs typeface="Trebuchet MS" pitchFamily="34" charset="-120"/>
               </a:rPr>
-              <a:t>correct</a:t>
+              <a:t>in</a:t>
             </a:r>
             <a:endParaRPr lang="en-US" sz="1300" dirty="0"/>
           </a:p>
@@ -26181,7 +25584,7 @@
         </p:nvSpPr>
         <p:spPr>
           <a:xfrm>
-            <a:off x="2938272" y="2569464"/>
+            <a:off x="2221992" y="2569464"/>
             <a:ext cx="1828800" cy="201168"/>
           </a:xfrm>
           <a:prstGeom prst="rect">
@@ -26206,7 +25609,7 @@
                 <a:ea typeface="Calibri" pitchFamily="34" charset="-122"/>
                 <a:cs typeface="Calibri" pitchFamily="34" charset="-120"/>
               </a:rPr>
-              <a:t>right, accurate</a:t>
+              <a:t>not</a:t>
             </a:r>
             <a:endParaRPr lang="en-US" sz="850" dirty="0"/>
           </a:p>
@@ -26220,7 +25623,7 @@
         </p:nvSpPr>
         <p:spPr>
           <a:xfrm>
-            <a:off x="5803392" y="2258568"/>
+            <a:off x="4370832" y="2258568"/>
             <a:ext cx="1828800" cy="292608"/>
           </a:xfrm>
           <a:prstGeom prst="rect">
@@ -26229,11 +25632,11 @@
             </a:avLst>
           </a:prstGeom>
           <a:solidFill>
-            <a:srgbClr val="FCE7F3"/>
+            <a:srgbClr val="CCFBF1"/>
           </a:solidFill>
           <a:ln w="19050">
             <a:solidFill>
-              <a:srgbClr val="DB2777"/>
+              <a:srgbClr val="0D9488"/>
             </a:solidFill>
             <a:prstDash val="solid"/>
           </a:ln>
@@ -26254,7 +25657,7 @@
         </p:nvSpPr>
         <p:spPr>
           <a:xfrm>
-            <a:off x="5803392" y="2258568"/>
+            <a:off x="4370832" y="2258568"/>
             <a:ext cx="1828800" cy="292608"/>
           </a:xfrm>
           <a:prstGeom prst="rect">
@@ -26273,13 +25676,13 @@
             <a:r>
               <a:rPr lang="en-US" sz="1300" b="1" dirty="0">
                 <a:solidFill>
-                  <a:srgbClr val="9D174D"/>
+                  <a:srgbClr val="0F766E"/>
                 </a:solidFill>
                 <a:latin typeface="Trebuchet MS" pitchFamily="34" charset="0"/>
                 <a:ea typeface="Trebuchet MS" pitchFamily="34" charset="-122"/>
                 <a:cs typeface="Trebuchet MS" pitchFamily="34" charset="-120"/>
               </a:rPr>
-              <a:t>ion</a:t>
+              <a:t>correct</a:t>
             </a:r>
             <a:endParaRPr lang="en-US" sz="1300" dirty="0"/>
           </a:p>
@@ -26293,7 +25696,7 @@
         </p:nvSpPr>
         <p:spPr>
           <a:xfrm>
-            <a:off x="5803392" y="2569464"/>
+            <a:off x="4370832" y="2569464"/>
             <a:ext cx="1828800" cy="201168"/>
           </a:xfrm>
           <a:prstGeom prst="rect">
@@ -26318,7 +25721,7 @@
                 <a:ea typeface="Calibri" pitchFamily="34" charset="-122"/>
                 <a:cs typeface="Calibri" pitchFamily="34" charset="-120"/>
               </a:rPr>
-              <a:t>act or result of</a:t>
+              <a:t>right, free from error</a:t>
             </a:r>
             <a:endParaRPr lang="en-US" sz="850" dirty="0"/>
           </a:p>
@@ -26327,6 +25730,118 @@
       <p:sp>
         <p:nvSpPr>
           <p:cNvPr id="22" name="Shape 20"/>
+          <p:cNvSpPr/>
+          <p:nvPr/>
+        </p:nvSpPr>
+        <p:spPr>
+          <a:xfrm>
+            <a:off x="6519672" y="2258568"/>
+            <a:ext cx="1828800" cy="292608"/>
+          </a:xfrm>
+          <a:prstGeom prst="rect">
+            <a:avLst>
+              <a:gd name="adj" fmla="val 25000"/>
+            </a:avLst>
+          </a:prstGeom>
+          <a:solidFill>
+            <a:srgbClr val="FCE7F3"/>
+          </a:solidFill>
+          <a:ln w="19050">
+            <a:solidFill>
+              <a:srgbClr val="DB2777"/>
+            </a:solidFill>
+            <a:prstDash val="solid"/>
+          </a:ln>
+          <a:effectLst>
+            <a:outerShdw sx="100000" sy="100000" kx="0" ky="0" algn="bl" rotWithShape="0" blurRad="101600" dist="38100" dir="8100000">
+              <a:srgbClr val="000000">
+                <a:alpha val="12000"/>
+              </a:srgbClr>
+            </a:outerShdw>
+          </a:effectLst>
+        </p:spPr>
+      </p:sp>
+      <p:sp>
+        <p:nvSpPr>
+          <p:cNvPr id="23" name="Text 21"/>
+          <p:cNvSpPr/>
+          <p:nvPr/>
+        </p:nvSpPr>
+        <p:spPr>
+          <a:xfrm>
+            <a:off x="6519672" y="2258568"/>
+            <a:ext cx="1828800" cy="292608"/>
+          </a:xfrm>
+          <a:prstGeom prst="rect">
+            <a:avLst/>
+          </a:prstGeom>
+          <a:noFill/>
+          <a:ln/>
+        </p:spPr>
+        <p:txBody>
+          <a:bodyPr wrap="square" lIns="0" tIns="0" rIns="0" bIns="0" rtlCol="0" anchor="ctr"/>
+          <a:lstStyle/>
+          <a:p>
+            <a:pPr algn="ctr" indent="0" marL="0">
+              <a:buNone/>
+            </a:pPr>
+            <a:r>
+              <a:rPr lang="en-US" sz="1300" b="1" dirty="0">
+                <a:solidFill>
+                  <a:srgbClr val="9D174D"/>
+                </a:solidFill>
+                <a:latin typeface="Trebuchet MS" pitchFamily="34" charset="0"/>
+                <a:ea typeface="Trebuchet MS" pitchFamily="34" charset="-122"/>
+                <a:cs typeface="Trebuchet MS" pitchFamily="34" charset="-120"/>
+              </a:rPr>
+              <a:t>ness</a:t>
+            </a:r>
+            <a:endParaRPr lang="en-US" sz="1300" dirty="0"/>
+          </a:p>
+        </p:txBody>
+      </p:sp>
+      <p:sp>
+        <p:nvSpPr>
+          <p:cNvPr id="24" name="Text 22"/>
+          <p:cNvSpPr/>
+          <p:nvPr/>
+        </p:nvSpPr>
+        <p:spPr>
+          <a:xfrm>
+            <a:off x="6519672" y="2569464"/>
+            <a:ext cx="1828800" cy="201168"/>
+          </a:xfrm>
+          <a:prstGeom prst="rect">
+            <a:avLst/>
+          </a:prstGeom>
+          <a:noFill/>
+          <a:ln/>
+        </p:spPr>
+        <p:txBody>
+          <a:bodyPr wrap="square" lIns="0" tIns="0" rIns="0" bIns="0" rtlCol="0" anchor="t"/>
+          <a:lstStyle/>
+          <a:p>
+            <a:pPr algn="ctr" indent="0" marL="0">
+              <a:buNone/>
+            </a:pPr>
+            <a:r>
+              <a:rPr lang="en-US" sz="850" dirty="0">
+                <a:solidFill>
+                  <a:srgbClr val="475569"/>
+                </a:solidFill>
+                <a:latin typeface="Calibri" pitchFamily="34" charset="0"/>
+                <a:ea typeface="Calibri" pitchFamily="34" charset="-122"/>
+                <a:cs typeface="Calibri" pitchFamily="34" charset="-120"/>
+              </a:rPr>
+              <a:t>state or quality of</a:t>
+            </a:r>
+            <a:endParaRPr lang="en-US" sz="850" dirty="0"/>
+          </a:p>
+        </p:txBody>
+      </p:sp>
+      <p:sp>
+        <p:nvSpPr>
+          <p:cNvPr id="25" name="Shape 23"/>
           <p:cNvSpPr/>
           <p:nvPr/>
         </p:nvSpPr>
@@ -26353,7 +25868,7 @@
       </p:sp>
       <p:sp>
         <p:nvSpPr>
-          <p:cNvPr id="23" name="Text 21"/>
+          <p:cNvPr id="26" name="Text 24"/>
           <p:cNvSpPr/>
           <p:nvPr/>
         </p:nvSpPr>
@@ -26392,7 +25907,7 @@
       </p:sp>
       <p:sp>
         <p:nvSpPr>
-          <p:cNvPr id="24" name="Shape 22"/>
+          <p:cNvPr id="27" name="Shape 25"/>
           <p:cNvSpPr/>
           <p:nvPr/>
         </p:nvSpPr>
@@ -26419,14 +25934,14 @@
       </p:sp>
       <p:sp>
         <p:nvSpPr>
-          <p:cNvPr id="25" name="Shape 23"/>
-          <p:cNvSpPr/>
-          <p:nvPr/>
-        </p:nvSpPr>
-        <p:spPr>
-          <a:xfrm>
-            <a:off x="2313432" y="3364992"/>
-            <a:ext cx="1645920" cy="475488"/>
+          <p:cNvPr id="28" name="Shape 26"/>
+          <p:cNvSpPr/>
+          <p:nvPr/>
+        </p:nvSpPr>
+        <p:spPr>
+          <a:xfrm>
+            <a:off x="1975104" y="3364992"/>
+            <a:ext cx="1554480" cy="475488"/>
           </a:xfrm>
           <a:prstGeom prst="rect">
             <a:avLst>
@@ -26446,14 +25961,14 @@
       </p:sp>
       <p:sp>
         <p:nvSpPr>
-          <p:cNvPr id="26" name="Text 24"/>
-          <p:cNvSpPr/>
-          <p:nvPr/>
-        </p:nvSpPr>
-        <p:spPr>
-          <a:xfrm>
-            <a:off x="2313432" y="3364992"/>
-            <a:ext cx="1645920" cy="475488"/>
+          <p:cNvPr id="29" name="Text 27"/>
+          <p:cNvSpPr/>
+          <p:nvPr/>
+        </p:nvSpPr>
+        <p:spPr>
+          <a:xfrm>
+            <a:off x="1975104" y="3364992"/>
+            <a:ext cx="1554480" cy="475488"/>
           </a:xfrm>
           <a:prstGeom prst="rect">
             <a:avLst/>
@@ -26477,7 +25992,7 @@
                 <a:ea typeface="Trebuchet MS" pitchFamily="34" charset="-122"/>
                 <a:cs typeface="Trebuchet MS" pitchFamily="34" charset="-120"/>
               </a:rPr>
-              <a:t>cor</a:t>
+              <a:t>in</a:t>
             </a:r>
             <a:endParaRPr lang="en-US" sz="1400" dirty="0"/>
           </a:p>
@@ -26485,14 +26000,14 @@
       </p:sp>
       <p:sp>
         <p:nvSpPr>
-          <p:cNvPr id="27" name="Text 25"/>
-          <p:cNvSpPr/>
-          <p:nvPr/>
-        </p:nvSpPr>
-        <p:spPr>
-          <a:xfrm>
-            <a:off x="3959352" y="3364992"/>
-            <a:ext cx="411480" cy="475488"/>
+          <p:cNvPr id="30" name="Text 28"/>
+          <p:cNvSpPr/>
+          <p:nvPr/>
+        </p:nvSpPr>
+        <p:spPr>
+          <a:xfrm>
+            <a:off x="3529584" y="3364992"/>
+            <a:ext cx="73152" cy="475488"/>
           </a:xfrm>
           <a:prstGeom prst="rect">
             <a:avLst/>
@@ -26524,14 +26039,14 @@
       </p:sp>
       <p:sp>
         <p:nvSpPr>
-          <p:cNvPr id="28" name="Shape 26"/>
-          <p:cNvSpPr/>
-          <p:nvPr/>
-        </p:nvSpPr>
-        <p:spPr>
-          <a:xfrm>
-            <a:off x="4370832" y="3364992"/>
-            <a:ext cx="1645920" cy="475488"/>
+          <p:cNvPr id="31" name="Shape 29"/>
+          <p:cNvSpPr/>
+          <p:nvPr/>
+        </p:nvSpPr>
+        <p:spPr>
+          <a:xfrm>
+            <a:off x="3602736" y="3364992"/>
+            <a:ext cx="1554480" cy="475488"/>
           </a:xfrm>
           <a:prstGeom prst="rect">
             <a:avLst>
@@ -26551,14 +26066,14 @@
       </p:sp>
       <p:sp>
         <p:nvSpPr>
-          <p:cNvPr id="29" name="Text 27"/>
-          <p:cNvSpPr/>
-          <p:nvPr/>
-        </p:nvSpPr>
-        <p:spPr>
-          <a:xfrm>
-            <a:off x="4370832" y="3364992"/>
-            <a:ext cx="1645920" cy="475488"/>
+          <p:cNvPr id="32" name="Text 30"/>
+          <p:cNvSpPr/>
+          <p:nvPr/>
+        </p:nvSpPr>
+        <p:spPr>
+          <a:xfrm>
+            <a:off x="3602736" y="3364992"/>
+            <a:ext cx="1554480" cy="475488"/>
           </a:xfrm>
           <a:prstGeom prst="rect">
             <a:avLst/>
@@ -26582,7 +26097,7 @@
                 <a:ea typeface="Trebuchet MS" pitchFamily="34" charset="-122"/>
                 <a:cs typeface="Trebuchet MS" pitchFamily="34" charset="-120"/>
               </a:rPr>
-              <a:t>rec</a:t>
+              <a:t>cor</a:t>
             </a:r>
             <a:endParaRPr lang="en-US" sz="1400" dirty="0"/>
           </a:p>
@@ -26590,14 +26105,14 @@
       </p:sp>
       <p:sp>
         <p:nvSpPr>
-          <p:cNvPr id="30" name="Text 28"/>
-          <p:cNvSpPr/>
-          <p:nvPr/>
-        </p:nvSpPr>
-        <p:spPr>
-          <a:xfrm>
-            <a:off x="6016752" y="3364992"/>
-            <a:ext cx="411480" cy="475488"/>
+          <p:cNvPr id="33" name="Text 31"/>
+          <p:cNvSpPr/>
+          <p:nvPr/>
+        </p:nvSpPr>
+        <p:spPr>
+          <a:xfrm>
+            <a:off x="5157216" y="3364992"/>
+            <a:ext cx="73152" cy="475488"/>
           </a:xfrm>
           <a:prstGeom prst="rect">
             <a:avLst/>
@@ -26629,14 +26144,14 @@
       </p:sp>
       <p:sp>
         <p:nvSpPr>
-          <p:cNvPr id="31" name="Shape 29"/>
-          <p:cNvSpPr/>
-          <p:nvPr/>
-        </p:nvSpPr>
-        <p:spPr>
-          <a:xfrm>
-            <a:off x="6428232" y="3364992"/>
-            <a:ext cx="1645920" cy="475488"/>
+          <p:cNvPr id="34" name="Shape 32"/>
+          <p:cNvSpPr/>
+          <p:nvPr/>
+        </p:nvSpPr>
+        <p:spPr>
+          <a:xfrm>
+            <a:off x="5230368" y="3364992"/>
+            <a:ext cx="1554480" cy="475488"/>
           </a:xfrm>
           <a:prstGeom prst="rect">
             <a:avLst>
@@ -26656,14 +26171,14 @@
       </p:sp>
       <p:sp>
         <p:nvSpPr>
-          <p:cNvPr id="32" name="Text 30"/>
-          <p:cNvSpPr/>
-          <p:nvPr/>
-        </p:nvSpPr>
-        <p:spPr>
-          <a:xfrm>
-            <a:off x="6428232" y="3364992"/>
-            <a:ext cx="1645920" cy="475488"/>
+          <p:cNvPr id="35" name="Text 33"/>
+          <p:cNvSpPr/>
+          <p:nvPr/>
+        </p:nvSpPr>
+        <p:spPr>
+          <a:xfrm>
+            <a:off x="5230368" y="3364992"/>
+            <a:ext cx="1554480" cy="475488"/>
           </a:xfrm>
           <a:prstGeom prst="rect">
             <a:avLst/>
@@ -26687,7 +26202,7 @@
                 <a:ea typeface="Trebuchet MS" pitchFamily="34" charset="-122"/>
                 <a:cs typeface="Trebuchet MS" pitchFamily="34" charset="-120"/>
               </a:rPr>
-              <a:t>tion</a:t>
+              <a:t>rect</a:t>
             </a:r>
             <a:endParaRPr lang="en-US" sz="1400" dirty="0"/>
           </a:p>
@@ -26695,7 +26210,112 @@
       </p:sp>
       <p:sp>
         <p:nvSpPr>
-          <p:cNvPr id="33" name="Shape 31"/>
+          <p:cNvPr id="36" name="Text 34"/>
+          <p:cNvSpPr/>
+          <p:nvPr/>
+        </p:nvSpPr>
+        <p:spPr>
+          <a:xfrm>
+            <a:off x="6784848" y="3364992"/>
+            <a:ext cx="73152" cy="475488"/>
+          </a:xfrm>
+          <a:prstGeom prst="rect">
+            <a:avLst/>
+          </a:prstGeom>
+          <a:noFill/>
+          <a:ln/>
+        </p:spPr>
+        <p:txBody>
+          <a:bodyPr wrap="square" lIns="0" tIns="0" rIns="0" bIns="0" rtlCol="0" anchor="ctr"/>
+          <a:lstStyle/>
+          <a:p>
+            <a:pPr algn="ctr" indent="0" marL="0">
+              <a:buNone/>
+            </a:pPr>
+            <a:r>
+              <a:rPr lang="en-US" sz="1600" b="1" dirty="0">
+                <a:solidFill>
+                  <a:srgbClr val="0D9488"/>
+                </a:solidFill>
+                <a:latin typeface="Trebuchet MS" pitchFamily="34" charset="0"/>
+                <a:ea typeface="Trebuchet MS" pitchFamily="34" charset="-122"/>
+                <a:cs typeface="Trebuchet MS" pitchFamily="34" charset="-120"/>
+              </a:rPr>
+              <a:t>·</a:t>
+            </a:r>
+            <a:endParaRPr lang="en-US" sz="1600" dirty="0"/>
+          </a:p>
+        </p:txBody>
+      </p:sp>
+      <p:sp>
+        <p:nvSpPr>
+          <p:cNvPr id="37" name="Shape 35"/>
+          <p:cNvSpPr/>
+          <p:nvPr/>
+        </p:nvSpPr>
+        <p:spPr>
+          <a:xfrm>
+            <a:off x="6858000" y="3364992"/>
+            <a:ext cx="1554480" cy="475488"/>
+          </a:xfrm>
+          <a:prstGeom prst="rect">
+            <a:avLst>
+              <a:gd name="adj" fmla="val 9615"/>
+            </a:avLst>
+          </a:prstGeom>
+          <a:solidFill>
+            <a:srgbClr val="FFFFFF"/>
+          </a:solidFill>
+          <a:ln w="12700">
+            <a:solidFill>
+              <a:srgbClr val="0D9488"/>
+            </a:solidFill>
+            <a:prstDash val="solid"/>
+          </a:ln>
+        </p:spPr>
+      </p:sp>
+      <p:sp>
+        <p:nvSpPr>
+          <p:cNvPr id="38" name="Text 36"/>
+          <p:cNvSpPr/>
+          <p:nvPr/>
+        </p:nvSpPr>
+        <p:spPr>
+          <a:xfrm>
+            <a:off x="6858000" y="3364992"/>
+            <a:ext cx="1554480" cy="475488"/>
+          </a:xfrm>
+          <a:prstGeom prst="rect">
+            <a:avLst/>
+          </a:prstGeom>
+          <a:noFill/>
+          <a:ln/>
+        </p:spPr>
+        <p:txBody>
+          <a:bodyPr wrap="square" lIns="0" tIns="0" rIns="0" bIns="0" rtlCol="0" anchor="ctr"/>
+          <a:lstStyle/>
+          <a:p>
+            <a:pPr algn="ctr" indent="0" marL="0">
+              <a:buNone/>
+            </a:pPr>
+            <a:r>
+              <a:rPr lang="en-US" sz="1400" b="1" dirty="0">
+                <a:solidFill>
+                  <a:srgbClr val="0D9488"/>
+                </a:solidFill>
+                <a:latin typeface="Trebuchet MS" pitchFamily="34" charset="0"/>
+                <a:ea typeface="Trebuchet MS" pitchFamily="34" charset="-122"/>
+                <a:cs typeface="Trebuchet MS" pitchFamily="34" charset="-120"/>
+              </a:rPr>
+              <a:t>ness</a:t>
+            </a:r>
+            <a:endParaRPr lang="en-US" sz="1400" dirty="0"/>
+          </a:p>
+        </p:txBody>
+      </p:sp>
+      <p:sp>
+        <p:nvSpPr>
+          <p:cNvPr id="39" name="Shape 37"/>
           <p:cNvSpPr/>
           <p:nvPr/>
         </p:nvSpPr>
@@ -26722,7 +26342,7 @@
       </p:sp>
       <p:sp>
         <p:nvSpPr>
-          <p:cNvPr id="34" name="Text 32"/>
+          <p:cNvPr id="40" name="Text 38"/>
           <p:cNvSpPr/>
           <p:nvPr/>
         </p:nvSpPr>
@@ -26761,7 +26381,7 @@
       </p:sp>
       <p:sp>
         <p:nvSpPr>
-          <p:cNvPr id="35" name="Shape 33"/>
+          <p:cNvPr id="41" name="Shape 39"/>
           <p:cNvSpPr/>
           <p:nvPr/>
         </p:nvSpPr>
@@ -26788,7 +26408,7 @@
       </p:sp>
       <p:sp>
         <p:nvSpPr>
-          <p:cNvPr id="36" name="Text 34"/>
+          <p:cNvPr id="42" name="Text 40"/>
           <p:cNvSpPr/>
           <p:nvPr/>
         </p:nvSpPr>
@@ -27250,7 +26870,7 @@
                 <a:ea typeface="Trebuchet MS" pitchFamily="34" charset="-122"/>
                 <a:cs typeface="Trebuchet MS" pitchFamily="34" charset="-120"/>
               </a:rPr>
-              <a:t>correction</a:t>
+              <a:t>incorrectness</a:t>
             </a:r>
             <a:endParaRPr lang="en-US" sz="2800" dirty="0"/>
           </a:p>
@@ -27330,7 +26950,7 @@
         </p:nvSpPr>
         <p:spPr>
           <a:xfrm>
-            <a:off x="2938272" y="2258568"/>
+            <a:off x="2221992" y="2258568"/>
             <a:ext cx="1828800" cy="292608"/>
           </a:xfrm>
           <a:prstGeom prst="rect">
@@ -27339,11 +26959,11 @@
             </a:avLst>
           </a:prstGeom>
           <a:solidFill>
-            <a:srgbClr val="CCFBF1"/>
+            <a:srgbClr val="DDD6FE"/>
           </a:solidFill>
           <a:ln w="19050">
             <a:solidFill>
-              <a:srgbClr val="0D9488"/>
+              <a:srgbClr val="7C3AED"/>
             </a:solidFill>
             <a:prstDash val="solid"/>
           </a:ln>
@@ -27364,7 +26984,7 @@
         </p:nvSpPr>
         <p:spPr>
           <a:xfrm>
-            <a:off x="2938272" y="2258568"/>
+            <a:off x="2221992" y="2258568"/>
             <a:ext cx="1828800" cy="292608"/>
           </a:xfrm>
           <a:prstGeom prst="rect">
@@ -27383,13 +27003,13 @@
             <a:r>
               <a:rPr lang="en-US" sz="1300" b="1" dirty="0">
                 <a:solidFill>
-                  <a:srgbClr val="0F766E"/>
+                  <a:srgbClr val="4C1D95"/>
                 </a:solidFill>
                 <a:latin typeface="Trebuchet MS" pitchFamily="34" charset="0"/>
                 <a:ea typeface="Trebuchet MS" pitchFamily="34" charset="-122"/>
                 <a:cs typeface="Trebuchet MS" pitchFamily="34" charset="-120"/>
               </a:rPr>
-              <a:t>correct</a:t>
+              <a:t>in</a:t>
             </a:r>
             <a:endParaRPr lang="en-US" sz="1300" dirty="0"/>
           </a:p>
@@ -27403,7 +27023,7 @@
         </p:nvSpPr>
         <p:spPr>
           <a:xfrm>
-            <a:off x="2938272" y="2569464"/>
+            <a:off x="2221992" y="2569464"/>
             <a:ext cx="1828800" cy="201168"/>
           </a:xfrm>
           <a:prstGeom prst="rect">
@@ -27428,7 +27048,7 @@
                 <a:ea typeface="Calibri" pitchFamily="34" charset="-122"/>
                 <a:cs typeface="Calibri" pitchFamily="34" charset="-120"/>
               </a:rPr>
-              <a:t>right, accurate</a:t>
+              <a:t>not</a:t>
             </a:r>
             <a:endParaRPr lang="en-US" sz="850" dirty="0"/>
           </a:p>
@@ -27442,7 +27062,7 @@
         </p:nvSpPr>
         <p:spPr>
           <a:xfrm>
-            <a:off x="5803392" y="2258568"/>
+            <a:off x="4370832" y="2258568"/>
             <a:ext cx="1828800" cy="292608"/>
           </a:xfrm>
           <a:prstGeom prst="rect">
@@ -27451,11 +27071,11 @@
             </a:avLst>
           </a:prstGeom>
           <a:solidFill>
-            <a:srgbClr val="FCE7F3"/>
+            <a:srgbClr val="CCFBF1"/>
           </a:solidFill>
           <a:ln w="19050">
             <a:solidFill>
-              <a:srgbClr val="DB2777"/>
+              <a:srgbClr val="0D9488"/>
             </a:solidFill>
             <a:prstDash val="solid"/>
           </a:ln>
@@ -27476,7 +27096,7 @@
         </p:nvSpPr>
         <p:spPr>
           <a:xfrm>
-            <a:off x="5803392" y="2258568"/>
+            <a:off x="4370832" y="2258568"/>
             <a:ext cx="1828800" cy="292608"/>
           </a:xfrm>
           <a:prstGeom prst="rect">
@@ -27495,13 +27115,13 @@
             <a:r>
               <a:rPr lang="en-US" sz="1300" b="1" dirty="0">
                 <a:solidFill>
-                  <a:srgbClr val="9D174D"/>
+                  <a:srgbClr val="0F766E"/>
                 </a:solidFill>
                 <a:latin typeface="Trebuchet MS" pitchFamily="34" charset="0"/>
                 <a:ea typeface="Trebuchet MS" pitchFamily="34" charset="-122"/>
                 <a:cs typeface="Trebuchet MS" pitchFamily="34" charset="-120"/>
               </a:rPr>
-              <a:t>ion</a:t>
+              <a:t>correct</a:t>
             </a:r>
             <a:endParaRPr lang="en-US" sz="1300" dirty="0"/>
           </a:p>
@@ -27515,7 +27135,7 @@
         </p:nvSpPr>
         <p:spPr>
           <a:xfrm>
-            <a:off x="5803392" y="2569464"/>
+            <a:off x="4370832" y="2569464"/>
             <a:ext cx="1828800" cy="201168"/>
           </a:xfrm>
           <a:prstGeom prst="rect">
@@ -27540,7 +27160,7 @@
                 <a:ea typeface="Calibri" pitchFamily="34" charset="-122"/>
                 <a:cs typeface="Calibri" pitchFamily="34" charset="-120"/>
               </a:rPr>
-              <a:t>act or result of</a:t>
+              <a:t>right, free from error</a:t>
             </a:r>
             <a:endParaRPr lang="en-US" sz="850" dirty="0"/>
           </a:p>
@@ -27549,6 +27169,118 @@
       <p:sp>
         <p:nvSpPr>
           <p:cNvPr id="22" name="Shape 20"/>
+          <p:cNvSpPr/>
+          <p:nvPr/>
+        </p:nvSpPr>
+        <p:spPr>
+          <a:xfrm>
+            <a:off x="6519672" y="2258568"/>
+            <a:ext cx="1828800" cy="292608"/>
+          </a:xfrm>
+          <a:prstGeom prst="rect">
+            <a:avLst>
+              <a:gd name="adj" fmla="val 25000"/>
+            </a:avLst>
+          </a:prstGeom>
+          <a:solidFill>
+            <a:srgbClr val="FCE7F3"/>
+          </a:solidFill>
+          <a:ln w="19050">
+            <a:solidFill>
+              <a:srgbClr val="DB2777"/>
+            </a:solidFill>
+            <a:prstDash val="solid"/>
+          </a:ln>
+          <a:effectLst>
+            <a:outerShdw sx="100000" sy="100000" kx="0" ky="0" algn="bl" rotWithShape="0" blurRad="101600" dist="38100" dir="8100000">
+              <a:srgbClr val="000000">
+                <a:alpha val="12000"/>
+              </a:srgbClr>
+            </a:outerShdw>
+          </a:effectLst>
+        </p:spPr>
+      </p:sp>
+      <p:sp>
+        <p:nvSpPr>
+          <p:cNvPr id="23" name="Text 21"/>
+          <p:cNvSpPr/>
+          <p:nvPr/>
+        </p:nvSpPr>
+        <p:spPr>
+          <a:xfrm>
+            <a:off x="6519672" y="2258568"/>
+            <a:ext cx="1828800" cy="292608"/>
+          </a:xfrm>
+          <a:prstGeom prst="rect">
+            <a:avLst/>
+          </a:prstGeom>
+          <a:noFill/>
+          <a:ln/>
+        </p:spPr>
+        <p:txBody>
+          <a:bodyPr wrap="square" lIns="0" tIns="0" rIns="0" bIns="0" rtlCol="0" anchor="ctr"/>
+          <a:lstStyle/>
+          <a:p>
+            <a:pPr algn="ctr" indent="0" marL="0">
+              <a:buNone/>
+            </a:pPr>
+            <a:r>
+              <a:rPr lang="en-US" sz="1300" b="1" dirty="0">
+                <a:solidFill>
+                  <a:srgbClr val="9D174D"/>
+                </a:solidFill>
+                <a:latin typeface="Trebuchet MS" pitchFamily="34" charset="0"/>
+                <a:ea typeface="Trebuchet MS" pitchFamily="34" charset="-122"/>
+                <a:cs typeface="Trebuchet MS" pitchFamily="34" charset="-120"/>
+              </a:rPr>
+              <a:t>ness</a:t>
+            </a:r>
+            <a:endParaRPr lang="en-US" sz="1300" dirty="0"/>
+          </a:p>
+        </p:txBody>
+      </p:sp>
+      <p:sp>
+        <p:nvSpPr>
+          <p:cNvPr id="24" name="Text 22"/>
+          <p:cNvSpPr/>
+          <p:nvPr/>
+        </p:nvSpPr>
+        <p:spPr>
+          <a:xfrm>
+            <a:off x="6519672" y="2569464"/>
+            <a:ext cx="1828800" cy="201168"/>
+          </a:xfrm>
+          <a:prstGeom prst="rect">
+            <a:avLst/>
+          </a:prstGeom>
+          <a:noFill/>
+          <a:ln/>
+        </p:spPr>
+        <p:txBody>
+          <a:bodyPr wrap="square" lIns="0" tIns="0" rIns="0" bIns="0" rtlCol="0" anchor="t"/>
+          <a:lstStyle/>
+          <a:p>
+            <a:pPr algn="ctr" indent="0" marL="0">
+              <a:buNone/>
+            </a:pPr>
+            <a:r>
+              <a:rPr lang="en-US" sz="850" dirty="0">
+                <a:solidFill>
+                  <a:srgbClr val="475569"/>
+                </a:solidFill>
+                <a:latin typeface="Calibri" pitchFamily="34" charset="0"/>
+                <a:ea typeface="Calibri" pitchFamily="34" charset="-122"/>
+                <a:cs typeface="Calibri" pitchFamily="34" charset="-120"/>
+              </a:rPr>
+              <a:t>state or quality of</a:t>
+            </a:r>
+            <a:endParaRPr lang="en-US" sz="850" dirty="0"/>
+          </a:p>
+        </p:txBody>
+      </p:sp>
+      <p:sp>
+        <p:nvSpPr>
+          <p:cNvPr id="25" name="Shape 23"/>
           <p:cNvSpPr/>
           <p:nvPr/>
         </p:nvSpPr>
@@ -27575,7 +27307,7 @@
       </p:sp>
       <p:sp>
         <p:nvSpPr>
-          <p:cNvPr id="23" name="Text 21"/>
+          <p:cNvPr id="26" name="Text 24"/>
           <p:cNvSpPr/>
           <p:nvPr/>
         </p:nvSpPr>
@@ -27614,7 +27346,7 @@
       </p:sp>
       <p:sp>
         <p:nvSpPr>
-          <p:cNvPr id="24" name="Shape 22"/>
+          <p:cNvPr id="27" name="Shape 25"/>
           <p:cNvSpPr/>
           <p:nvPr/>
         </p:nvSpPr>
@@ -27641,14 +27373,14 @@
       </p:sp>
       <p:sp>
         <p:nvSpPr>
-          <p:cNvPr id="25" name="Shape 23"/>
-          <p:cNvSpPr/>
-          <p:nvPr/>
-        </p:nvSpPr>
-        <p:spPr>
-          <a:xfrm>
-            <a:off x="2313432" y="3364992"/>
-            <a:ext cx="1645920" cy="475488"/>
+          <p:cNvPr id="28" name="Shape 26"/>
+          <p:cNvSpPr/>
+          <p:nvPr/>
+        </p:nvSpPr>
+        <p:spPr>
+          <a:xfrm>
+            <a:off x="1975104" y="3364992"/>
+            <a:ext cx="1554480" cy="475488"/>
           </a:xfrm>
           <a:prstGeom prst="rect">
             <a:avLst>
@@ -27668,14 +27400,14 @@
       </p:sp>
       <p:sp>
         <p:nvSpPr>
-          <p:cNvPr id="26" name="Text 24"/>
-          <p:cNvSpPr/>
-          <p:nvPr/>
-        </p:nvSpPr>
-        <p:spPr>
-          <a:xfrm>
-            <a:off x="2313432" y="3364992"/>
-            <a:ext cx="1645920" cy="475488"/>
+          <p:cNvPr id="29" name="Text 27"/>
+          <p:cNvSpPr/>
+          <p:nvPr/>
+        </p:nvSpPr>
+        <p:spPr>
+          <a:xfrm>
+            <a:off x="1975104" y="3364992"/>
+            <a:ext cx="1554480" cy="475488"/>
           </a:xfrm>
           <a:prstGeom prst="rect">
             <a:avLst/>
@@ -27699,7 +27431,7 @@
                 <a:ea typeface="Trebuchet MS" pitchFamily="34" charset="-122"/>
                 <a:cs typeface="Trebuchet MS" pitchFamily="34" charset="-120"/>
               </a:rPr>
-              <a:t>cor</a:t>
+              <a:t>in</a:t>
             </a:r>
             <a:endParaRPr lang="en-US" sz="1400" dirty="0"/>
           </a:p>
@@ -27707,14 +27439,14 @@
       </p:sp>
       <p:sp>
         <p:nvSpPr>
-          <p:cNvPr id="27" name="Text 25"/>
-          <p:cNvSpPr/>
-          <p:nvPr/>
-        </p:nvSpPr>
-        <p:spPr>
-          <a:xfrm>
-            <a:off x="3959352" y="3364992"/>
-            <a:ext cx="411480" cy="475488"/>
+          <p:cNvPr id="30" name="Text 28"/>
+          <p:cNvSpPr/>
+          <p:nvPr/>
+        </p:nvSpPr>
+        <p:spPr>
+          <a:xfrm>
+            <a:off x="3529584" y="3364992"/>
+            <a:ext cx="73152" cy="475488"/>
           </a:xfrm>
           <a:prstGeom prst="rect">
             <a:avLst/>
@@ -27746,14 +27478,14 @@
       </p:sp>
       <p:sp>
         <p:nvSpPr>
-          <p:cNvPr id="28" name="Shape 26"/>
-          <p:cNvSpPr/>
-          <p:nvPr/>
-        </p:nvSpPr>
-        <p:spPr>
-          <a:xfrm>
-            <a:off x="4370832" y="3364992"/>
-            <a:ext cx="1645920" cy="475488"/>
+          <p:cNvPr id="31" name="Shape 29"/>
+          <p:cNvSpPr/>
+          <p:nvPr/>
+        </p:nvSpPr>
+        <p:spPr>
+          <a:xfrm>
+            <a:off x="3602736" y="3364992"/>
+            <a:ext cx="1554480" cy="475488"/>
           </a:xfrm>
           <a:prstGeom prst="rect">
             <a:avLst>
@@ -27773,14 +27505,14 @@
       </p:sp>
       <p:sp>
         <p:nvSpPr>
-          <p:cNvPr id="29" name="Text 27"/>
-          <p:cNvSpPr/>
-          <p:nvPr/>
-        </p:nvSpPr>
-        <p:spPr>
-          <a:xfrm>
-            <a:off x="4370832" y="3364992"/>
-            <a:ext cx="1645920" cy="475488"/>
+          <p:cNvPr id="32" name="Text 30"/>
+          <p:cNvSpPr/>
+          <p:nvPr/>
+        </p:nvSpPr>
+        <p:spPr>
+          <a:xfrm>
+            <a:off x="3602736" y="3364992"/>
+            <a:ext cx="1554480" cy="475488"/>
           </a:xfrm>
           <a:prstGeom prst="rect">
             <a:avLst/>
@@ -27804,7 +27536,7 @@
                 <a:ea typeface="Trebuchet MS" pitchFamily="34" charset="-122"/>
                 <a:cs typeface="Trebuchet MS" pitchFamily="34" charset="-120"/>
               </a:rPr>
-              <a:t>rec</a:t>
+              <a:t>cor</a:t>
             </a:r>
             <a:endParaRPr lang="en-US" sz="1400" dirty="0"/>
           </a:p>
@@ -27812,14 +27544,14 @@
       </p:sp>
       <p:sp>
         <p:nvSpPr>
-          <p:cNvPr id="30" name="Text 28"/>
-          <p:cNvSpPr/>
-          <p:nvPr/>
-        </p:nvSpPr>
-        <p:spPr>
-          <a:xfrm>
-            <a:off x="6016752" y="3364992"/>
-            <a:ext cx="411480" cy="475488"/>
+          <p:cNvPr id="33" name="Text 31"/>
+          <p:cNvSpPr/>
+          <p:nvPr/>
+        </p:nvSpPr>
+        <p:spPr>
+          <a:xfrm>
+            <a:off x="5157216" y="3364992"/>
+            <a:ext cx="73152" cy="475488"/>
           </a:xfrm>
           <a:prstGeom prst="rect">
             <a:avLst/>
@@ -27851,14 +27583,14 @@
       </p:sp>
       <p:sp>
         <p:nvSpPr>
-          <p:cNvPr id="31" name="Shape 29"/>
-          <p:cNvSpPr/>
-          <p:nvPr/>
-        </p:nvSpPr>
-        <p:spPr>
-          <a:xfrm>
-            <a:off x="6428232" y="3364992"/>
-            <a:ext cx="1645920" cy="475488"/>
+          <p:cNvPr id="34" name="Shape 32"/>
+          <p:cNvSpPr/>
+          <p:nvPr/>
+        </p:nvSpPr>
+        <p:spPr>
+          <a:xfrm>
+            <a:off x="5230368" y="3364992"/>
+            <a:ext cx="1554480" cy="475488"/>
           </a:xfrm>
           <a:prstGeom prst="rect">
             <a:avLst>
@@ -27878,14 +27610,14 @@
       </p:sp>
       <p:sp>
         <p:nvSpPr>
-          <p:cNvPr id="32" name="Text 30"/>
-          <p:cNvSpPr/>
-          <p:nvPr/>
-        </p:nvSpPr>
-        <p:spPr>
-          <a:xfrm>
-            <a:off x="6428232" y="3364992"/>
-            <a:ext cx="1645920" cy="475488"/>
+          <p:cNvPr id="35" name="Text 33"/>
+          <p:cNvSpPr/>
+          <p:nvPr/>
+        </p:nvSpPr>
+        <p:spPr>
+          <a:xfrm>
+            <a:off x="5230368" y="3364992"/>
+            <a:ext cx="1554480" cy="475488"/>
           </a:xfrm>
           <a:prstGeom prst="rect">
             <a:avLst/>
@@ -27909,7 +27641,7 @@
                 <a:ea typeface="Trebuchet MS" pitchFamily="34" charset="-122"/>
                 <a:cs typeface="Trebuchet MS" pitchFamily="34" charset="-120"/>
               </a:rPr>
-              <a:t>tion</a:t>
+              <a:t>rect</a:t>
             </a:r>
             <a:endParaRPr lang="en-US" sz="1400" dirty="0"/>
           </a:p>
@@ -27917,7 +27649,112 @@
       </p:sp>
       <p:sp>
         <p:nvSpPr>
-          <p:cNvPr id="33" name="Shape 31"/>
+          <p:cNvPr id="36" name="Text 34"/>
+          <p:cNvSpPr/>
+          <p:nvPr/>
+        </p:nvSpPr>
+        <p:spPr>
+          <a:xfrm>
+            <a:off x="6784848" y="3364992"/>
+            <a:ext cx="73152" cy="475488"/>
+          </a:xfrm>
+          <a:prstGeom prst="rect">
+            <a:avLst/>
+          </a:prstGeom>
+          <a:noFill/>
+          <a:ln/>
+        </p:spPr>
+        <p:txBody>
+          <a:bodyPr wrap="square" lIns="0" tIns="0" rIns="0" bIns="0" rtlCol="0" anchor="ctr"/>
+          <a:lstStyle/>
+          <a:p>
+            <a:pPr algn="ctr" indent="0" marL="0">
+              <a:buNone/>
+            </a:pPr>
+            <a:r>
+              <a:rPr lang="en-US" sz="1600" b="1" dirty="0">
+                <a:solidFill>
+                  <a:srgbClr val="0D9488"/>
+                </a:solidFill>
+                <a:latin typeface="Trebuchet MS" pitchFamily="34" charset="0"/>
+                <a:ea typeface="Trebuchet MS" pitchFamily="34" charset="-122"/>
+                <a:cs typeface="Trebuchet MS" pitchFamily="34" charset="-120"/>
+              </a:rPr>
+              <a:t>·</a:t>
+            </a:r>
+            <a:endParaRPr lang="en-US" sz="1600" dirty="0"/>
+          </a:p>
+        </p:txBody>
+      </p:sp>
+      <p:sp>
+        <p:nvSpPr>
+          <p:cNvPr id="37" name="Shape 35"/>
+          <p:cNvSpPr/>
+          <p:nvPr/>
+        </p:nvSpPr>
+        <p:spPr>
+          <a:xfrm>
+            <a:off x="6858000" y="3364992"/>
+            <a:ext cx="1554480" cy="475488"/>
+          </a:xfrm>
+          <a:prstGeom prst="rect">
+            <a:avLst>
+              <a:gd name="adj" fmla="val 9615"/>
+            </a:avLst>
+          </a:prstGeom>
+          <a:solidFill>
+            <a:srgbClr val="FFFFFF"/>
+          </a:solidFill>
+          <a:ln w="12700">
+            <a:solidFill>
+              <a:srgbClr val="0D9488"/>
+            </a:solidFill>
+            <a:prstDash val="solid"/>
+          </a:ln>
+        </p:spPr>
+      </p:sp>
+      <p:sp>
+        <p:nvSpPr>
+          <p:cNvPr id="38" name="Text 36"/>
+          <p:cNvSpPr/>
+          <p:nvPr/>
+        </p:nvSpPr>
+        <p:spPr>
+          <a:xfrm>
+            <a:off x="6858000" y="3364992"/>
+            <a:ext cx="1554480" cy="475488"/>
+          </a:xfrm>
+          <a:prstGeom prst="rect">
+            <a:avLst/>
+          </a:prstGeom>
+          <a:noFill/>
+          <a:ln/>
+        </p:spPr>
+        <p:txBody>
+          <a:bodyPr wrap="square" lIns="0" tIns="0" rIns="0" bIns="0" rtlCol="0" anchor="ctr"/>
+          <a:lstStyle/>
+          <a:p>
+            <a:pPr algn="ctr" indent="0" marL="0">
+              <a:buNone/>
+            </a:pPr>
+            <a:r>
+              <a:rPr lang="en-US" sz="1400" b="1" dirty="0">
+                <a:solidFill>
+                  <a:srgbClr val="0D9488"/>
+                </a:solidFill>
+                <a:latin typeface="Trebuchet MS" pitchFamily="34" charset="0"/>
+                <a:ea typeface="Trebuchet MS" pitchFamily="34" charset="-122"/>
+                <a:cs typeface="Trebuchet MS" pitchFamily="34" charset="-120"/>
+              </a:rPr>
+              <a:t>ness</a:t>
+            </a:r>
+            <a:endParaRPr lang="en-US" sz="1400" dirty="0"/>
+          </a:p>
+        </p:txBody>
+      </p:sp>
+      <p:sp>
+        <p:nvSpPr>
+          <p:cNvPr id="39" name="Shape 37"/>
           <p:cNvSpPr/>
           <p:nvPr/>
         </p:nvSpPr>
@@ -27944,7 +27781,7 @@
       </p:sp>
       <p:sp>
         <p:nvSpPr>
-          <p:cNvPr id="34" name="Text 32"/>
+          <p:cNvPr id="40" name="Text 38"/>
           <p:cNvSpPr/>
           <p:nvPr/>
         </p:nvSpPr>
@@ -27983,7 +27820,7 @@
       </p:sp>
       <p:sp>
         <p:nvSpPr>
-          <p:cNvPr id="35" name="Shape 33"/>
+          <p:cNvPr id="41" name="Shape 39"/>
           <p:cNvSpPr/>
           <p:nvPr/>
         </p:nvSpPr>
@@ -28010,14 +27847,14 @@
       </p:sp>
       <p:sp>
         <p:nvSpPr>
-          <p:cNvPr id="36" name="Shape 34"/>
-          <p:cNvSpPr/>
-          <p:nvPr/>
-        </p:nvSpPr>
-        <p:spPr>
-          <a:xfrm>
-            <a:off x="2023872" y="4169664"/>
-            <a:ext cx="685800" cy="384048"/>
+          <p:cNvPr id="42" name="Shape 40"/>
+          <p:cNvSpPr/>
+          <p:nvPr/>
+        </p:nvSpPr>
+        <p:spPr>
+          <a:xfrm>
+            <a:off x="1952244" y="4169664"/>
+            <a:ext cx="543652" cy="384048"/>
           </a:xfrm>
           <a:prstGeom prst="rect">
             <a:avLst>
@@ -28037,14 +27874,14 @@
       </p:sp>
       <p:sp>
         <p:nvSpPr>
-          <p:cNvPr id="37" name="Text 35"/>
-          <p:cNvSpPr/>
-          <p:nvPr/>
-        </p:nvSpPr>
-        <p:spPr>
-          <a:xfrm>
-            <a:off x="2023872" y="4169664"/>
-            <a:ext cx="685800" cy="384048"/>
+          <p:cNvPr id="43" name="Text 41"/>
+          <p:cNvSpPr/>
+          <p:nvPr/>
+        </p:nvSpPr>
+        <p:spPr>
+          <a:xfrm>
+            <a:off x="1952244" y="4169664"/>
+            <a:ext cx="543652" cy="384048"/>
           </a:xfrm>
           <a:prstGeom prst="rect">
             <a:avLst/>
@@ -28068,6 +27905,138 @@
                 <a:ea typeface="Trebuchet MS" pitchFamily="34" charset="-122"/>
                 <a:cs typeface="Trebuchet MS" pitchFamily="34" charset="-120"/>
               </a:rPr>
+              <a:t>i</a:t>
+            </a:r>
+            <a:endParaRPr lang="en-US" sz="900" dirty="0"/>
+          </a:p>
+        </p:txBody>
+      </p:sp>
+      <p:sp>
+        <p:nvSpPr>
+          <p:cNvPr id="44" name="Shape 42"/>
+          <p:cNvSpPr/>
+          <p:nvPr/>
+        </p:nvSpPr>
+        <p:spPr>
+          <a:xfrm>
+            <a:off x="2546188" y="4169664"/>
+            <a:ext cx="543652" cy="384048"/>
+          </a:xfrm>
+          <a:prstGeom prst="rect">
+            <a:avLst>
+              <a:gd name="adj" fmla="val 9524"/>
+            </a:avLst>
+          </a:prstGeom>
+          <a:solidFill>
+            <a:srgbClr val="FFFFFF"/>
+          </a:solidFill>
+          <a:ln w="12700">
+            <a:solidFill>
+              <a:srgbClr val="DB2777"/>
+            </a:solidFill>
+            <a:prstDash val="solid"/>
+          </a:ln>
+        </p:spPr>
+      </p:sp>
+      <p:sp>
+        <p:nvSpPr>
+          <p:cNvPr id="45" name="Text 43"/>
+          <p:cNvSpPr/>
+          <p:nvPr/>
+        </p:nvSpPr>
+        <p:spPr>
+          <a:xfrm>
+            <a:off x="2546188" y="4169664"/>
+            <a:ext cx="543652" cy="384048"/>
+          </a:xfrm>
+          <a:prstGeom prst="rect">
+            <a:avLst/>
+          </a:prstGeom>
+          <a:noFill/>
+          <a:ln/>
+        </p:spPr>
+        <p:txBody>
+          <a:bodyPr wrap="square" lIns="0" tIns="0" rIns="0" bIns="0" rtlCol="0" anchor="ctr"/>
+          <a:lstStyle/>
+          <a:p>
+            <a:pPr algn="ctr" indent="0" marL="0">
+              <a:buNone/>
+            </a:pPr>
+            <a:r>
+              <a:rPr lang="en-US" sz="900" b="1" dirty="0">
+                <a:solidFill>
+                  <a:srgbClr val="9D174D"/>
+                </a:solidFill>
+                <a:latin typeface="Trebuchet MS" pitchFamily="34" charset="0"/>
+                <a:ea typeface="Trebuchet MS" pitchFamily="34" charset="-122"/>
+                <a:cs typeface="Trebuchet MS" pitchFamily="34" charset="-120"/>
+              </a:rPr>
+              <a:t>n</a:t>
+            </a:r>
+            <a:endParaRPr lang="en-US" sz="900" dirty="0"/>
+          </a:p>
+        </p:txBody>
+      </p:sp>
+      <p:sp>
+        <p:nvSpPr>
+          <p:cNvPr id="46" name="Shape 44"/>
+          <p:cNvSpPr/>
+          <p:nvPr/>
+        </p:nvSpPr>
+        <p:spPr>
+          <a:xfrm>
+            <a:off x="3140133" y="4169664"/>
+            <a:ext cx="543652" cy="384048"/>
+          </a:xfrm>
+          <a:prstGeom prst="rect">
+            <a:avLst>
+              <a:gd name="adj" fmla="val 9524"/>
+            </a:avLst>
+          </a:prstGeom>
+          <a:solidFill>
+            <a:srgbClr val="FFFFFF"/>
+          </a:solidFill>
+          <a:ln w="12700">
+            <a:solidFill>
+              <a:srgbClr val="DB2777"/>
+            </a:solidFill>
+            <a:prstDash val="solid"/>
+          </a:ln>
+        </p:spPr>
+      </p:sp>
+      <p:sp>
+        <p:nvSpPr>
+          <p:cNvPr id="47" name="Text 45"/>
+          <p:cNvSpPr/>
+          <p:nvPr/>
+        </p:nvSpPr>
+        <p:spPr>
+          <a:xfrm>
+            <a:off x="3140133" y="4169664"/>
+            <a:ext cx="543652" cy="384048"/>
+          </a:xfrm>
+          <a:prstGeom prst="rect">
+            <a:avLst/>
+          </a:prstGeom>
+          <a:noFill/>
+          <a:ln/>
+        </p:spPr>
+        <p:txBody>
+          <a:bodyPr wrap="square" lIns="0" tIns="0" rIns="0" bIns="0" rtlCol="0" anchor="ctr"/>
+          <a:lstStyle/>
+          <a:p>
+            <a:pPr algn="ctr" indent="0" marL="0">
+              <a:buNone/>
+            </a:pPr>
+            <a:r>
+              <a:rPr lang="en-US" sz="900" b="1" dirty="0">
+                <a:solidFill>
+                  <a:srgbClr val="9D174D"/>
+                </a:solidFill>
+                <a:latin typeface="Trebuchet MS" pitchFamily="34" charset="0"/>
+                <a:ea typeface="Trebuchet MS" pitchFamily="34" charset="-122"/>
+                <a:cs typeface="Trebuchet MS" pitchFamily="34" charset="-120"/>
+              </a:rPr>
               <a:t>c</a:t>
             </a:r>
             <a:endParaRPr lang="en-US" sz="900" dirty="0"/>
@@ -28076,14 +28045,14 @@
       </p:sp>
       <p:sp>
         <p:nvSpPr>
-          <p:cNvPr id="38" name="Text 36"/>
-          <p:cNvSpPr/>
-          <p:nvPr/>
-        </p:nvSpPr>
-        <p:spPr>
-          <a:xfrm>
-            <a:off x="2023872" y="4572000"/>
-            <a:ext cx="685800" cy="219456"/>
+          <p:cNvPr id="48" name="Text 46"/>
+          <p:cNvSpPr/>
+          <p:nvPr/>
+        </p:nvSpPr>
+        <p:spPr>
+          <a:xfrm>
+            <a:off x="3140133" y="4572000"/>
+            <a:ext cx="543652" cy="219456"/>
           </a:xfrm>
           <a:prstGeom prst="rect">
             <a:avLst/>
@@ -28115,14 +28084,14 @@
       </p:sp>
       <p:sp>
         <p:nvSpPr>
-          <p:cNvPr id="39" name="Shape 37"/>
-          <p:cNvSpPr/>
-          <p:nvPr/>
-        </p:nvSpPr>
-        <p:spPr>
-          <a:xfrm>
-            <a:off x="2831592" y="4169664"/>
-            <a:ext cx="685800" cy="384048"/>
+          <p:cNvPr id="49" name="Shape 47"/>
+          <p:cNvSpPr/>
+          <p:nvPr/>
+        </p:nvSpPr>
+        <p:spPr>
+          <a:xfrm>
+            <a:off x="3734077" y="4169664"/>
+            <a:ext cx="543652" cy="384048"/>
           </a:xfrm>
           <a:prstGeom prst="rect">
             <a:avLst>
@@ -28142,14 +28111,14 @@
       </p:sp>
       <p:sp>
         <p:nvSpPr>
-          <p:cNvPr id="40" name="Text 38"/>
-          <p:cNvSpPr/>
-          <p:nvPr/>
-        </p:nvSpPr>
-        <p:spPr>
-          <a:xfrm>
-            <a:off x="2831592" y="4169664"/>
-            <a:ext cx="685800" cy="384048"/>
+          <p:cNvPr id="50" name="Text 48"/>
+          <p:cNvSpPr/>
+          <p:nvPr/>
+        </p:nvSpPr>
+        <p:spPr>
+          <a:xfrm>
+            <a:off x="3734077" y="4169664"/>
+            <a:ext cx="543652" cy="384048"/>
           </a:xfrm>
           <a:prstGeom prst="rect">
             <a:avLst/>
@@ -28181,14 +28150,14 @@
       </p:sp>
       <p:sp>
         <p:nvSpPr>
-          <p:cNvPr id="41" name="Shape 39"/>
-          <p:cNvSpPr/>
-          <p:nvPr/>
-        </p:nvSpPr>
-        <p:spPr>
-          <a:xfrm>
-            <a:off x="3639312" y="4169664"/>
-            <a:ext cx="685800" cy="384048"/>
+          <p:cNvPr id="51" name="Shape 49"/>
+          <p:cNvSpPr/>
+          <p:nvPr/>
+        </p:nvSpPr>
+        <p:spPr>
+          <a:xfrm>
+            <a:off x="4328021" y="4169664"/>
+            <a:ext cx="543652" cy="384048"/>
           </a:xfrm>
           <a:prstGeom prst="rect">
             <a:avLst>
@@ -28208,14 +28177,14 @@
       </p:sp>
       <p:sp>
         <p:nvSpPr>
-          <p:cNvPr id="42" name="Text 40"/>
-          <p:cNvSpPr/>
-          <p:nvPr/>
-        </p:nvSpPr>
-        <p:spPr>
-          <a:xfrm>
-            <a:off x="3639312" y="4169664"/>
-            <a:ext cx="685800" cy="384048"/>
+          <p:cNvPr id="52" name="Text 50"/>
+          <p:cNvSpPr/>
+          <p:nvPr/>
+        </p:nvSpPr>
+        <p:spPr>
+          <a:xfrm>
+            <a:off x="4328021" y="4169664"/>
+            <a:ext cx="543652" cy="384048"/>
           </a:xfrm>
           <a:prstGeom prst="rect">
             <a:avLst/>
@@ -28247,14 +28216,14 @@
       </p:sp>
       <p:sp>
         <p:nvSpPr>
-          <p:cNvPr id="43" name="Shape 41"/>
-          <p:cNvSpPr/>
-          <p:nvPr/>
-        </p:nvSpPr>
-        <p:spPr>
-          <a:xfrm>
-            <a:off x="4447032" y="4169664"/>
-            <a:ext cx="685800" cy="384048"/>
+          <p:cNvPr id="53" name="Shape 51"/>
+          <p:cNvSpPr/>
+          <p:nvPr/>
+        </p:nvSpPr>
+        <p:spPr>
+          <a:xfrm>
+            <a:off x="4921966" y="4169664"/>
+            <a:ext cx="543652" cy="384048"/>
           </a:xfrm>
           <a:prstGeom prst="rect">
             <a:avLst>
@@ -28274,14 +28243,14 @@
       </p:sp>
       <p:sp>
         <p:nvSpPr>
-          <p:cNvPr id="44" name="Text 42"/>
-          <p:cNvSpPr/>
-          <p:nvPr/>
-        </p:nvSpPr>
-        <p:spPr>
-          <a:xfrm>
-            <a:off x="4447032" y="4169664"/>
-            <a:ext cx="685800" cy="384048"/>
+          <p:cNvPr id="54" name="Text 52"/>
+          <p:cNvSpPr/>
+          <p:nvPr/>
+        </p:nvSpPr>
+        <p:spPr>
+          <a:xfrm>
+            <a:off x="4921966" y="4169664"/>
+            <a:ext cx="543652" cy="384048"/>
           </a:xfrm>
           <a:prstGeom prst="rect">
             <a:avLst/>
@@ -28313,14 +28282,14 @@
       </p:sp>
       <p:sp>
         <p:nvSpPr>
-          <p:cNvPr id="45" name="Shape 43"/>
-          <p:cNvSpPr/>
-          <p:nvPr/>
-        </p:nvSpPr>
-        <p:spPr>
-          <a:xfrm>
-            <a:off x="5254752" y="4169664"/>
-            <a:ext cx="685800" cy="384048"/>
+          <p:cNvPr id="55" name="Shape 53"/>
+          <p:cNvSpPr/>
+          <p:nvPr/>
+        </p:nvSpPr>
+        <p:spPr>
+          <a:xfrm>
+            <a:off x="5515910" y="4169664"/>
+            <a:ext cx="543652" cy="384048"/>
           </a:xfrm>
           <a:prstGeom prst="rect">
             <a:avLst>
@@ -28340,14 +28309,14 @@
       </p:sp>
       <p:sp>
         <p:nvSpPr>
-          <p:cNvPr id="46" name="Text 44"/>
-          <p:cNvSpPr/>
-          <p:nvPr/>
-        </p:nvSpPr>
-        <p:spPr>
-          <a:xfrm>
-            <a:off x="5254752" y="4169664"/>
-            <a:ext cx="685800" cy="384048"/>
+          <p:cNvPr id="56" name="Text 54"/>
+          <p:cNvSpPr/>
+          <p:nvPr/>
+        </p:nvSpPr>
+        <p:spPr>
+          <a:xfrm>
+            <a:off x="5515910" y="4169664"/>
+            <a:ext cx="543652" cy="384048"/>
           </a:xfrm>
           <a:prstGeom prst="rect">
             <a:avLst/>
@@ -28379,14 +28348,14 @@
       </p:sp>
       <p:sp>
         <p:nvSpPr>
-          <p:cNvPr id="47" name="Text 45"/>
-          <p:cNvSpPr/>
-          <p:nvPr/>
-        </p:nvSpPr>
-        <p:spPr>
-          <a:xfrm>
-            <a:off x="5254752" y="4572000"/>
-            <a:ext cx="685800" cy="219456"/>
+          <p:cNvPr id="57" name="Text 55"/>
+          <p:cNvSpPr/>
+          <p:nvPr/>
+        </p:nvSpPr>
+        <p:spPr>
+          <a:xfrm>
+            <a:off x="5515910" y="4572000"/>
+            <a:ext cx="543652" cy="219456"/>
           </a:xfrm>
           <a:prstGeom prst="rect">
             <a:avLst/>
@@ -28418,14 +28387,14 @@
       </p:sp>
       <p:sp>
         <p:nvSpPr>
-          <p:cNvPr id="48" name="Shape 46"/>
-          <p:cNvSpPr/>
-          <p:nvPr/>
-        </p:nvSpPr>
-        <p:spPr>
-          <a:xfrm>
-            <a:off x="6062472" y="4169664"/>
-            <a:ext cx="685800" cy="384048"/>
+          <p:cNvPr id="58" name="Shape 56"/>
+          <p:cNvSpPr/>
+          <p:nvPr/>
+        </p:nvSpPr>
+        <p:spPr>
+          <a:xfrm>
+            <a:off x="6109855" y="4169664"/>
+            <a:ext cx="543652" cy="384048"/>
           </a:xfrm>
           <a:prstGeom prst="rect">
             <a:avLst>
@@ -28445,14 +28414,14 @@
       </p:sp>
       <p:sp>
         <p:nvSpPr>
-          <p:cNvPr id="49" name="Text 47"/>
-          <p:cNvSpPr/>
-          <p:nvPr/>
-        </p:nvSpPr>
-        <p:spPr>
-          <a:xfrm>
-            <a:off x="6062472" y="4169664"/>
-            <a:ext cx="685800" cy="384048"/>
+          <p:cNvPr id="59" name="Text 57"/>
+          <p:cNvSpPr/>
+          <p:nvPr/>
+        </p:nvSpPr>
+        <p:spPr>
+          <a:xfrm>
+            <a:off x="6109855" y="4169664"/>
+            <a:ext cx="543652" cy="384048"/>
           </a:xfrm>
           <a:prstGeom prst="rect">
             <a:avLst/>
@@ -28484,14 +28453,14 @@
       </p:sp>
       <p:sp>
         <p:nvSpPr>
-          <p:cNvPr id="50" name="Shape 48"/>
-          <p:cNvSpPr/>
-          <p:nvPr/>
-        </p:nvSpPr>
-        <p:spPr>
-          <a:xfrm>
-            <a:off x="6870192" y="4169664"/>
-            <a:ext cx="685800" cy="384048"/>
+          <p:cNvPr id="60" name="Shape 58"/>
+          <p:cNvSpPr/>
+          <p:nvPr/>
+        </p:nvSpPr>
+        <p:spPr>
+          <a:xfrm>
+            <a:off x="6703799" y="4169664"/>
+            <a:ext cx="543652" cy="384048"/>
           </a:xfrm>
           <a:prstGeom prst="rect">
             <a:avLst>
@@ -28511,14 +28480,14 @@
       </p:sp>
       <p:sp>
         <p:nvSpPr>
-          <p:cNvPr id="51" name="Text 49"/>
-          <p:cNvSpPr/>
-          <p:nvPr/>
-        </p:nvSpPr>
-        <p:spPr>
-          <a:xfrm>
-            <a:off x="6870192" y="4169664"/>
-            <a:ext cx="685800" cy="384048"/>
+          <p:cNvPr id="61" name="Text 59"/>
+          <p:cNvSpPr/>
+          <p:nvPr/>
+        </p:nvSpPr>
+        <p:spPr>
+          <a:xfrm>
+            <a:off x="6703799" y="4169664"/>
+            <a:ext cx="543652" cy="384048"/>
           </a:xfrm>
           <a:prstGeom prst="rect">
             <a:avLst/>
@@ -28542,7 +28511,7 @@
                 <a:ea typeface="Trebuchet MS" pitchFamily="34" charset="-122"/>
                 <a:cs typeface="Trebuchet MS" pitchFamily="34" charset="-120"/>
               </a:rPr>
-              <a:t>io</a:t>
+              <a:t>n</a:t>
             </a:r>
             <a:endParaRPr lang="en-US" sz="900" dirty="0"/>
           </a:p>
@@ -28550,53 +28519,14 @@
       </p:sp>
       <p:sp>
         <p:nvSpPr>
-          <p:cNvPr id="52" name="Text 50"/>
-          <p:cNvSpPr/>
-          <p:nvPr/>
-        </p:nvSpPr>
-        <p:spPr>
-          <a:xfrm>
-            <a:off x="6870192" y="4572000"/>
-            <a:ext cx="685800" cy="219456"/>
-          </a:xfrm>
-          <a:prstGeom prst="rect">
-            <a:avLst/>
-          </a:prstGeom>
-          <a:noFill/>
-          <a:ln/>
-        </p:spPr>
-        <p:txBody>
-          <a:bodyPr wrap="square" lIns="0" tIns="0" rIns="0" bIns="0" rtlCol="0" anchor="t"/>
-          <a:lstStyle/>
-          <a:p>
-            <a:pPr algn="ctr" indent="0" marL="0">
-              <a:buNone/>
-            </a:pPr>
-            <a:r>
-              <a:rPr lang="en-US" sz="750" i="1" dirty="0">
-                <a:solidFill>
-                  <a:srgbClr val="94A3B8"/>
-                </a:solidFill>
-                <a:latin typeface="Calibri" pitchFamily="34" charset="0"/>
-                <a:ea typeface="Calibri" pitchFamily="34" charset="-122"/>
-                <a:cs typeface="Calibri" pitchFamily="34" charset="-120"/>
-              </a:rPr>
-              <a:t>/sh/</a:t>
-            </a:r>
-            <a:endParaRPr lang="en-US" sz="750" dirty="0"/>
-          </a:p>
-        </p:txBody>
-      </p:sp>
-      <p:sp>
-        <p:nvSpPr>
-          <p:cNvPr id="53" name="Shape 51"/>
-          <p:cNvSpPr/>
-          <p:nvPr/>
-        </p:nvSpPr>
-        <p:spPr>
-          <a:xfrm>
-            <a:off x="7677912" y="4169664"/>
-            <a:ext cx="685800" cy="384048"/>
+          <p:cNvPr id="62" name="Shape 60"/>
+          <p:cNvSpPr/>
+          <p:nvPr/>
+        </p:nvSpPr>
+        <p:spPr>
+          <a:xfrm>
+            <a:off x="7297743" y="4169664"/>
+            <a:ext cx="543652" cy="384048"/>
           </a:xfrm>
           <a:prstGeom prst="rect">
             <a:avLst>
@@ -28616,14 +28546,14 @@
       </p:sp>
       <p:sp>
         <p:nvSpPr>
-          <p:cNvPr id="54" name="Text 52"/>
-          <p:cNvSpPr/>
-          <p:nvPr/>
-        </p:nvSpPr>
-        <p:spPr>
-          <a:xfrm>
-            <a:off x="7677912" y="4169664"/>
-            <a:ext cx="685800" cy="384048"/>
+          <p:cNvPr id="63" name="Text 61"/>
+          <p:cNvSpPr/>
+          <p:nvPr/>
+        </p:nvSpPr>
+        <p:spPr>
+          <a:xfrm>
+            <a:off x="7297743" y="4169664"/>
+            <a:ext cx="543652" cy="384048"/>
           </a:xfrm>
           <a:prstGeom prst="rect">
             <a:avLst/>
@@ -28647,7 +28577,73 @@
                 <a:ea typeface="Trebuchet MS" pitchFamily="34" charset="-122"/>
                 <a:cs typeface="Trebuchet MS" pitchFamily="34" charset="-120"/>
               </a:rPr>
-              <a:t>n</a:t>
+              <a:t>e</a:t>
+            </a:r>
+            <a:endParaRPr lang="en-US" sz="900" dirty="0"/>
+          </a:p>
+        </p:txBody>
+      </p:sp>
+      <p:sp>
+        <p:nvSpPr>
+          <p:cNvPr id="64" name="Shape 62"/>
+          <p:cNvSpPr/>
+          <p:nvPr/>
+        </p:nvSpPr>
+        <p:spPr>
+          <a:xfrm>
+            <a:off x="7891688" y="4169664"/>
+            <a:ext cx="543652" cy="384048"/>
+          </a:xfrm>
+          <a:prstGeom prst="rect">
+            <a:avLst>
+              <a:gd name="adj" fmla="val 9524"/>
+            </a:avLst>
+          </a:prstGeom>
+          <a:solidFill>
+            <a:srgbClr val="FFFFFF"/>
+          </a:solidFill>
+          <a:ln w="12700">
+            <a:solidFill>
+              <a:srgbClr val="DB2777"/>
+            </a:solidFill>
+            <a:prstDash val="solid"/>
+          </a:ln>
+        </p:spPr>
+      </p:sp>
+      <p:sp>
+        <p:nvSpPr>
+          <p:cNvPr id="65" name="Text 63"/>
+          <p:cNvSpPr/>
+          <p:nvPr/>
+        </p:nvSpPr>
+        <p:spPr>
+          <a:xfrm>
+            <a:off x="7891688" y="4169664"/>
+            <a:ext cx="543652" cy="384048"/>
+          </a:xfrm>
+          <a:prstGeom prst="rect">
+            <a:avLst/>
+          </a:prstGeom>
+          <a:noFill/>
+          <a:ln/>
+        </p:spPr>
+        <p:txBody>
+          <a:bodyPr wrap="square" lIns="0" tIns="0" rIns="0" bIns="0" rtlCol="0" anchor="ctr"/>
+          <a:lstStyle/>
+          <a:p>
+            <a:pPr algn="ctr" indent="0" marL="0">
+              <a:buNone/>
+            </a:pPr>
+            <a:r>
+              <a:rPr lang="en-US" sz="900" b="1" dirty="0">
+                <a:solidFill>
+                  <a:srgbClr val="9D174D"/>
+                </a:solidFill>
+                <a:latin typeface="Trebuchet MS" pitchFamily="34" charset="0"/>
+                <a:ea typeface="Trebuchet MS" pitchFamily="34" charset="-122"/>
+                <a:cs typeface="Trebuchet MS" pitchFamily="34" charset="-120"/>
+              </a:rPr>
+              <a:t>ss</a:t>
             </a:r>
             <a:endParaRPr lang="en-US" sz="900" dirty="0"/>
           </a:p>
@@ -29078,7 +29074,7 @@
                 <a:ea typeface="Trebuchet MS" pitchFamily="34" charset="-122"/>
                 <a:cs typeface="Trebuchet MS" pitchFamily="34" charset="-120"/>
               </a:rPr>
-              <a:t>correctly</a:t>
+              <a:t>corrector</a:t>
             </a:r>
             <a:endParaRPr lang="en-US" sz="2800" dirty="0"/>
           </a:p>
@@ -29905,7 +29901,7 @@
                 <a:ea typeface="Trebuchet MS" pitchFamily="34" charset="-122"/>
                 <a:cs typeface="Trebuchet MS" pitchFamily="34" charset="-120"/>
               </a:rPr>
-              <a:t>correctly</a:t>
+              <a:t>corrector</a:t>
             </a:r>
             <a:endParaRPr lang="en-US" sz="2800" dirty="0"/>
           </a:p>
@@ -30083,7 +30079,7 @@
                 <a:ea typeface="Calibri" pitchFamily="34" charset="-122"/>
                 <a:cs typeface="Calibri" pitchFamily="34" charset="-120"/>
               </a:rPr>
-              <a:t>right, accurate</a:t>
+              <a:t>right, free from error</a:t>
             </a:r>
             <a:endParaRPr lang="en-US" sz="850" dirty="0"/>
           </a:p>
@@ -30156,7 +30152,7 @@
                 <a:ea typeface="Trebuchet MS" pitchFamily="34" charset="-122"/>
                 <a:cs typeface="Trebuchet MS" pitchFamily="34" charset="-120"/>
               </a:rPr>
-              <a:t>ly</a:t>
+              <a:t>or</a:t>
             </a:r>
             <a:endParaRPr lang="en-US" sz="1300" dirty="0"/>
           </a:p>
@@ -30195,7 +30191,7 @@
                 <a:ea typeface="Calibri" pitchFamily="34" charset="-122"/>
                 <a:cs typeface="Calibri" pitchFamily="34" charset="-120"/>
               </a:rPr>
-              <a:t>in a certain way</a:t>
+              <a:t>person or thing that does</a:t>
             </a:r>
             <a:endParaRPr lang="en-US" sz="850" dirty="0"/>
           </a:p>
@@ -30890,7 +30886,7 @@
                 <a:ea typeface="Trebuchet MS" pitchFamily="34" charset="-122"/>
                 <a:cs typeface="Trebuchet MS" pitchFamily="34" charset="-120"/>
               </a:rPr>
-              <a:t>correctly</a:t>
+              <a:t>corrector</a:t>
             </a:r>
             <a:endParaRPr lang="en-US" sz="2800" dirty="0"/>
           </a:p>
@@ -31068,7 +31064,7 @@
                 <a:ea typeface="Calibri" pitchFamily="34" charset="-122"/>
                 <a:cs typeface="Calibri" pitchFamily="34" charset="-120"/>
               </a:rPr>
-              <a:t>right, accurate</a:t>
+              <a:t>right, free from error</a:t>
             </a:r>
             <a:endParaRPr lang="en-US" sz="850" dirty="0"/>
           </a:p>
@@ -31141,7 +31137,7 @@
                 <a:ea typeface="Trebuchet MS" pitchFamily="34" charset="-122"/>
                 <a:cs typeface="Trebuchet MS" pitchFamily="34" charset="-120"/>
               </a:rPr>
-              <a:t>ly</a:t>
+              <a:t>or</a:t>
             </a:r>
             <a:endParaRPr lang="en-US" sz="1300" dirty="0"/>
           </a:p>
@@ -31180,7 +31176,7 @@
                 <a:ea typeface="Calibri" pitchFamily="34" charset="-122"/>
                 <a:cs typeface="Calibri" pitchFamily="34" charset="-120"/>
               </a:rPr>
-              <a:t>in a certain way</a:t>
+              <a:t>person or thing that does</a:t>
             </a:r>
             <a:endParaRPr lang="en-US" sz="850" dirty="0"/>
           </a:p>
@@ -31444,7 +31440,7 @@
                 <a:ea typeface="Trebuchet MS" pitchFamily="34" charset="-122"/>
                 <a:cs typeface="Trebuchet MS" pitchFamily="34" charset="-120"/>
               </a:rPr>
-              <a:t>rect</a:t>
+              <a:t>rec</a:t>
             </a:r>
             <a:endParaRPr lang="en-US" sz="1400" dirty="0"/>
           </a:p>
@@ -31549,7 +31545,7 @@
                 <a:ea typeface="Trebuchet MS" pitchFamily="34" charset="-122"/>
                 <a:cs typeface="Trebuchet MS" pitchFamily="34" charset="-120"/>
               </a:rPr>
-              <a:t>ly</a:t>
+              <a:t>tor</a:t>
             </a:r>
             <a:endParaRPr lang="en-US" sz="1400" dirty="0"/>
           </a:p>
@@ -32112,7 +32108,7 @@
                 <a:ea typeface="Trebuchet MS" pitchFamily="34" charset="-122"/>
                 <a:cs typeface="Trebuchet MS" pitchFamily="34" charset="-120"/>
               </a:rPr>
-              <a:t>correctly</a:t>
+              <a:t>corrector</a:t>
             </a:r>
             <a:endParaRPr lang="en-US" sz="2800" dirty="0"/>
           </a:p>
@@ -32290,7 +32286,7 @@
                 <a:ea typeface="Calibri" pitchFamily="34" charset="-122"/>
                 <a:cs typeface="Calibri" pitchFamily="34" charset="-120"/>
               </a:rPr>
-              <a:t>right, accurate</a:t>
+              <a:t>right, free from error</a:t>
             </a:r>
             <a:endParaRPr lang="en-US" sz="850" dirty="0"/>
           </a:p>
@@ -32363,7 +32359,7 @@
                 <a:ea typeface="Trebuchet MS" pitchFamily="34" charset="-122"/>
                 <a:cs typeface="Trebuchet MS" pitchFamily="34" charset="-120"/>
               </a:rPr>
-              <a:t>ly</a:t>
+              <a:t>or</a:t>
             </a:r>
             <a:endParaRPr lang="en-US" sz="1300" dirty="0"/>
           </a:p>
@@ -32402,7 +32398,7 @@
                 <a:ea typeface="Calibri" pitchFamily="34" charset="-122"/>
                 <a:cs typeface="Calibri" pitchFamily="34" charset="-120"/>
               </a:rPr>
-              <a:t>in a certain way</a:t>
+              <a:t>person or thing that does</a:t>
             </a:r>
             <a:endParaRPr lang="en-US" sz="850" dirty="0"/>
           </a:p>
@@ -32666,7 +32662,7 @@
                 <a:ea typeface="Trebuchet MS" pitchFamily="34" charset="-122"/>
                 <a:cs typeface="Trebuchet MS" pitchFamily="34" charset="-120"/>
               </a:rPr>
-              <a:t>rect</a:t>
+              <a:t>rec</a:t>
             </a:r>
             <a:endParaRPr lang="en-US" sz="1400" dirty="0"/>
           </a:p>
@@ -32771,7 +32767,7 @@
                 <a:ea typeface="Trebuchet MS" pitchFamily="34" charset="-122"/>
                 <a:cs typeface="Trebuchet MS" pitchFamily="34" charset="-120"/>
               </a:rPr>
-              <a:t>ly</a:t>
+              <a:t>tor</a:t>
             </a:r>
             <a:endParaRPr lang="en-US" sz="1400" dirty="0"/>
           </a:p>
@@ -32878,7 +32874,7 @@
         </p:nvSpPr>
         <p:spPr>
           <a:xfrm>
-            <a:off x="2023872" y="4169664"/>
+            <a:off x="2124837" y="4169664"/>
             <a:ext cx="685800" cy="384048"/>
           </a:xfrm>
           <a:prstGeom prst="rect">
@@ -32905,7 +32901,7 @@
         </p:nvSpPr>
         <p:spPr>
           <a:xfrm>
-            <a:off x="2023872" y="4169664"/>
+            <a:off x="2124837" y="4169664"/>
             <a:ext cx="685800" cy="384048"/>
           </a:xfrm>
           <a:prstGeom prst="rect">
@@ -32944,7 +32940,7 @@
         </p:nvSpPr>
         <p:spPr>
           <a:xfrm>
-            <a:off x="2023872" y="4572000"/>
+            <a:off x="2124837" y="4572000"/>
             <a:ext cx="685800" cy="219456"/>
           </a:xfrm>
           <a:prstGeom prst="rect">
@@ -32983,7 +32979,7 @@
         </p:nvSpPr>
         <p:spPr>
           <a:xfrm>
-            <a:off x="2831592" y="4169664"/>
+            <a:off x="3033522" y="4169664"/>
             <a:ext cx="685800" cy="384048"/>
           </a:xfrm>
           <a:prstGeom prst="rect">
@@ -33010,7 +33006,7 @@
         </p:nvSpPr>
         <p:spPr>
           <a:xfrm>
-            <a:off x="2831592" y="4169664"/>
+            <a:off x="3033522" y="4169664"/>
             <a:ext cx="685800" cy="384048"/>
           </a:xfrm>
           <a:prstGeom prst="rect">
@@ -33049,7 +33045,7 @@
         </p:nvSpPr>
         <p:spPr>
           <a:xfrm>
-            <a:off x="3639312" y="4169664"/>
+            <a:off x="3942207" y="4169664"/>
             <a:ext cx="685800" cy="384048"/>
           </a:xfrm>
           <a:prstGeom prst="rect">
@@ -33076,7 +33072,7 @@
         </p:nvSpPr>
         <p:spPr>
           <a:xfrm>
-            <a:off x="3639312" y="4169664"/>
+            <a:off x="3942207" y="4169664"/>
             <a:ext cx="685800" cy="384048"/>
           </a:xfrm>
           <a:prstGeom prst="rect">
@@ -33115,7 +33111,7 @@
         </p:nvSpPr>
         <p:spPr>
           <a:xfrm>
-            <a:off x="4447032" y="4169664"/>
+            <a:off x="4850892" y="4169664"/>
             <a:ext cx="685800" cy="384048"/>
           </a:xfrm>
           <a:prstGeom prst="rect">
@@ -33142,7 +33138,7 @@
         </p:nvSpPr>
         <p:spPr>
           <a:xfrm>
-            <a:off x="4447032" y="4169664"/>
+            <a:off x="4850892" y="4169664"/>
             <a:ext cx="685800" cy="384048"/>
           </a:xfrm>
           <a:prstGeom prst="rect">
@@ -33181,7 +33177,7 @@
         </p:nvSpPr>
         <p:spPr>
           <a:xfrm>
-            <a:off x="5254752" y="4169664"/>
+            <a:off x="5759577" y="4169664"/>
             <a:ext cx="685800" cy="384048"/>
           </a:xfrm>
           <a:prstGeom prst="rect">
@@ -33208,7 +33204,7 @@
         </p:nvSpPr>
         <p:spPr>
           <a:xfrm>
-            <a:off x="5254752" y="4169664"/>
+            <a:off x="5759577" y="4169664"/>
             <a:ext cx="685800" cy="384048"/>
           </a:xfrm>
           <a:prstGeom prst="rect">
@@ -33247,7 +33243,7 @@
         </p:nvSpPr>
         <p:spPr>
           <a:xfrm>
-            <a:off x="5254752" y="4572000"/>
+            <a:off x="5759577" y="4572000"/>
             <a:ext cx="685800" cy="219456"/>
           </a:xfrm>
           <a:prstGeom prst="rect">
@@ -33286,7 +33282,7 @@
         </p:nvSpPr>
         <p:spPr>
           <a:xfrm>
-            <a:off x="6062472" y="4169664"/>
+            <a:off x="6668262" y="4169664"/>
             <a:ext cx="685800" cy="384048"/>
           </a:xfrm>
           <a:prstGeom prst="rect">
@@ -33313,7 +33309,7 @@
         </p:nvSpPr>
         <p:spPr>
           <a:xfrm>
-            <a:off x="6062472" y="4169664"/>
+            <a:off x="6668262" y="4169664"/>
             <a:ext cx="685800" cy="384048"/>
           </a:xfrm>
           <a:prstGeom prst="rect">
@@ -33352,7 +33348,7 @@
         </p:nvSpPr>
         <p:spPr>
           <a:xfrm>
-            <a:off x="6870192" y="4169664"/>
+            <a:off x="7576947" y="4169664"/>
             <a:ext cx="685800" cy="384048"/>
           </a:xfrm>
           <a:prstGeom prst="rect">
@@ -33379,7 +33375,7 @@
         </p:nvSpPr>
         <p:spPr>
           <a:xfrm>
-            <a:off x="6870192" y="4169664"/>
+            <a:off x="7576947" y="4169664"/>
             <a:ext cx="685800" cy="384048"/>
           </a:xfrm>
           <a:prstGeom prst="rect">
@@ -33404,73 +33400,7 @@
                 <a:ea typeface="Trebuchet MS" pitchFamily="34" charset="-122"/>
                 <a:cs typeface="Trebuchet MS" pitchFamily="34" charset="-120"/>
               </a:rPr>
-              <a:t>l</a:t>
-            </a:r>
-            <a:endParaRPr lang="en-US" sz="900" dirty="0"/>
-          </a:p>
-        </p:txBody>
-      </p:sp>
-      <p:sp>
-        <p:nvSpPr>
-          <p:cNvPr id="52" name="Shape 50"/>
-          <p:cNvSpPr/>
-          <p:nvPr/>
-        </p:nvSpPr>
-        <p:spPr>
-          <a:xfrm>
-            <a:off x="7677912" y="4169664"/>
-            <a:ext cx="685800" cy="384048"/>
-          </a:xfrm>
-          <a:prstGeom prst="rect">
-            <a:avLst>
-              <a:gd name="adj" fmla="val 9524"/>
-            </a:avLst>
-          </a:prstGeom>
-          <a:solidFill>
-            <a:srgbClr val="FFFFFF"/>
-          </a:solidFill>
-          <a:ln w="12700">
-            <a:solidFill>
-              <a:srgbClr val="DB2777"/>
-            </a:solidFill>
-            <a:prstDash val="solid"/>
-          </a:ln>
-        </p:spPr>
-      </p:sp>
-      <p:sp>
-        <p:nvSpPr>
-          <p:cNvPr id="53" name="Text 51"/>
-          <p:cNvSpPr/>
-          <p:nvPr/>
-        </p:nvSpPr>
-        <p:spPr>
-          <a:xfrm>
-            <a:off x="7677912" y="4169664"/>
-            <a:ext cx="685800" cy="384048"/>
-          </a:xfrm>
-          <a:prstGeom prst="rect">
-            <a:avLst/>
-          </a:prstGeom>
-          <a:noFill/>
-          <a:ln/>
-        </p:spPr>
-        <p:txBody>
-          <a:bodyPr wrap="square" lIns="0" tIns="0" rIns="0" bIns="0" rtlCol="0" anchor="ctr"/>
-          <a:lstStyle/>
-          <a:p>
-            <a:pPr algn="ctr" indent="0" marL="0">
-              <a:buNone/>
-            </a:pPr>
-            <a:r>
-              <a:rPr lang="en-US" sz="900" b="1" dirty="0">
-                <a:solidFill>
-                  <a:srgbClr val="9D174D"/>
-                </a:solidFill>
-                <a:latin typeface="Trebuchet MS" pitchFamily="34" charset="0"/>
-                <a:ea typeface="Trebuchet MS" pitchFamily="34" charset="-122"/>
-                <a:cs typeface="Trebuchet MS" pitchFamily="34" charset="-120"/>
-              </a:rPr>
-              <a:t>y</a:t>
+              <a:t>or</a:t>
             </a:r>
             <a:endParaRPr lang="en-US" sz="900" dirty="0"/>
           </a:p>
@@ -35424,7 +35354,7 @@
                 <a:ea typeface="Trebuchet MS" pitchFamily="34" charset="-122"/>
                 <a:cs typeface="Trebuchet MS" pitchFamily="34" charset="-120"/>
               </a:rPr>
-              <a:t>self-</a:t>
+              <a:t>re-</a:t>
             </a:r>
             <a:endParaRPr lang="en-US" sz="1300" dirty="0"/>
           </a:p>
@@ -35577,7 +35507,7 @@
                 <a:ea typeface="Trebuchet MS" pitchFamily="34" charset="-122"/>
                 <a:cs typeface="Trebuchet MS" pitchFamily="34" charset="-120"/>
               </a:rPr>
-              <a:t>semi-</a:t>
+              <a:t>un-</a:t>
             </a:r>
             <a:endParaRPr lang="en-US" sz="1300" dirty="0"/>
           </a:p>
@@ -35819,7 +35749,7 @@
                 <a:ea typeface="Trebuchet MS" pitchFamily="34" charset="-122"/>
                 <a:cs typeface="Trebuchet MS" pitchFamily="34" charset="-120"/>
               </a:rPr>
-              <a:t>-ive</a:t>
+              <a:t>-ed</a:t>
             </a:r>
             <a:endParaRPr lang="en-US" sz="1300" dirty="0"/>
           </a:p>
@@ -35883,7 +35813,7 @@
                 <a:ea typeface="Trebuchet MS" pitchFamily="34" charset="-122"/>
                 <a:cs typeface="Trebuchet MS" pitchFamily="34" charset="-120"/>
               </a:rPr>
-              <a:t>hyper-</a:t>
+              <a:t>self-</a:t>
             </a:r>
             <a:endParaRPr lang="en-US" sz="1300" dirty="0"/>
           </a:p>
@@ -35972,7 +35902,7 @@
                 <a:ea typeface="Trebuchet MS" pitchFamily="34" charset="-122"/>
                 <a:cs typeface="Trebuchet MS" pitchFamily="34" charset="-120"/>
               </a:rPr>
-              <a:t>-ed</a:t>
+              <a:t>-or</a:t>
             </a:r>
             <a:endParaRPr lang="en-US" sz="1300" dirty="0"/>
           </a:p>
@@ -36341,7 +36271,7 @@
                 <a:ea typeface="Trebuchet MS" pitchFamily="34" charset="-122"/>
                 <a:cs typeface="Trebuchet MS" pitchFamily="34" charset="-120"/>
               </a:rPr>
-              <a:t>corrective</a:t>
+              <a:t>corrector</a:t>
             </a:r>
             <a:endParaRPr lang="en-US" sz="1200" dirty="0"/>
           </a:p>
@@ -36407,7 +36337,7 @@
                 <a:ea typeface="Trebuchet MS" pitchFamily="34" charset="-122"/>
                 <a:cs typeface="Trebuchet MS" pitchFamily="34" charset="-120"/>
               </a:rPr>
-              <a:t>correctness</a:t>
+              <a:t>incorrectly</a:t>
             </a:r>
             <a:endParaRPr lang="en-US" sz="1200" dirty="0"/>
           </a:p>
@@ -36473,7 +36403,7 @@
                 <a:ea typeface="Trebuchet MS" pitchFamily="34" charset="-122"/>
                 <a:cs typeface="Trebuchet MS" pitchFamily="34" charset="-120"/>
               </a:rPr>
-              <a:t>self-correcting</a:t>
+              <a:t>correctness</a:t>
             </a:r>
             <a:endParaRPr lang="en-US" sz="1200" dirty="0"/>
           </a:p>
@@ -36539,7 +36469,7 @@
                 <a:ea typeface="Trebuchet MS" pitchFamily="34" charset="-122"/>
                 <a:cs typeface="Trebuchet MS" pitchFamily="34" charset="-120"/>
               </a:rPr>
-              <a:t>incorrectly</a:t>
+              <a:t>self-correct</a:t>
             </a:r>
             <a:endParaRPr lang="en-US" sz="1200" dirty="0"/>
           </a:p>
@@ -37727,7 +37657,7 @@
                 <a:ea typeface="Calibri" pitchFamily="34" charset="-122"/>
                 <a:cs typeface="Calibri" pitchFamily="34" charset="-120"/>
               </a:rPr>
-              <a:t>1.  The root 'correct' comes from Latin and means right or accurate.</a:t>
+              <a:t>1.  The suffix '-ly' can be added to 'correct' to make the word 'correctly'.</a:t>
             </a:r>
             <a:endParaRPr lang="en-US" sz="1300" dirty="0"/>
           </a:p>
@@ -37866,7 +37796,7 @@
                 <a:ea typeface="Calibri" pitchFamily="34" charset="-122"/>
                 <a:cs typeface="Calibri" pitchFamily="34" charset="-120"/>
               </a:rPr>
-              <a:t>2.  The word 'incorrectly' means something was done in the right way.</a:t>
+              <a:t>2.  The word 'correction' means to make something wrong.</a:t>
             </a:r>
             <a:endParaRPr lang="en-US" sz="1300" dirty="0"/>
           </a:p>
@@ -38005,7 +37935,7 @@
                 <a:ea typeface="Calibri" pitchFamily="34" charset="-122"/>
                 <a:cs typeface="Calibri" pitchFamily="34" charset="-120"/>
               </a:rPr>
-              <a:t>3.  Adding the prefix 'in' to 'correct' makes a word meaning not right.</a:t>
+              <a:t>3.  The root 'correct' means right or free from error.</a:t>
             </a:r>
             <a:endParaRPr lang="en-US" sz="1300" dirty="0"/>
           </a:p>
@@ -38144,7 +38074,7 @@
                 <a:ea typeface="Calibri" pitchFamily="34" charset="-122"/>
                 <a:cs typeface="Calibri" pitchFamily="34" charset="-120"/>
               </a:rPr>
-              <a:t>4.  A 'correction' is a change made to fix a mistake.</a:t>
+              <a:t>4.  The word 'incorrect' uses a prefix that means 'not'.</a:t>
             </a:r>
             <a:endParaRPr lang="en-US" sz="1300" dirty="0"/>
           </a:p>
@@ -38283,7 +38213,7 @@
                 <a:ea typeface="Calibri" pitchFamily="34" charset="-122"/>
                 <a:cs typeface="Calibri" pitchFamily="34" charset="-120"/>
               </a:rPr>
-              <a:t>5.  The suffix '-ive' in 'corrective' means it happened in the past.</a:t>
+              <a:t>5.  The root 'correct' comes from Greek.</a:t>
             </a:r>
             <a:endParaRPr lang="en-US" sz="1300" dirty="0"/>
           </a:p>
@@ -39186,7 +39116,7 @@
                 <a:ea typeface="Trebuchet MS" pitchFamily="34" charset="-122"/>
                 <a:cs typeface="Trebuchet MS" pitchFamily="34" charset="-120"/>
               </a:rPr>
-              <a:t>corrective</a:t>
+              <a:t>corrector</a:t>
             </a:r>
             <a:endParaRPr lang="en-US" sz="1300" dirty="0"/>
           </a:p>
@@ -39252,7 +39182,7 @@
                 <a:ea typeface="Trebuchet MS" pitchFamily="34" charset="-122"/>
                 <a:cs typeface="Trebuchet MS" pitchFamily="34" charset="-120"/>
               </a:rPr>
-              <a:t>correctness</a:t>
+              <a:t>incorrectly</a:t>
             </a:r>
             <a:endParaRPr lang="en-US" sz="1300" dirty="0"/>
           </a:p>
@@ -39318,7 +39248,7 @@
                 <a:ea typeface="Trebuchet MS" pitchFamily="34" charset="-122"/>
                 <a:cs typeface="Trebuchet MS" pitchFamily="34" charset="-120"/>
               </a:rPr>
-              <a:t>self-correcting</a:t>
+              <a:t>correctness</a:t>
             </a:r>
             <a:endParaRPr lang="en-US" sz="1300" dirty="0"/>
           </a:p>
@@ -40103,7 +40033,7 @@
                 <a:ea typeface="Trebuchet MS" pitchFamily="34" charset="-122"/>
                 <a:cs typeface="Trebuchet MS" pitchFamily="34" charset="-120"/>
               </a:rPr>
-              <a:t>self-</a:t>
+              <a:t>re-</a:t>
             </a:r>
             <a:endParaRPr lang="en-US" sz="1300" dirty="0"/>
           </a:p>
@@ -40256,7 +40186,7 @@
                 <a:ea typeface="Trebuchet MS" pitchFamily="34" charset="-122"/>
                 <a:cs typeface="Trebuchet MS" pitchFamily="34" charset="-120"/>
               </a:rPr>
-              <a:t>semi-</a:t>
+              <a:t>un-</a:t>
             </a:r>
             <a:endParaRPr lang="en-US" sz="1300" dirty="0"/>
           </a:p>
@@ -40498,7 +40428,7 @@
                 <a:ea typeface="Trebuchet MS" pitchFamily="34" charset="-122"/>
                 <a:cs typeface="Trebuchet MS" pitchFamily="34" charset="-120"/>
               </a:rPr>
-              <a:t>-ive</a:t>
+              <a:t>-ed</a:t>
             </a:r>
             <a:endParaRPr lang="en-US" sz="1300" dirty="0"/>
           </a:p>
@@ -40562,7 +40492,7 @@
                 <a:ea typeface="Trebuchet MS" pitchFamily="34" charset="-122"/>
                 <a:cs typeface="Trebuchet MS" pitchFamily="34" charset="-120"/>
               </a:rPr>
-              <a:t>hyper-</a:t>
+              <a:t>self-</a:t>
             </a:r>
             <a:endParaRPr lang="en-US" sz="1300" dirty="0"/>
           </a:p>
@@ -40651,7 +40581,7 @@
                 <a:ea typeface="Trebuchet MS" pitchFamily="34" charset="-122"/>
                 <a:cs typeface="Trebuchet MS" pitchFamily="34" charset="-120"/>
               </a:rPr>
-              <a:t>-ed</a:t>
+              <a:t>-or</a:t>
             </a:r>
             <a:endParaRPr lang="en-US" sz="1300" dirty="0"/>
           </a:p>
@@ -41562,7 +41492,7 @@
                 <a:ea typeface="Calibri" pitchFamily="34" charset="-122"/>
                 <a:cs typeface="Calibri" pitchFamily="34" charset="-120"/>
               </a:rPr>
-              <a:t>Able to find and fix your own mistakes.</a:t>
+              <a:t>The quality of being right or free from errors.</a:t>
             </a:r>
             <a:endParaRPr lang="en-US" sz="1200" dirty="0"/>
           </a:p>
@@ -41701,7 +41631,7 @@
                 <a:ea typeface="Calibri" pitchFamily="34" charset="-122"/>
                 <a:cs typeface="Calibri" pitchFamily="34" charset="-120"/>
               </a:rPr>
-              <a:t>Done in the right way, without any mistakes.</a:t>
+              <a:t>Doing something in the right way, without mistakes.</a:t>
             </a:r>
             <a:endParaRPr lang="en-US" sz="1200" dirty="0"/>
           </a:p>
@@ -41840,7 +41770,7 @@
                 <a:ea typeface="Calibri" pitchFamily="34" charset="-122"/>
                 <a:cs typeface="Calibri" pitchFamily="34" charset="-120"/>
               </a:rPr>
-              <a:t>The quality of being right or accurate.</a:t>
+              <a:t>Doing something in the wrong way, making a mistake.</a:t>
             </a:r>
             <a:endParaRPr lang="en-US" sz="1200" dirty="0"/>
           </a:p>
@@ -41979,7 +41909,7 @@
                 <a:ea typeface="Calibri" pitchFamily="34" charset="-122"/>
                 <a:cs typeface="Calibri" pitchFamily="34" charset="-120"/>
               </a:rPr>
-              <a:t>Something that helps fix or improve a mistake.</a:t>
+              <a:t>A person or tool that fixes mistakes.</a:t>
             </a:r>
             <a:endParaRPr lang="en-US" sz="1200" dirty="0"/>
           </a:p>
@@ -42052,7 +41982,7 @@
                 <a:ea typeface="Trebuchet MS" pitchFamily="34" charset="-122"/>
                 <a:cs typeface="Trebuchet MS" pitchFamily="34" charset="-120"/>
               </a:rPr>
-              <a:t>corrective</a:t>
+              <a:t>corrector</a:t>
             </a:r>
             <a:endParaRPr lang="en-US" sz="1200" dirty="0"/>
           </a:p>
@@ -42118,7 +42048,7 @@
                 <a:ea typeface="Calibri" pitchFamily="34" charset="-122"/>
                 <a:cs typeface="Calibri" pitchFamily="34" charset="-120"/>
               </a:rPr>
-              <a:t>Something that is right or has no mistakes.</a:t>
+              <a:t>Something that has no mistakes and is right or accurate.</a:t>
             </a:r>
             <a:endParaRPr lang="en-US" sz="1200" dirty="0"/>
           </a:p>
@@ -42191,7 +42121,7 @@
                 <a:ea typeface="Trebuchet MS" pitchFamily="34" charset="-122"/>
                 <a:cs typeface="Trebuchet MS" pitchFamily="34" charset="-120"/>
               </a:rPr>
-              <a:t>correctness</a:t>
+              <a:t>incorrectly</a:t>
             </a:r>
             <a:endParaRPr lang="en-US" sz="1200" dirty="0"/>
           </a:p>
@@ -42257,7 +42187,7 @@
                 <a:ea typeface="Calibri" pitchFamily="34" charset="-122"/>
                 <a:cs typeface="Calibri" pitchFamily="34" charset="-120"/>
               </a:rPr>
-              <a:t>A change made to fix a mistake.</a:t>
+              <a:t>A change made to fix a mistake in something.</a:t>
             </a:r>
             <a:endParaRPr lang="en-US" sz="1200" dirty="0"/>
           </a:p>
@@ -42330,7 +42260,7 @@
                 <a:ea typeface="Trebuchet MS" pitchFamily="34" charset="-122"/>
                 <a:cs typeface="Trebuchet MS" pitchFamily="34" charset="-120"/>
               </a:rPr>
-              <a:t>self-correcting</a:t>
+              <a:t>correctness</a:t>
             </a:r>
             <a:endParaRPr lang="en-US" sz="1200" dirty="0"/>
           </a:p>
@@ -42396,7 +42326,7 @@
                 <a:ea typeface="Calibri" pitchFamily="34" charset="-122"/>
                 <a:cs typeface="Calibri" pitchFamily="34" charset="-120"/>
               </a:rPr>
-              <a:t>Something that is wrong or has a mistake in it.</a:t>
+              <a:t>Something that has a mistake or is not right.</a:t>
             </a:r>
             <a:endParaRPr lang="en-US" sz="1200" dirty="0"/>
           </a:p>
@@ -42891,7 +42821,7 @@
                 <a:ea typeface="Calibri" pitchFamily="34" charset="-122"/>
                 <a:cs typeface="Calibri" pitchFamily="34" charset="-120"/>
               </a:rPr>
-              <a:t>Please check your answers carefully to make sure each one is correct before you hand in your test.</a:t>
+              <a:t>Please check your work carefully and correct any mistakes before you hand it in.</a:t>
             </a:r>
             <a:endParaRPr lang="en-US" sz="1500" dirty="0"/>
           </a:p>
@@ -43055,7 +42985,7 @@
                 <a:ea typeface="Calibri" pitchFamily="34" charset="-122"/>
                 <a:cs typeface="Calibri" pitchFamily="34" charset="-120"/>
               </a:rPr>
-              <a:t>The teacher wrote a correction in the margin to show where the student had made a spelling mistake.</a:t>
+              <a:t>The teacher wrote a correction in red pen next to the wrong answer.</a:t>
             </a:r>
             <a:endParaRPr lang="en-US" sz="1500" dirty="0"/>
           </a:p>
@@ -43219,7 +43149,7 @@
                 <a:ea typeface="Calibri" pitchFamily="34" charset="-122"/>
                 <a:cs typeface="Calibri" pitchFamily="34" charset="-120"/>
               </a:rPr>
-              <a:t>It is important to hold your pencil correctly so that your handwriting stays neat and easy to read.</a:t>
+              <a:t>Maya answered every question correctly and was very proud of herself.</a:t>
             </a:r>
             <a:endParaRPr lang="en-US" sz="1500" dirty="0"/>
           </a:p>

--- a/output/wordlabs-correct-3day.pptx
+++ b/output/wordlabs-correct-3day.pptx
@@ -4240,7 +4240,7 @@
                 <a:ea typeface="Calibri" pitchFamily="34" charset="-122"/>
                 <a:cs typeface="Calibri" pitchFamily="34" charset="-120"/>
               </a:rPr>
-              <a:t>"right, accurate, free from error"</a:t>
+              <a:t>"right; accurate"</a:t>
             </a:r>
             <a:endParaRPr lang="en-US" sz="2200" dirty="0"/>
           </a:p>
@@ -4279,7 +4279,7 @@
                 <a:ea typeface="Calibri" pitchFamily="34" charset="-122"/>
                 <a:cs typeface="Calibri" pitchFamily="34" charset="-120"/>
               </a:rPr>
-              <a:t>Origin: Latin: correctus</a:t>
+              <a:t>Origin: Anglo-Saxon (Old English) root</a:t>
             </a:r>
             <a:endParaRPr lang="en-US" sz="1300" dirty="0"/>
           </a:p>
@@ -5288,7 +5288,7 @@
                 <a:ea typeface="Calibri" pitchFamily="34" charset="-122"/>
                 <a:cs typeface="Calibri" pitchFamily="34" charset="-120"/>
               </a:rPr>
-              <a:t>Word Labs  •  wordlabs.app  •  Root: 'correct' = right, accurate, free from error</a:t>
+              <a:t>Word Labs  •  wordlabs.app  •  Root: 'correct' = right; accurate</a:t>
             </a:r>
             <a:endParaRPr lang="en-US" sz="800" dirty="0"/>
           </a:p>
@@ -5622,7 +5622,7 @@
                 <a:ea typeface="Trebuchet MS" pitchFamily="34" charset="-122"/>
                 <a:cs typeface="Trebuchet MS" pitchFamily="34" charset="-120"/>
               </a:rPr>
-              <a:t>1</a:t>
+              <a:t>0</a:t>
             </a:r>
             <a:pPr algn="ctr" indent="0" marL="0">
               <a:buNone/>
@@ -5928,7 +5928,7 @@
                 <a:ea typeface="Calibri" pitchFamily="34" charset="-122"/>
                 <a:cs typeface="Calibri" pitchFamily="34" charset="-120"/>
               </a:rPr>
-              <a:t>Word Labs  •  wordlabs.app  •  Root: 'correct' = right, accurate, free from error</a:t>
+              <a:t>Word Labs  •  wordlabs.app  •  Root: 'correct' = right; accurate</a:t>
             </a:r>
             <a:endParaRPr lang="en-US" sz="800" dirty="0"/>
           </a:p>
@@ -6040,7 +6040,7 @@
                 <a:ea typeface="Calibri" pitchFamily="34" charset="-122"/>
                 <a:cs typeface="Calibri" pitchFamily="34" charset="-120"/>
               </a:rPr>
-              <a:t>The teacher asked us to </a:t>
+              <a:t>The teacher pointed out the </a:t>
             </a:r>
             <a:pPr algn="l" indent="0" marL="0">
               <a:buNone/>
@@ -6057,7 +6057,7 @@
                 <a:ea typeface="Calibri" pitchFamily="34" charset="-122"/>
                 <a:cs typeface="Calibri" pitchFamily="34" charset="-120"/>
               </a:rPr>
-              <a:t>correct</a:t>
+              <a:t>incorrectness</a:t>
             </a:r>
             <a:pPr algn="l" indent="0" marL="0">
               <a:buNone/>
@@ -6071,7 +6071,7 @@
                 <a:ea typeface="Calibri" pitchFamily="34" charset="-122"/>
                 <a:cs typeface="Calibri" pitchFamily="34" charset="-120"/>
               </a:rPr>
-              <a:t> our spelling, and she praised us for working so </a:t>
+              <a:t> of his working out. The teacher made a </a:t>
             </a:r>
             <a:pPr algn="l" indent="0" marL="0">
               <a:buNone/>
@@ -6088,7 +6088,7 @@
                 <a:ea typeface="Calibri" pitchFamily="34" charset="-122"/>
                 <a:cs typeface="Calibri" pitchFamily="34" charset="-120"/>
               </a:rPr>
-              <a:t>correctly</a:t>
+              <a:t>correction</a:t>
             </a:r>
             <a:pPr algn="l" indent="0" marL="0">
               <a:buNone/>
@@ -6102,7 +6102,7 @@
                 <a:ea typeface="Calibri" pitchFamily="34" charset="-122"/>
                 <a:cs typeface="Calibri" pitchFamily="34" charset="-120"/>
               </a:rPr>
-              <a:t>.</a:t>
+              <a:t> to my spelling in red pen.</a:t>
             </a:r>
             <a:endParaRPr lang="en-US" sz="1800" dirty="0"/>
           </a:p>
@@ -6257,7 +6257,7 @@
                 <a:ea typeface="Trebuchet MS" pitchFamily="34" charset="-122"/>
                 <a:cs typeface="Trebuchet MS" pitchFamily="34" charset="-120"/>
               </a:rPr>
-              <a:t>correct</a:t>
+              <a:t>incorrectness</a:t>
             </a:r>
             <a:endParaRPr lang="en-US" sz="1400" dirty="0"/>
           </a:p>
@@ -6385,7 +6385,7 @@
                 <a:ea typeface="Trebuchet MS" pitchFamily="34" charset="-122"/>
                 <a:cs typeface="Trebuchet MS" pitchFamily="34" charset="-120"/>
               </a:rPr>
-              <a:t>correctly</a:t>
+              <a:t>correction</a:t>
             </a:r>
             <a:endParaRPr lang="en-US" sz="1400" dirty="0"/>
           </a:p>
@@ -6716,7 +6716,7 @@
                 <a:ea typeface="Calibri" pitchFamily="34" charset="-122"/>
                 <a:cs typeface="Calibri" pitchFamily="34" charset="-120"/>
               </a:rPr>
-              <a:t>Word Labs  •  wordlabs.app  •  Root: 'correct' = right, accurate, free from error</a:t>
+              <a:t>Word Labs  •  wordlabs.app  •  Root: 'correct' = right; accurate</a:t>
             </a:r>
             <a:endParaRPr lang="en-US" sz="800" dirty="0"/>
           </a:p>
@@ -6855,7 +6855,7 @@
                 <a:ea typeface="Trebuchet MS" pitchFamily="34" charset="-122"/>
                 <a:cs typeface="Trebuchet MS" pitchFamily="34" charset="-120"/>
               </a:rPr>
-              <a:t>correct</a:t>
+              <a:t>incorrectness</a:t>
             </a:r>
             <a:endParaRPr lang="en-US" sz="2800" dirty="0"/>
           </a:p>
@@ -7543,7 +7543,7 @@
                 <a:ea typeface="Calibri" pitchFamily="34" charset="-122"/>
                 <a:cs typeface="Calibri" pitchFamily="34" charset="-120"/>
               </a:rPr>
-              <a:t>Word Labs  •  wordlabs.app  •  Root: 'correct' = right, accurate, free from error</a:t>
+              <a:t>Word Labs  •  wordlabs.app  •  Root: 'correct' = right; accurate</a:t>
             </a:r>
             <a:endParaRPr lang="en-US" sz="800" dirty="0"/>
           </a:p>
@@ -7682,7 +7682,7 @@
                 <a:ea typeface="Trebuchet MS" pitchFamily="34" charset="-122"/>
                 <a:cs typeface="Trebuchet MS" pitchFamily="34" charset="-120"/>
               </a:rPr>
-              <a:t>correct</a:t>
+              <a:t>incorrectness</a:t>
             </a:r>
             <a:endParaRPr lang="en-US" sz="2800" dirty="0"/>
           </a:p>
@@ -7762,7 +7762,7 @@
         </p:nvSpPr>
         <p:spPr>
           <a:xfrm>
-            <a:off x="4370832" y="2258568"/>
+            <a:off x="2221992" y="2258568"/>
             <a:ext cx="1828800" cy="292608"/>
           </a:xfrm>
           <a:prstGeom prst="rect">
@@ -7771,11 +7771,11 @@
             </a:avLst>
           </a:prstGeom>
           <a:solidFill>
-            <a:srgbClr val="CCFBF1"/>
+            <a:srgbClr val="DDD6FE"/>
           </a:solidFill>
           <a:ln w="19050">
             <a:solidFill>
-              <a:srgbClr val="0D9488"/>
+              <a:srgbClr val="7C3AED"/>
             </a:solidFill>
             <a:prstDash val="solid"/>
           </a:ln>
@@ -7796,7 +7796,7 @@
         </p:nvSpPr>
         <p:spPr>
           <a:xfrm>
-            <a:off x="4370832" y="2258568"/>
+            <a:off x="2221992" y="2258568"/>
             <a:ext cx="1828800" cy="292608"/>
           </a:xfrm>
           <a:prstGeom prst="rect">
@@ -7815,13 +7815,13 @@
             <a:r>
               <a:rPr lang="en-US" sz="1300" b="1" dirty="0">
                 <a:solidFill>
-                  <a:srgbClr val="0F766E"/>
+                  <a:srgbClr val="4C1D95"/>
                 </a:solidFill>
                 <a:latin typeface="Trebuchet MS" pitchFamily="34" charset="0"/>
                 <a:ea typeface="Trebuchet MS" pitchFamily="34" charset="-122"/>
                 <a:cs typeface="Trebuchet MS" pitchFamily="34" charset="-120"/>
               </a:rPr>
-              <a:t>correct</a:t>
+              <a:t>in</a:t>
             </a:r>
             <a:endParaRPr lang="en-US" sz="1300" dirty="0"/>
           </a:p>
@@ -7835,7 +7835,7 @@
         </p:nvSpPr>
         <p:spPr>
           <a:xfrm>
-            <a:off x="4370832" y="2569464"/>
+            <a:off x="2221992" y="2569464"/>
             <a:ext cx="1828800" cy="201168"/>
           </a:xfrm>
           <a:prstGeom prst="rect">
@@ -7860,7 +7860,7 @@
                 <a:ea typeface="Calibri" pitchFamily="34" charset="-122"/>
                 <a:cs typeface="Calibri" pitchFamily="34" charset="-120"/>
               </a:rPr>
-              <a:t>right, free from error</a:t>
+              <a:t>not; into</a:t>
             </a:r>
             <a:endParaRPr lang="en-US" sz="850" dirty="0"/>
           </a:p>
@@ -7869,6 +7869,230 @@
       <p:sp>
         <p:nvSpPr>
           <p:cNvPr id="19" name="Shape 17"/>
+          <p:cNvSpPr/>
+          <p:nvPr/>
+        </p:nvSpPr>
+        <p:spPr>
+          <a:xfrm>
+            <a:off x="4370832" y="2258568"/>
+            <a:ext cx="1828800" cy="292608"/>
+          </a:xfrm>
+          <a:prstGeom prst="rect">
+            <a:avLst>
+              <a:gd name="adj" fmla="val 25000"/>
+            </a:avLst>
+          </a:prstGeom>
+          <a:solidFill>
+            <a:srgbClr val="CCFBF1"/>
+          </a:solidFill>
+          <a:ln w="19050">
+            <a:solidFill>
+              <a:srgbClr val="0D9488"/>
+            </a:solidFill>
+            <a:prstDash val="solid"/>
+          </a:ln>
+          <a:effectLst>
+            <a:outerShdw sx="100000" sy="100000" kx="0" ky="0" algn="bl" rotWithShape="0" blurRad="101600" dist="38100" dir="8100000">
+              <a:srgbClr val="000000">
+                <a:alpha val="12000"/>
+              </a:srgbClr>
+            </a:outerShdw>
+          </a:effectLst>
+        </p:spPr>
+      </p:sp>
+      <p:sp>
+        <p:nvSpPr>
+          <p:cNvPr id="20" name="Text 18"/>
+          <p:cNvSpPr/>
+          <p:nvPr/>
+        </p:nvSpPr>
+        <p:spPr>
+          <a:xfrm>
+            <a:off x="4370832" y="2258568"/>
+            <a:ext cx="1828800" cy="292608"/>
+          </a:xfrm>
+          <a:prstGeom prst="rect">
+            <a:avLst/>
+          </a:prstGeom>
+          <a:noFill/>
+          <a:ln/>
+        </p:spPr>
+        <p:txBody>
+          <a:bodyPr wrap="square" lIns="0" tIns="0" rIns="0" bIns="0" rtlCol="0" anchor="ctr"/>
+          <a:lstStyle/>
+          <a:p>
+            <a:pPr algn="ctr" indent="0" marL="0">
+              <a:buNone/>
+            </a:pPr>
+            <a:r>
+              <a:rPr lang="en-US" sz="1300" b="1" dirty="0">
+                <a:solidFill>
+                  <a:srgbClr val="0F766E"/>
+                </a:solidFill>
+                <a:latin typeface="Trebuchet MS" pitchFamily="34" charset="0"/>
+                <a:ea typeface="Trebuchet MS" pitchFamily="34" charset="-122"/>
+                <a:cs typeface="Trebuchet MS" pitchFamily="34" charset="-120"/>
+              </a:rPr>
+              <a:t>correct</a:t>
+            </a:r>
+            <a:endParaRPr lang="en-US" sz="1300" dirty="0"/>
+          </a:p>
+        </p:txBody>
+      </p:sp>
+      <p:sp>
+        <p:nvSpPr>
+          <p:cNvPr id="21" name="Text 19"/>
+          <p:cNvSpPr/>
+          <p:nvPr/>
+        </p:nvSpPr>
+        <p:spPr>
+          <a:xfrm>
+            <a:off x="4370832" y="2569464"/>
+            <a:ext cx="1828800" cy="201168"/>
+          </a:xfrm>
+          <a:prstGeom prst="rect">
+            <a:avLst/>
+          </a:prstGeom>
+          <a:noFill/>
+          <a:ln/>
+        </p:spPr>
+        <p:txBody>
+          <a:bodyPr wrap="square" lIns="0" tIns="0" rIns="0" bIns="0" rtlCol="0" anchor="t"/>
+          <a:lstStyle/>
+          <a:p>
+            <a:pPr algn="ctr" indent="0" marL="0">
+              <a:buNone/>
+            </a:pPr>
+            <a:r>
+              <a:rPr lang="en-US" sz="850" dirty="0">
+                <a:solidFill>
+                  <a:srgbClr val="475569"/>
+                </a:solidFill>
+                <a:latin typeface="Calibri" pitchFamily="34" charset="0"/>
+                <a:ea typeface="Calibri" pitchFamily="34" charset="-122"/>
+                <a:cs typeface="Calibri" pitchFamily="34" charset="-120"/>
+              </a:rPr>
+              <a:t>right; accurate</a:t>
+            </a:r>
+            <a:endParaRPr lang="en-US" sz="850" dirty="0"/>
+          </a:p>
+        </p:txBody>
+      </p:sp>
+      <p:sp>
+        <p:nvSpPr>
+          <p:cNvPr id="22" name="Shape 20"/>
+          <p:cNvSpPr/>
+          <p:nvPr/>
+        </p:nvSpPr>
+        <p:spPr>
+          <a:xfrm>
+            <a:off x="6519672" y="2258568"/>
+            <a:ext cx="1828800" cy="292608"/>
+          </a:xfrm>
+          <a:prstGeom prst="rect">
+            <a:avLst>
+              <a:gd name="adj" fmla="val 25000"/>
+            </a:avLst>
+          </a:prstGeom>
+          <a:solidFill>
+            <a:srgbClr val="FCE7F3"/>
+          </a:solidFill>
+          <a:ln w="19050">
+            <a:solidFill>
+              <a:srgbClr val="DB2777"/>
+            </a:solidFill>
+            <a:prstDash val="solid"/>
+          </a:ln>
+          <a:effectLst>
+            <a:outerShdw sx="100000" sy="100000" kx="0" ky="0" algn="bl" rotWithShape="0" blurRad="101600" dist="38100" dir="8100000">
+              <a:srgbClr val="000000">
+                <a:alpha val="12000"/>
+              </a:srgbClr>
+            </a:outerShdw>
+          </a:effectLst>
+        </p:spPr>
+      </p:sp>
+      <p:sp>
+        <p:nvSpPr>
+          <p:cNvPr id="23" name="Text 21"/>
+          <p:cNvSpPr/>
+          <p:nvPr/>
+        </p:nvSpPr>
+        <p:spPr>
+          <a:xfrm>
+            <a:off x="6519672" y="2258568"/>
+            <a:ext cx="1828800" cy="292608"/>
+          </a:xfrm>
+          <a:prstGeom prst="rect">
+            <a:avLst/>
+          </a:prstGeom>
+          <a:noFill/>
+          <a:ln/>
+        </p:spPr>
+        <p:txBody>
+          <a:bodyPr wrap="square" lIns="0" tIns="0" rIns="0" bIns="0" rtlCol="0" anchor="ctr"/>
+          <a:lstStyle/>
+          <a:p>
+            <a:pPr algn="ctr" indent="0" marL="0">
+              <a:buNone/>
+            </a:pPr>
+            <a:r>
+              <a:rPr lang="en-US" sz="1300" b="1" dirty="0">
+                <a:solidFill>
+                  <a:srgbClr val="9D174D"/>
+                </a:solidFill>
+                <a:latin typeface="Trebuchet MS" pitchFamily="34" charset="0"/>
+                <a:ea typeface="Trebuchet MS" pitchFamily="34" charset="-122"/>
+                <a:cs typeface="Trebuchet MS" pitchFamily="34" charset="-120"/>
+              </a:rPr>
+              <a:t>ness</a:t>
+            </a:r>
+            <a:endParaRPr lang="en-US" sz="1300" dirty="0"/>
+          </a:p>
+        </p:txBody>
+      </p:sp>
+      <p:sp>
+        <p:nvSpPr>
+          <p:cNvPr id="24" name="Text 22"/>
+          <p:cNvSpPr/>
+          <p:nvPr/>
+        </p:nvSpPr>
+        <p:spPr>
+          <a:xfrm>
+            <a:off x="6519672" y="2569464"/>
+            <a:ext cx="1828800" cy="201168"/>
+          </a:xfrm>
+          <a:prstGeom prst="rect">
+            <a:avLst/>
+          </a:prstGeom>
+          <a:noFill/>
+          <a:ln/>
+        </p:spPr>
+        <p:txBody>
+          <a:bodyPr wrap="square" lIns="0" tIns="0" rIns="0" bIns="0" rtlCol="0" anchor="t"/>
+          <a:lstStyle/>
+          <a:p>
+            <a:pPr algn="ctr" indent="0" marL="0">
+              <a:buNone/>
+            </a:pPr>
+            <a:r>
+              <a:rPr lang="en-US" sz="850" dirty="0">
+                <a:solidFill>
+                  <a:srgbClr val="475569"/>
+                </a:solidFill>
+                <a:latin typeface="Calibri" pitchFamily="34" charset="0"/>
+                <a:ea typeface="Calibri" pitchFamily="34" charset="-122"/>
+                <a:cs typeface="Calibri" pitchFamily="34" charset="-120"/>
+              </a:rPr>
+              <a:t>state of</a:t>
+            </a:r>
+            <a:endParaRPr lang="en-US" sz="850" dirty="0"/>
+          </a:p>
+        </p:txBody>
+      </p:sp>
+      <p:sp>
+        <p:nvSpPr>
+          <p:cNvPr id="25" name="Shape 23"/>
           <p:cNvSpPr/>
           <p:nvPr/>
         </p:nvSpPr>
@@ -7895,7 +8119,7 @@
       </p:sp>
       <p:sp>
         <p:nvSpPr>
-          <p:cNvPr id="20" name="Text 18"/>
+          <p:cNvPr id="26" name="Text 24"/>
           <p:cNvSpPr/>
           <p:nvPr/>
         </p:nvSpPr>
@@ -7934,7 +8158,7 @@
       </p:sp>
       <p:sp>
         <p:nvSpPr>
-          <p:cNvPr id="21" name="Shape 19"/>
+          <p:cNvPr id="27" name="Shape 25"/>
           <p:cNvSpPr/>
           <p:nvPr/>
         </p:nvSpPr>
@@ -7961,7 +8185,7 @@
       </p:sp>
       <p:sp>
         <p:nvSpPr>
-          <p:cNvPr id="22" name="Text 20"/>
+          <p:cNvPr id="28" name="Text 26"/>
           <p:cNvSpPr/>
           <p:nvPr/>
         </p:nvSpPr>
@@ -8000,7 +8224,7 @@
       </p:sp>
       <p:sp>
         <p:nvSpPr>
-          <p:cNvPr id="23" name="Shape 21"/>
+          <p:cNvPr id="29" name="Shape 27"/>
           <p:cNvSpPr/>
           <p:nvPr/>
         </p:nvSpPr>
@@ -8027,7 +8251,7 @@
       </p:sp>
       <p:sp>
         <p:nvSpPr>
-          <p:cNvPr id="24" name="Text 22"/>
+          <p:cNvPr id="30" name="Text 28"/>
           <p:cNvSpPr/>
           <p:nvPr/>
         </p:nvSpPr>
@@ -8066,7 +8290,7 @@
       </p:sp>
       <p:sp>
         <p:nvSpPr>
-          <p:cNvPr id="25" name="Shape 23"/>
+          <p:cNvPr id="31" name="Shape 29"/>
           <p:cNvSpPr/>
           <p:nvPr/>
         </p:nvSpPr>
@@ -8093,7 +8317,7 @@
       </p:sp>
       <p:sp>
         <p:nvSpPr>
-          <p:cNvPr id="26" name="Text 24"/>
+          <p:cNvPr id="32" name="Text 30"/>
           <p:cNvSpPr/>
           <p:nvPr/>
         </p:nvSpPr>
@@ -8416,7 +8640,7 @@
                 <a:ea typeface="Calibri" pitchFamily="34" charset="-122"/>
                 <a:cs typeface="Calibri" pitchFamily="34" charset="-120"/>
               </a:rPr>
-              <a:t>Word Labs  •  wordlabs.app  •  Root: 'correct' = right, accurate, free from error</a:t>
+              <a:t>Word Labs  •  wordlabs.app  •  Root: 'correct' = right; accurate</a:t>
             </a:r>
             <a:endParaRPr lang="en-US" sz="800" dirty="0"/>
           </a:p>
@@ -8555,7 +8779,7 @@
                 <a:ea typeface="Trebuchet MS" pitchFamily="34" charset="-122"/>
                 <a:cs typeface="Trebuchet MS" pitchFamily="34" charset="-120"/>
               </a:rPr>
-              <a:t>correct</a:t>
+              <a:t>incorrectness</a:t>
             </a:r>
             <a:endParaRPr lang="en-US" sz="2800" dirty="0"/>
           </a:p>
@@ -8635,7 +8859,7 @@
         </p:nvSpPr>
         <p:spPr>
           <a:xfrm>
-            <a:off x="4370832" y="2258568"/>
+            <a:off x="2221992" y="2258568"/>
             <a:ext cx="1828800" cy="292608"/>
           </a:xfrm>
           <a:prstGeom prst="rect">
@@ -8644,11 +8868,11 @@
             </a:avLst>
           </a:prstGeom>
           <a:solidFill>
-            <a:srgbClr val="CCFBF1"/>
+            <a:srgbClr val="DDD6FE"/>
           </a:solidFill>
           <a:ln w="19050">
             <a:solidFill>
-              <a:srgbClr val="0D9488"/>
+              <a:srgbClr val="7C3AED"/>
             </a:solidFill>
             <a:prstDash val="solid"/>
           </a:ln>
@@ -8669,7 +8893,7 @@
         </p:nvSpPr>
         <p:spPr>
           <a:xfrm>
-            <a:off x="4370832" y="2258568"/>
+            <a:off x="2221992" y="2258568"/>
             <a:ext cx="1828800" cy="292608"/>
           </a:xfrm>
           <a:prstGeom prst="rect">
@@ -8688,13 +8912,13 @@
             <a:r>
               <a:rPr lang="en-US" sz="1300" b="1" dirty="0">
                 <a:solidFill>
-                  <a:srgbClr val="0F766E"/>
+                  <a:srgbClr val="4C1D95"/>
                 </a:solidFill>
                 <a:latin typeface="Trebuchet MS" pitchFamily="34" charset="0"/>
                 <a:ea typeface="Trebuchet MS" pitchFamily="34" charset="-122"/>
                 <a:cs typeface="Trebuchet MS" pitchFamily="34" charset="-120"/>
               </a:rPr>
-              <a:t>correct</a:t>
+              <a:t>in</a:t>
             </a:r>
             <a:endParaRPr lang="en-US" sz="1300" dirty="0"/>
           </a:p>
@@ -8708,7 +8932,7 @@
         </p:nvSpPr>
         <p:spPr>
           <a:xfrm>
-            <a:off x="4370832" y="2569464"/>
+            <a:off x="2221992" y="2569464"/>
             <a:ext cx="1828800" cy="201168"/>
           </a:xfrm>
           <a:prstGeom prst="rect">
@@ -8733,7 +8957,7 @@
                 <a:ea typeface="Calibri" pitchFamily="34" charset="-122"/>
                 <a:cs typeface="Calibri" pitchFamily="34" charset="-120"/>
               </a:rPr>
-              <a:t>right, free from error</a:t>
+              <a:t>not; into</a:t>
             </a:r>
             <a:endParaRPr lang="en-US" sz="850" dirty="0"/>
           </a:p>
@@ -8742,6 +8966,230 @@
       <p:sp>
         <p:nvSpPr>
           <p:cNvPr id="19" name="Shape 17"/>
+          <p:cNvSpPr/>
+          <p:nvPr/>
+        </p:nvSpPr>
+        <p:spPr>
+          <a:xfrm>
+            <a:off x="4370832" y="2258568"/>
+            <a:ext cx="1828800" cy="292608"/>
+          </a:xfrm>
+          <a:prstGeom prst="rect">
+            <a:avLst>
+              <a:gd name="adj" fmla="val 25000"/>
+            </a:avLst>
+          </a:prstGeom>
+          <a:solidFill>
+            <a:srgbClr val="CCFBF1"/>
+          </a:solidFill>
+          <a:ln w="19050">
+            <a:solidFill>
+              <a:srgbClr val="0D9488"/>
+            </a:solidFill>
+            <a:prstDash val="solid"/>
+          </a:ln>
+          <a:effectLst>
+            <a:outerShdw sx="100000" sy="100000" kx="0" ky="0" algn="bl" rotWithShape="0" blurRad="101600" dist="38100" dir="8100000">
+              <a:srgbClr val="000000">
+                <a:alpha val="12000"/>
+              </a:srgbClr>
+            </a:outerShdw>
+          </a:effectLst>
+        </p:spPr>
+      </p:sp>
+      <p:sp>
+        <p:nvSpPr>
+          <p:cNvPr id="20" name="Text 18"/>
+          <p:cNvSpPr/>
+          <p:nvPr/>
+        </p:nvSpPr>
+        <p:spPr>
+          <a:xfrm>
+            <a:off x="4370832" y="2258568"/>
+            <a:ext cx="1828800" cy="292608"/>
+          </a:xfrm>
+          <a:prstGeom prst="rect">
+            <a:avLst/>
+          </a:prstGeom>
+          <a:noFill/>
+          <a:ln/>
+        </p:spPr>
+        <p:txBody>
+          <a:bodyPr wrap="square" lIns="0" tIns="0" rIns="0" bIns="0" rtlCol="0" anchor="ctr"/>
+          <a:lstStyle/>
+          <a:p>
+            <a:pPr algn="ctr" indent="0" marL="0">
+              <a:buNone/>
+            </a:pPr>
+            <a:r>
+              <a:rPr lang="en-US" sz="1300" b="1" dirty="0">
+                <a:solidFill>
+                  <a:srgbClr val="0F766E"/>
+                </a:solidFill>
+                <a:latin typeface="Trebuchet MS" pitchFamily="34" charset="0"/>
+                <a:ea typeface="Trebuchet MS" pitchFamily="34" charset="-122"/>
+                <a:cs typeface="Trebuchet MS" pitchFamily="34" charset="-120"/>
+              </a:rPr>
+              <a:t>correct</a:t>
+            </a:r>
+            <a:endParaRPr lang="en-US" sz="1300" dirty="0"/>
+          </a:p>
+        </p:txBody>
+      </p:sp>
+      <p:sp>
+        <p:nvSpPr>
+          <p:cNvPr id="21" name="Text 19"/>
+          <p:cNvSpPr/>
+          <p:nvPr/>
+        </p:nvSpPr>
+        <p:spPr>
+          <a:xfrm>
+            <a:off x="4370832" y="2569464"/>
+            <a:ext cx="1828800" cy="201168"/>
+          </a:xfrm>
+          <a:prstGeom prst="rect">
+            <a:avLst/>
+          </a:prstGeom>
+          <a:noFill/>
+          <a:ln/>
+        </p:spPr>
+        <p:txBody>
+          <a:bodyPr wrap="square" lIns="0" tIns="0" rIns="0" bIns="0" rtlCol="0" anchor="t"/>
+          <a:lstStyle/>
+          <a:p>
+            <a:pPr algn="ctr" indent="0" marL="0">
+              <a:buNone/>
+            </a:pPr>
+            <a:r>
+              <a:rPr lang="en-US" sz="850" dirty="0">
+                <a:solidFill>
+                  <a:srgbClr val="475569"/>
+                </a:solidFill>
+                <a:latin typeface="Calibri" pitchFamily="34" charset="0"/>
+                <a:ea typeface="Calibri" pitchFamily="34" charset="-122"/>
+                <a:cs typeface="Calibri" pitchFamily="34" charset="-120"/>
+              </a:rPr>
+              <a:t>right; accurate</a:t>
+            </a:r>
+            <a:endParaRPr lang="en-US" sz="850" dirty="0"/>
+          </a:p>
+        </p:txBody>
+      </p:sp>
+      <p:sp>
+        <p:nvSpPr>
+          <p:cNvPr id="22" name="Shape 20"/>
+          <p:cNvSpPr/>
+          <p:nvPr/>
+        </p:nvSpPr>
+        <p:spPr>
+          <a:xfrm>
+            <a:off x="6519672" y="2258568"/>
+            <a:ext cx="1828800" cy="292608"/>
+          </a:xfrm>
+          <a:prstGeom prst="rect">
+            <a:avLst>
+              <a:gd name="adj" fmla="val 25000"/>
+            </a:avLst>
+          </a:prstGeom>
+          <a:solidFill>
+            <a:srgbClr val="FCE7F3"/>
+          </a:solidFill>
+          <a:ln w="19050">
+            <a:solidFill>
+              <a:srgbClr val="DB2777"/>
+            </a:solidFill>
+            <a:prstDash val="solid"/>
+          </a:ln>
+          <a:effectLst>
+            <a:outerShdw sx="100000" sy="100000" kx="0" ky="0" algn="bl" rotWithShape="0" blurRad="101600" dist="38100" dir="8100000">
+              <a:srgbClr val="000000">
+                <a:alpha val="12000"/>
+              </a:srgbClr>
+            </a:outerShdw>
+          </a:effectLst>
+        </p:spPr>
+      </p:sp>
+      <p:sp>
+        <p:nvSpPr>
+          <p:cNvPr id="23" name="Text 21"/>
+          <p:cNvSpPr/>
+          <p:nvPr/>
+        </p:nvSpPr>
+        <p:spPr>
+          <a:xfrm>
+            <a:off x="6519672" y="2258568"/>
+            <a:ext cx="1828800" cy="292608"/>
+          </a:xfrm>
+          <a:prstGeom prst="rect">
+            <a:avLst/>
+          </a:prstGeom>
+          <a:noFill/>
+          <a:ln/>
+        </p:spPr>
+        <p:txBody>
+          <a:bodyPr wrap="square" lIns="0" tIns="0" rIns="0" bIns="0" rtlCol="0" anchor="ctr"/>
+          <a:lstStyle/>
+          <a:p>
+            <a:pPr algn="ctr" indent="0" marL="0">
+              <a:buNone/>
+            </a:pPr>
+            <a:r>
+              <a:rPr lang="en-US" sz="1300" b="1" dirty="0">
+                <a:solidFill>
+                  <a:srgbClr val="9D174D"/>
+                </a:solidFill>
+                <a:latin typeface="Trebuchet MS" pitchFamily="34" charset="0"/>
+                <a:ea typeface="Trebuchet MS" pitchFamily="34" charset="-122"/>
+                <a:cs typeface="Trebuchet MS" pitchFamily="34" charset="-120"/>
+              </a:rPr>
+              <a:t>ness</a:t>
+            </a:r>
+            <a:endParaRPr lang="en-US" sz="1300" dirty="0"/>
+          </a:p>
+        </p:txBody>
+      </p:sp>
+      <p:sp>
+        <p:nvSpPr>
+          <p:cNvPr id="24" name="Text 22"/>
+          <p:cNvSpPr/>
+          <p:nvPr/>
+        </p:nvSpPr>
+        <p:spPr>
+          <a:xfrm>
+            <a:off x="6519672" y="2569464"/>
+            <a:ext cx="1828800" cy="201168"/>
+          </a:xfrm>
+          <a:prstGeom prst="rect">
+            <a:avLst/>
+          </a:prstGeom>
+          <a:noFill/>
+          <a:ln/>
+        </p:spPr>
+        <p:txBody>
+          <a:bodyPr wrap="square" lIns="0" tIns="0" rIns="0" bIns="0" rtlCol="0" anchor="t"/>
+          <a:lstStyle/>
+          <a:p>
+            <a:pPr algn="ctr" indent="0" marL="0">
+              <a:buNone/>
+            </a:pPr>
+            <a:r>
+              <a:rPr lang="en-US" sz="850" dirty="0">
+                <a:solidFill>
+                  <a:srgbClr val="475569"/>
+                </a:solidFill>
+                <a:latin typeface="Calibri" pitchFamily="34" charset="0"/>
+                <a:ea typeface="Calibri" pitchFamily="34" charset="-122"/>
+                <a:cs typeface="Calibri" pitchFamily="34" charset="-120"/>
+              </a:rPr>
+              <a:t>state of</a:t>
+            </a:r>
+            <a:endParaRPr lang="en-US" sz="850" dirty="0"/>
+          </a:p>
+        </p:txBody>
+      </p:sp>
+      <p:sp>
+        <p:nvSpPr>
+          <p:cNvPr id="25" name="Shape 23"/>
           <p:cNvSpPr/>
           <p:nvPr/>
         </p:nvSpPr>
@@ -8768,7 +9216,7 @@
       </p:sp>
       <p:sp>
         <p:nvSpPr>
-          <p:cNvPr id="20" name="Text 18"/>
+          <p:cNvPr id="26" name="Text 24"/>
           <p:cNvSpPr/>
           <p:nvPr/>
         </p:nvSpPr>
@@ -8807,7 +9255,7 @@
       </p:sp>
       <p:sp>
         <p:nvSpPr>
-          <p:cNvPr id="21" name="Shape 19"/>
+          <p:cNvPr id="27" name="Shape 25"/>
           <p:cNvSpPr/>
           <p:nvPr/>
         </p:nvSpPr>
@@ -8834,14 +9282,14 @@
       </p:sp>
       <p:sp>
         <p:nvSpPr>
-          <p:cNvPr id="22" name="Shape 20"/>
-          <p:cNvSpPr/>
-          <p:nvPr/>
-        </p:nvSpPr>
-        <p:spPr>
-          <a:xfrm>
-            <a:off x="2999232" y="3364992"/>
-            <a:ext cx="1645920" cy="475488"/>
+          <p:cNvPr id="28" name="Shape 26"/>
+          <p:cNvSpPr/>
+          <p:nvPr/>
+        </p:nvSpPr>
+        <p:spPr>
+          <a:xfrm>
+            <a:off x="1975104" y="3364992"/>
+            <a:ext cx="1554480" cy="475488"/>
           </a:xfrm>
           <a:prstGeom prst="rect">
             <a:avLst>
@@ -8861,14 +9309,14 @@
       </p:sp>
       <p:sp>
         <p:nvSpPr>
-          <p:cNvPr id="23" name="Text 21"/>
-          <p:cNvSpPr/>
-          <p:nvPr/>
-        </p:nvSpPr>
-        <p:spPr>
-          <a:xfrm>
-            <a:off x="2999232" y="3364992"/>
-            <a:ext cx="1645920" cy="475488"/>
+          <p:cNvPr id="29" name="Text 27"/>
+          <p:cNvSpPr/>
+          <p:nvPr/>
+        </p:nvSpPr>
+        <p:spPr>
+          <a:xfrm>
+            <a:off x="1975104" y="3364992"/>
+            <a:ext cx="1554480" cy="475488"/>
           </a:xfrm>
           <a:prstGeom prst="rect">
             <a:avLst/>
@@ -8892,7 +9340,7 @@
                 <a:ea typeface="Trebuchet MS" pitchFamily="34" charset="-122"/>
                 <a:cs typeface="Trebuchet MS" pitchFamily="34" charset="-120"/>
               </a:rPr>
-              <a:t>cor</a:t>
+              <a:t>in</a:t>
             </a:r>
             <a:endParaRPr lang="en-US" sz="1400" dirty="0"/>
           </a:p>
@@ -8900,14 +9348,14 @@
       </p:sp>
       <p:sp>
         <p:nvSpPr>
-          <p:cNvPr id="24" name="Text 22"/>
-          <p:cNvSpPr/>
-          <p:nvPr/>
-        </p:nvSpPr>
-        <p:spPr>
-          <a:xfrm>
-            <a:off x="4645152" y="3364992"/>
-            <a:ext cx="1097280" cy="475488"/>
+          <p:cNvPr id="30" name="Text 28"/>
+          <p:cNvSpPr/>
+          <p:nvPr/>
+        </p:nvSpPr>
+        <p:spPr>
+          <a:xfrm>
+            <a:off x="3529584" y="3364992"/>
+            <a:ext cx="73152" cy="475488"/>
           </a:xfrm>
           <a:prstGeom prst="rect">
             <a:avLst/>
@@ -8939,14 +9387,14 @@
       </p:sp>
       <p:sp>
         <p:nvSpPr>
-          <p:cNvPr id="25" name="Shape 23"/>
-          <p:cNvSpPr/>
-          <p:nvPr/>
-        </p:nvSpPr>
-        <p:spPr>
-          <a:xfrm>
-            <a:off x="5742432" y="3364992"/>
-            <a:ext cx="1645920" cy="475488"/>
+          <p:cNvPr id="31" name="Shape 29"/>
+          <p:cNvSpPr/>
+          <p:nvPr/>
+        </p:nvSpPr>
+        <p:spPr>
+          <a:xfrm>
+            <a:off x="3602736" y="3364992"/>
+            <a:ext cx="1554480" cy="475488"/>
           </a:xfrm>
           <a:prstGeom prst="rect">
             <a:avLst>
@@ -8966,14 +9414,14 @@
       </p:sp>
       <p:sp>
         <p:nvSpPr>
-          <p:cNvPr id="26" name="Text 24"/>
-          <p:cNvSpPr/>
-          <p:nvPr/>
-        </p:nvSpPr>
-        <p:spPr>
-          <a:xfrm>
-            <a:off x="5742432" y="3364992"/>
-            <a:ext cx="1645920" cy="475488"/>
+          <p:cNvPr id="32" name="Text 30"/>
+          <p:cNvSpPr/>
+          <p:nvPr/>
+        </p:nvSpPr>
+        <p:spPr>
+          <a:xfrm>
+            <a:off x="3602736" y="3364992"/>
+            <a:ext cx="1554480" cy="475488"/>
           </a:xfrm>
           <a:prstGeom prst="rect">
             <a:avLst/>
@@ -8997,6 +9445,111 @@
                 <a:ea typeface="Trebuchet MS" pitchFamily="34" charset="-122"/>
                 <a:cs typeface="Trebuchet MS" pitchFamily="34" charset="-120"/>
               </a:rPr>
+              <a:t>cor</a:t>
+            </a:r>
+            <a:endParaRPr lang="en-US" sz="1400" dirty="0"/>
+          </a:p>
+        </p:txBody>
+      </p:sp>
+      <p:sp>
+        <p:nvSpPr>
+          <p:cNvPr id="33" name="Text 31"/>
+          <p:cNvSpPr/>
+          <p:nvPr/>
+        </p:nvSpPr>
+        <p:spPr>
+          <a:xfrm>
+            <a:off x="5157216" y="3364992"/>
+            <a:ext cx="73152" cy="475488"/>
+          </a:xfrm>
+          <a:prstGeom prst="rect">
+            <a:avLst/>
+          </a:prstGeom>
+          <a:noFill/>
+          <a:ln/>
+        </p:spPr>
+        <p:txBody>
+          <a:bodyPr wrap="square" lIns="0" tIns="0" rIns="0" bIns="0" rtlCol="0" anchor="ctr"/>
+          <a:lstStyle/>
+          <a:p>
+            <a:pPr algn="ctr" indent="0" marL="0">
+              <a:buNone/>
+            </a:pPr>
+            <a:r>
+              <a:rPr lang="en-US" sz="1600" b="1" dirty="0">
+                <a:solidFill>
+                  <a:srgbClr val="0D9488"/>
+                </a:solidFill>
+                <a:latin typeface="Trebuchet MS" pitchFamily="34" charset="0"/>
+                <a:ea typeface="Trebuchet MS" pitchFamily="34" charset="-122"/>
+                <a:cs typeface="Trebuchet MS" pitchFamily="34" charset="-120"/>
+              </a:rPr>
+              <a:t>·</a:t>
+            </a:r>
+            <a:endParaRPr lang="en-US" sz="1600" dirty="0"/>
+          </a:p>
+        </p:txBody>
+      </p:sp>
+      <p:sp>
+        <p:nvSpPr>
+          <p:cNvPr id="34" name="Shape 32"/>
+          <p:cNvSpPr/>
+          <p:nvPr/>
+        </p:nvSpPr>
+        <p:spPr>
+          <a:xfrm>
+            <a:off x="5230368" y="3364992"/>
+            <a:ext cx="1554480" cy="475488"/>
+          </a:xfrm>
+          <a:prstGeom prst="rect">
+            <a:avLst>
+              <a:gd name="adj" fmla="val 9615"/>
+            </a:avLst>
+          </a:prstGeom>
+          <a:solidFill>
+            <a:srgbClr val="FFFFFF"/>
+          </a:solidFill>
+          <a:ln w="12700">
+            <a:solidFill>
+              <a:srgbClr val="0D9488"/>
+            </a:solidFill>
+            <a:prstDash val="solid"/>
+          </a:ln>
+        </p:spPr>
+      </p:sp>
+      <p:sp>
+        <p:nvSpPr>
+          <p:cNvPr id="35" name="Text 33"/>
+          <p:cNvSpPr/>
+          <p:nvPr/>
+        </p:nvSpPr>
+        <p:spPr>
+          <a:xfrm>
+            <a:off x="5230368" y="3364992"/>
+            <a:ext cx="1554480" cy="475488"/>
+          </a:xfrm>
+          <a:prstGeom prst="rect">
+            <a:avLst/>
+          </a:prstGeom>
+          <a:noFill/>
+          <a:ln/>
+        </p:spPr>
+        <p:txBody>
+          <a:bodyPr wrap="square" lIns="0" tIns="0" rIns="0" bIns="0" rtlCol="0" anchor="ctr"/>
+          <a:lstStyle/>
+          <a:p>
+            <a:pPr algn="ctr" indent="0" marL="0">
+              <a:buNone/>
+            </a:pPr>
+            <a:r>
+              <a:rPr lang="en-US" sz="1400" b="1" dirty="0">
+                <a:solidFill>
+                  <a:srgbClr val="0D9488"/>
+                </a:solidFill>
+                <a:latin typeface="Trebuchet MS" pitchFamily="34" charset="0"/>
+                <a:ea typeface="Trebuchet MS" pitchFamily="34" charset="-122"/>
+                <a:cs typeface="Trebuchet MS" pitchFamily="34" charset="-120"/>
+              </a:rPr>
               <a:t>rect</a:t>
             </a:r>
             <a:endParaRPr lang="en-US" sz="1400" dirty="0"/>
@@ -9005,7 +9558,112 @@
       </p:sp>
       <p:sp>
         <p:nvSpPr>
-          <p:cNvPr id="27" name="Shape 25"/>
+          <p:cNvPr id="36" name="Text 34"/>
+          <p:cNvSpPr/>
+          <p:nvPr/>
+        </p:nvSpPr>
+        <p:spPr>
+          <a:xfrm>
+            <a:off x="6784848" y="3364992"/>
+            <a:ext cx="73152" cy="475488"/>
+          </a:xfrm>
+          <a:prstGeom prst="rect">
+            <a:avLst/>
+          </a:prstGeom>
+          <a:noFill/>
+          <a:ln/>
+        </p:spPr>
+        <p:txBody>
+          <a:bodyPr wrap="square" lIns="0" tIns="0" rIns="0" bIns="0" rtlCol="0" anchor="ctr"/>
+          <a:lstStyle/>
+          <a:p>
+            <a:pPr algn="ctr" indent="0" marL="0">
+              <a:buNone/>
+            </a:pPr>
+            <a:r>
+              <a:rPr lang="en-US" sz="1600" b="1" dirty="0">
+                <a:solidFill>
+                  <a:srgbClr val="0D9488"/>
+                </a:solidFill>
+                <a:latin typeface="Trebuchet MS" pitchFamily="34" charset="0"/>
+                <a:ea typeface="Trebuchet MS" pitchFamily="34" charset="-122"/>
+                <a:cs typeface="Trebuchet MS" pitchFamily="34" charset="-120"/>
+              </a:rPr>
+              <a:t>·</a:t>
+            </a:r>
+            <a:endParaRPr lang="en-US" sz="1600" dirty="0"/>
+          </a:p>
+        </p:txBody>
+      </p:sp>
+      <p:sp>
+        <p:nvSpPr>
+          <p:cNvPr id="37" name="Shape 35"/>
+          <p:cNvSpPr/>
+          <p:nvPr/>
+        </p:nvSpPr>
+        <p:spPr>
+          <a:xfrm>
+            <a:off x="6858000" y="3364992"/>
+            <a:ext cx="1554480" cy="475488"/>
+          </a:xfrm>
+          <a:prstGeom prst="rect">
+            <a:avLst>
+              <a:gd name="adj" fmla="val 9615"/>
+            </a:avLst>
+          </a:prstGeom>
+          <a:solidFill>
+            <a:srgbClr val="FFFFFF"/>
+          </a:solidFill>
+          <a:ln w="12700">
+            <a:solidFill>
+              <a:srgbClr val="0D9488"/>
+            </a:solidFill>
+            <a:prstDash val="solid"/>
+          </a:ln>
+        </p:spPr>
+      </p:sp>
+      <p:sp>
+        <p:nvSpPr>
+          <p:cNvPr id="38" name="Text 36"/>
+          <p:cNvSpPr/>
+          <p:nvPr/>
+        </p:nvSpPr>
+        <p:spPr>
+          <a:xfrm>
+            <a:off x="6858000" y="3364992"/>
+            <a:ext cx="1554480" cy="475488"/>
+          </a:xfrm>
+          <a:prstGeom prst="rect">
+            <a:avLst/>
+          </a:prstGeom>
+          <a:noFill/>
+          <a:ln/>
+        </p:spPr>
+        <p:txBody>
+          <a:bodyPr wrap="square" lIns="0" tIns="0" rIns="0" bIns="0" rtlCol="0" anchor="ctr"/>
+          <a:lstStyle/>
+          <a:p>
+            <a:pPr algn="ctr" indent="0" marL="0">
+              <a:buNone/>
+            </a:pPr>
+            <a:r>
+              <a:rPr lang="en-US" sz="1400" b="1" dirty="0">
+                <a:solidFill>
+                  <a:srgbClr val="0D9488"/>
+                </a:solidFill>
+                <a:latin typeface="Trebuchet MS" pitchFamily="34" charset="0"/>
+                <a:ea typeface="Trebuchet MS" pitchFamily="34" charset="-122"/>
+                <a:cs typeface="Trebuchet MS" pitchFamily="34" charset="-120"/>
+              </a:rPr>
+              <a:t>ness</a:t>
+            </a:r>
+            <a:endParaRPr lang="en-US" sz="1400" dirty="0"/>
+          </a:p>
+        </p:txBody>
+      </p:sp>
+      <p:sp>
+        <p:nvSpPr>
+          <p:cNvPr id="39" name="Shape 37"/>
           <p:cNvSpPr/>
           <p:nvPr/>
         </p:nvSpPr>
@@ -9032,7 +9690,7 @@
       </p:sp>
       <p:sp>
         <p:nvSpPr>
-          <p:cNvPr id="28" name="Text 26"/>
+          <p:cNvPr id="40" name="Text 38"/>
           <p:cNvSpPr/>
           <p:nvPr/>
         </p:nvSpPr>
@@ -9071,7 +9729,7 @@
       </p:sp>
       <p:sp>
         <p:nvSpPr>
-          <p:cNvPr id="29" name="Shape 27"/>
+          <p:cNvPr id="41" name="Shape 39"/>
           <p:cNvSpPr/>
           <p:nvPr/>
         </p:nvSpPr>
@@ -9098,7 +9756,7 @@
       </p:sp>
       <p:sp>
         <p:nvSpPr>
-          <p:cNvPr id="30" name="Text 28"/>
+          <p:cNvPr id="42" name="Text 40"/>
           <p:cNvSpPr/>
           <p:nvPr/>
         </p:nvSpPr>
@@ -9421,7 +10079,7 @@
                 <a:ea typeface="Calibri" pitchFamily="34" charset="-122"/>
                 <a:cs typeface="Calibri" pitchFamily="34" charset="-120"/>
               </a:rPr>
-              <a:t>Word Labs  •  wordlabs.app  •  Root: 'correct' = right, accurate, free from error</a:t>
+              <a:t>Word Labs  •  wordlabs.app  •  Root: 'correct' = right; accurate</a:t>
             </a:r>
             <a:endParaRPr lang="en-US" sz="800" dirty="0"/>
           </a:p>
@@ -9560,7 +10218,7 @@
                 <a:ea typeface="Trebuchet MS" pitchFamily="34" charset="-122"/>
                 <a:cs typeface="Trebuchet MS" pitchFamily="34" charset="-120"/>
               </a:rPr>
-              <a:t>correct</a:t>
+              <a:t>incorrectness</a:t>
             </a:r>
             <a:endParaRPr lang="en-US" sz="2800" dirty="0"/>
           </a:p>
@@ -9640,7 +10298,7 @@
         </p:nvSpPr>
         <p:spPr>
           <a:xfrm>
-            <a:off x="4370832" y="2258568"/>
+            <a:off x="2221992" y="2258568"/>
             <a:ext cx="1828800" cy="292608"/>
           </a:xfrm>
           <a:prstGeom prst="rect">
@@ -9649,11 +10307,11 @@
             </a:avLst>
           </a:prstGeom>
           <a:solidFill>
-            <a:srgbClr val="CCFBF1"/>
+            <a:srgbClr val="DDD6FE"/>
           </a:solidFill>
           <a:ln w="19050">
             <a:solidFill>
-              <a:srgbClr val="0D9488"/>
+              <a:srgbClr val="7C3AED"/>
             </a:solidFill>
             <a:prstDash val="solid"/>
           </a:ln>
@@ -9674,7 +10332,7 @@
         </p:nvSpPr>
         <p:spPr>
           <a:xfrm>
-            <a:off x="4370832" y="2258568"/>
+            <a:off x="2221992" y="2258568"/>
             <a:ext cx="1828800" cy="292608"/>
           </a:xfrm>
           <a:prstGeom prst="rect">
@@ -9693,13 +10351,13 @@
             <a:r>
               <a:rPr lang="en-US" sz="1300" b="1" dirty="0">
                 <a:solidFill>
-                  <a:srgbClr val="0F766E"/>
+                  <a:srgbClr val="4C1D95"/>
                 </a:solidFill>
                 <a:latin typeface="Trebuchet MS" pitchFamily="34" charset="0"/>
                 <a:ea typeface="Trebuchet MS" pitchFamily="34" charset="-122"/>
                 <a:cs typeface="Trebuchet MS" pitchFamily="34" charset="-120"/>
               </a:rPr>
-              <a:t>correct</a:t>
+              <a:t>in</a:t>
             </a:r>
             <a:endParaRPr lang="en-US" sz="1300" dirty="0"/>
           </a:p>
@@ -9713,7 +10371,7 @@
         </p:nvSpPr>
         <p:spPr>
           <a:xfrm>
-            <a:off x="4370832" y="2569464"/>
+            <a:off x="2221992" y="2569464"/>
             <a:ext cx="1828800" cy="201168"/>
           </a:xfrm>
           <a:prstGeom prst="rect">
@@ -9738,7 +10396,7 @@
                 <a:ea typeface="Calibri" pitchFamily="34" charset="-122"/>
                 <a:cs typeface="Calibri" pitchFamily="34" charset="-120"/>
               </a:rPr>
-              <a:t>right, free from error</a:t>
+              <a:t>not; into</a:t>
             </a:r>
             <a:endParaRPr lang="en-US" sz="850" dirty="0"/>
           </a:p>
@@ -9747,6 +10405,230 @@
       <p:sp>
         <p:nvSpPr>
           <p:cNvPr id="19" name="Shape 17"/>
+          <p:cNvSpPr/>
+          <p:nvPr/>
+        </p:nvSpPr>
+        <p:spPr>
+          <a:xfrm>
+            <a:off x="4370832" y="2258568"/>
+            <a:ext cx="1828800" cy="292608"/>
+          </a:xfrm>
+          <a:prstGeom prst="rect">
+            <a:avLst>
+              <a:gd name="adj" fmla="val 25000"/>
+            </a:avLst>
+          </a:prstGeom>
+          <a:solidFill>
+            <a:srgbClr val="CCFBF1"/>
+          </a:solidFill>
+          <a:ln w="19050">
+            <a:solidFill>
+              <a:srgbClr val="0D9488"/>
+            </a:solidFill>
+            <a:prstDash val="solid"/>
+          </a:ln>
+          <a:effectLst>
+            <a:outerShdw sx="100000" sy="100000" kx="0" ky="0" algn="bl" rotWithShape="0" blurRad="101600" dist="38100" dir="8100000">
+              <a:srgbClr val="000000">
+                <a:alpha val="12000"/>
+              </a:srgbClr>
+            </a:outerShdw>
+          </a:effectLst>
+        </p:spPr>
+      </p:sp>
+      <p:sp>
+        <p:nvSpPr>
+          <p:cNvPr id="20" name="Text 18"/>
+          <p:cNvSpPr/>
+          <p:nvPr/>
+        </p:nvSpPr>
+        <p:spPr>
+          <a:xfrm>
+            <a:off x="4370832" y="2258568"/>
+            <a:ext cx="1828800" cy="292608"/>
+          </a:xfrm>
+          <a:prstGeom prst="rect">
+            <a:avLst/>
+          </a:prstGeom>
+          <a:noFill/>
+          <a:ln/>
+        </p:spPr>
+        <p:txBody>
+          <a:bodyPr wrap="square" lIns="0" tIns="0" rIns="0" bIns="0" rtlCol="0" anchor="ctr"/>
+          <a:lstStyle/>
+          <a:p>
+            <a:pPr algn="ctr" indent="0" marL="0">
+              <a:buNone/>
+            </a:pPr>
+            <a:r>
+              <a:rPr lang="en-US" sz="1300" b="1" dirty="0">
+                <a:solidFill>
+                  <a:srgbClr val="0F766E"/>
+                </a:solidFill>
+                <a:latin typeface="Trebuchet MS" pitchFamily="34" charset="0"/>
+                <a:ea typeface="Trebuchet MS" pitchFamily="34" charset="-122"/>
+                <a:cs typeface="Trebuchet MS" pitchFamily="34" charset="-120"/>
+              </a:rPr>
+              <a:t>correct</a:t>
+            </a:r>
+            <a:endParaRPr lang="en-US" sz="1300" dirty="0"/>
+          </a:p>
+        </p:txBody>
+      </p:sp>
+      <p:sp>
+        <p:nvSpPr>
+          <p:cNvPr id="21" name="Text 19"/>
+          <p:cNvSpPr/>
+          <p:nvPr/>
+        </p:nvSpPr>
+        <p:spPr>
+          <a:xfrm>
+            <a:off x="4370832" y="2569464"/>
+            <a:ext cx="1828800" cy="201168"/>
+          </a:xfrm>
+          <a:prstGeom prst="rect">
+            <a:avLst/>
+          </a:prstGeom>
+          <a:noFill/>
+          <a:ln/>
+        </p:spPr>
+        <p:txBody>
+          <a:bodyPr wrap="square" lIns="0" tIns="0" rIns="0" bIns="0" rtlCol="0" anchor="t"/>
+          <a:lstStyle/>
+          <a:p>
+            <a:pPr algn="ctr" indent="0" marL="0">
+              <a:buNone/>
+            </a:pPr>
+            <a:r>
+              <a:rPr lang="en-US" sz="850" dirty="0">
+                <a:solidFill>
+                  <a:srgbClr val="475569"/>
+                </a:solidFill>
+                <a:latin typeface="Calibri" pitchFamily="34" charset="0"/>
+                <a:ea typeface="Calibri" pitchFamily="34" charset="-122"/>
+                <a:cs typeface="Calibri" pitchFamily="34" charset="-120"/>
+              </a:rPr>
+              <a:t>right; accurate</a:t>
+            </a:r>
+            <a:endParaRPr lang="en-US" sz="850" dirty="0"/>
+          </a:p>
+        </p:txBody>
+      </p:sp>
+      <p:sp>
+        <p:nvSpPr>
+          <p:cNvPr id="22" name="Shape 20"/>
+          <p:cNvSpPr/>
+          <p:nvPr/>
+        </p:nvSpPr>
+        <p:spPr>
+          <a:xfrm>
+            <a:off x="6519672" y="2258568"/>
+            <a:ext cx="1828800" cy="292608"/>
+          </a:xfrm>
+          <a:prstGeom prst="rect">
+            <a:avLst>
+              <a:gd name="adj" fmla="val 25000"/>
+            </a:avLst>
+          </a:prstGeom>
+          <a:solidFill>
+            <a:srgbClr val="FCE7F3"/>
+          </a:solidFill>
+          <a:ln w="19050">
+            <a:solidFill>
+              <a:srgbClr val="DB2777"/>
+            </a:solidFill>
+            <a:prstDash val="solid"/>
+          </a:ln>
+          <a:effectLst>
+            <a:outerShdw sx="100000" sy="100000" kx="0" ky="0" algn="bl" rotWithShape="0" blurRad="101600" dist="38100" dir="8100000">
+              <a:srgbClr val="000000">
+                <a:alpha val="12000"/>
+              </a:srgbClr>
+            </a:outerShdw>
+          </a:effectLst>
+        </p:spPr>
+      </p:sp>
+      <p:sp>
+        <p:nvSpPr>
+          <p:cNvPr id="23" name="Text 21"/>
+          <p:cNvSpPr/>
+          <p:nvPr/>
+        </p:nvSpPr>
+        <p:spPr>
+          <a:xfrm>
+            <a:off x="6519672" y="2258568"/>
+            <a:ext cx="1828800" cy="292608"/>
+          </a:xfrm>
+          <a:prstGeom prst="rect">
+            <a:avLst/>
+          </a:prstGeom>
+          <a:noFill/>
+          <a:ln/>
+        </p:spPr>
+        <p:txBody>
+          <a:bodyPr wrap="square" lIns="0" tIns="0" rIns="0" bIns="0" rtlCol="0" anchor="ctr"/>
+          <a:lstStyle/>
+          <a:p>
+            <a:pPr algn="ctr" indent="0" marL="0">
+              <a:buNone/>
+            </a:pPr>
+            <a:r>
+              <a:rPr lang="en-US" sz="1300" b="1" dirty="0">
+                <a:solidFill>
+                  <a:srgbClr val="9D174D"/>
+                </a:solidFill>
+                <a:latin typeface="Trebuchet MS" pitchFamily="34" charset="0"/>
+                <a:ea typeface="Trebuchet MS" pitchFamily="34" charset="-122"/>
+                <a:cs typeface="Trebuchet MS" pitchFamily="34" charset="-120"/>
+              </a:rPr>
+              <a:t>ness</a:t>
+            </a:r>
+            <a:endParaRPr lang="en-US" sz="1300" dirty="0"/>
+          </a:p>
+        </p:txBody>
+      </p:sp>
+      <p:sp>
+        <p:nvSpPr>
+          <p:cNvPr id="24" name="Text 22"/>
+          <p:cNvSpPr/>
+          <p:nvPr/>
+        </p:nvSpPr>
+        <p:spPr>
+          <a:xfrm>
+            <a:off x="6519672" y="2569464"/>
+            <a:ext cx="1828800" cy="201168"/>
+          </a:xfrm>
+          <a:prstGeom prst="rect">
+            <a:avLst/>
+          </a:prstGeom>
+          <a:noFill/>
+          <a:ln/>
+        </p:spPr>
+        <p:txBody>
+          <a:bodyPr wrap="square" lIns="0" tIns="0" rIns="0" bIns="0" rtlCol="0" anchor="t"/>
+          <a:lstStyle/>
+          <a:p>
+            <a:pPr algn="ctr" indent="0" marL="0">
+              <a:buNone/>
+            </a:pPr>
+            <a:r>
+              <a:rPr lang="en-US" sz="850" dirty="0">
+                <a:solidFill>
+                  <a:srgbClr val="475569"/>
+                </a:solidFill>
+                <a:latin typeface="Calibri" pitchFamily="34" charset="0"/>
+                <a:ea typeface="Calibri" pitchFamily="34" charset="-122"/>
+                <a:cs typeface="Calibri" pitchFamily="34" charset="-120"/>
+              </a:rPr>
+              <a:t>state of</a:t>
+            </a:r>
+            <a:endParaRPr lang="en-US" sz="850" dirty="0"/>
+          </a:p>
+        </p:txBody>
+      </p:sp>
+      <p:sp>
+        <p:nvSpPr>
+          <p:cNvPr id="25" name="Shape 23"/>
           <p:cNvSpPr/>
           <p:nvPr/>
         </p:nvSpPr>
@@ -9773,7 +10655,7 @@
       </p:sp>
       <p:sp>
         <p:nvSpPr>
-          <p:cNvPr id="20" name="Text 18"/>
+          <p:cNvPr id="26" name="Text 24"/>
           <p:cNvSpPr/>
           <p:nvPr/>
         </p:nvSpPr>
@@ -9812,7 +10694,7 @@
       </p:sp>
       <p:sp>
         <p:nvSpPr>
-          <p:cNvPr id="21" name="Shape 19"/>
+          <p:cNvPr id="27" name="Shape 25"/>
           <p:cNvSpPr/>
           <p:nvPr/>
         </p:nvSpPr>
@@ -9839,14 +10721,14 @@
       </p:sp>
       <p:sp>
         <p:nvSpPr>
-          <p:cNvPr id="22" name="Shape 20"/>
-          <p:cNvSpPr/>
-          <p:nvPr/>
-        </p:nvSpPr>
-        <p:spPr>
-          <a:xfrm>
-            <a:off x="2999232" y="3364992"/>
-            <a:ext cx="1645920" cy="475488"/>
+          <p:cNvPr id="28" name="Shape 26"/>
+          <p:cNvSpPr/>
+          <p:nvPr/>
+        </p:nvSpPr>
+        <p:spPr>
+          <a:xfrm>
+            <a:off x="1975104" y="3364992"/>
+            <a:ext cx="1554480" cy="475488"/>
           </a:xfrm>
           <a:prstGeom prst="rect">
             <a:avLst>
@@ -9866,14 +10748,14 @@
       </p:sp>
       <p:sp>
         <p:nvSpPr>
-          <p:cNvPr id="23" name="Text 21"/>
-          <p:cNvSpPr/>
-          <p:nvPr/>
-        </p:nvSpPr>
-        <p:spPr>
-          <a:xfrm>
-            <a:off x="2999232" y="3364992"/>
-            <a:ext cx="1645920" cy="475488"/>
+          <p:cNvPr id="29" name="Text 27"/>
+          <p:cNvSpPr/>
+          <p:nvPr/>
+        </p:nvSpPr>
+        <p:spPr>
+          <a:xfrm>
+            <a:off x="1975104" y="3364992"/>
+            <a:ext cx="1554480" cy="475488"/>
           </a:xfrm>
           <a:prstGeom prst="rect">
             <a:avLst/>
@@ -9897,7 +10779,7 @@
                 <a:ea typeface="Trebuchet MS" pitchFamily="34" charset="-122"/>
                 <a:cs typeface="Trebuchet MS" pitchFamily="34" charset="-120"/>
               </a:rPr>
-              <a:t>cor</a:t>
+              <a:t>in</a:t>
             </a:r>
             <a:endParaRPr lang="en-US" sz="1400" dirty="0"/>
           </a:p>
@@ -9905,14 +10787,14 @@
       </p:sp>
       <p:sp>
         <p:nvSpPr>
-          <p:cNvPr id="24" name="Text 22"/>
-          <p:cNvSpPr/>
-          <p:nvPr/>
-        </p:nvSpPr>
-        <p:spPr>
-          <a:xfrm>
-            <a:off x="4645152" y="3364992"/>
-            <a:ext cx="1097280" cy="475488"/>
+          <p:cNvPr id="30" name="Text 28"/>
+          <p:cNvSpPr/>
+          <p:nvPr/>
+        </p:nvSpPr>
+        <p:spPr>
+          <a:xfrm>
+            <a:off x="3529584" y="3364992"/>
+            <a:ext cx="73152" cy="475488"/>
           </a:xfrm>
           <a:prstGeom prst="rect">
             <a:avLst/>
@@ -9944,14 +10826,14 @@
       </p:sp>
       <p:sp>
         <p:nvSpPr>
-          <p:cNvPr id="25" name="Shape 23"/>
-          <p:cNvSpPr/>
-          <p:nvPr/>
-        </p:nvSpPr>
-        <p:spPr>
-          <a:xfrm>
-            <a:off x="5742432" y="3364992"/>
-            <a:ext cx="1645920" cy="475488"/>
+          <p:cNvPr id="31" name="Shape 29"/>
+          <p:cNvSpPr/>
+          <p:nvPr/>
+        </p:nvSpPr>
+        <p:spPr>
+          <a:xfrm>
+            <a:off x="3602736" y="3364992"/>
+            <a:ext cx="1554480" cy="475488"/>
           </a:xfrm>
           <a:prstGeom prst="rect">
             <a:avLst>
@@ -9971,14 +10853,14 @@
       </p:sp>
       <p:sp>
         <p:nvSpPr>
-          <p:cNvPr id="26" name="Text 24"/>
-          <p:cNvSpPr/>
-          <p:nvPr/>
-        </p:nvSpPr>
-        <p:spPr>
-          <a:xfrm>
-            <a:off x="5742432" y="3364992"/>
-            <a:ext cx="1645920" cy="475488"/>
+          <p:cNvPr id="32" name="Text 30"/>
+          <p:cNvSpPr/>
+          <p:nvPr/>
+        </p:nvSpPr>
+        <p:spPr>
+          <a:xfrm>
+            <a:off x="3602736" y="3364992"/>
+            <a:ext cx="1554480" cy="475488"/>
           </a:xfrm>
           <a:prstGeom prst="rect">
             <a:avLst/>
@@ -10002,6 +10884,111 @@
                 <a:ea typeface="Trebuchet MS" pitchFamily="34" charset="-122"/>
                 <a:cs typeface="Trebuchet MS" pitchFamily="34" charset="-120"/>
               </a:rPr>
+              <a:t>cor</a:t>
+            </a:r>
+            <a:endParaRPr lang="en-US" sz="1400" dirty="0"/>
+          </a:p>
+        </p:txBody>
+      </p:sp>
+      <p:sp>
+        <p:nvSpPr>
+          <p:cNvPr id="33" name="Text 31"/>
+          <p:cNvSpPr/>
+          <p:nvPr/>
+        </p:nvSpPr>
+        <p:spPr>
+          <a:xfrm>
+            <a:off x="5157216" y="3364992"/>
+            <a:ext cx="73152" cy="475488"/>
+          </a:xfrm>
+          <a:prstGeom prst="rect">
+            <a:avLst/>
+          </a:prstGeom>
+          <a:noFill/>
+          <a:ln/>
+        </p:spPr>
+        <p:txBody>
+          <a:bodyPr wrap="square" lIns="0" tIns="0" rIns="0" bIns="0" rtlCol="0" anchor="ctr"/>
+          <a:lstStyle/>
+          <a:p>
+            <a:pPr algn="ctr" indent="0" marL="0">
+              <a:buNone/>
+            </a:pPr>
+            <a:r>
+              <a:rPr lang="en-US" sz="1600" b="1" dirty="0">
+                <a:solidFill>
+                  <a:srgbClr val="0D9488"/>
+                </a:solidFill>
+                <a:latin typeface="Trebuchet MS" pitchFamily="34" charset="0"/>
+                <a:ea typeface="Trebuchet MS" pitchFamily="34" charset="-122"/>
+                <a:cs typeface="Trebuchet MS" pitchFamily="34" charset="-120"/>
+              </a:rPr>
+              <a:t>·</a:t>
+            </a:r>
+            <a:endParaRPr lang="en-US" sz="1600" dirty="0"/>
+          </a:p>
+        </p:txBody>
+      </p:sp>
+      <p:sp>
+        <p:nvSpPr>
+          <p:cNvPr id="34" name="Shape 32"/>
+          <p:cNvSpPr/>
+          <p:nvPr/>
+        </p:nvSpPr>
+        <p:spPr>
+          <a:xfrm>
+            <a:off x="5230368" y="3364992"/>
+            <a:ext cx="1554480" cy="475488"/>
+          </a:xfrm>
+          <a:prstGeom prst="rect">
+            <a:avLst>
+              <a:gd name="adj" fmla="val 9615"/>
+            </a:avLst>
+          </a:prstGeom>
+          <a:solidFill>
+            <a:srgbClr val="FFFFFF"/>
+          </a:solidFill>
+          <a:ln w="12700">
+            <a:solidFill>
+              <a:srgbClr val="0D9488"/>
+            </a:solidFill>
+            <a:prstDash val="solid"/>
+          </a:ln>
+        </p:spPr>
+      </p:sp>
+      <p:sp>
+        <p:nvSpPr>
+          <p:cNvPr id="35" name="Text 33"/>
+          <p:cNvSpPr/>
+          <p:nvPr/>
+        </p:nvSpPr>
+        <p:spPr>
+          <a:xfrm>
+            <a:off x="5230368" y="3364992"/>
+            <a:ext cx="1554480" cy="475488"/>
+          </a:xfrm>
+          <a:prstGeom prst="rect">
+            <a:avLst/>
+          </a:prstGeom>
+          <a:noFill/>
+          <a:ln/>
+        </p:spPr>
+        <p:txBody>
+          <a:bodyPr wrap="square" lIns="0" tIns="0" rIns="0" bIns="0" rtlCol="0" anchor="ctr"/>
+          <a:lstStyle/>
+          <a:p>
+            <a:pPr algn="ctr" indent="0" marL="0">
+              <a:buNone/>
+            </a:pPr>
+            <a:r>
+              <a:rPr lang="en-US" sz="1400" b="1" dirty="0">
+                <a:solidFill>
+                  <a:srgbClr val="0D9488"/>
+                </a:solidFill>
+                <a:latin typeface="Trebuchet MS" pitchFamily="34" charset="0"/>
+                <a:ea typeface="Trebuchet MS" pitchFamily="34" charset="-122"/>
+                <a:cs typeface="Trebuchet MS" pitchFamily="34" charset="-120"/>
+              </a:rPr>
               <a:t>rect</a:t>
             </a:r>
             <a:endParaRPr lang="en-US" sz="1400" dirty="0"/>
@@ -10010,7 +10997,112 @@
       </p:sp>
       <p:sp>
         <p:nvSpPr>
-          <p:cNvPr id="27" name="Shape 25"/>
+          <p:cNvPr id="36" name="Text 34"/>
+          <p:cNvSpPr/>
+          <p:nvPr/>
+        </p:nvSpPr>
+        <p:spPr>
+          <a:xfrm>
+            <a:off x="6784848" y="3364992"/>
+            <a:ext cx="73152" cy="475488"/>
+          </a:xfrm>
+          <a:prstGeom prst="rect">
+            <a:avLst/>
+          </a:prstGeom>
+          <a:noFill/>
+          <a:ln/>
+        </p:spPr>
+        <p:txBody>
+          <a:bodyPr wrap="square" lIns="0" tIns="0" rIns="0" bIns="0" rtlCol="0" anchor="ctr"/>
+          <a:lstStyle/>
+          <a:p>
+            <a:pPr algn="ctr" indent="0" marL="0">
+              <a:buNone/>
+            </a:pPr>
+            <a:r>
+              <a:rPr lang="en-US" sz="1600" b="1" dirty="0">
+                <a:solidFill>
+                  <a:srgbClr val="0D9488"/>
+                </a:solidFill>
+                <a:latin typeface="Trebuchet MS" pitchFamily="34" charset="0"/>
+                <a:ea typeface="Trebuchet MS" pitchFamily="34" charset="-122"/>
+                <a:cs typeface="Trebuchet MS" pitchFamily="34" charset="-120"/>
+              </a:rPr>
+              <a:t>·</a:t>
+            </a:r>
+            <a:endParaRPr lang="en-US" sz="1600" dirty="0"/>
+          </a:p>
+        </p:txBody>
+      </p:sp>
+      <p:sp>
+        <p:nvSpPr>
+          <p:cNvPr id="37" name="Shape 35"/>
+          <p:cNvSpPr/>
+          <p:nvPr/>
+        </p:nvSpPr>
+        <p:spPr>
+          <a:xfrm>
+            <a:off x="6858000" y="3364992"/>
+            <a:ext cx="1554480" cy="475488"/>
+          </a:xfrm>
+          <a:prstGeom prst="rect">
+            <a:avLst>
+              <a:gd name="adj" fmla="val 9615"/>
+            </a:avLst>
+          </a:prstGeom>
+          <a:solidFill>
+            <a:srgbClr val="FFFFFF"/>
+          </a:solidFill>
+          <a:ln w="12700">
+            <a:solidFill>
+              <a:srgbClr val="0D9488"/>
+            </a:solidFill>
+            <a:prstDash val="solid"/>
+          </a:ln>
+        </p:spPr>
+      </p:sp>
+      <p:sp>
+        <p:nvSpPr>
+          <p:cNvPr id="38" name="Text 36"/>
+          <p:cNvSpPr/>
+          <p:nvPr/>
+        </p:nvSpPr>
+        <p:spPr>
+          <a:xfrm>
+            <a:off x="6858000" y="3364992"/>
+            <a:ext cx="1554480" cy="475488"/>
+          </a:xfrm>
+          <a:prstGeom prst="rect">
+            <a:avLst/>
+          </a:prstGeom>
+          <a:noFill/>
+          <a:ln/>
+        </p:spPr>
+        <p:txBody>
+          <a:bodyPr wrap="square" lIns="0" tIns="0" rIns="0" bIns="0" rtlCol="0" anchor="ctr"/>
+          <a:lstStyle/>
+          <a:p>
+            <a:pPr algn="ctr" indent="0" marL="0">
+              <a:buNone/>
+            </a:pPr>
+            <a:r>
+              <a:rPr lang="en-US" sz="1400" b="1" dirty="0">
+                <a:solidFill>
+                  <a:srgbClr val="0D9488"/>
+                </a:solidFill>
+                <a:latin typeface="Trebuchet MS" pitchFamily="34" charset="0"/>
+                <a:ea typeface="Trebuchet MS" pitchFamily="34" charset="-122"/>
+                <a:cs typeface="Trebuchet MS" pitchFamily="34" charset="-120"/>
+              </a:rPr>
+              <a:t>ness</a:t>
+            </a:r>
+            <a:endParaRPr lang="en-US" sz="1400" dirty="0"/>
+          </a:p>
+        </p:txBody>
+      </p:sp>
+      <p:sp>
+        <p:nvSpPr>
+          <p:cNvPr id="39" name="Shape 37"/>
           <p:cNvSpPr/>
           <p:nvPr/>
         </p:nvSpPr>
@@ -10037,7 +11129,7 @@
       </p:sp>
       <p:sp>
         <p:nvSpPr>
-          <p:cNvPr id="28" name="Text 26"/>
+          <p:cNvPr id="40" name="Text 38"/>
           <p:cNvSpPr/>
           <p:nvPr/>
         </p:nvSpPr>
@@ -10076,18 +11168,18 @@
       </p:sp>
       <p:sp>
         <p:nvSpPr>
-          <p:cNvPr id="29" name="Shape 27"/>
+          <p:cNvPr id="41" name="Shape 39"/>
           <p:cNvSpPr/>
           <p:nvPr/>
         </p:nvSpPr>
         <p:spPr>
           <a:xfrm>
             <a:off x="1874520" y="4096512"/>
-            <a:ext cx="6903720" cy="804672"/>
+            <a:ext cx="6903720" cy="658368"/>
           </a:xfrm>
           <a:prstGeom prst="rect">
             <a:avLst>
-              <a:gd name="adj" fmla="val 6818"/>
+              <a:gd name="adj" fmla="val 8333"/>
             </a:avLst>
           </a:prstGeom>
           <a:solidFill>
@@ -10103,18 +11195,18 @@
       </p:sp>
       <p:sp>
         <p:nvSpPr>
-          <p:cNvPr id="30" name="Shape 28"/>
-          <p:cNvSpPr/>
-          <p:nvPr/>
-        </p:nvSpPr>
-        <p:spPr>
-          <a:xfrm>
-            <a:off x="2254649" y="4169664"/>
-            <a:ext cx="685800" cy="384048"/>
+          <p:cNvPr id="42" name="Shape 40"/>
+          <p:cNvSpPr/>
+          <p:nvPr/>
+        </p:nvSpPr>
+        <p:spPr>
+          <a:xfrm>
+            <a:off x="1952244" y="4169664"/>
+            <a:ext cx="543652" cy="475488"/>
           </a:xfrm>
           <a:prstGeom prst="rect">
             <a:avLst>
-              <a:gd name="adj" fmla="val 9524"/>
+              <a:gd name="adj" fmla="val 7692"/>
             </a:avLst>
           </a:prstGeom>
           <a:solidFill>
@@ -10130,14 +11222,14 @@
       </p:sp>
       <p:sp>
         <p:nvSpPr>
-          <p:cNvPr id="31" name="Text 29"/>
-          <p:cNvSpPr/>
-          <p:nvPr/>
-        </p:nvSpPr>
-        <p:spPr>
-          <a:xfrm>
-            <a:off x="2254649" y="4169664"/>
-            <a:ext cx="685800" cy="384048"/>
+          <p:cNvPr id="43" name="Text 41"/>
+          <p:cNvSpPr/>
+          <p:nvPr/>
+        </p:nvSpPr>
+        <p:spPr>
+          <a:xfrm>
+            <a:off x="1952244" y="4169664"/>
+            <a:ext cx="543652" cy="475488"/>
           </a:xfrm>
           <a:prstGeom prst="rect">
             <a:avLst/>
@@ -10161,7 +11253,7 @@
                 <a:ea typeface="Trebuchet MS" pitchFamily="34" charset="-122"/>
                 <a:cs typeface="Trebuchet MS" pitchFamily="34" charset="-120"/>
               </a:rPr>
-              <a:t>c</a:t>
+              <a:t>i</a:t>
             </a:r>
             <a:endParaRPr lang="en-US" sz="900" dirty="0"/>
           </a:p>
@@ -10169,57 +11261,18 @@
       </p:sp>
       <p:sp>
         <p:nvSpPr>
-          <p:cNvPr id="32" name="Text 30"/>
-          <p:cNvSpPr/>
-          <p:nvPr/>
-        </p:nvSpPr>
-        <p:spPr>
-          <a:xfrm>
-            <a:off x="2254649" y="4572000"/>
-            <a:ext cx="685800" cy="219456"/>
-          </a:xfrm>
-          <a:prstGeom prst="rect">
-            <a:avLst/>
-          </a:prstGeom>
-          <a:noFill/>
-          <a:ln/>
-        </p:spPr>
-        <p:txBody>
-          <a:bodyPr wrap="square" lIns="0" tIns="0" rIns="0" bIns="0" rtlCol="0" anchor="t"/>
-          <a:lstStyle/>
-          <a:p>
-            <a:pPr algn="ctr" indent="0" marL="0">
-              <a:buNone/>
-            </a:pPr>
-            <a:r>
-              <a:rPr lang="en-US" sz="750" i="1" dirty="0">
-                <a:solidFill>
-                  <a:srgbClr val="94A3B8"/>
-                </a:solidFill>
-                <a:latin typeface="Calibri" pitchFamily="34" charset="0"/>
-                <a:ea typeface="Calibri" pitchFamily="34" charset="-122"/>
-                <a:cs typeface="Calibri" pitchFamily="34" charset="-120"/>
-              </a:rPr>
-              <a:t>/k/</a:t>
-            </a:r>
-            <a:endParaRPr lang="en-US" sz="750" dirty="0"/>
-          </a:p>
-        </p:txBody>
-      </p:sp>
-      <p:sp>
-        <p:nvSpPr>
-          <p:cNvPr id="33" name="Shape 31"/>
-          <p:cNvSpPr/>
-          <p:nvPr/>
-        </p:nvSpPr>
-        <p:spPr>
-          <a:xfrm>
-            <a:off x="3293146" y="4169664"/>
-            <a:ext cx="685800" cy="384048"/>
+          <p:cNvPr id="44" name="Shape 42"/>
+          <p:cNvSpPr/>
+          <p:nvPr/>
+        </p:nvSpPr>
+        <p:spPr>
+          <a:xfrm>
+            <a:off x="2546188" y="4169664"/>
+            <a:ext cx="543652" cy="475488"/>
           </a:xfrm>
           <a:prstGeom prst="rect">
             <a:avLst>
-              <a:gd name="adj" fmla="val 9524"/>
+              <a:gd name="adj" fmla="val 7692"/>
             </a:avLst>
           </a:prstGeom>
           <a:solidFill>
@@ -10235,14 +11288,14 @@
       </p:sp>
       <p:sp>
         <p:nvSpPr>
-          <p:cNvPr id="34" name="Text 32"/>
-          <p:cNvSpPr/>
-          <p:nvPr/>
-        </p:nvSpPr>
-        <p:spPr>
-          <a:xfrm>
-            <a:off x="3293146" y="4169664"/>
-            <a:ext cx="685800" cy="384048"/>
+          <p:cNvPr id="45" name="Text 43"/>
+          <p:cNvSpPr/>
+          <p:nvPr/>
+        </p:nvSpPr>
+        <p:spPr>
+          <a:xfrm>
+            <a:off x="2546188" y="4169664"/>
+            <a:ext cx="543652" cy="475488"/>
           </a:xfrm>
           <a:prstGeom prst="rect">
             <a:avLst/>
@@ -10266,7 +11319,7 @@
                 <a:ea typeface="Trebuchet MS" pitchFamily="34" charset="-122"/>
                 <a:cs typeface="Trebuchet MS" pitchFamily="34" charset="-120"/>
               </a:rPr>
-              <a:t>or</a:t>
+              <a:t>n</a:t>
             </a:r>
             <a:endParaRPr lang="en-US" sz="900" dirty="0"/>
           </a:p>
@@ -10274,18 +11327,18 @@
       </p:sp>
       <p:sp>
         <p:nvSpPr>
-          <p:cNvPr id="35" name="Shape 33"/>
-          <p:cNvSpPr/>
-          <p:nvPr/>
-        </p:nvSpPr>
-        <p:spPr>
-          <a:xfrm>
-            <a:off x="4331643" y="4169664"/>
-            <a:ext cx="685800" cy="384048"/>
+          <p:cNvPr id="46" name="Shape 44"/>
+          <p:cNvSpPr/>
+          <p:nvPr/>
+        </p:nvSpPr>
+        <p:spPr>
+          <a:xfrm>
+            <a:off x="3140133" y="4169664"/>
+            <a:ext cx="543652" cy="475488"/>
           </a:xfrm>
           <a:prstGeom prst="rect">
             <a:avLst>
-              <a:gd name="adj" fmla="val 9524"/>
+              <a:gd name="adj" fmla="val 7692"/>
             </a:avLst>
           </a:prstGeom>
           <a:solidFill>
@@ -10301,14 +11354,14 @@
       </p:sp>
       <p:sp>
         <p:nvSpPr>
-          <p:cNvPr id="36" name="Text 34"/>
-          <p:cNvSpPr/>
-          <p:nvPr/>
-        </p:nvSpPr>
-        <p:spPr>
-          <a:xfrm>
-            <a:off x="4331643" y="4169664"/>
-            <a:ext cx="685800" cy="384048"/>
+          <p:cNvPr id="47" name="Text 45"/>
+          <p:cNvSpPr/>
+          <p:nvPr/>
+        </p:nvSpPr>
+        <p:spPr>
+          <a:xfrm>
+            <a:off x="3140133" y="4169664"/>
+            <a:ext cx="543652" cy="475488"/>
           </a:xfrm>
           <a:prstGeom prst="rect">
             <a:avLst/>
@@ -10332,7 +11385,7 @@
                 <a:ea typeface="Trebuchet MS" pitchFamily="34" charset="-122"/>
                 <a:cs typeface="Trebuchet MS" pitchFamily="34" charset="-120"/>
               </a:rPr>
-              <a:t>r</a:t>
+              <a:t>c</a:t>
             </a:r>
             <a:endParaRPr lang="en-US" sz="900" dirty="0"/>
           </a:p>
@@ -10340,18 +11393,18 @@
       </p:sp>
       <p:sp>
         <p:nvSpPr>
-          <p:cNvPr id="37" name="Shape 35"/>
-          <p:cNvSpPr/>
-          <p:nvPr/>
-        </p:nvSpPr>
-        <p:spPr>
-          <a:xfrm>
-            <a:off x="5370141" y="4169664"/>
-            <a:ext cx="685800" cy="384048"/>
+          <p:cNvPr id="48" name="Shape 46"/>
+          <p:cNvSpPr/>
+          <p:nvPr/>
+        </p:nvSpPr>
+        <p:spPr>
+          <a:xfrm>
+            <a:off x="3734077" y="4169664"/>
+            <a:ext cx="543652" cy="475488"/>
           </a:xfrm>
           <a:prstGeom prst="rect">
             <a:avLst>
-              <a:gd name="adj" fmla="val 9524"/>
+              <a:gd name="adj" fmla="val 7692"/>
             </a:avLst>
           </a:prstGeom>
           <a:solidFill>
@@ -10367,14 +11420,14 @@
       </p:sp>
       <p:sp>
         <p:nvSpPr>
-          <p:cNvPr id="38" name="Text 36"/>
-          <p:cNvSpPr/>
-          <p:nvPr/>
-        </p:nvSpPr>
-        <p:spPr>
-          <a:xfrm>
-            <a:off x="5370141" y="4169664"/>
-            <a:ext cx="685800" cy="384048"/>
+          <p:cNvPr id="49" name="Text 47"/>
+          <p:cNvSpPr/>
+          <p:nvPr/>
+        </p:nvSpPr>
+        <p:spPr>
+          <a:xfrm>
+            <a:off x="3734077" y="4169664"/>
+            <a:ext cx="543652" cy="475488"/>
           </a:xfrm>
           <a:prstGeom prst="rect">
             <a:avLst/>
@@ -10398,7 +11451,7 @@
                 <a:ea typeface="Trebuchet MS" pitchFamily="34" charset="-122"/>
                 <a:cs typeface="Trebuchet MS" pitchFamily="34" charset="-120"/>
               </a:rPr>
-              <a:t>e</a:t>
+              <a:t>o</a:t>
             </a:r>
             <a:endParaRPr lang="en-US" sz="900" dirty="0"/>
           </a:p>
@@ -10406,18 +11459,18 @@
       </p:sp>
       <p:sp>
         <p:nvSpPr>
-          <p:cNvPr id="39" name="Shape 37"/>
-          <p:cNvSpPr/>
-          <p:nvPr/>
-        </p:nvSpPr>
-        <p:spPr>
-          <a:xfrm>
-            <a:off x="6408638" y="4169664"/>
-            <a:ext cx="685800" cy="384048"/>
+          <p:cNvPr id="50" name="Shape 48"/>
+          <p:cNvSpPr/>
+          <p:nvPr/>
+        </p:nvSpPr>
+        <p:spPr>
+          <a:xfrm>
+            <a:off x="4328021" y="4169664"/>
+            <a:ext cx="543652" cy="475488"/>
           </a:xfrm>
           <a:prstGeom prst="rect">
             <a:avLst>
-              <a:gd name="adj" fmla="val 9524"/>
+              <a:gd name="adj" fmla="val 7692"/>
             </a:avLst>
           </a:prstGeom>
           <a:solidFill>
@@ -10433,14 +11486,14 @@
       </p:sp>
       <p:sp>
         <p:nvSpPr>
-          <p:cNvPr id="40" name="Text 38"/>
-          <p:cNvSpPr/>
-          <p:nvPr/>
-        </p:nvSpPr>
-        <p:spPr>
-          <a:xfrm>
-            <a:off x="6408638" y="4169664"/>
-            <a:ext cx="685800" cy="384048"/>
+          <p:cNvPr id="51" name="Text 49"/>
+          <p:cNvSpPr/>
+          <p:nvPr/>
+        </p:nvSpPr>
+        <p:spPr>
+          <a:xfrm>
+            <a:off x="4328021" y="4169664"/>
+            <a:ext cx="543652" cy="475488"/>
           </a:xfrm>
           <a:prstGeom prst="rect">
             <a:avLst/>
@@ -10464,7 +11517,7 @@
                 <a:ea typeface="Trebuchet MS" pitchFamily="34" charset="-122"/>
                 <a:cs typeface="Trebuchet MS" pitchFamily="34" charset="-120"/>
               </a:rPr>
-              <a:t>c</a:t>
+              <a:t>rr</a:t>
             </a:r>
             <a:endParaRPr lang="en-US" sz="900" dirty="0"/>
           </a:p>
@@ -10472,57 +11525,18 @@
       </p:sp>
       <p:sp>
         <p:nvSpPr>
-          <p:cNvPr id="41" name="Text 39"/>
-          <p:cNvSpPr/>
-          <p:nvPr/>
-        </p:nvSpPr>
-        <p:spPr>
-          <a:xfrm>
-            <a:off x="6408638" y="4572000"/>
-            <a:ext cx="685800" cy="219456"/>
-          </a:xfrm>
-          <a:prstGeom prst="rect">
-            <a:avLst/>
-          </a:prstGeom>
-          <a:noFill/>
-          <a:ln/>
-        </p:spPr>
-        <p:txBody>
-          <a:bodyPr wrap="square" lIns="0" tIns="0" rIns="0" bIns="0" rtlCol="0" anchor="t"/>
-          <a:lstStyle/>
-          <a:p>
-            <a:pPr algn="ctr" indent="0" marL="0">
-              <a:buNone/>
-            </a:pPr>
-            <a:r>
-              <a:rPr lang="en-US" sz="750" i="1" dirty="0">
-                <a:solidFill>
-                  <a:srgbClr val="94A3B8"/>
-                </a:solidFill>
-                <a:latin typeface="Calibri" pitchFamily="34" charset="0"/>
-                <a:ea typeface="Calibri" pitchFamily="34" charset="-122"/>
-                <a:cs typeface="Calibri" pitchFamily="34" charset="-120"/>
-              </a:rPr>
-              <a:t>/k/</a:t>
-            </a:r>
-            <a:endParaRPr lang="en-US" sz="750" dirty="0"/>
-          </a:p>
-        </p:txBody>
-      </p:sp>
-      <p:sp>
-        <p:nvSpPr>
-          <p:cNvPr id="42" name="Shape 40"/>
-          <p:cNvSpPr/>
-          <p:nvPr/>
-        </p:nvSpPr>
-        <p:spPr>
-          <a:xfrm>
-            <a:off x="7447135" y="4169664"/>
-            <a:ext cx="685800" cy="384048"/>
+          <p:cNvPr id="52" name="Shape 50"/>
+          <p:cNvSpPr/>
+          <p:nvPr/>
+        </p:nvSpPr>
+        <p:spPr>
+          <a:xfrm>
+            <a:off x="4921966" y="4169664"/>
+            <a:ext cx="543652" cy="475488"/>
           </a:xfrm>
           <a:prstGeom prst="rect">
             <a:avLst>
-              <a:gd name="adj" fmla="val 9524"/>
+              <a:gd name="adj" fmla="val 7692"/>
             </a:avLst>
           </a:prstGeom>
           <a:solidFill>
@@ -10538,14 +11552,14 @@
       </p:sp>
       <p:sp>
         <p:nvSpPr>
-          <p:cNvPr id="43" name="Text 41"/>
-          <p:cNvSpPr/>
-          <p:nvPr/>
-        </p:nvSpPr>
-        <p:spPr>
-          <a:xfrm>
-            <a:off x="7447135" y="4169664"/>
-            <a:ext cx="685800" cy="384048"/>
+          <p:cNvPr id="53" name="Text 51"/>
+          <p:cNvSpPr/>
+          <p:nvPr/>
+        </p:nvSpPr>
+        <p:spPr>
+          <a:xfrm>
+            <a:off x="4921966" y="4169664"/>
+            <a:ext cx="543652" cy="475488"/>
           </a:xfrm>
           <a:prstGeom prst="rect">
             <a:avLst/>
@@ -10569,7 +11583,337 @@
                 <a:ea typeface="Trebuchet MS" pitchFamily="34" charset="-122"/>
                 <a:cs typeface="Trebuchet MS" pitchFamily="34" charset="-120"/>
               </a:rPr>
+              <a:t>e</a:t>
+            </a:r>
+            <a:endParaRPr lang="en-US" sz="900" dirty="0"/>
+          </a:p>
+        </p:txBody>
+      </p:sp>
+      <p:sp>
+        <p:nvSpPr>
+          <p:cNvPr id="54" name="Shape 52"/>
+          <p:cNvSpPr/>
+          <p:nvPr/>
+        </p:nvSpPr>
+        <p:spPr>
+          <a:xfrm>
+            <a:off x="5515910" y="4169664"/>
+            <a:ext cx="543652" cy="475488"/>
+          </a:xfrm>
+          <a:prstGeom prst="rect">
+            <a:avLst>
+              <a:gd name="adj" fmla="val 7692"/>
+            </a:avLst>
+          </a:prstGeom>
+          <a:solidFill>
+            <a:srgbClr val="FFFFFF"/>
+          </a:solidFill>
+          <a:ln w="12700">
+            <a:solidFill>
+              <a:srgbClr val="DB2777"/>
+            </a:solidFill>
+            <a:prstDash val="solid"/>
+          </a:ln>
+        </p:spPr>
+      </p:sp>
+      <p:sp>
+        <p:nvSpPr>
+          <p:cNvPr id="55" name="Text 53"/>
+          <p:cNvSpPr/>
+          <p:nvPr/>
+        </p:nvSpPr>
+        <p:spPr>
+          <a:xfrm>
+            <a:off x="5515910" y="4169664"/>
+            <a:ext cx="543652" cy="475488"/>
+          </a:xfrm>
+          <a:prstGeom prst="rect">
+            <a:avLst/>
+          </a:prstGeom>
+          <a:noFill/>
+          <a:ln/>
+        </p:spPr>
+        <p:txBody>
+          <a:bodyPr wrap="square" lIns="0" tIns="0" rIns="0" bIns="0" rtlCol="0" anchor="ctr"/>
+          <a:lstStyle/>
+          <a:p>
+            <a:pPr algn="ctr" indent="0" marL="0">
+              <a:buNone/>
+            </a:pPr>
+            <a:r>
+              <a:rPr lang="en-US" sz="900" b="1" dirty="0">
+                <a:solidFill>
+                  <a:srgbClr val="9D174D"/>
+                </a:solidFill>
+                <a:latin typeface="Trebuchet MS" pitchFamily="34" charset="0"/>
+                <a:ea typeface="Trebuchet MS" pitchFamily="34" charset="-122"/>
+                <a:cs typeface="Trebuchet MS" pitchFamily="34" charset="-120"/>
+              </a:rPr>
+              <a:t>c</a:t>
+            </a:r>
+            <a:endParaRPr lang="en-US" sz="900" dirty="0"/>
+          </a:p>
+        </p:txBody>
+      </p:sp>
+      <p:sp>
+        <p:nvSpPr>
+          <p:cNvPr id="56" name="Shape 54"/>
+          <p:cNvSpPr/>
+          <p:nvPr/>
+        </p:nvSpPr>
+        <p:spPr>
+          <a:xfrm>
+            <a:off x="6109855" y="4169664"/>
+            <a:ext cx="543652" cy="475488"/>
+          </a:xfrm>
+          <a:prstGeom prst="rect">
+            <a:avLst>
+              <a:gd name="adj" fmla="val 7692"/>
+            </a:avLst>
+          </a:prstGeom>
+          <a:solidFill>
+            <a:srgbClr val="FFFFFF"/>
+          </a:solidFill>
+          <a:ln w="12700">
+            <a:solidFill>
+              <a:srgbClr val="DB2777"/>
+            </a:solidFill>
+            <a:prstDash val="solid"/>
+          </a:ln>
+        </p:spPr>
+      </p:sp>
+      <p:sp>
+        <p:nvSpPr>
+          <p:cNvPr id="57" name="Text 55"/>
+          <p:cNvSpPr/>
+          <p:nvPr/>
+        </p:nvSpPr>
+        <p:spPr>
+          <a:xfrm>
+            <a:off x="6109855" y="4169664"/>
+            <a:ext cx="543652" cy="475488"/>
+          </a:xfrm>
+          <a:prstGeom prst="rect">
+            <a:avLst/>
+          </a:prstGeom>
+          <a:noFill/>
+          <a:ln/>
+        </p:spPr>
+        <p:txBody>
+          <a:bodyPr wrap="square" lIns="0" tIns="0" rIns="0" bIns="0" rtlCol="0" anchor="ctr"/>
+          <a:lstStyle/>
+          <a:p>
+            <a:pPr algn="ctr" indent="0" marL="0">
+              <a:buNone/>
+            </a:pPr>
+            <a:r>
+              <a:rPr lang="en-US" sz="900" b="1" dirty="0">
+                <a:solidFill>
+                  <a:srgbClr val="9D174D"/>
+                </a:solidFill>
+                <a:latin typeface="Trebuchet MS" pitchFamily="34" charset="0"/>
+                <a:ea typeface="Trebuchet MS" pitchFamily="34" charset="-122"/>
+                <a:cs typeface="Trebuchet MS" pitchFamily="34" charset="-120"/>
+              </a:rPr>
               <a:t>t</a:t>
+            </a:r>
+            <a:endParaRPr lang="en-US" sz="900" dirty="0"/>
+          </a:p>
+        </p:txBody>
+      </p:sp>
+      <p:sp>
+        <p:nvSpPr>
+          <p:cNvPr id="58" name="Shape 56"/>
+          <p:cNvSpPr/>
+          <p:nvPr/>
+        </p:nvSpPr>
+        <p:spPr>
+          <a:xfrm>
+            <a:off x="6703799" y="4169664"/>
+            <a:ext cx="543652" cy="475488"/>
+          </a:xfrm>
+          <a:prstGeom prst="rect">
+            <a:avLst>
+              <a:gd name="adj" fmla="val 7692"/>
+            </a:avLst>
+          </a:prstGeom>
+          <a:solidFill>
+            <a:srgbClr val="FFFFFF"/>
+          </a:solidFill>
+          <a:ln w="12700">
+            <a:solidFill>
+              <a:srgbClr val="DB2777"/>
+            </a:solidFill>
+            <a:prstDash val="solid"/>
+          </a:ln>
+        </p:spPr>
+      </p:sp>
+      <p:sp>
+        <p:nvSpPr>
+          <p:cNvPr id="59" name="Text 57"/>
+          <p:cNvSpPr/>
+          <p:nvPr/>
+        </p:nvSpPr>
+        <p:spPr>
+          <a:xfrm>
+            <a:off x="6703799" y="4169664"/>
+            <a:ext cx="543652" cy="475488"/>
+          </a:xfrm>
+          <a:prstGeom prst="rect">
+            <a:avLst/>
+          </a:prstGeom>
+          <a:noFill/>
+          <a:ln/>
+        </p:spPr>
+        <p:txBody>
+          <a:bodyPr wrap="square" lIns="0" tIns="0" rIns="0" bIns="0" rtlCol="0" anchor="ctr"/>
+          <a:lstStyle/>
+          <a:p>
+            <a:pPr algn="ctr" indent="0" marL="0">
+              <a:buNone/>
+            </a:pPr>
+            <a:r>
+              <a:rPr lang="en-US" sz="900" b="1" dirty="0">
+                <a:solidFill>
+                  <a:srgbClr val="9D174D"/>
+                </a:solidFill>
+                <a:latin typeface="Trebuchet MS" pitchFamily="34" charset="0"/>
+                <a:ea typeface="Trebuchet MS" pitchFamily="34" charset="-122"/>
+                <a:cs typeface="Trebuchet MS" pitchFamily="34" charset="-120"/>
+              </a:rPr>
+              <a:t>n</a:t>
+            </a:r>
+            <a:endParaRPr lang="en-US" sz="900" dirty="0"/>
+          </a:p>
+        </p:txBody>
+      </p:sp>
+      <p:sp>
+        <p:nvSpPr>
+          <p:cNvPr id="60" name="Shape 58"/>
+          <p:cNvSpPr/>
+          <p:nvPr/>
+        </p:nvSpPr>
+        <p:spPr>
+          <a:xfrm>
+            <a:off x="7297743" y="4169664"/>
+            <a:ext cx="543652" cy="475488"/>
+          </a:xfrm>
+          <a:prstGeom prst="rect">
+            <a:avLst>
+              <a:gd name="adj" fmla="val 7692"/>
+            </a:avLst>
+          </a:prstGeom>
+          <a:solidFill>
+            <a:srgbClr val="FFFFFF"/>
+          </a:solidFill>
+          <a:ln w="12700">
+            <a:solidFill>
+              <a:srgbClr val="DB2777"/>
+            </a:solidFill>
+            <a:prstDash val="solid"/>
+          </a:ln>
+        </p:spPr>
+      </p:sp>
+      <p:sp>
+        <p:nvSpPr>
+          <p:cNvPr id="61" name="Text 59"/>
+          <p:cNvSpPr/>
+          <p:nvPr/>
+        </p:nvSpPr>
+        <p:spPr>
+          <a:xfrm>
+            <a:off x="7297743" y="4169664"/>
+            <a:ext cx="543652" cy="475488"/>
+          </a:xfrm>
+          <a:prstGeom prst="rect">
+            <a:avLst/>
+          </a:prstGeom>
+          <a:noFill/>
+          <a:ln/>
+        </p:spPr>
+        <p:txBody>
+          <a:bodyPr wrap="square" lIns="0" tIns="0" rIns="0" bIns="0" rtlCol="0" anchor="ctr"/>
+          <a:lstStyle/>
+          <a:p>
+            <a:pPr algn="ctr" indent="0" marL="0">
+              <a:buNone/>
+            </a:pPr>
+            <a:r>
+              <a:rPr lang="en-US" sz="900" b="1" dirty="0">
+                <a:solidFill>
+                  <a:srgbClr val="9D174D"/>
+                </a:solidFill>
+                <a:latin typeface="Trebuchet MS" pitchFamily="34" charset="0"/>
+                <a:ea typeface="Trebuchet MS" pitchFamily="34" charset="-122"/>
+                <a:cs typeface="Trebuchet MS" pitchFamily="34" charset="-120"/>
+              </a:rPr>
+              <a:t>e</a:t>
+            </a:r>
+            <a:endParaRPr lang="en-US" sz="900" dirty="0"/>
+          </a:p>
+        </p:txBody>
+      </p:sp>
+      <p:sp>
+        <p:nvSpPr>
+          <p:cNvPr id="62" name="Shape 60"/>
+          <p:cNvSpPr/>
+          <p:nvPr/>
+        </p:nvSpPr>
+        <p:spPr>
+          <a:xfrm>
+            <a:off x="7891688" y="4169664"/>
+            <a:ext cx="543652" cy="475488"/>
+          </a:xfrm>
+          <a:prstGeom prst="rect">
+            <a:avLst>
+              <a:gd name="adj" fmla="val 7692"/>
+            </a:avLst>
+          </a:prstGeom>
+          <a:solidFill>
+            <a:srgbClr val="FFFFFF"/>
+          </a:solidFill>
+          <a:ln w="12700">
+            <a:solidFill>
+              <a:srgbClr val="DB2777"/>
+            </a:solidFill>
+            <a:prstDash val="solid"/>
+          </a:ln>
+        </p:spPr>
+      </p:sp>
+      <p:sp>
+        <p:nvSpPr>
+          <p:cNvPr id="63" name="Text 61"/>
+          <p:cNvSpPr/>
+          <p:nvPr/>
+        </p:nvSpPr>
+        <p:spPr>
+          <a:xfrm>
+            <a:off x="7891688" y="4169664"/>
+            <a:ext cx="543652" cy="475488"/>
+          </a:xfrm>
+          <a:prstGeom prst="rect">
+            <a:avLst/>
+          </a:prstGeom>
+          <a:noFill/>
+          <a:ln/>
+        </p:spPr>
+        <p:txBody>
+          <a:bodyPr wrap="square" lIns="0" tIns="0" rIns="0" bIns="0" rtlCol="0" anchor="ctr"/>
+          <a:lstStyle/>
+          <a:p>
+            <a:pPr algn="ctr" indent="0" marL="0">
+              <a:buNone/>
+            </a:pPr>
+            <a:r>
+              <a:rPr lang="en-US" sz="900" b="1" dirty="0">
+                <a:solidFill>
+                  <a:srgbClr val="9D174D"/>
+                </a:solidFill>
+                <a:latin typeface="Trebuchet MS" pitchFamily="34" charset="0"/>
+                <a:ea typeface="Trebuchet MS" pitchFamily="34" charset="-122"/>
+                <a:cs typeface="Trebuchet MS" pitchFamily="34" charset="-120"/>
+              </a:rPr>
+              <a:t>ss</a:t>
             </a:r>
             <a:endParaRPr lang="en-US" sz="900" dirty="0"/>
           </a:p>
@@ -10861,7 +12205,7 @@
                 <a:ea typeface="Calibri" pitchFamily="34" charset="-122"/>
                 <a:cs typeface="Calibri" pitchFamily="34" charset="-120"/>
               </a:rPr>
-              <a:t>Word Labs  •  wordlabs.app  •  Root: 'correct' = right, accurate, free from error</a:t>
+              <a:t>Word Labs  •  wordlabs.app  •  Root: 'correct' = right; accurate</a:t>
             </a:r>
             <a:endParaRPr lang="en-US" sz="800" dirty="0"/>
           </a:p>
@@ -11000,7 +12344,7 @@
                 <a:ea typeface="Trebuchet MS" pitchFamily="34" charset="-122"/>
                 <a:cs typeface="Trebuchet MS" pitchFamily="34" charset="-120"/>
               </a:rPr>
-              <a:t>correctly</a:t>
+              <a:t>correction</a:t>
             </a:r>
             <a:endParaRPr lang="en-US" sz="2800" dirty="0"/>
           </a:p>
@@ -11688,7 +13032,7 @@
                 <a:ea typeface="Calibri" pitchFamily="34" charset="-122"/>
                 <a:cs typeface="Calibri" pitchFamily="34" charset="-120"/>
               </a:rPr>
-              <a:t>Word Labs  •  wordlabs.app  •  Root: 'correct' = right, accurate, free from error</a:t>
+              <a:t>Word Labs  •  wordlabs.app  •  Root: 'correct' = right; accurate</a:t>
             </a:r>
             <a:endParaRPr lang="en-US" sz="800" dirty="0"/>
           </a:p>
@@ -11827,7 +13171,7 @@
                 <a:ea typeface="Trebuchet MS" pitchFamily="34" charset="-122"/>
                 <a:cs typeface="Trebuchet MS" pitchFamily="34" charset="-120"/>
               </a:rPr>
-              <a:t>correctly</a:t>
+              <a:t>correction</a:t>
             </a:r>
             <a:endParaRPr lang="en-US" sz="2800" dirty="0"/>
           </a:p>
@@ -12005,7 +13349,7 @@
                 <a:ea typeface="Calibri" pitchFamily="34" charset="-122"/>
                 <a:cs typeface="Calibri" pitchFamily="34" charset="-120"/>
               </a:rPr>
-              <a:t>right, free from error</a:t>
+              <a:t>right; accurate</a:t>
             </a:r>
             <a:endParaRPr lang="en-US" sz="850" dirty="0"/>
           </a:p>
@@ -12078,7 +13422,7 @@
                 <a:ea typeface="Trebuchet MS" pitchFamily="34" charset="-122"/>
                 <a:cs typeface="Trebuchet MS" pitchFamily="34" charset="-120"/>
               </a:rPr>
-              <a:t>ly</a:t>
+              <a:t>ion</a:t>
             </a:r>
             <a:endParaRPr lang="en-US" sz="1300" dirty="0"/>
           </a:p>
@@ -12117,7 +13461,7 @@
                 <a:ea typeface="Calibri" pitchFamily="34" charset="-122"/>
                 <a:cs typeface="Calibri" pitchFamily="34" charset="-120"/>
               </a:rPr>
-              <a:t>in a certain way</a:t>
+              <a:t>act or result of</a:t>
             </a:r>
             <a:endParaRPr lang="en-US" sz="850" dirty="0"/>
           </a:p>
@@ -12673,7 +14017,7 @@
                 <a:ea typeface="Calibri" pitchFamily="34" charset="-122"/>
                 <a:cs typeface="Calibri" pitchFamily="34" charset="-120"/>
               </a:rPr>
-              <a:t>Word Labs  •  wordlabs.app  •  Root: 'correct' = right, accurate, free from error</a:t>
+              <a:t>Word Labs  •  wordlabs.app  •  Root: 'correct' = right; accurate</a:t>
             </a:r>
             <a:endParaRPr lang="en-US" sz="800" dirty="0"/>
           </a:p>
@@ -12812,7 +14156,7 @@
                 <a:ea typeface="Trebuchet MS" pitchFamily="34" charset="-122"/>
                 <a:cs typeface="Trebuchet MS" pitchFamily="34" charset="-120"/>
               </a:rPr>
-              <a:t>correctly</a:t>
+              <a:t>correction</a:t>
             </a:r>
             <a:endParaRPr lang="en-US" sz="2800" dirty="0"/>
           </a:p>
@@ -12990,7 +14334,7 @@
                 <a:ea typeface="Calibri" pitchFamily="34" charset="-122"/>
                 <a:cs typeface="Calibri" pitchFamily="34" charset="-120"/>
               </a:rPr>
-              <a:t>right, free from error</a:t>
+              <a:t>right; accurate</a:t>
             </a:r>
             <a:endParaRPr lang="en-US" sz="850" dirty="0"/>
           </a:p>
@@ -13063,7 +14407,7 @@
                 <a:ea typeface="Trebuchet MS" pitchFamily="34" charset="-122"/>
                 <a:cs typeface="Trebuchet MS" pitchFamily="34" charset="-120"/>
               </a:rPr>
-              <a:t>ly</a:t>
+              <a:t>ion</a:t>
             </a:r>
             <a:endParaRPr lang="en-US" sz="1300" dirty="0"/>
           </a:p>
@@ -13102,7 +14446,7 @@
                 <a:ea typeface="Calibri" pitchFamily="34" charset="-122"/>
                 <a:cs typeface="Calibri" pitchFamily="34" charset="-120"/>
               </a:rPr>
-              <a:t>in a certain way</a:t>
+              <a:t>act or result of</a:t>
             </a:r>
             <a:endParaRPr lang="en-US" sz="850" dirty="0"/>
           </a:p>
@@ -13366,7 +14710,7 @@
                 <a:ea typeface="Trebuchet MS" pitchFamily="34" charset="-122"/>
                 <a:cs typeface="Trebuchet MS" pitchFamily="34" charset="-120"/>
               </a:rPr>
-              <a:t>rect</a:t>
+              <a:t>rec</a:t>
             </a:r>
             <a:endParaRPr lang="en-US" sz="1400" dirty="0"/>
           </a:p>
@@ -13471,7 +14815,7 @@
                 <a:ea typeface="Trebuchet MS" pitchFamily="34" charset="-122"/>
                 <a:cs typeface="Trebuchet MS" pitchFamily="34" charset="-120"/>
               </a:rPr>
-              <a:t>ly</a:t>
+              <a:t>tion</a:t>
             </a:r>
             <a:endParaRPr lang="en-US" sz="1400" dirty="0"/>
           </a:p>
@@ -13804,7 +15148,7 @@
                 <a:ea typeface="Calibri" pitchFamily="34" charset="-122"/>
                 <a:cs typeface="Calibri" pitchFamily="34" charset="-120"/>
               </a:rPr>
-              <a:t>Root 'correct' — right, accurate, free from error</a:t>
+              <a:t>Root 'correct' — right; accurate</a:t>
             </a:r>
             <a:endParaRPr lang="en-US" sz="1600" dirty="0"/>
           </a:p>
@@ -14160,7 +15504,7 @@
                 <a:ea typeface="Calibri" pitchFamily="34" charset="-122"/>
                 <a:cs typeface="Calibri" pitchFamily="34" charset="-120"/>
               </a:rPr>
-              <a:t>Word Labs  •  wordlabs.app  •  Root: 'correct' = right, accurate, free from error</a:t>
+              <a:t>Word Labs  •  wordlabs.app  •  Root: 'correct' = right; accurate</a:t>
             </a:r>
             <a:endParaRPr lang="en-US" sz="800" dirty="0"/>
           </a:p>
@@ -14299,7 +15643,7 @@
                 <a:ea typeface="Trebuchet MS" pitchFamily="34" charset="-122"/>
                 <a:cs typeface="Trebuchet MS" pitchFamily="34" charset="-120"/>
               </a:rPr>
-              <a:t>correctly</a:t>
+              <a:t>correction</a:t>
             </a:r>
             <a:endParaRPr lang="en-US" sz="2800" dirty="0"/>
           </a:p>
@@ -14477,7 +15821,7 @@
                 <a:ea typeface="Calibri" pitchFamily="34" charset="-122"/>
                 <a:cs typeface="Calibri" pitchFamily="34" charset="-120"/>
               </a:rPr>
-              <a:t>right, free from error</a:t>
+              <a:t>right; accurate</a:t>
             </a:r>
             <a:endParaRPr lang="en-US" sz="850" dirty="0"/>
           </a:p>
@@ -14550,7 +15894,7 @@
                 <a:ea typeface="Trebuchet MS" pitchFamily="34" charset="-122"/>
                 <a:cs typeface="Trebuchet MS" pitchFamily="34" charset="-120"/>
               </a:rPr>
-              <a:t>ly</a:t>
+              <a:t>ion</a:t>
             </a:r>
             <a:endParaRPr lang="en-US" sz="1300" dirty="0"/>
           </a:p>
@@ -14589,7 +15933,7 @@
                 <a:ea typeface="Calibri" pitchFamily="34" charset="-122"/>
                 <a:cs typeface="Calibri" pitchFamily="34" charset="-120"/>
               </a:rPr>
-              <a:t>in a certain way</a:t>
+              <a:t>act or result of</a:t>
             </a:r>
             <a:endParaRPr lang="en-US" sz="850" dirty="0"/>
           </a:p>
@@ -14853,7 +16197,7 @@
                 <a:ea typeface="Trebuchet MS" pitchFamily="34" charset="-122"/>
                 <a:cs typeface="Trebuchet MS" pitchFamily="34" charset="-120"/>
               </a:rPr>
-              <a:t>rect</a:t>
+              <a:t>rec</a:t>
             </a:r>
             <a:endParaRPr lang="en-US" sz="1400" dirty="0"/>
           </a:p>
@@ -14958,7 +16302,7 @@
                 <a:ea typeface="Trebuchet MS" pitchFamily="34" charset="-122"/>
                 <a:cs typeface="Trebuchet MS" pitchFamily="34" charset="-120"/>
               </a:rPr>
-              <a:t>ly</a:t>
+              <a:t>tion</a:t>
             </a:r>
             <a:endParaRPr lang="en-US" sz="1400" dirty="0"/>
           </a:p>
@@ -15039,11 +16383,11 @@
         <p:spPr>
           <a:xfrm>
             <a:off x="1874520" y="4096512"/>
-            <a:ext cx="6903720" cy="804672"/>
+            <a:ext cx="6903720" cy="658368"/>
           </a:xfrm>
           <a:prstGeom prst="rect">
             <a:avLst>
-              <a:gd name="adj" fmla="val 6818"/>
+              <a:gd name="adj" fmla="val 8333"/>
             </a:avLst>
           </a:prstGeom>
           <a:solidFill>
@@ -15066,11 +16410,11 @@
         <p:spPr>
           <a:xfrm>
             <a:off x="2023872" y="4169664"/>
-            <a:ext cx="685800" cy="384048"/>
+            <a:ext cx="685800" cy="475488"/>
           </a:xfrm>
           <a:prstGeom prst="rect">
             <a:avLst>
-              <a:gd name="adj" fmla="val 9524"/>
+              <a:gd name="adj" fmla="val 7692"/>
             </a:avLst>
           </a:prstGeom>
           <a:solidFill>
@@ -15093,7 +16437,7 @@
         <p:spPr>
           <a:xfrm>
             <a:off x="2023872" y="4169664"/>
-            <a:ext cx="685800" cy="384048"/>
+            <a:ext cx="685800" cy="475488"/>
           </a:xfrm>
           <a:prstGeom prst="rect">
             <a:avLst/>
@@ -15125,57 +16469,18 @@
       </p:sp>
       <p:sp>
         <p:nvSpPr>
-          <p:cNvPr id="38" name="Text 36"/>
-          <p:cNvSpPr/>
-          <p:nvPr/>
-        </p:nvSpPr>
-        <p:spPr>
-          <a:xfrm>
-            <a:off x="2023872" y="4572000"/>
-            <a:ext cx="685800" cy="219456"/>
-          </a:xfrm>
-          <a:prstGeom prst="rect">
-            <a:avLst/>
-          </a:prstGeom>
-          <a:noFill/>
-          <a:ln/>
-        </p:spPr>
-        <p:txBody>
-          <a:bodyPr wrap="square" lIns="0" tIns="0" rIns="0" bIns="0" rtlCol="0" anchor="t"/>
-          <a:lstStyle/>
-          <a:p>
-            <a:pPr algn="ctr" indent="0" marL="0">
-              <a:buNone/>
-            </a:pPr>
-            <a:r>
-              <a:rPr lang="en-US" sz="750" i="1" dirty="0">
-                <a:solidFill>
-                  <a:srgbClr val="94A3B8"/>
-                </a:solidFill>
-                <a:latin typeface="Calibri" pitchFamily="34" charset="0"/>
-                <a:ea typeface="Calibri" pitchFamily="34" charset="-122"/>
-                <a:cs typeface="Calibri" pitchFamily="34" charset="-120"/>
-              </a:rPr>
-              <a:t>/k/</a:t>
-            </a:r>
-            <a:endParaRPr lang="en-US" sz="750" dirty="0"/>
-          </a:p>
-        </p:txBody>
-      </p:sp>
-      <p:sp>
-        <p:nvSpPr>
-          <p:cNvPr id="39" name="Shape 37"/>
+          <p:cNvPr id="38" name="Shape 36"/>
           <p:cNvSpPr/>
           <p:nvPr/>
         </p:nvSpPr>
         <p:spPr>
           <a:xfrm>
             <a:off x="2831592" y="4169664"/>
-            <a:ext cx="685800" cy="384048"/>
+            <a:ext cx="685800" cy="475488"/>
           </a:xfrm>
           <a:prstGeom prst="rect">
             <a:avLst>
-              <a:gd name="adj" fmla="val 9524"/>
+              <a:gd name="adj" fmla="val 7692"/>
             </a:avLst>
           </a:prstGeom>
           <a:solidFill>
@@ -15191,14 +16496,14 @@
       </p:sp>
       <p:sp>
         <p:nvSpPr>
-          <p:cNvPr id="40" name="Text 38"/>
+          <p:cNvPr id="39" name="Text 37"/>
           <p:cNvSpPr/>
           <p:nvPr/>
         </p:nvSpPr>
         <p:spPr>
           <a:xfrm>
             <a:off x="2831592" y="4169664"/>
-            <a:ext cx="685800" cy="384048"/>
+            <a:ext cx="685800" cy="475488"/>
           </a:xfrm>
           <a:prstGeom prst="rect">
             <a:avLst/>
@@ -15222,7 +16527,7 @@
                 <a:ea typeface="Trebuchet MS" pitchFamily="34" charset="-122"/>
                 <a:cs typeface="Trebuchet MS" pitchFamily="34" charset="-120"/>
               </a:rPr>
-              <a:t>or</a:t>
+              <a:t>o</a:t>
             </a:r>
             <a:endParaRPr lang="en-US" sz="900" dirty="0"/>
           </a:p>
@@ -15230,18 +16535,18 @@
       </p:sp>
       <p:sp>
         <p:nvSpPr>
-          <p:cNvPr id="41" name="Shape 39"/>
+          <p:cNvPr id="40" name="Shape 38"/>
           <p:cNvSpPr/>
           <p:nvPr/>
         </p:nvSpPr>
         <p:spPr>
           <a:xfrm>
             <a:off x="3639312" y="4169664"/>
-            <a:ext cx="685800" cy="384048"/>
+            <a:ext cx="685800" cy="475488"/>
           </a:xfrm>
           <a:prstGeom prst="rect">
             <a:avLst>
-              <a:gd name="adj" fmla="val 9524"/>
+              <a:gd name="adj" fmla="val 7692"/>
             </a:avLst>
           </a:prstGeom>
           <a:solidFill>
@@ -15257,14 +16562,14 @@
       </p:sp>
       <p:sp>
         <p:nvSpPr>
-          <p:cNvPr id="42" name="Text 40"/>
+          <p:cNvPr id="41" name="Text 39"/>
           <p:cNvSpPr/>
           <p:nvPr/>
         </p:nvSpPr>
         <p:spPr>
           <a:xfrm>
             <a:off x="3639312" y="4169664"/>
-            <a:ext cx="685800" cy="384048"/>
+            <a:ext cx="685800" cy="475488"/>
           </a:xfrm>
           <a:prstGeom prst="rect">
             <a:avLst/>
@@ -15288,7 +16593,7 @@
                 <a:ea typeface="Trebuchet MS" pitchFamily="34" charset="-122"/>
                 <a:cs typeface="Trebuchet MS" pitchFamily="34" charset="-120"/>
               </a:rPr>
-              <a:t>r</a:t>
+              <a:t>rr</a:t>
             </a:r>
             <a:endParaRPr lang="en-US" sz="900" dirty="0"/>
           </a:p>
@@ -15296,18 +16601,18 @@
       </p:sp>
       <p:sp>
         <p:nvSpPr>
-          <p:cNvPr id="43" name="Shape 41"/>
+          <p:cNvPr id="42" name="Shape 40"/>
           <p:cNvSpPr/>
           <p:nvPr/>
         </p:nvSpPr>
         <p:spPr>
           <a:xfrm>
             <a:off x="4447032" y="4169664"/>
-            <a:ext cx="685800" cy="384048"/>
+            <a:ext cx="685800" cy="475488"/>
           </a:xfrm>
           <a:prstGeom prst="rect">
             <a:avLst>
-              <a:gd name="adj" fmla="val 9524"/>
+              <a:gd name="adj" fmla="val 7692"/>
             </a:avLst>
           </a:prstGeom>
           <a:solidFill>
@@ -15323,14 +16628,14 @@
       </p:sp>
       <p:sp>
         <p:nvSpPr>
-          <p:cNvPr id="44" name="Text 42"/>
+          <p:cNvPr id="43" name="Text 41"/>
           <p:cNvSpPr/>
           <p:nvPr/>
         </p:nvSpPr>
         <p:spPr>
           <a:xfrm>
             <a:off x="4447032" y="4169664"/>
-            <a:ext cx="685800" cy="384048"/>
+            <a:ext cx="685800" cy="475488"/>
           </a:xfrm>
           <a:prstGeom prst="rect">
             <a:avLst/>
@@ -15362,18 +16667,18 @@
       </p:sp>
       <p:sp>
         <p:nvSpPr>
-          <p:cNvPr id="45" name="Shape 43"/>
+          <p:cNvPr id="44" name="Shape 42"/>
           <p:cNvSpPr/>
           <p:nvPr/>
         </p:nvSpPr>
         <p:spPr>
           <a:xfrm>
             <a:off x="5254752" y="4169664"/>
-            <a:ext cx="685800" cy="384048"/>
+            <a:ext cx="685800" cy="475488"/>
           </a:xfrm>
           <a:prstGeom prst="rect">
             <a:avLst>
-              <a:gd name="adj" fmla="val 9524"/>
+              <a:gd name="adj" fmla="val 7692"/>
             </a:avLst>
           </a:prstGeom>
           <a:solidFill>
@@ -15389,14 +16694,14 @@
       </p:sp>
       <p:sp>
         <p:nvSpPr>
-          <p:cNvPr id="46" name="Text 44"/>
+          <p:cNvPr id="45" name="Text 43"/>
           <p:cNvSpPr/>
           <p:nvPr/>
         </p:nvSpPr>
         <p:spPr>
           <a:xfrm>
             <a:off x="5254752" y="4169664"/>
-            <a:ext cx="685800" cy="384048"/>
+            <a:ext cx="685800" cy="475488"/>
           </a:xfrm>
           <a:prstGeom prst="rect">
             <a:avLst/>
@@ -15428,80 +16733,41 @@
       </p:sp>
       <p:sp>
         <p:nvSpPr>
+          <p:cNvPr id="46" name="Shape 44"/>
+          <p:cNvSpPr/>
+          <p:nvPr/>
+        </p:nvSpPr>
+        <p:spPr>
+          <a:xfrm>
+            <a:off x="6062472" y="4169664"/>
+            <a:ext cx="685800" cy="475488"/>
+          </a:xfrm>
+          <a:prstGeom prst="rect">
+            <a:avLst>
+              <a:gd name="adj" fmla="val 7692"/>
+            </a:avLst>
+          </a:prstGeom>
+          <a:solidFill>
+            <a:srgbClr val="FFFFFF"/>
+          </a:solidFill>
+          <a:ln w="12700">
+            <a:solidFill>
+              <a:srgbClr val="DB2777"/>
+            </a:solidFill>
+            <a:prstDash val="solid"/>
+          </a:ln>
+        </p:spPr>
+      </p:sp>
+      <p:sp>
+        <p:nvSpPr>
           <p:cNvPr id="47" name="Text 45"/>
           <p:cNvSpPr/>
           <p:nvPr/>
         </p:nvSpPr>
         <p:spPr>
           <a:xfrm>
-            <a:off x="5254752" y="4572000"/>
-            <a:ext cx="685800" cy="219456"/>
-          </a:xfrm>
-          <a:prstGeom prst="rect">
-            <a:avLst/>
-          </a:prstGeom>
-          <a:noFill/>
-          <a:ln/>
-        </p:spPr>
-        <p:txBody>
-          <a:bodyPr wrap="square" lIns="0" tIns="0" rIns="0" bIns="0" rtlCol="0" anchor="t"/>
-          <a:lstStyle/>
-          <a:p>
-            <a:pPr algn="ctr" indent="0" marL="0">
-              <a:buNone/>
-            </a:pPr>
-            <a:r>
-              <a:rPr lang="en-US" sz="750" i="1" dirty="0">
-                <a:solidFill>
-                  <a:srgbClr val="94A3B8"/>
-                </a:solidFill>
-                <a:latin typeface="Calibri" pitchFamily="34" charset="0"/>
-                <a:ea typeface="Calibri" pitchFamily="34" charset="-122"/>
-                <a:cs typeface="Calibri" pitchFamily="34" charset="-120"/>
-              </a:rPr>
-              <a:t>/k/</a:t>
-            </a:r>
-            <a:endParaRPr lang="en-US" sz="750" dirty="0"/>
-          </a:p>
-        </p:txBody>
-      </p:sp>
-      <p:sp>
-        <p:nvSpPr>
-          <p:cNvPr id="48" name="Shape 46"/>
-          <p:cNvSpPr/>
-          <p:nvPr/>
-        </p:nvSpPr>
-        <p:spPr>
-          <a:xfrm>
             <a:off x="6062472" y="4169664"/>
-            <a:ext cx="685800" cy="384048"/>
-          </a:xfrm>
-          <a:prstGeom prst="rect">
-            <a:avLst>
-              <a:gd name="adj" fmla="val 9524"/>
-            </a:avLst>
-          </a:prstGeom>
-          <a:solidFill>
-            <a:srgbClr val="FFFFFF"/>
-          </a:solidFill>
-          <a:ln w="12700">
-            <a:solidFill>
-              <a:srgbClr val="DB2777"/>
-            </a:solidFill>
-            <a:prstDash val="solid"/>
-          </a:ln>
-        </p:spPr>
-      </p:sp>
-      <p:sp>
-        <p:nvSpPr>
-          <p:cNvPr id="49" name="Text 47"/>
-          <p:cNvSpPr/>
-          <p:nvPr/>
-        </p:nvSpPr>
-        <p:spPr>
-          <a:xfrm>
-            <a:off x="6062472" y="4169664"/>
-            <a:ext cx="685800" cy="384048"/>
+            <a:ext cx="685800" cy="475488"/>
           </a:xfrm>
           <a:prstGeom prst="rect">
             <a:avLst/>
@@ -15525,7 +16791,7 @@
                 <a:ea typeface="Trebuchet MS" pitchFamily="34" charset="-122"/>
                 <a:cs typeface="Trebuchet MS" pitchFamily="34" charset="-120"/>
               </a:rPr>
-              <a:t>t</a:t>
+              <a:t>ti</a:t>
             </a:r>
             <a:endParaRPr lang="en-US" sz="900" dirty="0"/>
           </a:p>
@@ -15533,18 +16799,18 @@
       </p:sp>
       <p:sp>
         <p:nvSpPr>
-          <p:cNvPr id="50" name="Shape 48"/>
+          <p:cNvPr id="48" name="Shape 46"/>
           <p:cNvSpPr/>
           <p:nvPr/>
         </p:nvSpPr>
         <p:spPr>
           <a:xfrm>
             <a:off x="6870192" y="4169664"/>
-            <a:ext cx="685800" cy="384048"/>
+            <a:ext cx="685800" cy="475488"/>
           </a:xfrm>
           <a:prstGeom prst="rect">
             <a:avLst>
-              <a:gd name="adj" fmla="val 9524"/>
+              <a:gd name="adj" fmla="val 7692"/>
             </a:avLst>
           </a:prstGeom>
           <a:solidFill>
@@ -15560,14 +16826,14 @@
       </p:sp>
       <p:sp>
         <p:nvSpPr>
-          <p:cNvPr id="51" name="Text 49"/>
+          <p:cNvPr id="49" name="Text 47"/>
           <p:cNvSpPr/>
           <p:nvPr/>
         </p:nvSpPr>
         <p:spPr>
           <a:xfrm>
             <a:off x="6870192" y="4169664"/>
-            <a:ext cx="685800" cy="384048"/>
+            <a:ext cx="685800" cy="475488"/>
           </a:xfrm>
           <a:prstGeom prst="rect">
             <a:avLst/>
@@ -15591,7 +16857,7 @@
                 <a:ea typeface="Trebuchet MS" pitchFamily="34" charset="-122"/>
                 <a:cs typeface="Trebuchet MS" pitchFamily="34" charset="-120"/>
               </a:rPr>
-              <a:t>l</a:t>
+              <a:t>o</a:t>
             </a:r>
             <a:endParaRPr lang="en-US" sz="900" dirty="0"/>
           </a:p>
@@ -15599,18 +16865,18 @@
       </p:sp>
       <p:sp>
         <p:nvSpPr>
-          <p:cNvPr id="52" name="Shape 50"/>
+          <p:cNvPr id="50" name="Shape 48"/>
           <p:cNvSpPr/>
           <p:nvPr/>
         </p:nvSpPr>
         <p:spPr>
           <a:xfrm>
             <a:off x="7677912" y="4169664"/>
-            <a:ext cx="685800" cy="384048"/>
+            <a:ext cx="685800" cy="475488"/>
           </a:xfrm>
           <a:prstGeom prst="rect">
             <a:avLst>
-              <a:gd name="adj" fmla="val 9524"/>
+              <a:gd name="adj" fmla="val 7692"/>
             </a:avLst>
           </a:prstGeom>
           <a:solidFill>
@@ -15626,14 +16892,14 @@
       </p:sp>
       <p:sp>
         <p:nvSpPr>
-          <p:cNvPr id="53" name="Text 51"/>
+          <p:cNvPr id="51" name="Text 49"/>
           <p:cNvSpPr/>
           <p:nvPr/>
         </p:nvSpPr>
         <p:spPr>
           <a:xfrm>
             <a:off x="7677912" y="4169664"/>
-            <a:ext cx="685800" cy="384048"/>
+            <a:ext cx="685800" cy="475488"/>
           </a:xfrm>
           <a:prstGeom prst="rect">
             <a:avLst/>
@@ -15657,7 +16923,7 @@
                 <a:ea typeface="Trebuchet MS" pitchFamily="34" charset="-122"/>
                 <a:cs typeface="Trebuchet MS" pitchFamily="34" charset="-120"/>
               </a:rPr>
-              <a:t>y</a:t>
+              <a:t>n</a:t>
             </a:r>
             <a:endParaRPr lang="en-US" sz="900" dirty="0"/>
           </a:p>
@@ -16231,7 +17497,7 @@
                 <a:ea typeface="Calibri" pitchFamily="34" charset="-122"/>
                 <a:cs typeface="Calibri" pitchFamily="34" charset="-120"/>
               </a:rPr>
-              <a:t>Word Labs  •  wordlabs.app  •  Root: 'correct' = right, accurate, free from error</a:t>
+              <a:t>Word Labs  •  wordlabs.app  •  Root: 'correct' = right; accurate</a:t>
             </a:r>
             <a:endParaRPr lang="en-US" sz="800" dirty="0"/>
           </a:p>
@@ -16565,7 +17831,7 @@
                 <a:ea typeface="Trebuchet MS" pitchFamily="34" charset="-122"/>
                 <a:cs typeface="Trebuchet MS" pitchFamily="34" charset="-120"/>
               </a:rPr>
-              <a:t>2</a:t>
+              <a:t>0</a:t>
             </a:r>
             <a:pPr algn="ctr" indent="0" marL="0">
               <a:buNone/>
@@ -16579,7 +17845,7 @@
                 <a:ea typeface="Trebuchet MS" pitchFamily="34" charset="-122"/>
                 <a:cs typeface="Trebuchet MS" pitchFamily="34" charset="-120"/>
               </a:rPr>
-              <a:t>  punctuation marks</a:t>
+              <a:t>  punctuation mark</a:t>
             </a:r>
             <a:endParaRPr lang="en-US" sz="2800" dirty="0"/>
           </a:p>
@@ -16871,7 +18137,7 @@
                 <a:ea typeface="Calibri" pitchFamily="34" charset="-122"/>
                 <a:cs typeface="Calibri" pitchFamily="34" charset="-120"/>
               </a:rPr>
-              <a:t>Word Labs  •  wordlabs.app  •  Root: 'correct' = right, accurate, free from error</a:t>
+              <a:t>Word Labs  •  wordlabs.app  •  Root: 'correct' = right; accurate</a:t>
             </a:r>
             <a:endParaRPr lang="en-US" sz="800" dirty="0"/>
           </a:p>
@@ -16983,7 +18249,7 @@
                 <a:ea typeface="Calibri" pitchFamily="34" charset="-122"/>
                 <a:cs typeface="Calibri" pitchFamily="34" charset="-120"/>
               </a:rPr>
-              <a:t>After making a </a:t>
+              <a:t>The editor made several </a:t>
             </a:r>
             <a:pPr algn="l" indent="0" marL="0">
               <a:buNone/>
@@ -17000,7 +18266,7 @@
                 <a:ea typeface="Calibri" pitchFamily="34" charset="-122"/>
                 <a:cs typeface="Calibri" pitchFamily="34" charset="-120"/>
               </a:rPr>
-              <a:t>correction</a:t>
+              <a:t>corrections</a:t>
             </a:r>
             <a:pPr algn="l" indent="0" marL="0">
               <a:buNone/>
@@ -17014,7 +18280,7 @@
                 <a:ea typeface="Calibri" pitchFamily="34" charset="-122"/>
                 <a:cs typeface="Calibri" pitchFamily="34" charset="-120"/>
               </a:rPr>
-              <a:t> to her work, Sophie realised that </a:t>
+              <a:t> to the essay before it was printed. The </a:t>
             </a:r>
             <a:pPr algn="l" indent="0" marL="0">
               <a:buNone/>
@@ -17031,7 +18297,7 @@
                 <a:ea typeface="Calibri" pitchFamily="34" charset="-122"/>
                 <a:cs typeface="Calibri" pitchFamily="34" charset="-120"/>
               </a:rPr>
-              <a:t>incorrectness</a:t>
+              <a:t>correctional</a:t>
             </a:r>
             <a:pPr algn="l" indent="0" marL="0">
               <a:buNone/>
@@ -17045,7 +18311,38 @@
                 <a:ea typeface="Calibri" pitchFamily="34" charset="-122"/>
                 <a:cs typeface="Calibri" pitchFamily="34" charset="-120"/>
               </a:rPr>
-              <a:t> had caused her to lose marks; she vowed to be more careful.</a:t>
+              <a:t> officer supervised the inmates in the yard. The doctor recommended </a:t>
+            </a:r>
+            <a:pPr algn="l" indent="0" marL="0">
+              <a:buNone/>
+            </a:pPr>
+            <a:r>
+              <a:rPr lang="en-US" sz="1800" b="1" dirty="0">
+                <a:solidFill>
+                  <a:srgbClr val="0D9488"/>
+                </a:solidFill>
+                <a:highlight>
+                  <a:srgbClr val="CCFBF1"/>
+                </a:highlight>
+                <a:latin typeface="Calibri" pitchFamily="34" charset="0"/>
+                <a:ea typeface="Calibri" pitchFamily="34" charset="-122"/>
+                <a:cs typeface="Calibri" pitchFamily="34" charset="-120"/>
+              </a:rPr>
+              <a:t>corrective</a:t>
+            </a:r>
+            <a:pPr algn="l" indent="0" marL="0">
+              <a:buNone/>
+            </a:pPr>
+            <a:r>
+              <a:rPr lang="en-US" sz="1800" dirty="0">
+                <a:solidFill>
+                  <a:srgbClr val="0F172A"/>
+                </a:solidFill>
+                <a:latin typeface="Calibri" pitchFamily="34" charset="0"/>
+                <a:ea typeface="Calibri" pitchFamily="34" charset="-122"/>
+                <a:cs typeface="Calibri" pitchFamily="34" charset="-120"/>
+              </a:rPr>
+              <a:t> lenses to help her see clearly.</a:t>
             </a:r>
             <a:endParaRPr lang="en-US" sz="1800" dirty="0"/>
           </a:p>
@@ -17200,7 +18497,7 @@
                 <a:ea typeface="Trebuchet MS" pitchFamily="34" charset="-122"/>
                 <a:cs typeface="Trebuchet MS" pitchFamily="34" charset="-120"/>
               </a:rPr>
-              <a:t>correction</a:t>
+              <a:t>corrections</a:t>
             </a:r>
             <a:endParaRPr lang="en-US" sz="1400" dirty="0"/>
           </a:p>
@@ -17328,7 +18625,7 @@
                 <a:ea typeface="Trebuchet MS" pitchFamily="34" charset="-122"/>
                 <a:cs typeface="Trebuchet MS" pitchFamily="34" charset="-120"/>
               </a:rPr>
-              <a:t>incorrectness</a:t>
+              <a:t>correctional</a:t>
             </a:r>
             <a:endParaRPr lang="en-US" sz="1400" dirty="0"/>
           </a:p>
@@ -17456,7 +18753,7 @@
                 <a:ea typeface="Trebuchet MS" pitchFamily="34" charset="-122"/>
                 <a:cs typeface="Trebuchet MS" pitchFamily="34" charset="-120"/>
               </a:rPr>
-              <a:t>corrector</a:t>
+              <a:t>corrective</a:t>
             </a:r>
             <a:endParaRPr lang="en-US" sz="1400" dirty="0"/>
           </a:p>
@@ -17787,7 +19084,7 @@
                 <a:ea typeface="Calibri" pitchFamily="34" charset="-122"/>
                 <a:cs typeface="Calibri" pitchFamily="34" charset="-120"/>
               </a:rPr>
-              <a:t>Word Labs  •  wordlabs.app  •  Root: 'correct' = right, accurate, free from error</a:t>
+              <a:t>Word Labs  •  wordlabs.app  •  Root: 'correct' = right; accurate</a:t>
             </a:r>
             <a:endParaRPr lang="en-US" sz="800" dirty="0"/>
           </a:p>
@@ -17926,7 +19223,7 @@
                 <a:ea typeface="Trebuchet MS" pitchFamily="34" charset="-122"/>
                 <a:cs typeface="Trebuchet MS" pitchFamily="34" charset="-120"/>
               </a:rPr>
-              <a:t>correction</a:t>
+              <a:t>corrections</a:t>
             </a:r>
             <a:endParaRPr lang="en-US" sz="2800" dirty="0"/>
           </a:p>
@@ -18614,7 +19911,7 @@
                 <a:ea typeface="Calibri" pitchFamily="34" charset="-122"/>
                 <a:cs typeface="Calibri" pitchFamily="34" charset="-120"/>
               </a:rPr>
-              <a:t>Word Labs  •  wordlabs.app  •  Root: 'correct' = right, accurate, free from error</a:t>
+              <a:t>Word Labs  •  wordlabs.app  •  Root: 'correct' = right; accurate</a:t>
             </a:r>
             <a:endParaRPr lang="en-US" sz="800" dirty="0"/>
           </a:p>
@@ -18753,7 +20050,7 @@
                 <a:ea typeface="Trebuchet MS" pitchFamily="34" charset="-122"/>
                 <a:cs typeface="Trebuchet MS" pitchFamily="34" charset="-120"/>
               </a:rPr>
-              <a:t>correction</a:t>
+              <a:t>corrections</a:t>
             </a:r>
             <a:endParaRPr lang="en-US" sz="2800" dirty="0"/>
           </a:p>
@@ -18833,7 +20130,7 @@
         </p:nvSpPr>
         <p:spPr>
           <a:xfrm>
-            <a:off x="2938272" y="2258568"/>
+            <a:off x="2221992" y="2258568"/>
             <a:ext cx="1828800" cy="292608"/>
           </a:xfrm>
           <a:prstGeom prst="rect">
@@ -18867,7 +20164,7 @@
         </p:nvSpPr>
         <p:spPr>
           <a:xfrm>
-            <a:off x="2938272" y="2258568"/>
+            <a:off x="2221992" y="2258568"/>
             <a:ext cx="1828800" cy="292608"/>
           </a:xfrm>
           <a:prstGeom prst="rect">
@@ -18906,7 +20203,7 @@
         </p:nvSpPr>
         <p:spPr>
           <a:xfrm>
-            <a:off x="2938272" y="2569464"/>
+            <a:off x="2221992" y="2569464"/>
             <a:ext cx="1828800" cy="201168"/>
           </a:xfrm>
           <a:prstGeom prst="rect">
@@ -18931,7 +20228,7 @@
                 <a:ea typeface="Calibri" pitchFamily="34" charset="-122"/>
                 <a:cs typeface="Calibri" pitchFamily="34" charset="-120"/>
               </a:rPr>
-              <a:t>right, free from error</a:t>
+              <a:t>right; accurate</a:t>
             </a:r>
             <a:endParaRPr lang="en-US" sz="850" dirty="0"/>
           </a:p>
@@ -18945,7 +20242,7 @@
         </p:nvSpPr>
         <p:spPr>
           <a:xfrm>
-            <a:off x="5803392" y="2258568"/>
+            <a:off x="4370832" y="2258568"/>
             <a:ext cx="1828800" cy="292608"/>
           </a:xfrm>
           <a:prstGeom prst="rect">
@@ -18979,7 +20276,7 @@
         </p:nvSpPr>
         <p:spPr>
           <a:xfrm>
-            <a:off x="5803392" y="2258568"/>
+            <a:off x="4370832" y="2258568"/>
             <a:ext cx="1828800" cy="292608"/>
           </a:xfrm>
           <a:prstGeom prst="rect">
@@ -19018,7 +20315,7 @@
         </p:nvSpPr>
         <p:spPr>
           <a:xfrm>
-            <a:off x="5803392" y="2569464"/>
+            <a:off x="4370832" y="2569464"/>
             <a:ext cx="1828800" cy="201168"/>
           </a:xfrm>
           <a:prstGeom prst="rect">
@@ -19057,6 +20354,118 @@
         </p:nvSpPr>
         <p:spPr>
           <a:xfrm>
+            <a:off x="6519672" y="2258568"/>
+            <a:ext cx="1828800" cy="292608"/>
+          </a:xfrm>
+          <a:prstGeom prst="rect">
+            <a:avLst>
+              <a:gd name="adj" fmla="val 25000"/>
+            </a:avLst>
+          </a:prstGeom>
+          <a:solidFill>
+            <a:srgbClr val="FCE7F3"/>
+          </a:solidFill>
+          <a:ln w="19050">
+            <a:solidFill>
+              <a:srgbClr val="DB2777"/>
+            </a:solidFill>
+            <a:prstDash val="solid"/>
+          </a:ln>
+          <a:effectLst>
+            <a:outerShdw sx="100000" sy="100000" kx="0" ky="0" algn="bl" rotWithShape="0" blurRad="101600" dist="38100" dir="8100000">
+              <a:srgbClr val="000000">
+                <a:alpha val="12000"/>
+              </a:srgbClr>
+            </a:outerShdw>
+          </a:effectLst>
+        </p:spPr>
+      </p:sp>
+      <p:sp>
+        <p:nvSpPr>
+          <p:cNvPr id="23" name="Text 21"/>
+          <p:cNvSpPr/>
+          <p:nvPr/>
+        </p:nvSpPr>
+        <p:spPr>
+          <a:xfrm>
+            <a:off x="6519672" y="2258568"/>
+            <a:ext cx="1828800" cy="292608"/>
+          </a:xfrm>
+          <a:prstGeom prst="rect">
+            <a:avLst/>
+          </a:prstGeom>
+          <a:noFill/>
+          <a:ln/>
+        </p:spPr>
+        <p:txBody>
+          <a:bodyPr wrap="square" lIns="0" tIns="0" rIns="0" bIns="0" rtlCol="0" anchor="ctr"/>
+          <a:lstStyle/>
+          <a:p>
+            <a:pPr algn="ctr" indent="0" marL="0">
+              <a:buNone/>
+            </a:pPr>
+            <a:r>
+              <a:rPr lang="en-US" sz="1300" b="1" dirty="0">
+                <a:solidFill>
+                  <a:srgbClr val="9D174D"/>
+                </a:solidFill>
+                <a:latin typeface="Trebuchet MS" pitchFamily="34" charset="0"/>
+                <a:ea typeface="Trebuchet MS" pitchFamily="34" charset="-122"/>
+                <a:cs typeface="Trebuchet MS" pitchFamily="34" charset="-120"/>
+              </a:rPr>
+              <a:t>s</a:t>
+            </a:r>
+            <a:endParaRPr lang="en-US" sz="1300" dirty="0"/>
+          </a:p>
+        </p:txBody>
+      </p:sp>
+      <p:sp>
+        <p:nvSpPr>
+          <p:cNvPr id="24" name="Text 22"/>
+          <p:cNvSpPr/>
+          <p:nvPr/>
+        </p:nvSpPr>
+        <p:spPr>
+          <a:xfrm>
+            <a:off x="6519672" y="2569464"/>
+            <a:ext cx="1828800" cy="201168"/>
+          </a:xfrm>
+          <a:prstGeom prst="rect">
+            <a:avLst/>
+          </a:prstGeom>
+          <a:noFill/>
+          <a:ln/>
+        </p:spPr>
+        <p:txBody>
+          <a:bodyPr wrap="square" lIns="0" tIns="0" rIns="0" bIns="0" rtlCol="0" anchor="t"/>
+          <a:lstStyle/>
+          <a:p>
+            <a:pPr algn="ctr" indent="0" marL="0">
+              <a:buNone/>
+            </a:pPr>
+            <a:r>
+              <a:rPr lang="en-US" sz="850" dirty="0">
+                <a:solidFill>
+                  <a:srgbClr val="475569"/>
+                </a:solidFill>
+                <a:latin typeface="Calibri" pitchFamily="34" charset="0"/>
+                <a:ea typeface="Calibri" pitchFamily="34" charset="-122"/>
+                <a:cs typeface="Calibri" pitchFamily="34" charset="-120"/>
+              </a:rPr>
+              <a:t>plural or present tense</a:t>
+            </a:r>
+            <a:endParaRPr lang="en-US" sz="850" dirty="0"/>
+          </a:p>
+        </p:txBody>
+      </p:sp>
+      <p:sp>
+        <p:nvSpPr>
+          <p:cNvPr id="25" name="Shape 23"/>
+          <p:cNvSpPr/>
+          <p:nvPr/>
+        </p:nvSpPr>
+        <p:spPr>
+          <a:xfrm>
             <a:off x="365760" y="3273552"/>
             <a:ext cx="1371600" cy="658368"/>
           </a:xfrm>
@@ -19078,7 +20487,7 @@
       </p:sp>
       <p:sp>
         <p:nvSpPr>
-          <p:cNvPr id="23" name="Text 21"/>
+          <p:cNvPr id="26" name="Text 24"/>
           <p:cNvSpPr/>
           <p:nvPr/>
         </p:nvSpPr>
@@ -19117,7 +20526,7 @@
       </p:sp>
       <p:sp>
         <p:nvSpPr>
-          <p:cNvPr id="24" name="Shape 22"/>
+          <p:cNvPr id="27" name="Shape 25"/>
           <p:cNvSpPr/>
           <p:nvPr/>
         </p:nvSpPr>
@@ -19144,7 +20553,7 @@
       </p:sp>
       <p:sp>
         <p:nvSpPr>
-          <p:cNvPr id="25" name="Text 23"/>
+          <p:cNvPr id="28" name="Text 26"/>
           <p:cNvSpPr/>
           <p:nvPr/>
         </p:nvSpPr>
@@ -19183,7 +20592,7 @@
       </p:sp>
       <p:sp>
         <p:nvSpPr>
-          <p:cNvPr id="26" name="Shape 24"/>
+          <p:cNvPr id="29" name="Shape 27"/>
           <p:cNvSpPr/>
           <p:nvPr/>
         </p:nvSpPr>
@@ -19210,7 +20619,7 @@
       </p:sp>
       <p:sp>
         <p:nvSpPr>
-          <p:cNvPr id="27" name="Text 25"/>
+          <p:cNvPr id="30" name="Text 28"/>
           <p:cNvSpPr/>
           <p:nvPr/>
         </p:nvSpPr>
@@ -19249,7 +20658,7 @@
       </p:sp>
       <p:sp>
         <p:nvSpPr>
-          <p:cNvPr id="28" name="Shape 26"/>
+          <p:cNvPr id="31" name="Shape 29"/>
           <p:cNvSpPr/>
           <p:nvPr/>
         </p:nvSpPr>
@@ -19276,7 +20685,7 @@
       </p:sp>
       <p:sp>
         <p:nvSpPr>
-          <p:cNvPr id="29" name="Text 27"/>
+          <p:cNvPr id="32" name="Text 30"/>
           <p:cNvSpPr/>
           <p:nvPr/>
         </p:nvSpPr>
@@ -19599,7 +21008,7 @@
                 <a:ea typeface="Calibri" pitchFamily="34" charset="-122"/>
                 <a:cs typeface="Calibri" pitchFamily="34" charset="-120"/>
               </a:rPr>
-              <a:t>Word Labs  •  wordlabs.app  •  Root: 'correct' = right, accurate, free from error</a:t>
+              <a:t>Word Labs  •  wordlabs.app  •  Root: 'correct' = right; accurate</a:t>
             </a:r>
             <a:endParaRPr lang="en-US" sz="800" dirty="0"/>
           </a:p>
@@ -19738,7 +21147,7 @@
                 <a:ea typeface="Trebuchet MS" pitchFamily="34" charset="-122"/>
                 <a:cs typeface="Trebuchet MS" pitchFamily="34" charset="-120"/>
               </a:rPr>
-              <a:t>correction</a:t>
+              <a:t>corrections</a:t>
             </a:r>
             <a:endParaRPr lang="en-US" sz="2800" dirty="0"/>
           </a:p>
@@ -19818,7 +21227,7 @@
         </p:nvSpPr>
         <p:spPr>
           <a:xfrm>
-            <a:off x="2938272" y="2258568"/>
+            <a:off x="2221992" y="2258568"/>
             <a:ext cx="1828800" cy="292608"/>
           </a:xfrm>
           <a:prstGeom prst="rect">
@@ -19852,7 +21261,7 @@
         </p:nvSpPr>
         <p:spPr>
           <a:xfrm>
-            <a:off x="2938272" y="2258568"/>
+            <a:off x="2221992" y="2258568"/>
             <a:ext cx="1828800" cy="292608"/>
           </a:xfrm>
           <a:prstGeom prst="rect">
@@ -19891,7 +21300,7 @@
         </p:nvSpPr>
         <p:spPr>
           <a:xfrm>
-            <a:off x="2938272" y="2569464"/>
+            <a:off x="2221992" y="2569464"/>
             <a:ext cx="1828800" cy="201168"/>
           </a:xfrm>
           <a:prstGeom prst="rect">
@@ -19916,7 +21325,7 @@
                 <a:ea typeface="Calibri" pitchFamily="34" charset="-122"/>
                 <a:cs typeface="Calibri" pitchFamily="34" charset="-120"/>
               </a:rPr>
-              <a:t>right, free from error</a:t>
+              <a:t>right; accurate</a:t>
             </a:r>
             <a:endParaRPr lang="en-US" sz="850" dirty="0"/>
           </a:p>
@@ -19930,7 +21339,7 @@
         </p:nvSpPr>
         <p:spPr>
           <a:xfrm>
-            <a:off x="5803392" y="2258568"/>
+            <a:off x="4370832" y="2258568"/>
             <a:ext cx="1828800" cy="292608"/>
           </a:xfrm>
           <a:prstGeom prst="rect">
@@ -19964,7 +21373,7 @@
         </p:nvSpPr>
         <p:spPr>
           <a:xfrm>
-            <a:off x="5803392" y="2258568"/>
+            <a:off x="4370832" y="2258568"/>
             <a:ext cx="1828800" cy="292608"/>
           </a:xfrm>
           <a:prstGeom prst="rect">
@@ -20003,7 +21412,7 @@
         </p:nvSpPr>
         <p:spPr>
           <a:xfrm>
-            <a:off x="5803392" y="2569464"/>
+            <a:off x="4370832" y="2569464"/>
             <a:ext cx="1828800" cy="201168"/>
           </a:xfrm>
           <a:prstGeom prst="rect">
@@ -20042,6 +21451,118 @@
         </p:nvSpPr>
         <p:spPr>
           <a:xfrm>
+            <a:off x="6519672" y="2258568"/>
+            <a:ext cx="1828800" cy="292608"/>
+          </a:xfrm>
+          <a:prstGeom prst="rect">
+            <a:avLst>
+              <a:gd name="adj" fmla="val 25000"/>
+            </a:avLst>
+          </a:prstGeom>
+          <a:solidFill>
+            <a:srgbClr val="FCE7F3"/>
+          </a:solidFill>
+          <a:ln w="19050">
+            <a:solidFill>
+              <a:srgbClr val="DB2777"/>
+            </a:solidFill>
+            <a:prstDash val="solid"/>
+          </a:ln>
+          <a:effectLst>
+            <a:outerShdw sx="100000" sy="100000" kx="0" ky="0" algn="bl" rotWithShape="0" blurRad="101600" dist="38100" dir="8100000">
+              <a:srgbClr val="000000">
+                <a:alpha val="12000"/>
+              </a:srgbClr>
+            </a:outerShdw>
+          </a:effectLst>
+        </p:spPr>
+      </p:sp>
+      <p:sp>
+        <p:nvSpPr>
+          <p:cNvPr id="23" name="Text 21"/>
+          <p:cNvSpPr/>
+          <p:nvPr/>
+        </p:nvSpPr>
+        <p:spPr>
+          <a:xfrm>
+            <a:off x="6519672" y="2258568"/>
+            <a:ext cx="1828800" cy="292608"/>
+          </a:xfrm>
+          <a:prstGeom prst="rect">
+            <a:avLst/>
+          </a:prstGeom>
+          <a:noFill/>
+          <a:ln/>
+        </p:spPr>
+        <p:txBody>
+          <a:bodyPr wrap="square" lIns="0" tIns="0" rIns="0" bIns="0" rtlCol="0" anchor="ctr"/>
+          <a:lstStyle/>
+          <a:p>
+            <a:pPr algn="ctr" indent="0" marL="0">
+              <a:buNone/>
+            </a:pPr>
+            <a:r>
+              <a:rPr lang="en-US" sz="1300" b="1" dirty="0">
+                <a:solidFill>
+                  <a:srgbClr val="9D174D"/>
+                </a:solidFill>
+                <a:latin typeface="Trebuchet MS" pitchFamily="34" charset="0"/>
+                <a:ea typeface="Trebuchet MS" pitchFamily="34" charset="-122"/>
+                <a:cs typeface="Trebuchet MS" pitchFamily="34" charset="-120"/>
+              </a:rPr>
+              <a:t>s</a:t>
+            </a:r>
+            <a:endParaRPr lang="en-US" sz="1300" dirty="0"/>
+          </a:p>
+        </p:txBody>
+      </p:sp>
+      <p:sp>
+        <p:nvSpPr>
+          <p:cNvPr id="24" name="Text 22"/>
+          <p:cNvSpPr/>
+          <p:nvPr/>
+        </p:nvSpPr>
+        <p:spPr>
+          <a:xfrm>
+            <a:off x="6519672" y="2569464"/>
+            <a:ext cx="1828800" cy="201168"/>
+          </a:xfrm>
+          <a:prstGeom prst="rect">
+            <a:avLst/>
+          </a:prstGeom>
+          <a:noFill/>
+          <a:ln/>
+        </p:spPr>
+        <p:txBody>
+          <a:bodyPr wrap="square" lIns="0" tIns="0" rIns="0" bIns="0" rtlCol="0" anchor="t"/>
+          <a:lstStyle/>
+          <a:p>
+            <a:pPr algn="ctr" indent="0" marL="0">
+              <a:buNone/>
+            </a:pPr>
+            <a:r>
+              <a:rPr lang="en-US" sz="850" dirty="0">
+                <a:solidFill>
+                  <a:srgbClr val="475569"/>
+                </a:solidFill>
+                <a:latin typeface="Calibri" pitchFamily="34" charset="0"/>
+                <a:ea typeface="Calibri" pitchFamily="34" charset="-122"/>
+                <a:cs typeface="Calibri" pitchFamily="34" charset="-120"/>
+              </a:rPr>
+              <a:t>plural or present tense</a:t>
+            </a:r>
+            <a:endParaRPr lang="en-US" sz="850" dirty="0"/>
+          </a:p>
+        </p:txBody>
+      </p:sp>
+      <p:sp>
+        <p:nvSpPr>
+          <p:cNvPr id="25" name="Shape 23"/>
+          <p:cNvSpPr/>
+          <p:nvPr/>
+        </p:nvSpPr>
+        <p:spPr>
+          <a:xfrm>
             <a:off x="365760" y="3273552"/>
             <a:ext cx="1371600" cy="658368"/>
           </a:xfrm>
@@ -20063,7 +21584,7 @@
       </p:sp>
       <p:sp>
         <p:nvSpPr>
-          <p:cNvPr id="23" name="Text 21"/>
+          <p:cNvPr id="26" name="Text 24"/>
           <p:cNvSpPr/>
           <p:nvPr/>
         </p:nvSpPr>
@@ -20102,7 +21623,7 @@
       </p:sp>
       <p:sp>
         <p:nvSpPr>
-          <p:cNvPr id="24" name="Shape 22"/>
+          <p:cNvPr id="27" name="Shape 25"/>
           <p:cNvSpPr/>
           <p:nvPr/>
         </p:nvSpPr>
@@ -20129,7 +21650,7 @@
       </p:sp>
       <p:sp>
         <p:nvSpPr>
-          <p:cNvPr id="25" name="Shape 23"/>
+          <p:cNvPr id="28" name="Shape 26"/>
           <p:cNvSpPr/>
           <p:nvPr/>
         </p:nvSpPr>
@@ -20156,7 +21677,7 @@
       </p:sp>
       <p:sp>
         <p:nvSpPr>
-          <p:cNvPr id="26" name="Text 24"/>
+          <p:cNvPr id="29" name="Text 27"/>
           <p:cNvSpPr/>
           <p:nvPr/>
         </p:nvSpPr>
@@ -20195,7 +21716,7 @@
       </p:sp>
       <p:sp>
         <p:nvSpPr>
-          <p:cNvPr id="27" name="Text 25"/>
+          <p:cNvPr id="30" name="Text 28"/>
           <p:cNvSpPr/>
           <p:nvPr/>
         </p:nvSpPr>
@@ -20234,7 +21755,7 @@
       </p:sp>
       <p:sp>
         <p:nvSpPr>
-          <p:cNvPr id="28" name="Shape 26"/>
+          <p:cNvPr id="31" name="Shape 29"/>
           <p:cNvSpPr/>
           <p:nvPr/>
         </p:nvSpPr>
@@ -20261,7 +21782,7 @@
       </p:sp>
       <p:sp>
         <p:nvSpPr>
-          <p:cNvPr id="29" name="Text 27"/>
+          <p:cNvPr id="32" name="Text 30"/>
           <p:cNvSpPr/>
           <p:nvPr/>
         </p:nvSpPr>
@@ -20300,7 +21821,7 @@
       </p:sp>
       <p:sp>
         <p:nvSpPr>
-          <p:cNvPr id="30" name="Text 28"/>
+          <p:cNvPr id="33" name="Text 31"/>
           <p:cNvSpPr/>
           <p:nvPr/>
         </p:nvSpPr>
@@ -20339,7 +21860,7 @@
       </p:sp>
       <p:sp>
         <p:nvSpPr>
-          <p:cNvPr id="31" name="Shape 29"/>
+          <p:cNvPr id="34" name="Shape 32"/>
           <p:cNvSpPr/>
           <p:nvPr/>
         </p:nvSpPr>
@@ -20366,7 +21887,7 @@
       </p:sp>
       <p:sp>
         <p:nvSpPr>
-          <p:cNvPr id="32" name="Text 30"/>
+          <p:cNvPr id="35" name="Text 33"/>
           <p:cNvSpPr/>
           <p:nvPr/>
         </p:nvSpPr>
@@ -20397,7 +21918,7 @@
                 <a:ea typeface="Trebuchet MS" pitchFamily="34" charset="-122"/>
                 <a:cs typeface="Trebuchet MS" pitchFamily="34" charset="-120"/>
               </a:rPr>
-              <a:t>tion</a:t>
+              <a:t>tions</a:t>
             </a:r>
             <a:endParaRPr lang="en-US" sz="1400" dirty="0"/>
           </a:p>
@@ -20405,7 +21926,7 @@
       </p:sp>
       <p:sp>
         <p:nvSpPr>
-          <p:cNvPr id="33" name="Shape 31"/>
+          <p:cNvPr id="36" name="Shape 34"/>
           <p:cNvSpPr/>
           <p:nvPr/>
         </p:nvSpPr>
@@ -20432,7 +21953,7 @@
       </p:sp>
       <p:sp>
         <p:nvSpPr>
-          <p:cNvPr id="34" name="Text 32"/>
+          <p:cNvPr id="37" name="Text 35"/>
           <p:cNvSpPr/>
           <p:nvPr/>
         </p:nvSpPr>
@@ -20471,7 +21992,7 @@
       </p:sp>
       <p:sp>
         <p:nvSpPr>
-          <p:cNvPr id="35" name="Shape 33"/>
+          <p:cNvPr id="38" name="Shape 36"/>
           <p:cNvSpPr/>
           <p:nvPr/>
         </p:nvSpPr>
@@ -20498,7 +22019,7 @@
       </p:sp>
       <p:sp>
         <p:nvSpPr>
-          <p:cNvPr id="36" name="Text 34"/>
+          <p:cNvPr id="39" name="Text 37"/>
           <p:cNvSpPr/>
           <p:nvPr/>
         </p:nvSpPr>
@@ -20821,7 +22342,7 @@
                 <a:ea typeface="Calibri" pitchFamily="34" charset="-122"/>
                 <a:cs typeface="Calibri" pitchFamily="34" charset="-120"/>
               </a:rPr>
-              <a:t>Word Labs  •  wordlabs.app  •  Root: 'correct' = right, accurate, free from error</a:t>
+              <a:t>Word Labs  •  wordlabs.app  •  Root: 'correct' = right; accurate</a:t>
             </a:r>
             <a:endParaRPr lang="en-US" sz="800" dirty="0"/>
           </a:p>
@@ -20960,7 +22481,7 @@
                 <a:ea typeface="Trebuchet MS" pitchFamily="34" charset="-122"/>
                 <a:cs typeface="Trebuchet MS" pitchFamily="34" charset="-120"/>
               </a:rPr>
-              <a:t>correction</a:t>
+              <a:t>corrections</a:t>
             </a:r>
             <a:endParaRPr lang="en-US" sz="2800" dirty="0"/>
           </a:p>
@@ -21040,7 +22561,7 @@
         </p:nvSpPr>
         <p:spPr>
           <a:xfrm>
-            <a:off x="2938272" y="2258568"/>
+            <a:off x="2221992" y="2258568"/>
             <a:ext cx="1828800" cy="292608"/>
           </a:xfrm>
           <a:prstGeom prst="rect">
@@ -21074,7 +22595,7 @@
         </p:nvSpPr>
         <p:spPr>
           <a:xfrm>
-            <a:off x="2938272" y="2258568"/>
+            <a:off x="2221992" y="2258568"/>
             <a:ext cx="1828800" cy="292608"/>
           </a:xfrm>
           <a:prstGeom prst="rect">
@@ -21113,7 +22634,7 @@
         </p:nvSpPr>
         <p:spPr>
           <a:xfrm>
-            <a:off x="2938272" y="2569464"/>
+            <a:off x="2221992" y="2569464"/>
             <a:ext cx="1828800" cy="201168"/>
           </a:xfrm>
           <a:prstGeom prst="rect">
@@ -21138,7 +22659,7 @@
                 <a:ea typeface="Calibri" pitchFamily="34" charset="-122"/>
                 <a:cs typeface="Calibri" pitchFamily="34" charset="-120"/>
               </a:rPr>
-              <a:t>right, free from error</a:t>
+              <a:t>right; accurate</a:t>
             </a:r>
             <a:endParaRPr lang="en-US" sz="850" dirty="0"/>
           </a:p>
@@ -21152,7 +22673,7 @@
         </p:nvSpPr>
         <p:spPr>
           <a:xfrm>
-            <a:off x="5803392" y="2258568"/>
+            <a:off x="4370832" y="2258568"/>
             <a:ext cx="1828800" cy="292608"/>
           </a:xfrm>
           <a:prstGeom prst="rect">
@@ -21186,7 +22707,7 @@
         </p:nvSpPr>
         <p:spPr>
           <a:xfrm>
-            <a:off x="5803392" y="2258568"/>
+            <a:off x="4370832" y="2258568"/>
             <a:ext cx="1828800" cy="292608"/>
           </a:xfrm>
           <a:prstGeom prst="rect">
@@ -21225,7 +22746,7 @@
         </p:nvSpPr>
         <p:spPr>
           <a:xfrm>
-            <a:off x="5803392" y="2569464"/>
+            <a:off x="4370832" y="2569464"/>
             <a:ext cx="1828800" cy="201168"/>
           </a:xfrm>
           <a:prstGeom prst="rect">
@@ -21264,6 +22785,118 @@
         </p:nvSpPr>
         <p:spPr>
           <a:xfrm>
+            <a:off x="6519672" y="2258568"/>
+            <a:ext cx="1828800" cy="292608"/>
+          </a:xfrm>
+          <a:prstGeom prst="rect">
+            <a:avLst>
+              <a:gd name="adj" fmla="val 25000"/>
+            </a:avLst>
+          </a:prstGeom>
+          <a:solidFill>
+            <a:srgbClr val="FCE7F3"/>
+          </a:solidFill>
+          <a:ln w="19050">
+            <a:solidFill>
+              <a:srgbClr val="DB2777"/>
+            </a:solidFill>
+            <a:prstDash val="solid"/>
+          </a:ln>
+          <a:effectLst>
+            <a:outerShdw sx="100000" sy="100000" kx="0" ky="0" algn="bl" rotWithShape="0" blurRad="101600" dist="38100" dir="8100000">
+              <a:srgbClr val="000000">
+                <a:alpha val="12000"/>
+              </a:srgbClr>
+            </a:outerShdw>
+          </a:effectLst>
+        </p:spPr>
+      </p:sp>
+      <p:sp>
+        <p:nvSpPr>
+          <p:cNvPr id="23" name="Text 21"/>
+          <p:cNvSpPr/>
+          <p:nvPr/>
+        </p:nvSpPr>
+        <p:spPr>
+          <a:xfrm>
+            <a:off x="6519672" y="2258568"/>
+            <a:ext cx="1828800" cy="292608"/>
+          </a:xfrm>
+          <a:prstGeom prst="rect">
+            <a:avLst/>
+          </a:prstGeom>
+          <a:noFill/>
+          <a:ln/>
+        </p:spPr>
+        <p:txBody>
+          <a:bodyPr wrap="square" lIns="0" tIns="0" rIns="0" bIns="0" rtlCol="0" anchor="ctr"/>
+          <a:lstStyle/>
+          <a:p>
+            <a:pPr algn="ctr" indent="0" marL="0">
+              <a:buNone/>
+            </a:pPr>
+            <a:r>
+              <a:rPr lang="en-US" sz="1300" b="1" dirty="0">
+                <a:solidFill>
+                  <a:srgbClr val="9D174D"/>
+                </a:solidFill>
+                <a:latin typeface="Trebuchet MS" pitchFamily="34" charset="0"/>
+                <a:ea typeface="Trebuchet MS" pitchFamily="34" charset="-122"/>
+                <a:cs typeface="Trebuchet MS" pitchFamily="34" charset="-120"/>
+              </a:rPr>
+              <a:t>s</a:t>
+            </a:r>
+            <a:endParaRPr lang="en-US" sz="1300" dirty="0"/>
+          </a:p>
+        </p:txBody>
+      </p:sp>
+      <p:sp>
+        <p:nvSpPr>
+          <p:cNvPr id="24" name="Text 22"/>
+          <p:cNvSpPr/>
+          <p:nvPr/>
+        </p:nvSpPr>
+        <p:spPr>
+          <a:xfrm>
+            <a:off x="6519672" y="2569464"/>
+            <a:ext cx="1828800" cy="201168"/>
+          </a:xfrm>
+          <a:prstGeom prst="rect">
+            <a:avLst/>
+          </a:prstGeom>
+          <a:noFill/>
+          <a:ln/>
+        </p:spPr>
+        <p:txBody>
+          <a:bodyPr wrap="square" lIns="0" tIns="0" rIns="0" bIns="0" rtlCol="0" anchor="t"/>
+          <a:lstStyle/>
+          <a:p>
+            <a:pPr algn="ctr" indent="0" marL="0">
+              <a:buNone/>
+            </a:pPr>
+            <a:r>
+              <a:rPr lang="en-US" sz="850" dirty="0">
+                <a:solidFill>
+                  <a:srgbClr val="475569"/>
+                </a:solidFill>
+                <a:latin typeface="Calibri" pitchFamily="34" charset="0"/>
+                <a:ea typeface="Calibri" pitchFamily="34" charset="-122"/>
+                <a:cs typeface="Calibri" pitchFamily="34" charset="-120"/>
+              </a:rPr>
+              <a:t>plural or present tense</a:t>
+            </a:r>
+            <a:endParaRPr lang="en-US" sz="850" dirty="0"/>
+          </a:p>
+        </p:txBody>
+      </p:sp>
+      <p:sp>
+        <p:nvSpPr>
+          <p:cNvPr id="25" name="Shape 23"/>
+          <p:cNvSpPr/>
+          <p:nvPr/>
+        </p:nvSpPr>
+        <p:spPr>
+          <a:xfrm>
             <a:off x="365760" y="3273552"/>
             <a:ext cx="1371600" cy="658368"/>
           </a:xfrm>
@@ -21285,7 +22918,7 @@
       </p:sp>
       <p:sp>
         <p:nvSpPr>
-          <p:cNvPr id="23" name="Text 21"/>
+          <p:cNvPr id="26" name="Text 24"/>
           <p:cNvSpPr/>
           <p:nvPr/>
         </p:nvSpPr>
@@ -21324,7 +22957,7 @@
       </p:sp>
       <p:sp>
         <p:nvSpPr>
-          <p:cNvPr id="24" name="Shape 22"/>
+          <p:cNvPr id="27" name="Shape 25"/>
           <p:cNvSpPr/>
           <p:nvPr/>
         </p:nvSpPr>
@@ -21351,7 +22984,7 @@
       </p:sp>
       <p:sp>
         <p:nvSpPr>
-          <p:cNvPr id="25" name="Shape 23"/>
+          <p:cNvPr id="28" name="Shape 26"/>
           <p:cNvSpPr/>
           <p:nvPr/>
         </p:nvSpPr>
@@ -21378,7 +23011,7 @@
       </p:sp>
       <p:sp>
         <p:nvSpPr>
-          <p:cNvPr id="26" name="Text 24"/>
+          <p:cNvPr id="29" name="Text 27"/>
           <p:cNvSpPr/>
           <p:nvPr/>
         </p:nvSpPr>
@@ -21417,7 +23050,7 @@
       </p:sp>
       <p:sp>
         <p:nvSpPr>
-          <p:cNvPr id="27" name="Text 25"/>
+          <p:cNvPr id="30" name="Text 28"/>
           <p:cNvSpPr/>
           <p:nvPr/>
         </p:nvSpPr>
@@ -21456,7 +23089,7 @@
       </p:sp>
       <p:sp>
         <p:nvSpPr>
-          <p:cNvPr id="28" name="Shape 26"/>
+          <p:cNvPr id="31" name="Shape 29"/>
           <p:cNvSpPr/>
           <p:nvPr/>
         </p:nvSpPr>
@@ -21483,7 +23116,7 @@
       </p:sp>
       <p:sp>
         <p:nvSpPr>
-          <p:cNvPr id="29" name="Text 27"/>
+          <p:cNvPr id="32" name="Text 30"/>
           <p:cNvSpPr/>
           <p:nvPr/>
         </p:nvSpPr>
@@ -21522,7 +23155,7 @@
       </p:sp>
       <p:sp>
         <p:nvSpPr>
-          <p:cNvPr id="30" name="Text 28"/>
+          <p:cNvPr id="33" name="Text 31"/>
           <p:cNvSpPr/>
           <p:nvPr/>
         </p:nvSpPr>
@@ -21561,7 +23194,7 @@
       </p:sp>
       <p:sp>
         <p:nvSpPr>
-          <p:cNvPr id="31" name="Shape 29"/>
+          <p:cNvPr id="34" name="Shape 32"/>
           <p:cNvSpPr/>
           <p:nvPr/>
         </p:nvSpPr>
@@ -21588,7 +23221,7 @@
       </p:sp>
       <p:sp>
         <p:nvSpPr>
-          <p:cNvPr id="32" name="Text 30"/>
+          <p:cNvPr id="35" name="Text 33"/>
           <p:cNvSpPr/>
           <p:nvPr/>
         </p:nvSpPr>
@@ -21619,7 +23252,7 @@
                 <a:ea typeface="Trebuchet MS" pitchFamily="34" charset="-122"/>
                 <a:cs typeface="Trebuchet MS" pitchFamily="34" charset="-120"/>
               </a:rPr>
-              <a:t>tion</a:t>
+              <a:t>tions</a:t>
             </a:r>
             <a:endParaRPr lang="en-US" sz="1400" dirty="0"/>
           </a:p>
@@ -21627,7 +23260,7 @@
       </p:sp>
       <p:sp>
         <p:nvSpPr>
-          <p:cNvPr id="33" name="Shape 31"/>
+          <p:cNvPr id="36" name="Shape 34"/>
           <p:cNvSpPr/>
           <p:nvPr/>
         </p:nvSpPr>
@@ -21654,7 +23287,7 @@
       </p:sp>
       <p:sp>
         <p:nvSpPr>
-          <p:cNvPr id="34" name="Text 32"/>
+          <p:cNvPr id="37" name="Text 35"/>
           <p:cNvSpPr/>
           <p:nvPr/>
         </p:nvSpPr>
@@ -21693,18 +23326,18 @@
       </p:sp>
       <p:sp>
         <p:nvSpPr>
-          <p:cNvPr id="35" name="Shape 33"/>
+          <p:cNvPr id="38" name="Shape 36"/>
           <p:cNvSpPr/>
           <p:nvPr/>
         </p:nvSpPr>
         <p:spPr>
           <a:xfrm>
             <a:off x="1874520" y="4096512"/>
-            <a:ext cx="6903720" cy="804672"/>
+            <a:ext cx="6903720" cy="658368"/>
           </a:xfrm>
           <a:prstGeom prst="rect">
             <a:avLst>
-              <a:gd name="adj" fmla="val 6818"/>
+              <a:gd name="adj" fmla="val 8333"/>
             </a:avLst>
           </a:prstGeom>
           <a:solidFill>
@@ -21720,18 +23353,18 @@
       </p:sp>
       <p:sp>
         <p:nvSpPr>
-          <p:cNvPr id="36" name="Shape 34"/>
-          <p:cNvSpPr/>
-          <p:nvPr/>
-        </p:nvSpPr>
-        <p:spPr>
-          <a:xfrm>
-            <a:off x="2023872" y="4169664"/>
-            <a:ext cx="685800" cy="384048"/>
+          <p:cNvPr id="39" name="Shape 37"/>
+          <p:cNvSpPr/>
+          <p:nvPr/>
+        </p:nvSpPr>
+        <p:spPr>
+          <a:xfrm>
+            <a:off x="1951330" y="4169664"/>
+            <a:ext cx="676656" cy="475488"/>
           </a:xfrm>
           <a:prstGeom prst="rect">
             <a:avLst>
-              <a:gd name="adj" fmla="val 9524"/>
+              <a:gd name="adj" fmla="val 7692"/>
             </a:avLst>
           </a:prstGeom>
           <a:solidFill>
@@ -21747,14 +23380,14 @@
       </p:sp>
       <p:sp>
         <p:nvSpPr>
-          <p:cNvPr id="37" name="Text 35"/>
-          <p:cNvSpPr/>
-          <p:nvPr/>
-        </p:nvSpPr>
-        <p:spPr>
-          <a:xfrm>
-            <a:off x="2023872" y="4169664"/>
-            <a:ext cx="685800" cy="384048"/>
+          <p:cNvPr id="40" name="Text 38"/>
+          <p:cNvSpPr/>
+          <p:nvPr/>
+        </p:nvSpPr>
+        <p:spPr>
+          <a:xfrm>
+            <a:off x="1951330" y="4169664"/>
+            <a:ext cx="676656" cy="475488"/>
           </a:xfrm>
           <a:prstGeom prst="rect">
             <a:avLst/>
@@ -21786,57 +23419,18 @@
       </p:sp>
       <p:sp>
         <p:nvSpPr>
-          <p:cNvPr id="38" name="Text 36"/>
-          <p:cNvSpPr/>
-          <p:nvPr/>
-        </p:nvSpPr>
-        <p:spPr>
-          <a:xfrm>
-            <a:off x="2023872" y="4572000"/>
-            <a:ext cx="685800" cy="219456"/>
-          </a:xfrm>
-          <a:prstGeom prst="rect">
-            <a:avLst/>
-          </a:prstGeom>
-          <a:noFill/>
-          <a:ln/>
-        </p:spPr>
-        <p:txBody>
-          <a:bodyPr wrap="square" lIns="0" tIns="0" rIns="0" bIns="0" rtlCol="0" anchor="t"/>
-          <a:lstStyle/>
-          <a:p>
-            <a:pPr algn="ctr" indent="0" marL="0">
-              <a:buNone/>
-            </a:pPr>
-            <a:r>
-              <a:rPr lang="en-US" sz="750" i="1" dirty="0">
-                <a:solidFill>
-                  <a:srgbClr val="94A3B8"/>
-                </a:solidFill>
-                <a:latin typeface="Calibri" pitchFamily="34" charset="0"/>
-                <a:ea typeface="Calibri" pitchFamily="34" charset="-122"/>
-                <a:cs typeface="Calibri" pitchFamily="34" charset="-120"/>
-              </a:rPr>
-              <a:t>/k/</a:t>
-            </a:r>
-            <a:endParaRPr lang="en-US" sz="750" dirty="0"/>
-          </a:p>
-        </p:txBody>
-      </p:sp>
-      <p:sp>
-        <p:nvSpPr>
-          <p:cNvPr id="39" name="Shape 37"/>
-          <p:cNvSpPr/>
-          <p:nvPr/>
-        </p:nvSpPr>
-        <p:spPr>
-          <a:xfrm>
-            <a:off x="2831592" y="4169664"/>
-            <a:ext cx="685800" cy="384048"/>
+          <p:cNvPr id="41" name="Shape 39"/>
+          <p:cNvSpPr/>
+          <p:nvPr/>
+        </p:nvSpPr>
+        <p:spPr>
+          <a:xfrm>
+            <a:off x="2677363" y="4169664"/>
+            <a:ext cx="676656" cy="475488"/>
           </a:xfrm>
           <a:prstGeom prst="rect">
             <a:avLst>
-              <a:gd name="adj" fmla="val 9524"/>
+              <a:gd name="adj" fmla="val 7692"/>
             </a:avLst>
           </a:prstGeom>
           <a:solidFill>
@@ -21852,14 +23446,14 @@
       </p:sp>
       <p:sp>
         <p:nvSpPr>
-          <p:cNvPr id="40" name="Text 38"/>
-          <p:cNvSpPr/>
-          <p:nvPr/>
-        </p:nvSpPr>
-        <p:spPr>
-          <a:xfrm>
-            <a:off x="2831592" y="4169664"/>
-            <a:ext cx="685800" cy="384048"/>
+          <p:cNvPr id="42" name="Text 40"/>
+          <p:cNvSpPr/>
+          <p:nvPr/>
+        </p:nvSpPr>
+        <p:spPr>
+          <a:xfrm>
+            <a:off x="2677363" y="4169664"/>
+            <a:ext cx="676656" cy="475488"/>
           </a:xfrm>
           <a:prstGeom prst="rect">
             <a:avLst/>
@@ -21883,7 +23477,7 @@
                 <a:ea typeface="Trebuchet MS" pitchFamily="34" charset="-122"/>
                 <a:cs typeface="Trebuchet MS" pitchFamily="34" charset="-120"/>
               </a:rPr>
-              <a:t>or</a:t>
+              <a:t>o</a:t>
             </a:r>
             <a:endParaRPr lang="en-US" sz="900" dirty="0"/>
           </a:p>
@@ -21891,18 +23485,18 @@
       </p:sp>
       <p:sp>
         <p:nvSpPr>
-          <p:cNvPr id="41" name="Shape 39"/>
-          <p:cNvSpPr/>
-          <p:nvPr/>
-        </p:nvSpPr>
-        <p:spPr>
-          <a:xfrm>
-            <a:off x="3639312" y="4169664"/>
-            <a:ext cx="685800" cy="384048"/>
+          <p:cNvPr id="43" name="Shape 41"/>
+          <p:cNvSpPr/>
+          <p:nvPr/>
+        </p:nvSpPr>
+        <p:spPr>
+          <a:xfrm>
+            <a:off x="3403397" y="4169664"/>
+            <a:ext cx="676656" cy="475488"/>
           </a:xfrm>
           <a:prstGeom prst="rect">
             <a:avLst>
-              <a:gd name="adj" fmla="val 9524"/>
+              <a:gd name="adj" fmla="val 7692"/>
             </a:avLst>
           </a:prstGeom>
           <a:solidFill>
@@ -21918,14 +23512,14 @@
       </p:sp>
       <p:sp>
         <p:nvSpPr>
-          <p:cNvPr id="42" name="Text 40"/>
-          <p:cNvSpPr/>
-          <p:nvPr/>
-        </p:nvSpPr>
-        <p:spPr>
-          <a:xfrm>
-            <a:off x="3639312" y="4169664"/>
-            <a:ext cx="685800" cy="384048"/>
+          <p:cNvPr id="44" name="Text 42"/>
+          <p:cNvSpPr/>
+          <p:nvPr/>
+        </p:nvSpPr>
+        <p:spPr>
+          <a:xfrm>
+            <a:off x="3403397" y="4169664"/>
+            <a:ext cx="676656" cy="475488"/>
           </a:xfrm>
           <a:prstGeom prst="rect">
             <a:avLst/>
@@ -21949,7 +23543,7 @@
                 <a:ea typeface="Trebuchet MS" pitchFamily="34" charset="-122"/>
                 <a:cs typeface="Trebuchet MS" pitchFamily="34" charset="-120"/>
               </a:rPr>
-              <a:t>r</a:t>
+              <a:t>rr</a:t>
             </a:r>
             <a:endParaRPr lang="en-US" sz="900" dirty="0"/>
           </a:p>
@@ -21957,18 +23551,18 @@
       </p:sp>
       <p:sp>
         <p:nvSpPr>
-          <p:cNvPr id="43" name="Shape 41"/>
-          <p:cNvSpPr/>
-          <p:nvPr/>
-        </p:nvSpPr>
-        <p:spPr>
-          <a:xfrm>
-            <a:off x="4447032" y="4169664"/>
-            <a:ext cx="685800" cy="384048"/>
+          <p:cNvPr id="45" name="Shape 43"/>
+          <p:cNvSpPr/>
+          <p:nvPr/>
+        </p:nvSpPr>
+        <p:spPr>
+          <a:xfrm>
+            <a:off x="4129430" y="4169664"/>
+            <a:ext cx="676656" cy="475488"/>
           </a:xfrm>
           <a:prstGeom prst="rect">
             <a:avLst>
-              <a:gd name="adj" fmla="val 9524"/>
+              <a:gd name="adj" fmla="val 7692"/>
             </a:avLst>
           </a:prstGeom>
           <a:solidFill>
@@ -21984,14 +23578,14 @@
       </p:sp>
       <p:sp>
         <p:nvSpPr>
-          <p:cNvPr id="44" name="Text 42"/>
-          <p:cNvSpPr/>
-          <p:nvPr/>
-        </p:nvSpPr>
-        <p:spPr>
-          <a:xfrm>
-            <a:off x="4447032" y="4169664"/>
-            <a:ext cx="685800" cy="384048"/>
+          <p:cNvPr id="46" name="Text 44"/>
+          <p:cNvSpPr/>
+          <p:nvPr/>
+        </p:nvSpPr>
+        <p:spPr>
+          <a:xfrm>
+            <a:off x="4129430" y="4169664"/>
+            <a:ext cx="676656" cy="475488"/>
           </a:xfrm>
           <a:prstGeom prst="rect">
             <a:avLst/>
@@ -22023,18 +23617,18 @@
       </p:sp>
       <p:sp>
         <p:nvSpPr>
-          <p:cNvPr id="45" name="Shape 43"/>
-          <p:cNvSpPr/>
-          <p:nvPr/>
-        </p:nvSpPr>
-        <p:spPr>
-          <a:xfrm>
-            <a:off x="5254752" y="4169664"/>
-            <a:ext cx="685800" cy="384048"/>
+          <p:cNvPr id="47" name="Shape 45"/>
+          <p:cNvSpPr/>
+          <p:nvPr/>
+        </p:nvSpPr>
+        <p:spPr>
+          <a:xfrm>
+            <a:off x="4855464" y="4169664"/>
+            <a:ext cx="676656" cy="475488"/>
           </a:xfrm>
           <a:prstGeom prst="rect">
             <a:avLst>
-              <a:gd name="adj" fmla="val 9524"/>
+              <a:gd name="adj" fmla="val 7692"/>
             </a:avLst>
           </a:prstGeom>
           <a:solidFill>
@@ -22050,14 +23644,14 @@
       </p:sp>
       <p:sp>
         <p:nvSpPr>
-          <p:cNvPr id="46" name="Text 44"/>
-          <p:cNvSpPr/>
-          <p:nvPr/>
-        </p:nvSpPr>
-        <p:spPr>
-          <a:xfrm>
-            <a:off x="5254752" y="4169664"/>
-            <a:ext cx="685800" cy="384048"/>
+          <p:cNvPr id="48" name="Text 46"/>
+          <p:cNvSpPr/>
+          <p:nvPr/>
+        </p:nvSpPr>
+        <p:spPr>
+          <a:xfrm>
+            <a:off x="4855464" y="4169664"/>
+            <a:ext cx="676656" cy="475488"/>
           </a:xfrm>
           <a:prstGeom prst="rect">
             <a:avLst/>
@@ -22089,57 +23683,18 @@
       </p:sp>
       <p:sp>
         <p:nvSpPr>
-          <p:cNvPr id="47" name="Text 45"/>
-          <p:cNvSpPr/>
-          <p:nvPr/>
-        </p:nvSpPr>
-        <p:spPr>
-          <a:xfrm>
-            <a:off x="5254752" y="4572000"/>
-            <a:ext cx="685800" cy="219456"/>
-          </a:xfrm>
-          <a:prstGeom prst="rect">
-            <a:avLst/>
-          </a:prstGeom>
-          <a:noFill/>
-          <a:ln/>
-        </p:spPr>
-        <p:txBody>
-          <a:bodyPr wrap="square" lIns="0" tIns="0" rIns="0" bIns="0" rtlCol="0" anchor="t"/>
-          <a:lstStyle/>
-          <a:p>
-            <a:pPr algn="ctr" indent="0" marL="0">
-              <a:buNone/>
-            </a:pPr>
-            <a:r>
-              <a:rPr lang="en-US" sz="750" i="1" dirty="0">
-                <a:solidFill>
-                  <a:srgbClr val="94A3B8"/>
-                </a:solidFill>
-                <a:latin typeface="Calibri" pitchFamily="34" charset="0"/>
-                <a:ea typeface="Calibri" pitchFamily="34" charset="-122"/>
-                <a:cs typeface="Calibri" pitchFamily="34" charset="-120"/>
-              </a:rPr>
-              <a:t>/k/</a:t>
-            </a:r>
-            <a:endParaRPr lang="en-US" sz="750" dirty="0"/>
-          </a:p>
-        </p:txBody>
-      </p:sp>
-      <p:sp>
-        <p:nvSpPr>
-          <p:cNvPr id="48" name="Shape 46"/>
-          <p:cNvSpPr/>
-          <p:nvPr/>
-        </p:nvSpPr>
-        <p:spPr>
-          <a:xfrm>
-            <a:off x="6062472" y="4169664"/>
-            <a:ext cx="685800" cy="384048"/>
+          <p:cNvPr id="49" name="Shape 47"/>
+          <p:cNvSpPr/>
+          <p:nvPr/>
+        </p:nvSpPr>
+        <p:spPr>
+          <a:xfrm>
+            <a:off x="5581498" y="4169664"/>
+            <a:ext cx="676656" cy="475488"/>
           </a:xfrm>
           <a:prstGeom prst="rect">
             <a:avLst>
-              <a:gd name="adj" fmla="val 9524"/>
+              <a:gd name="adj" fmla="val 7692"/>
             </a:avLst>
           </a:prstGeom>
           <a:solidFill>
@@ -22155,14 +23710,14 @@
       </p:sp>
       <p:sp>
         <p:nvSpPr>
-          <p:cNvPr id="49" name="Text 47"/>
-          <p:cNvSpPr/>
-          <p:nvPr/>
-        </p:nvSpPr>
-        <p:spPr>
-          <a:xfrm>
-            <a:off x="6062472" y="4169664"/>
-            <a:ext cx="685800" cy="384048"/>
+          <p:cNvPr id="50" name="Text 48"/>
+          <p:cNvSpPr/>
+          <p:nvPr/>
+        </p:nvSpPr>
+        <p:spPr>
+          <a:xfrm>
+            <a:off x="5581498" y="4169664"/>
+            <a:ext cx="676656" cy="475488"/>
           </a:xfrm>
           <a:prstGeom prst="rect">
             <a:avLst/>
@@ -22186,7 +23741,7 @@
                 <a:ea typeface="Trebuchet MS" pitchFamily="34" charset="-122"/>
                 <a:cs typeface="Trebuchet MS" pitchFamily="34" charset="-120"/>
               </a:rPr>
-              <a:t>t</a:t>
+              <a:t>ti</a:t>
             </a:r>
             <a:endParaRPr lang="en-US" sz="900" dirty="0"/>
           </a:p>
@@ -22194,57 +23749,18 @@
       </p:sp>
       <p:sp>
         <p:nvSpPr>
-          <p:cNvPr id="50" name="Text 48"/>
-          <p:cNvSpPr/>
-          <p:nvPr/>
-        </p:nvSpPr>
-        <p:spPr>
-          <a:xfrm>
-            <a:off x="6062472" y="4572000"/>
-            <a:ext cx="685800" cy="219456"/>
-          </a:xfrm>
-          <a:prstGeom prst="rect">
-            <a:avLst/>
-          </a:prstGeom>
-          <a:noFill/>
-          <a:ln/>
-        </p:spPr>
-        <p:txBody>
-          <a:bodyPr wrap="square" lIns="0" tIns="0" rIns="0" bIns="0" rtlCol="0" anchor="t"/>
-          <a:lstStyle/>
-          <a:p>
-            <a:pPr algn="ctr" indent="0" marL="0">
-              <a:buNone/>
-            </a:pPr>
-            <a:r>
-              <a:rPr lang="en-US" sz="750" i="1" dirty="0">
-                <a:solidFill>
-                  <a:srgbClr val="94A3B8"/>
-                </a:solidFill>
-                <a:latin typeface="Calibri" pitchFamily="34" charset="0"/>
-                <a:ea typeface="Calibri" pitchFamily="34" charset="-122"/>
-                <a:cs typeface="Calibri" pitchFamily="34" charset="-120"/>
-              </a:rPr>
-              <a:t>/sh/</a:t>
-            </a:r>
-            <a:endParaRPr lang="en-US" sz="750" dirty="0"/>
-          </a:p>
-        </p:txBody>
-      </p:sp>
-      <p:sp>
-        <p:nvSpPr>
           <p:cNvPr id="51" name="Shape 49"/>
           <p:cNvSpPr/>
           <p:nvPr/>
         </p:nvSpPr>
         <p:spPr>
           <a:xfrm>
-            <a:off x="6870192" y="4169664"/>
-            <a:ext cx="685800" cy="384048"/>
+            <a:off x="6307531" y="4169664"/>
+            <a:ext cx="676656" cy="475488"/>
           </a:xfrm>
           <a:prstGeom prst="rect">
             <a:avLst>
-              <a:gd name="adj" fmla="val 9524"/>
+              <a:gd name="adj" fmla="val 7692"/>
             </a:avLst>
           </a:prstGeom>
           <a:solidFill>
@@ -22266,8 +23782,8 @@
         </p:nvSpPr>
         <p:spPr>
           <a:xfrm>
-            <a:off x="6870192" y="4169664"/>
-            <a:ext cx="685800" cy="384048"/>
+            <a:off x="6307531" y="4169664"/>
+            <a:ext cx="676656" cy="475488"/>
           </a:xfrm>
           <a:prstGeom prst="rect">
             <a:avLst/>
@@ -22291,7 +23807,7 @@
                 <a:ea typeface="Trebuchet MS" pitchFamily="34" charset="-122"/>
                 <a:cs typeface="Trebuchet MS" pitchFamily="34" charset="-120"/>
               </a:rPr>
-              <a:t>io</a:t>
+              <a:t>o</a:t>
             </a:r>
             <a:endParaRPr lang="en-US" sz="900" dirty="0"/>
           </a:p>
@@ -22305,12 +23821,12 @@
         </p:nvSpPr>
         <p:spPr>
           <a:xfrm>
-            <a:off x="7677912" y="4169664"/>
-            <a:ext cx="685800" cy="384048"/>
+            <a:off x="7033565" y="4169664"/>
+            <a:ext cx="676656" cy="475488"/>
           </a:xfrm>
           <a:prstGeom prst="rect">
             <a:avLst>
-              <a:gd name="adj" fmla="val 9524"/>
+              <a:gd name="adj" fmla="val 7692"/>
             </a:avLst>
           </a:prstGeom>
           <a:solidFill>
@@ -22332,8 +23848,8 @@
         </p:nvSpPr>
         <p:spPr>
           <a:xfrm>
-            <a:off x="7677912" y="4169664"/>
-            <a:ext cx="685800" cy="384048"/>
+            <a:off x="7033565" y="4169664"/>
+            <a:ext cx="676656" cy="475488"/>
           </a:xfrm>
           <a:prstGeom prst="rect">
             <a:avLst/>
@@ -22358,6 +23874,72 @@
                 <a:cs typeface="Trebuchet MS" pitchFamily="34" charset="-120"/>
               </a:rPr>
               <a:t>n</a:t>
+            </a:r>
+            <a:endParaRPr lang="en-US" sz="900" dirty="0"/>
+          </a:p>
+        </p:txBody>
+      </p:sp>
+      <p:sp>
+        <p:nvSpPr>
+          <p:cNvPr id="55" name="Shape 53"/>
+          <p:cNvSpPr/>
+          <p:nvPr/>
+        </p:nvSpPr>
+        <p:spPr>
+          <a:xfrm>
+            <a:off x="7759598" y="4169664"/>
+            <a:ext cx="676656" cy="475488"/>
+          </a:xfrm>
+          <a:prstGeom prst="rect">
+            <a:avLst>
+              <a:gd name="adj" fmla="val 7692"/>
+            </a:avLst>
+          </a:prstGeom>
+          <a:solidFill>
+            <a:srgbClr val="FFFFFF"/>
+          </a:solidFill>
+          <a:ln w="12700">
+            <a:solidFill>
+              <a:srgbClr val="DB2777"/>
+            </a:solidFill>
+            <a:prstDash val="solid"/>
+          </a:ln>
+        </p:spPr>
+      </p:sp>
+      <p:sp>
+        <p:nvSpPr>
+          <p:cNvPr id="56" name="Text 54"/>
+          <p:cNvSpPr/>
+          <p:nvPr/>
+        </p:nvSpPr>
+        <p:spPr>
+          <a:xfrm>
+            <a:off x="7759598" y="4169664"/>
+            <a:ext cx="676656" cy="475488"/>
+          </a:xfrm>
+          <a:prstGeom prst="rect">
+            <a:avLst/>
+          </a:prstGeom>
+          <a:noFill/>
+          <a:ln/>
+        </p:spPr>
+        <p:txBody>
+          <a:bodyPr wrap="square" lIns="0" tIns="0" rIns="0" bIns="0" rtlCol="0" anchor="ctr"/>
+          <a:lstStyle/>
+          <a:p>
+            <a:pPr algn="ctr" indent="0" marL="0">
+              <a:buNone/>
+            </a:pPr>
+            <a:r>
+              <a:rPr lang="en-US" sz="900" b="1" dirty="0">
+                <a:solidFill>
+                  <a:srgbClr val="9D174D"/>
+                </a:solidFill>
+                <a:latin typeface="Trebuchet MS" pitchFamily="34" charset="0"/>
+                <a:ea typeface="Trebuchet MS" pitchFamily="34" charset="-122"/>
+                <a:cs typeface="Trebuchet MS" pitchFamily="34" charset="-120"/>
+              </a:rPr>
+              <a:t>s</a:t>
             </a:r>
             <a:endParaRPr lang="en-US" sz="900" dirty="0"/>
           </a:p>
@@ -22649,7 +24231,7 @@
                 <a:ea typeface="Calibri" pitchFamily="34" charset="-122"/>
                 <a:cs typeface="Calibri" pitchFamily="34" charset="-120"/>
               </a:rPr>
-              <a:t>Word Labs  •  wordlabs.app  •  Root: 'correct' = right, accurate, free from error</a:t>
+              <a:t>Word Labs  •  wordlabs.app  •  Root: 'correct' = right; accurate</a:t>
             </a:r>
             <a:endParaRPr lang="en-US" sz="800" dirty="0"/>
           </a:p>
@@ -22788,7 +24370,7 @@
                 <a:ea typeface="Trebuchet MS" pitchFamily="34" charset="-122"/>
                 <a:cs typeface="Trebuchet MS" pitchFamily="34" charset="-120"/>
               </a:rPr>
-              <a:t>incorrectness</a:t>
+              <a:t>correctional</a:t>
             </a:r>
             <a:endParaRPr lang="en-US" sz="2800" dirty="0"/>
           </a:p>
@@ -23476,7 +25058,7 @@
                 <a:ea typeface="Calibri" pitchFamily="34" charset="-122"/>
                 <a:cs typeface="Calibri" pitchFamily="34" charset="-120"/>
               </a:rPr>
-              <a:t>Word Labs  •  wordlabs.app  •  Root: 'correct' = right, accurate, free from error</a:t>
+              <a:t>Word Labs  •  wordlabs.app  •  Root: 'correct' = right; accurate</a:t>
             </a:r>
             <a:endParaRPr lang="en-US" sz="800" dirty="0"/>
           </a:p>
@@ -23615,7 +25197,7 @@
                 <a:ea typeface="Trebuchet MS" pitchFamily="34" charset="-122"/>
                 <a:cs typeface="Trebuchet MS" pitchFamily="34" charset="-120"/>
               </a:rPr>
-              <a:t>incorrectness</a:t>
+              <a:t>correctional</a:t>
             </a:r>
             <a:endParaRPr lang="en-US" sz="2800" dirty="0"/>
           </a:p>
@@ -23704,11 +25286,11 @@
             </a:avLst>
           </a:prstGeom>
           <a:solidFill>
-            <a:srgbClr val="DDD6FE"/>
+            <a:srgbClr val="CCFBF1"/>
           </a:solidFill>
           <a:ln w="19050">
             <a:solidFill>
-              <a:srgbClr val="7C3AED"/>
+              <a:srgbClr val="0D9488"/>
             </a:solidFill>
             <a:prstDash val="solid"/>
           </a:ln>
@@ -23748,13 +25330,13 @@
             <a:r>
               <a:rPr lang="en-US" sz="1300" b="1" dirty="0">
                 <a:solidFill>
-                  <a:srgbClr val="4C1D95"/>
+                  <a:srgbClr val="0F766E"/>
                 </a:solidFill>
                 <a:latin typeface="Trebuchet MS" pitchFamily="34" charset="0"/>
                 <a:ea typeface="Trebuchet MS" pitchFamily="34" charset="-122"/>
                 <a:cs typeface="Trebuchet MS" pitchFamily="34" charset="-120"/>
               </a:rPr>
-              <a:t>in</a:t>
+              <a:t>correct</a:t>
             </a:r>
             <a:endParaRPr lang="en-US" sz="1300" dirty="0"/>
           </a:p>
@@ -23793,7 +25375,7 @@
                 <a:ea typeface="Calibri" pitchFamily="34" charset="-122"/>
                 <a:cs typeface="Calibri" pitchFamily="34" charset="-120"/>
               </a:rPr>
-              <a:t>not</a:t>
+              <a:t>right; accurate</a:t>
             </a:r>
             <a:endParaRPr lang="en-US" sz="850" dirty="0"/>
           </a:p>
@@ -23816,11 +25398,11 @@
             </a:avLst>
           </a:prstGeom>
           <a:solidFill>
-            <a:srgbClr val="CCFBF1"/>
+            <a:srgbClr val="FCE7F3"/>
           </a:solidFill>
           <a:ln w="19050">
             <a:solidFill>
-              <a:srgbClr val="0D9488"/>
+              <a:srgbClr val="DB2777"/>
             </a:solidFill>
             <a:prstDash val="solid"/>
           </a:ln>
@@ -23860,13 +25442,13 @@
             <a:r>
               <a:rPr lang="en-US" sz="1300" b="1" dirty="0">
                 <a:solidFill>
-                  <a:srgbClr val="0F766E"/>
+                  <a:srgbClr val="9D174D"/>
                 </a:solidFill>
                 <a:latin typeface="Trebuchet MS" pitchFamily="34" charset="0"/>
                 <a:ea typeface="Trebuchet MS" pitchFamily="34" charset="-122"/>
                 <a:cs typeface="Trebuchet MS" pitchFamily="34" charset="-120"/>
               </a:rPr>
-              <a:t>correct</a:t>
+              <a:t>ion</a:t>
             </a:r>
             <a:endParaRPr lang="en-US" sz="1300" dirty="0"/>
           </a:p>
@@ -23905,7 +25487,7 @@
                 <a:ea typeface="Calibri" pitchFamily="34" charset="-122"/>
                 <a:cs typeface="Calibri" pitchFamily="34" charset="-120"/>
               </a:rPr>
-              <a:t>right, free from error</a:t>
+              <a:t>act or result of</a:t>
             </a:r>
             <a:endParaRPr lang="en-US" sz="850" dirty="0"/>
           </a:p>
@@ -23978,7 +25560,7 @@
                 <a:ea typeface="Trebuchet MS" pitchFamily="34" charset="-122"/>
                 <a:cs typeface="Trebuchet MS" pitchFamily="34" charset="-120"/>
               </a:rPr>
-              <a:t>ness</a:t>
+              <a:t>al</a:t>
             </a:r>
             <a:endParaRPr lang="en-US" sz="1300" dirty="0"/>
           </a:p>
@@ -24017,7 +25599,7 @@
                 <a:ea typeface="Calibri" pitchFamily="34" charset="-122"/>
                 <a:cs typeface="Calibri" pitchFamily="34" charset="-120"/>
               </a:rPr>
-              <a:t>state or quality of</a:t>
+              <a:t>related to</a:t>
             </a:r>
             <a:endParaRPr lang="en-US" sz="850" dirty="0"/>
           </a:p>
@@ -24573,7 +26155,7 @@
                 <a:ea typeface="Calibri" pitchFamily="34" charset="-122"/>
                 <a:cs typeface="Calibri" pitchFamily="34" charset="-120"/>
               </a:rPr>
-              <a:t>Word Labs  •  wordlabs.app  •  Root: 'correct' = right, accurate, free from error</a:t>
+              <a:t>Word Labs  •  wordlabs.app  •  Root: 'correct' = right; accurate</a:t>
             </a:r>
             <a:endParaRPr lang="en-US" sz="800" dirty="0"/>
           </a:p>
@@ -24646,7 +26228,7 @@
                 <a:ea typeface="Trebuchet MS" pitchFamily="34" charset="-122"/>
                 <a:cs typeface="Trebuchet MS" pitchFamily="34" charset="-120"/>
               </a:rPr>
-              <a:t>We are learning that the root 'correct' means 'right, accurate, free from error'.</a:t>
+              <a:t>We are learning that the root 'correct' means 'right; accurate'.</a:t>
             </a:r>
             <a:endParaRPr lang="en-US" sz="2000" dirty="0"/>
           </a:p>
@@ -25292,7 +26874,7 @@
                 <a:ea typeface="Calibri" pitchFamily="34" charset="-122"/>
                 <a:cs typeface="Calibri" pitchFamily="34" charset="-120"/>
               </a:rPr>
-              <a:t>Word Labs  •  wordlabs.app  •  Root: 'correct' = right, accurate, free from error</a:t>
+              <a:t>Word Labs  •  wordlabs.app  •  Root: 'correct' = right; accurate</a:t>
             </a:r>
             <a:endParaRPr lang="en-US" sz="800" dirty="0"/>
           </a:p>
@@ -25431,7 +27013,7 @@
                 <a:ea typeface="Trebuchet MS" pitchFamily="34" charset="-122"/>
                 <a:cs typeface="Trebuchet MS" pitchFamily="34" charset="-120"/>
               </a:rPr>
-              <a:t>incorrectness</a:t>
+              <a:t>correctional</a:t>
             </a:r>
             <a:endParaRPr lang="en-US" sz="2800" dirty="0"/>
           </a:p>
@@ -25520,11 +27102,11 @@
             </a:avLst>
           </a:prstGeom>
           <a:solidFill>
-            <a:srgbClr val="DDD6FE"/>
+            <a:srgbClr val="CCFBF1"/>
           </a:solidFill>
           <a:ln w="19050">
             <a:solidFill>
-              <a:srgbClr val="7C3AED"/>
+              <a:srgbClr val="0D9488"/>
             </a:solidFill>
             <a:prstDash val="solid"/>
           </a:ln>
@@ -25564,13 +27146,13 @@
             <a:r>
               <a:rPr lang="en-US" sz="1300" b="1" dirty="0">
                 <a:solidFill>
-                  <a:srgbClr val="4C1D95"/>
+                  <a:srgbClr val="0F766E"/>
                 </a:solidFill>
                 <a:latin typeface="Trebuchet MS" pitchFamily="34" charset="0"/>
                 <a:ea typeface="Trebuchet MS" pitchFamily="34" charset="-122"/>
                 <a:cs typeface="Trebuchet MS" pitchFamily="34" charset="-120"/>
               </a:rPr>
-              <a:t>in</a:t>
+              <a:t>correct</a:t>
             </a:r>
             <a:endParaRPr lang="en-US" sz="1300" dirty="0"/>
           </a:p>
@@ -25609,7 +27191,7 @@
                 <a:ea typeface="Calibri" pitchFamily="34" charset="-122"/>
                 <a:cs typeface="Calibri" pitchFamily="34" charset="-120"/>
               </a:rPr>
-              <a:t>not</a:t>
+              <a:t>right; accurate</a:t>
             </a:r>
             <a:endParaRPr lang="en-US" sz="850" dirty="0"/>
           </a:p>
@@ -25632,11 +27214,11 @@
             </a:avLst>
           </a:prstGeom>
           <a:solidFill>
-            <a:srgbClr val="CCFBF1"/>
+            <a:srgbClr val="FCE7F3"/>
           </a:solidFill>
           <a:ln w="19050">
             <a:solidFill>
-              <a:srgbClr val="0D9488"/>
+              <a:srgbClr val="DB2777"/>
             </a:solidFill>
             <a:prstDash val="solid"/>
           </a:ln>
@@ -25676,13 +27258,13 @@
             <a:r>
               <a:rPr lang="en-US" sz="1300" b="1" dirty="0">
                 <a:solidFill>
-                  <a:srgbClr val="0F766E"/>
+                  <a:srgbClr val="9D174D"/>
                 </a:solidFill>
                 <a:latin typeface="Trebuchet MS" pitchFamily="34" charset="0"/>
                 <a:ea typeface="Trebuchet MS" pitchFamily="34" charset="-122"/>
                 <a:cs typeface="Trebuchet MS" pitchFamily="34" charset="-120"/>
               </a:rPr>
-              <a:t>correct</a:t>
+              <a:t>ion</a:t>
             </a:r>
             <a:endParaRPr lang="en-US" sz="1300" dirty="0"/>
           </a:p>
@@ -25721,7 +27303,7 @@
                 <a:ea typeface="Calibri" pitchFamily="34" charset="-122"/>
                 <a:cs typeface="Calibri" pitchFamily="34" charset="-120"/>
               </a:rPr>
-              <a:t>right, free from error</a:t>
+              <a:t>act or result of</a:t>
             </a:r>
             <a:endParaRPr lang="en-US" sz="850" dirty="0"/>
           </a:p>
@@ -25794,7 +27376,7 @@
                 <a:ea typeface="Trebuchet MS" pitchFamily="34" charset="-122"/>
                 <a:cs typeface="Trebuchet MS" pitchFamily="34" charset="-120"/>
               </a:rPr>
-              <a:t>ness</a:t>
+              <a:t>al</a:t>
             </a:r>
             <a:endParaRPr lang="en-US" sz="1300" dirty="0"/>
           </a:p>
@@ -25833,7 +27415,7 @@
                 <a:ea typeface="Calibri" pitchFamily="34" charset="-122"/>
                 <a:cs typeface="Calibri" pitchFamily="34" charset="-120"/>
               </a:rPr>
-              <a:t>state or quality of</a:t>
+              <a:t>related to</a:t>
             </a:r>
             <a:endParaRPr lang="en-US" sz="850" dirty="0"/>
           </a:p>
@@ -25992,7 +27574,7 @@
                 <a:ea typeface="Trebuchet MS" pitchFamily="34" charset="-122"/>
                 <a:cs typeface="Trebuchet MS" pitchFamily="34" charset="-120"/>
               </a:rPr>
-              <a:t>in</a:t>
+              <a:t>cor</a:t>
             </a:r>
             <a:endParaRPr lang="en-US" sz="1400" dirty="0"/>
           </a:p>
@@ -26097,7 +27679,7 @@
                 <a:ea typeface="Trebuchet MS" pitchFamily="34" charset="-122"/>
                 <a:cs typeface="Trebuchet MS" pitchFamily="34" charset="-120"/>
               </a:rPr>
-              <a:t>cor</a:t>
+              <a:t>rec</a:t>
             </a:r>
             <a:endParaRPr lang="en-US" sz="1400" dirty="0"/>
           </a:p>
@@ -26202,7 +27784,7 @@
                 <a:ea typeface="Trebuchet MS" pitchFamily="34" charset="-122"/>
                 <a:cs typeface="Trebuchet MS" pitchFamily="34" charset="-120"/>
               </a:rPr>
-              <a:t>rect</a:t>
+              <a:t>tion</a:t>
             </a:r>
             <a:endParaRPr lang="en-US" sz="1400" dirty="0"/>
           </a:p>
@@ -26307,7 +27889,7 @@
                 <a:ea typeface="Trebuchet MS" pitchFamily="34" charset="-122"/>
                 <a:cs typeface="Trebuchet MS" pitchFamily="34" charset="-120"/>
               </a:rPr>
-              <a:t>ness</a:t>
+              <a:t>al</a:t>
             </a:r>
             <a:endParaRPr lang="en-US" sz="1400" dirty="0"/>
           </a:p>
@@ -26731,7 +28313,7 @@
                 <a:ea typeface="Calibri" pitchFamily="34" charset="-122"/>
                 <a:cs typeface="Calibri" pitchFamily="34" charset="-120"/>
               </a:rPr>
-              <a:t>Word Labs  •  wordlabs.app  •  Root: 'correct' = right, accurate, free from error</a:t>
+              <a:t>Word Labs  •  wordlabs.app  •  Root: 'correct' = right; accurate</a:t>
             </a:r>
             <a:endParaRPr lang="en-US" sz="800" dirty="0"/>
           </a:p>
@@ -26870,7 +28452,7 @@
                 <a:ea typeface="Trebuchet MS" pitchFamily="34" charset="-122"/>
                 <a:cs typeface="Trebuchet MS" pitchFamily="34" charset="-120"/>
               </a:rPr>
-              <a:t>incorrectness</a:t>
+              <a:t>correctional</a:t>
             </a:r>
             <a:endParaRPr lang="en-US" sz="2800" dirty="0"/>
           </a:p>
@@ -26959,11 +28541,11 @@
             </a:avLst>
           </a:prstGeom>
           <a:solidFill>
-            <a:srgbClr val="DDD6FE"/>
+            <a:srgbClr val="CCFBF1"/>
           </a:solidFill>
           <a:ln w="19050">
             <a:solidFill>
-              <a:srgbClr val="7C3AED"/>
+              <a:srgbClr val="0D9488"/>
             </a:solidFill>
             <a:prstDash val="solid"/>
           </a:ln>
@@ -27003,13 +28585,13 @@
             <a:r>
               <a:rPr lang="en-US" sz="1300" b="1" dirty="0">
                 <a:solidFill>
-                  <a:srgbClr val="4C1D95"/>
+                  <a:srgbClr val="0F766E"/>
                 </a:solidFill>
                 <a:latin typeface="Trebuchet MS" pitchFamily="34" charset="0"/>
                 <a:ea typeface="Trebuchet MS" pitchFamily="34" charset="-122"/>
                 <a:cs typeface="Trebuchet MS" pitchFamily="34" charset="-120"/>
               </a:rPr>
-              <a:t>in</a:t>
+              <a:t>correct</a:t>
             </a:r>
             <a:endParaRPr lang="en-US" sz="1300" dirty="0"/>
           </a:p>
@@ -27048,7 +28630,7 @@
                 <a:ea typeface="Calibri" pitchFamily="34" charset="-122"/>
                 <a:cs typeface="Calibri" pitchFamily="34" charset="-120"/>
               </a:rPr>
-              <a:t>not</a:t>
+              <a:t>right; accurate</a:t>
             </a:r>
             <a:endParaRPr lang="en-US" sz="850" dirty="0"/>
           </a:p>
@@ -27071,11 +28653,11 @@
             </a:avLst>
           </a:prstGeom>
           <a:solidFill>
-            <a:srgbClr val="CCFBF1"/>
+            <a:srgbClr val="FCE7F3"/>
           </a:solidFill>
           <a:ln w="19050">
             <a:solidFill>
-              <a:srgbClr val="0D9488"/>
+              <a:srgbClr val="DB2777"/>
             </a:solidFill>
             <a:prstDash val="solid"/>
           </a:ln>
@@ -27115,13 +28697,13 @@
             <a:r>
               <a:rPr lang="en-US" sz="1300" b="1" dirty="0">
                 <a:solidFill>
-                  <a:srgbClr val="0F766E"/>
+                  <a:srgbClr val="9D174D"/>
                 </a:solidFill>
                 <a:latin typeface="Trebuchet MS" pitchFamily="34" charset="0"/>
                 <a:ea typeface="Trebuchet MS" pitchFamily="34" charset="-122"/>
                 <a:cs typeface="Trebuchet MS" pitchFamily="34" charset="-120"/>
               </a:rPr>
-              <a:t>correct</a:t>
+              <a:t>ion</a:t>
             </a:r>
             <a:endParaRPr lang="en-US" sz="1300" dirty="0"/>
           </a:p>
@@ -27160,7 +28742,7 @@
                 <a:ea typeface="Calibri" pitchFamily="34" charset="-122"/>
                 <a:cs typeface="Calibri" pitchFamily="34" charset="-120"/>
               </a:rPr>
-              <a:t>right, free from error</a:t>
+              <a:t>act or result of</a:t>
             </a:r>
             <a:endParaRPr lang="en-US" sz="850" dirty="0"/>
           </a:p>
@@ -27233,7 +28815,7 @@
                 <a:ea typeface="Trebuchet MS" pitchFamily="34" charset="-122"/>
                 <a:cs typeface="Trebuchet MS" pitchFamily="34" charset="-120"/>
               </a:rPr>
-              <a:t>ness</a:t>
+              <a:t>al</a:t>
             </a:r>
             <a:endParaRPr lang="en-US" sz="1300" dirty="0"/>
           </a:p>
@@ -27272,7 +28854,7 @@
                 <a:ea typeface="Calibri" pitchFamily="34" charset="-122"/>
                 <a:cs typeface="Calibri" pitchFamily="34" charset="-120"/>
               </a:rPr>
-              <a:t>state or quality of</a:t>
+              <a:t>related to</a:t>
             </a:r>
             <a:endParaRPr lang="en-US" sz="850" dirty="0"/>
           </a:p>
@@ -27431,7 +29013,7 @@
                 <a:ea typeface="Trebuchet MS" pitchFamily="34" charset="-122"/>
                 <a:cs typeface="Trebuchet MS" pitchFamily="34" charset="-120"/>
               </a:rPr>
-              <a:t>in</a:t>
+              <a:t>cor</a:t>
             </a:r>
             <a:endParaRPr lang="en-US" sz="1400" dirty="0"/>
           </a:p>
@@ -27536,7 +29118,7 @@
                 <a:ea typeface="Trebuchet MS" pitchFamily="34" charset="-122"/>
                 <a:cs typeface="Trebuchet MS" pitchFamily="34" charset="-120"/>
               </a:rPr>
-              <a:t>cor</a:t>
+              <a:t>rec</a:t>
             </a:r>
             <a:endParaRPr lang="en-US" sz="1400" dirty="0"/>
           </a:p>
@@ -27641,7 +29223,7 @@
                 <a:ea typeface="Trebuchet MS" pitchFamily="34" charset="-122"/>
                 <a:cs typeface="Trebuchet MS" pitchFamily="34" charset="-120"/>
               </a:rPr>
-              <a:t>rect</a:t>
+              <a:t>tion</a:t>
             </a:r>
             <a:endParaRPr lang="en-US" sz="1400" dirty="0"/>
           </a:p>
@@ -27746,7 +29328,7 @@
                 <a:ea typeface="Trebuchet MS" pitchFamily="34" charset="-122"/>
                 <a:cs typeface="Trebuchet MS" pitchFamily="34" charset="-120"/>
               </a:rPr>
-              <a:t>ness</a:t>
+              <a:t>al</a:t>
             </a:r>
             <a:endParaRPr lang="en-US" sz="1400" dirty="0"/>
           </a:p>
@@ -27827,11 +29409,11 @@
         <p:spPr>
           <a:xfrm>
             <a:off x="1874520" y="4096512"/>
-            <a:ext cx="6903720" cy="804672"/>
+            <a:ext cx="6903720" cy="658368"/>
           </a:xfrm>
           <a:prstGeom prst="rect">
             <a:avLst>
-              <a:gd name="adj" fmla="val 6818"/>
+              <a:gd name="adj" fmla="val 8333"/>
             </a:avLst>
           </a:prstGeom>
           <a:solidFill>
@@ -27853,12 +29435,12 @@
         </p:nvSpPr>
         <p:spPr>
           <a:xfrm>
-            <a:off x="1952244" y="4169664"/>
-            <a:ext cx="543652" cy="384048"/>
+            <a:off x="1951828" y="4169664"/>
+            <a:ext cx="603504" cy="475488"/>
           </a:xfrm>
           <a:prstGeom prst="rect">
             <a:avLst>
-              <a:gd name="adj" fmla="val 9524"/>
+              <a:gd name="adj" fmla="val 7692"/>
             </a:avLst>
           </a:prstGeom>
           <a:solidFill>
@@ -27880,8 +29462,8 @@
         </p:nvSpPr>
         <p:spPr>
           <a:xfrm>
-            <a:off x="1952244" y="4169664"/>
-            <a:ext cx="543652" cy="384048"/>
+            <a:off x="1951828" y="4169664"/>
+            <a:ext cx="603504" cy="475488"/>
           </a:xfrm>
           <a:prstGeom prst="rect">
             <a:avLst/>
@@ -27905,7 +29487,7 @@
                 <a:ea typeface="Trebuchet MS" pitchFamily="34" charset="-122"/>
                 <a:cs typeface="Trebuchet MS" pitchFamily="34" charset="-120"/>
               </a:rPr>
-              <a:t>i</a:t>
+              <a:t>c</a:t>
             </a:r>
             <a:endParaRPr lang="en-US" sz="900" dirty="0"/>
           </a:p>
@@ -27919,12 +29501,12 @@
         </p:nvSpPr>
         <p:spPr>
           <a:xfrm>
-            <a:off x="2546188" y="4169664"/>
-            <a:ext cx="543652" cy="384048"/>
+            <a:off x="2605209" y="4169664"/>
+            <a:ext cx="603504" cy="475488"/>
           </a:xfrm>
           <a:prstGeom prst="rect">
             <a:avLst>
-              <a:gd name="adj" fmla="val 9524"/>
+              <a:gd name="adj" fmla="val 7692"/>
             </a:avLst>
           </a:prstGeom>
           <a:solidFill>
@@ -27946,8 +29528,8 @@
         </p:nvSpPr>
         <p:spPr>
           <a:xfrm>
-            <a:off x="2546188" y="4169664"/>
-            <a:ext cx="543652" cy="384048"/>
+            <a:off x="2605209" y="4169664"/>
+            <a:ext cx="603504" cy="475488"/>
           </a:xfrm>
           <a:prstGeom prst="rect">
             <a:avLst/>
@@ -27971,7 +29553,7 @@
                 <a:ea typeface="Trebuchet MS" pitchFamily="34" charset="-122"/>
                 <a:cs typeface="Trebuchet MS" pitchFamily="34" charset="-120"/>
               </a:rPr>
-              <a:t>n</a:t>
+              <a:t>o</a:t>
             </a:r>
             <a:endParaRPr lang="en-US" sz="900" dirty="0"/>
           </a:p>
@@ -27985,12 +29567,12 @@
         </p:nvSpPr>
         <p:spPr>
           <a:xfrm>
-            <a:off x="3140133" y="4169664"/>
-            <a:ext cx="543652" cy="384048"/>
+            <a:off x="3258589" y="4169664"/>
+            <a:ext cx="603504" cy="475488"/>
           </a:xfrm>
           <a:prstGeom prst="rect">
             <a:avLst>
-              <a:gd name="adj" fmla="val 9524"/>
+              <a:gd name="adj" fmla="val 7692"/>
             </a:avLst>
           </a:prstGeom>
           <a:solidFill>
@@ -28012,8 +29594,8 @@
         </p:nvSpPr>
         <p:spPr>
           <a:xfrm>
-            <a:off x="3140133" y="4169664"/>
-            <a:ext cx="543652" cy="384048"/>
+            <a:off x="3258589" y="4169664"/>
+            <a:ext cx="603504" cy="475488"/>
           </a:xfrm>
           <a:prstGeom prst="rect">
             <a:avLst/>
@@ -28037,7 +29619,7 @@
                 <a:ea typeface="Trebuchet MS" pitchFamily="34" charset="-122"/>
                 <a:cs typeface="Trebuchet MS" pitchFamily="34" charset="-120"/>
               </a:rPr>
-              <a:t>c</a:t>
+              <a:t>rr</a:t>
             </a:r>
             <a:endParaRPr lang="en-US" sz="900" dirty="0"/>
           </a:p>
@@ -28045,57 +29627,18 @@
       </p:sp>
       <p:sp>
         <p:nvSpPr>
-          <p:cNvPr id="48" name="Text 46"/>
-          <p:cNvSpPr/>
-          <p:nvPr/>
-        </p:nvSpPr>
-        <p:spPr>
-          <a:xfrm>
-            <a:off x="3140133" y="4572000"/>
-            <a:ext cx="543652" cy="219456"/>
-          </a:xfrm>
-          <a:prstGeom prst="rect">
-            <a:avLst/>
-          </a:prstGeom>
-          <a:noFill/>
-          <a:ln/>
-        </p:spPr>
-        <p:txBody>
-          <a:bodyPr wrap="square" lIns="0" tIns="0" rIns="0" bIns="0" rtlCol="0" anchor="t"/>
-          <a:lstStyle/>
-          <a:p>
-            <a:pPr algn="ctr" indent="0" marL="0">
-              <a:buNone/>
-            </a:pPr>
-            <a:r>
-              <a:rPr lang="en-US" sz="750" i="1" dirty="0">
-                <a:solidFill>
-                  <a:srgbClr val="94A3B8"/>
-                </a:solidFill>
-                <a:latin typeface="Calibri" pitchFamily="34" charset="0"/>
-                <a:ea typeface="Calibri" pitchFamily="34" charset="-122"/>
-                <a:cs typeface="Calibri" pitchFamily="34" charset="-120"/>
-              </a:rPr>
-              <a:t>/k/</a:t>
-            </a:r>
-            <a:endParaRPr lang="en-US" sz="750" dirty="0"/>
-          </a:p>
-        </p:txBody>
-      </p:sp>
-      <p:sp>
-        <p:nvSpPr>
-          <p:cNvPr id="49" name="Shape 47"/>
-          <p:cNvSpPr/>
-          <p:nvPr/>
-        </p:nvSpPr>
-        <p:spPr>
-          <a:xfrm>
-            <a:off x="3734077" y="4169664"/>
-            <a:ext cx="543652" cy="384048"/>
+          <p:cNvPr id="48" name="Shape 46"/>
+          <p:cNvSpPr/>
+          <p:nvPr/>
+        </p:nvSpPr>
+        <p:spPr>
+          <a:xfrm>
+            <a:off x="3911969" y="4169664"/>
+            <a:ext cx="603504" cy="475488"/>
           </a:xfrm>
           <a:prstGeom prst="rect">
             <a:avLst>
-              <a:gd name="adj" fmla="val 9524"/>
+              <a:gd name="adj" fmla="val 7692"/>
             </a:avLst>
           </a:prstGeom>
           <a:solidFill>
@@ -28111,14 +29654,14 @@
       </p:sp>
       <p:sp>
         <p:nvSpPr>
-          <p:cNvPr id="50" name="Text 48"/>
-          <p:cNvSpPr/>
-          <p:nvPr/>
-        </p:nvSpPr>
-        <p:spPr>
-          <a:xfrm>
-            <a:off x="3734077" y="4169664"/>
-            <a:ext cx="543652" cy="384048"/>
+          <p:cNvPr id="49" name="Text 47"/>
+          <p:cNvSpPr/>
+          <p:nvPr/>
+        </p:nvSpPr>
+        <p:spPr>
+          <a:xfrm>
+            <a:off x="3911969" y="4169664"/>
+            <a:ext cx="603504" cy="475488"/>
           </a:xfrm>
           <a:prstGeom prst="rect">
             <a:avLst/>
@@ -28142,7 +29685,7 @@
                 <a:ea typeface="Trebuchet MS" pitchFamily="34" charset="-122"/>
                 <a:cs typeface="Trebuchet MS" pitchFamily="34" charset="-120"/>
               </a:rPr>
-              <a:t>or</a:t>
+              <a:t>e</a:t>
             </a:r>
             <a:endParaRPr lang="en-US" sz="900" dirty="0"/>
           </a:p>
@@ -28150,18 +29693,18 @@
       </p:sp>
       <p:sp>
         <p:nvSpPr>
-          <p:cNvPr id="51" name="Shape 49"/>
-          <p:cNvSpPr/>
-          <p:nvPr/>
-        </p:nvSpPr>
-        <p:spPr>
-          <a:xfrm>
-            <a:off x="4328021" y="4169664"/>
-            <a:ext cx="543652" cy="384048"/>
+          <p:cNvPr id="50" name="Shape 48"/>
+          <p:cNvSpPr/>
+          <p:nvPr/>
+        </p:nvSpPr>
+        <p:spPr>
+          <a:xfrm>
+            <a:off x="4565350" y="4169664"/>
+            <a:ext cx="603504" cy="475488"/>
           </a:xfrm>
           <a:prstGeom prst="rect">
             <a:avLst>
-              <a:gd name="adj" fmla="val 9524"/>
+              <a:gd name="adj" fmla="val 7692"/>
             </a:avLst>
           </a:prstGeom>
           <a:solidFill>
@@ -28177,14 +29720,14 @@
       </p:sp>
       <p:sp>
         <p:nvSpPr>
-          <p:cNvPr id="52" name="Text 50"/>
-          <p:cNvSpPr/>
-          <p:nvPr/>
-        </p:nvSpPr>
-        <p:spPr>
-          <a:xfrm>
-            <a:off x="4328021" y="4169664"/>
-            <a:ext cx="543652" cy="384048"/>
+          <p:cNvPr id="51" name="Text 49"/>
+          <p:cNvSpPr/>
+          <p:nvPr/>
+        </p:nvSpPr>
+        <p:spPr>
+          <a:xfrm>
+            <a:off x="4565350" y="4169664"/>
+            <a:ext cx="603504" cy="475488"/>
           </a:xfrm>
           <a:prstGeom prst="rect">
             <a:avLst/>
@@ -28208,7 +29751,7 @@
                 <a:ea typeface="Trebuchet MS" pitchFamily="34" charset="-122"/>
                 <a:cs typeface="Trebuchet MS" pitchFamily="34" charset="-120"/>
               </a:rPr>
-              <a:t>r</a:t>
+              <a:t>c</a:t>
             </a:r>
             <a:endParaRPr lang="en-US" sz="900" dirty="0"/>
           </a:p>
@@ -28216,18 +29759,18 @@
       </p:sp>
       <p:sp>
         <p:nvSpPr>
-          <p:cNvPr id="53" name="Shape 51"/>
-          <p:cNvSpPr/>
-          <p:nvPr/>
-        </p:nvSpPr>
-        <p:spPr>
-          <a:xfrm>
-            <a:off x="4921966" y="4169664"/>
-            <a:ext cx="543652" cy="384048"/>
+          <p:cNvPr id="52" name="Shape 50"/>
+          <p:cNvSpPr/>
+          <p:nvPr/>
+        </p:nvSpPr>
+        <p:spPr>
+          <a:xfrm>
+            <a:off x="5218730" y="4169664"/>
+            <a:ext cx="603504" cy="475488"/>
           </a:xfrm>
           <a:prstGeom prst="rect">
             <a:avLst>
-              <a:gd name="adj" fmla="val 9524"/>
+              <a:gd name="adj" fmla="val 7692"/>
             </a:avLst>
           </a:prstGeom>
           <a:solidFill>
@@ -28243,14 +29786,14 @@
       </p:sp>
       <p:sp>
         <p:nvSpPr>
-          <p:cNvPr id="54" name="Text 52"/>
-          <p:cNvSpPr/>
-          <p:nvPr/>
-        </p:nvSpPr>
-        <p:spPr>
-          <a:xfrm>
-            <a:off x="4921966" y="4169664"/>
-            <a:ext cx="543652" cy="384048"/>
+          <p:cNvPr id="53" name="Text 51"/>
+          <p:cNvSpPr/>
+          <p:nvPr/>
+        </p:nvSpPr>
+        <p:spPr>
+          <a:xfrm>
+            <a:off x="5218730" y="4169664"/>
+            <a:ext cx="603504" cy="475488"/>
           </a:xfrm>
           <a:prstGeom prst="rect">
             <a:avLst/>
@@ -28274,7 +29817,7 @@
                 <a:ea typeface="Trebuchet MS" pitchFamily="34" charset="-122"/>
                 <a:cs typeface="Trebuchet MS" pitchFamily="34" charset="-120"/>
               </a:rPr>
-              <a:t>e</a:t>
+              <a:t>ti</a:t>
             </a:r>
             <a:endParaRPr lang="en-US" sz="900" dirty="0"/>
           </a:p>
@@ -28282,18 +29825,18 @@
       </p:sp>
       <p:sp>
         <p:nvSpPr>
-          <p:cNvPr id="55" name="Shape 53"/>
-          <p:cNvSpPr/>
-          <p:nvPr/>
-        </p:nvSpPr>
-        <p:spPr>
-          <a:xfrm>
-            <a:off x="5515910" y="4169664"/>
-            <a:ext cx="543652" cy="384048"/>
+          <p:cNvPr id="54" name="Shape 52"/>
+          <p:cNvSpPr/>
+          <p:nvPr/>
+        </p:nvSpPr>
+        <p:spPr>
+          <a:xfrm>
+            <a:off x="5872111" y="4169664"/>
+            <a:ext cx="603504" cy="475488"/>
           </a:xfrm>
           <a:prstGeom prst="rect">
             <a:avLst>
-              <a:gd name="adj" fmla="val 9524"/>
+              <a:gd name="adj" fmla="val 7692"/>
             </a:avLst>
           </a:prstGeom>
           <a:solidFill>
@@ -28309,14 +29852,14 @@
       </p:sp>
       <p:sp>
         <p:nvSpPr>
-          <p:cNvPr id="56" name="Text 54"/>
-          <p:cNvSpPr/>
-          <p:nvPr/>
-        </p:nvSpPr>
-        <p:spPr>
-          <a:xfrm>
-            <a:off x="5515910" y="4169664"/>
-            <a:ext cx="543652" cy="384048"/>
+          <p:cNvPr id="55" name="Text 53"/>
+          <p:cNvSpPr/>
+          <p:nvPr/>
+        </p:nvSpPr>
+        <p:spPr>
+          <a:xfrm>
+            <a:off x="5872111" y="4169664"/>
+            <a:ext cx="603504" cy="475488"/>
           </a:xfrm>
           <a:prstGeom prst="rect">
             <a:avLst/>
@@ -28340,7 +29883,7 @@
                 <a:ea typeface="Trebuchet MS" pitchFamily="34" charset="-122"/>
                 <a:cs typeface="Trebuchet MS" pitchFamily="34" charset="-120"/>
               </a:rPr>
-              <a:t>c</a:t>
+              <a:t>o</a:t>
             </a:r>
             <a:endParaRPr lang="en-US" sz="900" dirty="0"/>
           </a:p>
@@ -28348,80 +29891,41 @@
       </p:sp>
       <p:sp>
         <p:nvSpPr>
+          <p:cNvPr id="56" name="Shape 54"/>
+          <p:cNvSpPr/>
+          <p:nvPr/>
+        </p:nvSpPr>
+        <p:spPr>
+          <a:xfrm>
+            <a:off x="6525491" y="4169664"/>
+            <a:ext cx="603504" cy="475488"/>
+          </a:xfrm>
+          <a:prstGeom prst="rect">
+            <a:avLst>
+              <a:gd name="adj" fmla="val 7692"/>
+            </a:avLst>
+          </a:prstGeom>
+          <a:solidFill>
+            <a:srgbClr val="FFFFFF"/>
+          </a:solidFill>
+          <a:ln w="12700">
+            <a:solidFill>
+              <a:srgbClr val="DB2777"/>
+            </a:solidFill>
+            <a:prstDash val="solid"/>
+          </a:ln>
+        </p:spPr>
+      </p:sp>
+      <p:sp>
+        <p:nvSpPr>
           <p:cNvPr id="57" name="Text 55"/>
           <p:cNvSpPr/>
           <p:nvPr/>
         </p:nvSpPr>
         <p:spPr>
           <a:xfrm>
-            <a:off x="5515910" y="4572000"/>
-            <a:ext cx="543652" cy="219456"/>
-          </a:xfrm>
-          <a:prstGeom prst="rect">
-            <a:avLst/>
-          </a:prstGeom>
-          <a:noFill/>
-          <a:ln/>
-        </p:spPr>
-        <p:txBody>
-          <a:bodyPr wrap="square" lIns="0" tIns="0" rIns="0" bIns="0" rtlCol="0" anchor="t"/>
-          <a:lstStyle/>
-          <a:p>
-            <a:pPr algn="ctr" indent="0" marL="0">
-              <a:buNone/>
-            </a:pPr>
-            <a:r>
-              <a:rPr lang="en-US" sz="750" i="1" dirty="0">
-                <a:solidFill>
-                  <a:srgbClr val="94A3B8"/>
-                </a:solidFill>
-                <a:latin typeface="Calibri" pitchFamily="34" charset="0"/>
-                <a:ea typeface="Calibri" pitchFamily="34" charset="-122"/>
-                <a:cs typeface="Calibri" pitchFamily="34" charset="-120"/>
-              </a:rPr>
-              <a:t>/k/</a:t>
-            </a:r>
-            <a:endParaRPr lang="en-US" sz="750" dirty="0"/>
-          </a:p>
-        </p:txBody>
-      </p:sp>
-      <p:sp>
-        <p:nvSpPr>
-          <p:cNvPr id="58" name="Shape 56"/>
-          <p:cNvSpPr/>
-          <p:nvPr/>
-        </p:nvSpPr>
-        <p:spPr>
-          <a:xfrm>
-            <a:off x="6109855" y="4169664"/>
-            <a:ext cx="543652" cy="384048"/>
-          </a:xfrm>
-          <a:prstGeom prst="rect">
-            <a:avLst>
-              <a:gd name="adj" fmla="val 9524"/>
-            </a:avLst>
-          </a:prstGeom>
-          <a:solidFill>
-            <a:srgbClr val="FFFFFF"/>
-          </a:solidFill>
-          <a:ln w="12700">
-            <a:solidFill>
-              <a:srgbClr val="DB2777"/>
-            </a:solidFill>
-            <a:prstDash val="solid"/>
-          </a:ln>
-        </p:spPr>
-      </p:sp>
-      <p:sp>
-        <p:nvSpPr>
-          <p:cNvPr id="59" name="Text 57"/>
-          <p:cNvSpPr/>
-          <p:nvPr/>
-        </p:nvSpPr>
-        <p:spPr>
-          <a:xfrm>
-            <a:off x="6109855" y="4169664"/>
-            <a:ext cx="543652" cy="384048"/>
+            <a:off x="6525491" y="4169664"/>
+            <a:ext cx="603504" cy="475488"/>
           </a:xfrm>
           <a:prstGeom prst="rect">
             <a:avLst/>
@@ -28445,7 +29949,7 @@
                 <a:ea typeface="Trebuchet MS" pitchFamily="34" charset="-122"/>
                 <a:cs typeface="Trebuchet MS" pitchFamily="34" charset="-120"/>
               </a:rPr>
-              <a:t>t</a:t>
+              <a:t>n</a:t>
             </a:r>
             <a:endParaRPr lang="en-US" sz="900" dirty="0"/>
           </a:p>
@@ -28453,18 +29957,18 @@
       </p:sp>
       <p:sp>
         <p:nvSpPr>
-          <p:cNvPr id="60" name="Shape 58"/>
-          <p:cNvSpPr/>
-          <p:nvPr/>
-        </p:nvSpPr>
-        <p:spPr>
-          <a:xfrm>
-            <a:off x="6703799" y="4169664"/>
-            <a:ext cx="543652" cy="384048"/>
+          <p:cNvPr id="58" name="Shape 56"/>
+          <p:cNvSpPr/>
+          <p:nvPr/>
+        </p:nvSpPr>
+        <p:spPr>
+          <a:xfrm>
+            <a:off x="7178871" y="4169664"/>
+            <a:ext cx="603504" cy="475488"/>
           </a:xfrm>
           <a:prstGeom prst="rect">
             <a:avLst>
-              <a:gd name="adj" fmla="val 9524"/>
+              <a:gd name="adj" fmla="val 7692"/>
             </a:avLst>
           </a:prstGeom>
           <a:solidFill>
@@ -28480,14 +29984,14 @@
       </p:sp>
       <p:sp>
         <p:nvSpPr>
-          <p:cNvPr id="61" name="Text 59"/>
-          <p:cNvSpPr/>
-          <p:nvPr/>
-        </p:nvSpPr>
-        <p:spPr>
-          <a:xfrm>
-            <a:off x="6703799" y="4169664"/>
-            <a:ext cx="543652" cy="384048"/>
+          <p:cNvPr id="59" name="Text 57"/>
+          <p:cNvSpPr/>
+          <p:nvPr/>
+        </p:nvSpPr>
+        <p:spPr>
+          <a:xfrm>
+            <a:off x="7178871" y="4169664"/>
+            <a:ext cx="603504" cy="475488"/>
           </a:xfrm>
           <a:prstGeom prst="rect">
             <a:avLst/>
@@ -28511,7 +30015,7 @@
                 <a:ea typeface="Trebuchet MS" pitchFamily="34" charset="-122"/>
                 <a:cs typeface="Trebuchet MS" pitchFamily="34" charset="-120"/>
               </a:rPr>
-              <a:t>n</a:t>
+              <a:t>a</a:t>
             </a:r>
             <a:endParaRPr lang="en-US" sz="900" dirty="0"/>
           </a:p>
@@ -28519,18 +30023,18 @@
       </p:sp>
       <p:sp>
         <p:nvSpPr>
-          <p:cNvPr id="62" name="Shape 60"/>
-          <p:cNvSpPr/>
-          <p:nvPr/>
-        </p:nvSpPr>
-        <p:spPr>
-          <a:xfrm>
-            <a:off x="7297743" y="4169664"/>
-            <a:ext cx="543652" cy="384048"/>
+          <p:cNvPr id="60" name="Shape 58"/>
+          <p:cNvSpPr/>
+          <p:nvPr/>
+        </p:nvSpPr>
+        <p:spPr>
+          <a:xfrm>
+            <a:off x="7832252" y="4169664"/>
+            <a:ext cx="603504" cy="475488"/>
           </a:xfrm>
           <a:prstGeom prst="rect">
             <a:avLst>
-              <a:gd name="adj" fmla="val 9524"/>
+              <a:gd name="adj" fmla="val 7692"/>
             </a:avLst>
           </a:prstGeom>
           <a:solidFill>
@@ -28546,14 +30050,14 @@
       </p:sp>
       <p:sp>
         <p:nvSpPr>
-          <p:cNvPr id="63" name="Text 61"/>
-          <p:cNvSpPr/>
-          <p:nvPr/>
-        </p:nvSpPr>
-        <p:spPr>
-          <a:xfrm>
-            <a:off x="7297743" y="4169664"/>
-            <a:ext cx="543652" cy="384048"/>
+          <p:cNvPr id="61" name="Text 59"/>
+          <p:cNvSpPr/>
+          <p:nvPr/>
+        </p:nvSpPr>
+        <p:spPr>
+          <a:xfrm>
+            <a:off x="7832252" y="4169664"/>
+            <a:ext cx="603504" cy="475488"/>
           </a:xfrm>
           <a:prstGeom prst="rect">
             <a:avLst/>
@@ -28577,73 +30081,7 @@
                 <a:ea typeface="Trebuchet MS" pitchFamily="34" charset="-122"/>
                 <a:cs typeface="Trebuchet MS" pitchFamily="34" charset="-120"/>
               </a:rPr>
-              <a:t>e</a:t>
-            </a:r>
-            <a:endParaRPr lang="en-US" sz="900" dirty="0"/>
-          </a:p>
-        </p:txBody>
-      </p:sp>
-      <p:sp>
-        <p:nvSpPr>
-          <p:cNvPr id="64" name="Shape 62"/>
-          <p:cNvSpPr/>
-          <p:nvPr/>
-        </p:nvSpPr>
-        <p:spPr>
-          <a:xfrm>
-            <a:off x="7891688" y="4169664"/>
-            <a:ext cx="543652" cy="384048"/>
-          </a:xfrm>
-          <a:prstGeom prst="rect">
-            <a:avLst>
-              <a:gd name="adj" fmla="val 9524"/>
-            </a:avLst>
-          </a:prstGeom>
-          <a:solidFill>
-            <a:srgbClr val="FFFFFF"/>
-          </a:solidFill>
-          <a:ln w="12700">
-            <a:solidFill>
-              <a:srgbClr val="DB2777"/>
-            </a:solidFill>
-            <a:prstDash val="solid"/>
-          </a:ln>
-        </p:spPr>
-      </p:sp>
-      <p:sp>
-        <p:nvSpPr>
-          <p:cNvPr id="65" name="Text 63"/>
-          <p:cNvSpPr/>
-          <p:nvPr/>
-        </p:nvSpPr>
-        <p:spPr>
-          <a:xfrm>
-            <a:off x="7891688" y="4169664"/>
-            <a:ext cx="543652" cy="384048"/>
-          </a:xfrm>
-          <a:prstGeom prst="rect">
-            <a:avLst/>
-          </a:prstGeom>
-          <a:noFill/>
-          <a:ln/>
-        </p:spPr>
-        <p:txBody>
-          <a:bodyPr wrap="square" lIns="0" tIns="0" rIns="0" bIns="0" rtlCol="0" anchor="ctr"/>
-          <a:lstStyle/>
-          <a:p>
-            <a:pPr algn="ctr" indent="0" marL="0">
-              <a:buNone/>
-            </a:pPr>
-            <a:r>
-              <a:rPr lang="en-US" sz="900" b="1" dirty="0">
-                <a:solidFill>
-                  <a:srgbClr val="9D174D"/>
-                </a:solidFill>
-                <a:latin typeface="Trebuchet MS" pitchFamily="34" charset="0"/>
-                <a:ea typeface="Trebuchet MS" pitchFamily="34" charset="-122"/>
-                <a:cs typeface="Trebuchet MS" pitchFamily="34" charset="-120"/>
-              </a:rPr>
-              <a:t>ss</a:t>
+              <a:t>l</a:t>
             </a:r>
             <a:endParaRPr lang="en-US" sz="900" dirty="0"/>
           </a:p>
@@ -28935,7 +30373,7 @@
                 <a:ea typeface="Calibri" pitchFamily="34" charset="-122"/>
                 <a:cs typeface="Calibri" pitchFamily="34" charset="-120"/>
               </a:rPr>
-              <a:t>Word Labs  •  wordlabs.app  •  Root: 'correct' = right, accurate, free from error</a:t>
+              <a:t>Word Labs  •  wordlabs.app  •  Root: 'correct' = right; accurate</a:t>
             </a:r>
             <a:endParaRPr lang="en-US" sz="800" dirty="0"/>
           </a:p>
@@ -29074,7 +30512,7 @@
                 <a:ea typeface="Trebuchet MS" pitchFamily="34" charset="-122"/>
                 <a:cs typeface="Trebuchet MS" pitchFamily="34" charset="-120"/>
               </a:rPr>
-              <a:t>corrector</a:t>
+              <a:t>corrective</a:t>
             </a:r>
             <a:endParaRPr lang="en-US" sz="2800" dirty="0"/>
           </a:p>
@@ -29762,7 +31200,7 @@
                 <a:ea typeface="Calibri" pitchFamily="34" charset="-122"/>
                 <a:cs typeface="Calibri" pitchFamily="34" charset="-120"/>
               </a:rPr>
-              <a:t>Word Labs  •  wordlabs.app  •  Root: 'correct' = right, accurate, free from error</a:t>
+              <a:t>Word Labs  •  wordlabs.app  •  Root: 'correct' = right; accurate</a:t>
             </a:r>
             <a:endParaRPr lang="en-US" sz="800" dirty="0"/>
           </a:p>
@@ -29901,7 +31339,7 @@
                 <a:ea typeface="Trebuchet MS" pitchFamily="34" charset="-122"/>
                 <a:cs typeface="Trebuchet MS" pitchFamily="34" charset="-120"/>
               </a:rPr>
-              <a:t>corrector</a:t>
+              <a:t>corrective</a:t>
             </a:r>
             <a:endParaRPr lang="en-US" sz="2800" dirty="0"/>
           </a:p>
@@ -30079,7 +31517,7 @@
                 <a:ea typeface="Calibri" pitchFamily="34" charset="-122"/>
                 <a:cs typeface="Calibri" pitchFamily="34" charset="-120"/>
               </a:rPr>
-              <a:t>right, free from error</a:t>
+              <a:t>right; accurate</a:t>
             </a:r>
             <a:endParaRPr lang="en-US" sz="850" dirty="0"/>
           </a:p>
@@ -30152,7 +31590,7 @@
                 <a:ea typeface="Trebuchet MS" pitchFamily="34" charset="-122"/>
                 <a:cs typeface="Trebuchet MS" pitchFamily="34" charset="-120"/>
               </a:rPr>
-              <a:t>or</a:t>
+              <a:t>ive</a:t>
             </a:r>
             <a:endParaRPr lang="en-US" sz="1300" dirty="0"/>
           </a:p>
@@ -30191,7 +31629,7 @@
                 <a:ea typeface="Calibri" pitchFamily="34" charset="-122"/>
                 <a:cs typeface="Calibri" pitchFamily="34" charset="-120"/>
               </a:rPr>
-              <a:t>person or thing that does</a:t>
+              <a:t>having quality of</a:t>
             </a:r>
             <a:endParaRPr lang="en-US" sz="850" dirty="0"/>
           </a:p>
@@ -30747,7 +32185,7 @@
                 <a:ea typeface="Calibri" pitchFamily="34" charset="-122"/>
                 <a:cs typeface="Calibri" pitchFamily="34" charset="-120"/>
               </a:rPr>
-              <a:t>Word Labs  •  wordlabs.app  •  Root: 'correct' = right, accurate, free from error</a:t>
+              <a:t>Word Labs  •  wordlabs.app  •  Root: 'correct' = right; accurate</a:t>
             </a:r>
             <a:endParaRPr lang="en-US" sz="800" dirty="0"/>
           </a:p>
@@ -30886,7 +32324,7 @@
                 <a:ea typeface="Trebuchet MS" pitchFamily="34" charset="-122"/>
                 <a:cs typeface="Trebuchet MS" pitchFamily="34" charset="-120"/>
               </a:rPr>
-              <a:t>corrector</a:t>
+              <a:t>corrective</a:t>
             </a:r>
             <a:endParaRPr lang="en-US" sz="2800" dirty="0"/>
           </a:p>
@@ -31064,7 +32502,7 @@
                 <a:ea typeface="Calibri" pitchFamily="34" charset="-122"/>
                 <a:cs typeface="Calibri" pitchFamily="34" charset="-120"/>
               </a:rPr>
-              <a:t>right, free from error</a:t>
+              <a:t>right; accurate</a:t>
             </a:r>
             <a:endParaRPr lang="en-US" sz="850" dirty="0"/>
           </a:p>
@@ -31137,7 +32575,7 @@
                 <a:ea typeface="Trebuchet MS" pitchFamily="34" charset="-122"/>
                 <a:cs typeface="Trebuchet MS" pitchFamily="34" charset="-120"/>
               </a:rPr>
-              <a:t>or</a:t>
+              <a:t>ive</a:t>
             </a:r>
             <a:endParaRPr lang="en-US" sz="1300" dirty="0"/>
           </a:p>
@@ -31176,7 +32614,7 @@
                 <a:ea typeface="Calibri" pitchFamily="34" charset="-122"/>
                 <a:cs typeface="Calibri" pitchFamily="34" charset="-120"/>
               </a:rPr>
-              <a:t>person or thing that does</a:t>
+              <a:t>having quality of</a:t>
             </a:r>
             <a:endParaRPr lang="en-US" sz="850" dirty="0"/>
           </a:p>
@@ -31545,7 +32983,7 @@
                 <a:ea typeface="Trebuchet MS" pitchFamily="34" charset="-122"/>
                 <a:cs typeface="Trebuchet MS" pitchFamily="34" charset="-120"/>
               </a:rPr>
-              <a:t>tor</a:t>
+              <a:t>tive</a:t>
             </a:r>
             <a:endParaRPr lang="en-US" sz="1400" dirty="0"/>
           </a:p>
@@ -31969,7 +33407,7 @@
                 <a:ea typeface="Calibri" pitchFamily="34" charset="-122"/>
                 <a:cs typeface="Calibri" pitchFamily="34" charset="-120"/>
               </a:rPr>
-              <a:t>Word Labs  •  wordlabs.app  •  Root: 'correct' = right, accurate, free from error</a:t>
+              <a:t>Word Labs  •  wordlabs.app  •  Root: 'correct' = right; accurate</a:t>
             </a:r>
             <a:endParaRPr lang="en-US" sz="800" dirty="0"/>
           </a:p>
@@ -32108,7 +33546,7 @@
                 <a:ea typeface="Trebuchet MS" pitchFamily="34" charset="-122"/>
                 <a:cs typeface="Trebuchet MS" pitchFamily="34" charset="-120"/>
               </a:rPr>
-              <a:t>corrector</a:t>
+              <a:t>corrective</a:t>
             </a:r>
             <a:endParaRPr lang="en-US" sz="2800" dirty="0"/>
           </a:p>
@@ -32286,7 +33724,7 @@
                 <a:ea typeface="Calibri" pitchFamily="34" charset="-122"/>
                 <a:cs typeface="Calibri" pitchFamily="34" charset="-120"/>
               </a:rPr>
-              <a:t>right, free from error</a:t>
+              <a:t>right; accurate</a:t>
             </a:r>
             <a:endParaRPr lang="en-US" sz="850" dirty="0"/>
           </a:p>
@@ -32359,7 +33797,7 @@
                 <a:ea typeface="Trebuchet MS" pitchFamily="34" charset="-122"/>
                 <a:cs typeface="Trebuchet MS" pitchFamily="34" charset="-120"/>
               </a:rPr>
-              <a:t>or</a:t>
+              <a:t>ive</a:t>
             </a:r>
             <a:endParaRPr lang="en-US" sz="1300" dirty="0"/>
           </a:p>
@@ -32398,7 +33836,7 @@
                 <a:ea typeface="Calibri" pitchFamily="34" charset="-122"/>
                 <a:cs typeface="Calibri" pitchFamily="34" charset="-120"/>
               </a:rPr>
-              <a:t>person or thing that does</a:t>
+              <a:t>having quality of</a:t>
             </a:r>
             <a:endParaRPr lang="en-US" sz="850" dirty="0"/>
           </a:p>
@@ -32767,7 +34205,7 @@
                 <a:ea typeface="Trebuchet MS" pitchFamily="34" charset="-122"/>
                 <a:cs typeface="Trebuchet MS" pitchFamily="34" charset="-120"/>
               </a:rPr>
-              <a:t>tor</a:t>
+              <a:t>tive</a:t>
             </a:r>
             <a:endParaRPr lang="en-US" sz="1400" dirty="0"/>
           </a:p>
@@ -32848,11 +34286,11 @@
         <p:spPr>
           <a:xfrm>
             <a:off x="1874520" y="4096512"/>
-            <a:ext cx="6903720" cy="804672"/>
+            <a:ext cx="6903720" cy="658368"/>
           </a:xfrm>
           <a:prstGeom prst="rect">
             <a:avLst>
-              <a:gd name="adj" fmla="val 6818"/>
+              <a:gd name="adj" fmla="val 8333"/>
             </a:avLst>
           </a:prstGeom>
           <a:solidFill>
@@ -32874,12 +34312,12 @@
         </p:nvSpPr>
         <p:spPr>
           <a:xfrm>
-            <a:off x="2124837" y="4169664"/>
-            <a:ext cx="685800" cy="384048"/>
+            <a:off x="1951330" y="4169664"/>
+            <a:ext cx="676656" cy="475488"/>
           </a:xfrm>
           <a:prstGeom prst="rect">
             <a:avLst>
-              <a:gd name="adj" fmla="val 9524"/>
+              <a:gd name="adj" fmla="val 7692"/>
             </a:avLst>
           </a:prstGeom>
           <a:solidFill>
@@ -32901,8 +34339,8 @@
         </p:nvSpPr>
         <p:spPr>
           <a:xfrm>
-            <a:off x="2124837" y="4169664"/>
-            <a:ext cx="685800" cy="384048"/>
+            <a:off x="1951330" y="4169664"/>
+            <a:ext cx="676656" cy="475488"/>
           </a:xfrm>
           <a:prstGeom prst="rect">
             <a:avLst/>
@@ -32934,57 +34372,18 @@
       </p:sp>
       <p:sp>
         <p:nvSpPr>
-          <p:cNvPr id="38" name="Text 36"/>
-          <p:cNvSpPr/>
-          <p:nvPr/>
-        </p:nvSpPr>
-        <p:spPr>
-          <a:xfrm>
-            <a:off x="2124837" y="4572000"/>
-            <a:ext cx="685800" cy="219456"/>
-          </a:xfrm>
-          <a:prstGeom prst="rect">
-            <a:avLst/>
-          </a:prstGeom>
-          <a:noFill/>
-          <a:ln/>
-        </p:spPr>
-        <p:txBody>
-          <a:bodyPr wrap="square" lIns="0" tIns="0" rIns="0" bIns="0" rtlCol="0" anchor="t"/>
-          <a:lstStyle/>
-          <a:p>
-            <a:pPr algn="ctr" indent="0" marL="0">
-              <a:buNone/>
-            </a:pPr>
-            <a:r>
-              <a:rPr lang="en-US" sz="750" i="1" dirty="0">
-                <a:solidFill>
-                  <a:srgbClr val="94A3B8"/>
-                </a:solidFill>
-                <a:latin typeface="Calibri" pitchFamily="34" charset="0"/>
-                <a:ea typeface="Calibri" pitchFamily="34" charset="-122"/>
-                <a:cs typeface="Calibri" pitchFamily="34" charset="-120"/>
-              </a:rPr>
-              <a:t>/k/</a:t>
-            </a:r>
-            <a:endParaRPr lang="en-US" sz="750" dirty="0"/>
-          </a:p>
-        </p:txBody>
-      </p:sp>
-      <p:sp>
-        <p:nvSpPr>
-          <p:cNvPr id="39" name="Shape 37"/>
-          <p:cNvSpPr/>
-          <p:nvPr/>
-        </p:nvSpPr>
-        <p:spPr>
-          <a:xfrm>
-            <a:off x="3033522" y="4169664"/>
-            <a:ext cx="685800" cy="384048"/>
+          <p:cNvPr id="38" name="Shape 36"/>
+          <p:cNvSpPr/>
+          <p:nvPr/>
+        </p:nvSpPr>
+        <p:spPr>
+          <a:xfrm>
+            <a:off x="2677363" y="4169664"/>
+            <a:ext cx="676656" cy="475488"/>
           </a:xfrm>
           <a:prstGeom prst="rect">
             <a:avLst>
-              <a:gd name="adj" fmla="val 9524"/>
+              <a:gd name="adj" fmla="val 7692"/>
             </a:avLst>
           </a:prstGeom>
           <a:solidFill>
@@ -33000,14 +34399,14 @@
       </p:sp>
       <p:sp>
         <p:nvSpPr>
-          <p:cNvPr id="40" name="Text 38"/>
-          <p:cNvSpPr/>
-          <p:nvPr/>
-        </p:nvSpPr>
-        <p:spPr>
-          <a:xfrm>
-            <a:off x="3033522" y="4169664"/>
-            <a:ext cx="685800" cy="384048"/>
+          <p:cNvPr id="39" name="Text 37"/>
+          <p:cNvSpPr/>
+          <p:nvPr/>
+        </p:nvSpPr>
+        <p:spPr>
+          <a:xfrm>
+            <a:off x="2677363" y="4169664"/>
+            <a:ext cx="676656" cy="475488"/>
           </a:xfrm>
           <a:prstGeom prst="rect">
             <a:avLst/>
@@ -33031,7 +34430,7 @@
                 <a:ea typeface="Trebuchet MS" pitchFamily="34" charset="-122"/>
                 <a:cs typeface="Trebuchet MS" pitchFamily="34" charset="-120"/>
               </a:rPr>
-              <a:t>or</a:t>
+              <a:t>o</a:t>
             </a:r>
             <a:endParaRPr lang="en-US" sz="900" dirty="0"/>
           </a:p>
@@ -33039,18 +34438,18 @@
       </p:sp>
       <p:sp>
         <p:nvSpPr>
-          <p:cNvPr id="41" name="Shape 39"/>
-          <p:cNvSpPr/>
-          <p:nvPr/>
-        </p:nvSpPr>
-        <p:spPr>
-          <a:xfrm>
-            <a:off x="3942207" y="4169664"/>
-            <a:ext cx="685800" cy="384048"/>
+          <p:cNvPr id="40" name="Shape 38"/>
+          <p:cNvSpPr/>
+          <p:nvPr/>
+        </p:nvSpPr>
+        <p:spPr>
+          <a:xfrm>
+            <a:off x="3403397" y="4169664"/>
+            <a:ext cx="676656" cy="475488"/>
           </a:xfrm>
           <a:prstGeom prst="rect">
             <a:avLst>
-              <a:gd name="adj" fmla="val 9524"/>
+              <a:gd name="adj" fmla="val 7692"/>
             </a:avLst>
           </a:prstGeom>
           <a:solidFill>
@@ -33066,14 +34465,14 @@
       </p:sp>
       <p:sp>
         <p:nvSpPr>
-          <p:cNvPr id="42" name="Text 40"/>
-          <p:cNvSpPr/>
-          <p:nvPr/>
-        </p:nvSpPr>
-        <p:spPr>
-          <a:xfrm>
-            <a:off x="3942207" y="4169664"/>
-            <a:ext cx="685800" cy="384048"/>
+          <p:cNvPr id="41" name="Text 39"/>
+          <p:cNvSpPr/>
+          <p:nvPr/>
+        </p:nvSpPr>
+        <p:spPr>
+          <a:xfrm>
+            <a:off x="3403397" y="4169664"/>
+            <a:ext cx="676656" cy="475488"/>
           </a:xfrm>
           <a:prstGeom prst="rect">
             <a:avLst/>
@@ -33097,7 +34496,7 @@
                 <a:ea typeface="Trebuchet MS" pitchFamily="34" charset="-122"/>
                 <a:cs typeface="Trebuchet MS" pitchFamily="34" charset="-120"/>
               </a:rPr>
-              <a:t>r</a:t>
+              <a:t>rr</a:t>
             </a:r>
             <a:endParaRPr lang="en-US" sz="900" dirty="0"/>
           </a:p>
@@ -33105,18 +34504,18 @@
       </p:sp>
       <p:sp>
         <p:nvSpPr>
-          <p:cNvPr id="43" name="Shape 41"/>
-          <p:cNvSpPr/>
-          <p:nvPr/>
-        </p:nvSpPr>
-        <p:spPr>
-          <a:xfrm>
-            <a:off x="4850892" y="4169664"/>
-            <a:ext cx="685800" cy="384048"/>
+          <p:cNvPr id="42" name="Shape 40"/>
+          <p:cNvSpPr/>
+          <p:nvPr/>
+        </p:nvSpPr>
+        <p:spPr>
+          <a:xfrm>
+            <a:off x="4129430" y="4169664"/>
+            <a:ext cx="676656" cy="475488"/>
           </a:xfrm>
           <a:prstGeom prst="rect">
             <a:avLst>
-              <a:gd name="adj" fmla="val 9524"/>
+              <a:gd name="adj" fmla="val 7692"/>
             </a:avLst>
           </a:prstGeom>
           <a:solidFill>
@@ -33132,14 +34531,14 @@
       </p:sp>
       <p:sp>
         <p:nvSpPr>
-          <p:cNvPr id="44" name="Text 42"/>
-          <p:cNvSpPr/>
-          <p:nvPr/>
-        </p:nvSpPr>
-        <p:spPr>
-          <a:xfrm>
-            <a:off x="4850892" y="4169664"/>
-            <a:ext cx="685800" cy="384048"/>
+          <p:cNvPr id="43" name="Text 41"/>
+          <p:cNvSpPr/>
+          <p:nvPr/>
+        </p:nvSpPr>
+        <p:spPr>
+          <a:xfrm>
+            <a:off x="4129430" y="4169664"/>
+            <a:ext cx="676656" cy="475488"/>
           </a:xfrm>
           <a:prstGeom prst="rect">
             <a:avLst/>
@@ -33171,18 +34570,18 @@
       </p:sp>
       <p:sp>
         <p:nvSpPr>
-          <p:cNvPr id="45" name="Shape 43"/>
-          <p:cNvSpPr/>
-          <p:nvPr/>
-        </p:nvSpPr>
-        <p:spPr>
-          <a:xfrm>
-            <a:off x="5759577" y="4169664"/>
-            <a:ext cx="685800" cy="384048"/>
+          <p:cNvPr id="44" name="Shape 42"/>
+          <p:cNvSpPr/>
+          <p:nvPr/>
+        </p:nvSpPr>
+        <p:spPr>
+          <a:xfrm>
+            <a:off x="4855464" y="4169664"/>
+            <a:ext cx="676656" cy="475488"/>
           </a:xfrm>
           <a:prstGeom prst="rect">
             <a:avLst>
-              <a:gd name="adj" fmla="val 9524"/>
+              <a:gd name="adj" fmla="val 7692"/>
             </a:avLst>
           </a:prstGeom>
           <a:solidFill>
@@ -33198,14 +34597,14 @@
       </p:sp>
       <p:sp>
         <p:nvSpPr>
-          <p:cNvPr id="46" name="Text 44"/>
-          <p:cNvSpPr/>
-          <p:nvPr/>
-        </p:nvSpPr>
-        <p:spPr>
-          <a:xfrm>
-            <a:off x="5759577" y="4169664"/>
-            <a:ext cx="685800" cy="384048"/>
+          <p:cNvPr id="45" name="Text 43"/>
+          <p:cNvSpPr/>
+          <p:nvPr/>
+        </p:nvSpPr>
+        <p:spPr>
+          <a:xfrm>
+            <a:off x="4855464" y="4169664"/>
+            <a:ext cx="676656" cy="475488"/>
           </a:xfrm>
           <a:prstGeom prst="rect">
             <a:avLst/>
@@ -33237,80 +34636,41 @@
       </p:sp>
       <p:sp>
         <p:nvSpPr>
+          <p:cNvPr id="46" name="Shape 44"/>
+          <p:cNvSpPr/>
+          <p:nvPr/>
+        </p:nvSpPr>
+        <p:spPr>
+          <a:xfrm>
+            <a:off x="5581498" y="4169664"/>
+            <a:ext cx="676656" cy="475488"/>
+          </a:xfrm>
+          <a:prstGeom prst="rect">
+            <a:avLst>
+              <a:gd name="adj" fmla="val 7692"/>
+            </a:avLst>
+          </a:prstGeom>
+          <a:solidFill>
+            <a:srgbClr val="FFFFFF"/>
+          </a:solidFill>
+          <a:ln w="12700">
+            <a:solidFill>
+              <a:srgbClr val="DB2777"/>
+            </a:solidFill>
+            <a:prstDash val="solid"/>
+          </a:ln>
+        </p:spPr>
+      </p:sp>
+      <p:sp>
+        <p:nvSpPr>
           <p:cNvPr id="47" name="Text 45"/>
           <p:cNvSpPr/>
           <p:nvPr/>
         </p:nvSpPr>
         <p:spPr>
           <a:xfrm>
-            <a:off x="5759577" y="4572000"/>
-            <a:ext cx="685800" cy="219456"/>
-          </a:xfrm>
-          <a:prstGeom prst="rect">
-            <a:avLst/>
-          </a:prstGeom>
-          <a:noFill/>
-          <a:ln/>
-        </p:spPr>
-        <p:txBody>
-          <a:bodyPr wrap="square" lIns="0" tIns="0" rIns="0" bIns="0" rtlCol="0" anchor="t"/>
-          <a:lstStyle/>
-          <a:p>
-            <a:pPr algn="ctr" indent="0" marL="0">
-              <a:buNone/>
-            </a:pPr>
-            <a:r>
-              <a:rPr lang="en-US" sz="750" i="1" dirty="0">
-                <a:solidFill>
-                  <a:srgbClr val="94A3B8"/>
-                </a:solidFill>
-                <a:latin typeface="Calibri" pitchFamily="34" charset="0"/>
-                <a:ea typeface="Calibri" pitchFamily="34" charset="-122"/>
-                <a:cs typeface="Calibri" pitchFamily="34" charset="-120"/>
-              </a:rPr>
-              <a:t>/k/</a:t>
-            </a:r>
-            <a:endParaRPr lang="en-US" sz="750" dirty="0"/>
-          </a:p>
-        </p:txBody>
-      </p:sp>
-      <p:sp>
-        <p:nvSpPr>
-          <p:cNvPr id="48" name="Shape 46"/>
-          <p:cNvSpPr/>
-          <p:nvPr/>
-        </p:nvSpPr>
-        <p:spPr>
-          <a:xfrm>
-            <a:off x="6668262" y="4169664"/>
-            <a:ext cx="685800" cy="384048"/>
-          </a:xfrm>
-          <a:prstGeom prst="rect">
-            <a:avLst>
-              <a:gd name="adj" fmla="val 9524"/>
-            </a:avLst>
-          </a:prstGeom>
-          <a:solidFill>
-            <a:srgbClr val="FFFFFF"/>
-          </a:solidFill>
-          <a:ln w="12700">
-            <a:solidFill>
-              <a:srgbClr val="DB2777"/>
-            </a:solidFill>
-            <a:prstDash val="solid"/>
-          </a:ln>
-        </p:spPr>
-      </p:sp>
-      <p:sp>
-        <p:nvSpPr>
-          <p:cNvPr id="49" name="Text 47"/>
-          <p:cNvSpPr/>
-          <p:nvPr/>
-        </p:nvSpPr>
-        <p:spPr>
-          <a:xfrm>
-            <a:off x="6668262" y="4169664"/>
-            <a:ext cx="685800" cy="384048"/>
+            <a:off x="5581498" y="4169664"/>
+            <a:ext cx="676656" cy="475488"/>
           </a:xfrm>
           <a:prstGeom prst="rect">
             <a:avLst/>
@@ -33342,18 +34702,18 @@
       </p:sp>
       <p:sp>
         <p:nvSpPr>
-          <p:cNvPr id="50" name="Shape 48"/>
-          <p:cNvSpPr/>
-          <p:nvPr/>
-        </p:nvSpPr>
-        <p:spPr>
-          <a:xfrm>
-            <a:off x="7576947" y="4169664"/>
-            <a:ext cx="685800" cy="384048"/>
+          <p:cNvPr id="48" name="Shape 46"/>
+          <p:cNvSpPr/>
+          <p:nvPr/>
+        </p:nvSpPr>
+        <p:spPr>
+          <a:xfrm>
+            <a:off x="6307531" y="4169664"/>
+            <a:ext cx="676656" cy="475488"/>
           </a:xfrm>
           <a:prstGeom prst="rect">
             <a:avLst>
-              <a:gd name="adj" fmla="val 9524"/>
+              <a:gd name="adj" fmla="val 7692"/>
             </a:avLst>
           </a:prstGeom>
           <a:solidFill>
@@ -33369,14 +34729,14 @@
       </p:sp>
       <p:sp>
         <p:nvSpPr>
-          <p:cNvPr id="51" name="Text 49"/>
-          <p:cNvSpPr/>
-          <p:nvPr/>
-        </p:nvSpPr>
-        <p:spPr>
-          <a:xfrm>
-            <a:off x="7576947" y="4169664"/>
-            <a:ext cx="685800" cy="384048"/>
+          <p:cNvPr id="49" name="Text 47"/>
+          <p:cNvSpPr/>
+          <p:nvPr/>
+        </p:nvSpPr>
+        <p:spPr>
+          <a:xfrm>
+            <a:off x="6307531" y="4169664"/>
+            <a:ext cx="676656" cy="475488"/>
           </a:xfrm>
           <a:prstGeom prst="rect">
             <a:avLst/>
@@ -33400,7 +34760,139 @@
                 <a:ea typeface="Trebuchet MS" pitchFamily="34" charset="-122"/>
                 <a:cs typeface="Trebuchet MS" pitchFamily="34" charset="-120"/>
               </a:rPr>
-              <a:t>or</a:t>
+              <a:t>i</a:t>
+            </a:r>
+            <a:endParaRPr lang="en-US" sz="900" dirty="0"/>
+          </a:p>
+        </p:txBody>
+      </p:sp>
+      <p:sp>
+        <p:nvSpPr>
+          <p:cNvPr id="50" name="Shape 48"/>
+          <p:cNvSpPr/>
+          <p:nvPr/>
+        </p:nvSpPr>
+        <p:spPr>
+          <a:xfrm>
+            <a:off x="7033565" y="4169664"/>
+            <a:ext cx="676656" cy="475488"/>
+          </a:xfrm>
+          <a:prstGeom prst="rect">
+            <a:avLst>
+              <a:gd name="adj" fmla="val 7692"/>
+            </a:avLst>
+          </a:prstGeom>
+          <a:solidFill>
+            <a:srgbClr val="FFFFFF"/>
+          </a:solidFill>
+          <a:ln w="12700">
+            <a:solidFill>
+              <a:srgbClr val="DB2777"/>
+            </a:solidFill>
+            <a:prstDash val="solid"/>
+          </a:ln>
+        </p:spPr>
+      </p:sp>
+      <p:sp>
+        <p:nvSpPr>
+          <p:cNvPr id="51" name="Text 49"/>
+          <p:cNvSpPr/>
+          <p:nvPr/>
+        </p:nvSpPr>
+        <p:spPr>
+          <a:xfrm>
+            <a:off x="7033565" y="4169664"/>
+            <a:ext cx="676656" cy="475488"/>
+          </a:xfrm>
+          <a:prstGeom prst="rect">
+            <a:avLst/>
+          </a:prstGeom>
+          <a:noFill/>
+          <a:ln/>
+        </p:spPr>
+        <p:txBody>
+          <a:bodyPr wrap="square" lIns="0" tIns="0" rIns="0" bIns="0" rtlCol="0" anchor="ctr"/>
+          <a:lstStyle/>
+          <a:p>
+            <a:pPr algn="ctr" indent="0" marL="0">
+              <a:buNone/>
+            </a:pPr>
+            <a:r>
+              <a:rPr lang="en-US" sz="900" b="1" dirty="0">
+                <a:solidFill>
+                  <a:srgbClr val="9D174D"/>
+                </a:solidFill>
+                <a:latin typeface="Trebuchet MS" pitchFamily="34" charset="0"/>
+                <a:ea typeface="Trebuchet MS" pitchFamily="34" charset="-122"/>
+                <a:cs typeface="Trebuchet MS" pitchFamily="34" charset="-120"/>
+              </a:rPr>
+              <a:t>v</a:t>
+            </a:r>
+            <a:endParaRPr lang="en-US" sz="900" dirty="0"/>
+          </a:p>
+        </p:txBody>
+      </p:sp>
+      <p:sp>
+        <p:nvSpPr>
+          <p:cNvPr id="52" name="Shape 50"/>
+          <p:cNvSpPr/>
+          <p:nvPr/>
+        </p:nvSpPr>
+        <p:spPr>
+          <a:xfrm>
+            <a:off x="7759598" y="4169664"/>
+            <a:ext cx="676656" cy="475488"/>
+          </a:xfrm>
+          <a:prstGeom prst="rect">
+            <a:avLst>
+              <a:gd name="adj" fmla="val 7692"/>
+            </a:avLst>
+          </a:prstGeom>
+          <a:solidFill>
+            <a:srgbClr val="FFFFFF"/>
+          </a:solidFill>
+          <a:ln w="12700">
+            <a:solidFill>
+              <a:srgbClr val="DB2777"/>
+            </a:solidFill>
+            <a:prstDash val="solid"/>
+          </a:ln>
+        </p:spPr>
+      </p:sp>
+      <p:sp>
+        <p:nvSpPr>
+          <p:cNvPr id="53" name="Text 51"/>
+          <p:cNvSpPr/>
+          <p:nvPr/>
+        </p:nvSpPr>
+        <p:spPr>
+          <a:xfrm>
+            <a:off x="7759598" y="4169664"/>
+            <a:ext cx="676656" cy="475488"/>
+          </a:xfrm>
+          <a:prstGeom prst="rect">
+            <a:avLst/>
+          </a:prstGeom>
+          <a:noFill/>
+          <a:ln/>
+        </p:spPr>
+        <p:txBody>
+          <a:bodyPr wrap="square" lIns="0" tIns="0" rIns="0" bIns="0" rtlCol="0" anchor="ctr"/>
+          <a:lstStyle/>
+          <a:p>
+            <a:pPr algn="ctr" indent="0" marL="0">
+              <a:buNone/>
+            </a:pPr>
+            <a:r>
+              <a:rPr lang="en-US" sz="900" b="1" dirty="0">
+                <a:solidFill>
+                  <a:srgbClr val="9D174D"/>
+                </a:solidFill>
+                <a:latin typeface="Trebuchet MS" pitchFamily="34" charset="0"/>
+                <a:ea typeface="Trebuchet MS" pitchFamily="34" charset="-122"/>
+                <a:cs typeface="Trebuchet MS" pitchFamily="34" charset="-120"/>
+              </a:rPr>
+              <a:t>e</a:t>
             </a:r>
             <a:endParaRPr lang="en-US" sz="900" dirty="0"/>
           </a:p>
@@ -33692,7 +35184,7 @@
                 <a:ea typeface="Calibri" pitchFamily="34" charset="-122"/>
                 <a:cs typeface="Calibri" pitchFamily="34" charset="-120"/>
               </a:rPr>
-              <a:t>Word Labs  •  wordlabs.app  •  Root: 'correct' = right, accurate, free from error</a:t>
+              <a:t>Word Labs  •  wordlabs.app  •  Root: 'correct' = right; accurate</a:t>
             </a:r>
             <a:endParaRPr lang="en-US" sz="800" dirty="0"/>
           </a:p>
@@ -34861,7 +36353,7 @@
                 <a:ea typeface="Calibri" pitchFamily="34" charset="-122"/>
                 <a:cs typeface="Calibri" pitchFamily="34" charset="-120"/>
               </a:rPr>
-              <a:t>Word Labs  •  wordlabs.app  •  Root: 'correct' = right, accurate, free from error</a:t>
+              <a:t>Word Labs  •  wordlabs.app  •  Root: 'correct' = right; accurate</a:t>
             </a:r>
             <a:endParaRPr lang="en-US" sz="800" dirty="0"/>
           </a:p>
@@ -35290,7 +36782,7 @@
                 <a:ea typeface="Trebuchet MS" pitchFamily="34" charset="-122"/>
                 <a:cs typeface="Trebuchet MS" pitchFamily="34" charset="-120"/>
               </a:rPr>
-              <a:t>-ion</a:t>
+              <a:t>-ed</a:t>
             </a:r>
             <a:endParaRPr lang="en-US" sz="1300" dirty="0"/>
           </a:p>
@@ -35311,7 +36803,7 @@
             <a:avLst/>
           </a:prstGeom>
           <a:solidFill>
-            <a:srgbClr val="DDD6FE"/>
+            <a:srgbClr val="F1F5F9"/>
           </a:solidFill>
           <a:ln w="12700">
             <a:solidFill>
@@ -35323,14 +36815,64 @@
       </p:sp>
       <p:sp>
         <p:nvSpPr>
-          <p:cNvPr id="24" name="Text 22"/>
-          <p:cNvSpPr/>
-          <p:nvPr/>
-        </p:nvSpPr>
-        <p:spPr>
-          <a:xfrm>
-            <a:off x="365760" y="1984248"/>
-            <a:ext cx="2468880" cy="402336"/>
+          <p:cNvPr id="24" name="Shape 22"/>
+          <p:cNvSpPr/>
+          <p:nvPr/>
+        </p:nvSpPr>
+        <p:spPr>
+          <a:xfrm>
+            <a:off x="2971800" y="1984248"/>
+            <a:ext cx="2834640" cy="402336"/>
+          </a:xfrm>
+          <a:prstGeom prst="rect">
+            <a:avLst/>
+          </a:prstGeom>
+          <a:solidFill>
+            <a:srgbClr val="F1F5F9"/>
+          </a:solidFill>
+          <a:ln w="12700">
+            <a:solidFill>
+              <a:srgbClr val="E2E8F0"/>
+            </a:solidFill>
+            <a:prstDash val="solid"/>
+          </a:ln>
+        </p:spPr>
+      </p:sp>
+      <p:sp>
+        <p:nvSpPr>
+          <p:cNvPr id="25" name="Shape 23"/>
+          <p:cNvSpPr/>
+          <p:nvPr/>
+        </p:nvSpPr>
+        <p:spPr>
+          <a:xfrm>
+            <a:off x="5943600" y="1984248"/>
+            <a:ext cx="2834640" cy="402336"/>
+          </a:xfrm>
+          <a:prstGeom prst="rect">
+            <a:avLst/>
+          </a:prstGeom>
+          <a:solidFill>
+            <a:srgbClr val="FCE7F3"/>
+          </a:solidFill>
+          <a:ln w="12700">
+            <a:solidFill>
+              <a:srgbClr val="E2E8F0"/>
+            </a:solidFill>
+            <a:prstDash val="solid"/>
+          </a:ln>
+        </p:spPr>
+      </p:sp>
+      <p:sp>
+        <p:nvSpPr>
+          <p:cNvPr id="26" name="Text 24"/>
+          <p:cNvSpPr/>
+          <p:nvPr/>
+        </p:nvSpPr>
+        <p:spPr>
+          <a:xfrm>
+            <a:off x="5943600" y="1984248"/>
+            <a:ext cx="2834640" cy="402336"/>
           </a:xfrm>
           <a:prstGeom prst="rect">
             <a:avLst/>
@@ -35348,13 +36890,13 @@
             <a:r>
               <a:rPr lang="en-US" sz="1300" b="1" dirty="0">
                 <a:solidFill>
-                  <a:srgbClr val="4C1D95"/>
+                  <a:srgbClr val="9D174D"/>
                 </a:solidFill>
                 <a:latin typeface="Trebuchet MS" pitchFamily="34" charset="0"/>
                 <a:ea typeface="Trebuchet MS" pitchFamily="34" charset="-122"/>
                 <a:cs typeface="Trebuchet MS" pitchFamily="34" charset="-120"/>
               </a:rPr>
-              <a:t>re-</a:t>
+              <a:t>-ing</a:t>
             </a:r>
             <a:endParaRPr lang="en-US" sz="1300" dirty="0"/>
           </a:p>
@@ -35362,20 +36904,45 @@
       </p:sp>
       <p:sp>
         <p:nvSpPr>
-          <p:cNvPr id="25" name="Shape 23"/>
-          <p:cNvSpPr/>
-          <p:nvPr/>
-        </p:nvSpPr>
-        <p:spPr>
-          <a:xfrm>
-            <a:off x="2971800" y="1984248"/>
+          <p:cNvPr id="27" name="Shape 25"/>
+          <p:cNvSpPr/>
+          <p:nvPr/>
+        </p:nvSpPr>
+        <p:spPr>
+          <a:xfrm>
+            <a:off x="365760" y="2404872"/>
+            <a:ext cx="2468880" cy="402336"/>
+          </a:xfrm>
+          <a:prstGeom prst="rect">
+            <a:avLst/>
+          </a:prstGeom>
+          <a:solidFill>
+            <a:srgbClr val="F8FAFC"/>
+          </a:solidFill>
+          <a:ln w="12700">
+            <a:solidFill>
+              <a:srgbClr val="E2E8F0"/>
+            </a:solidFill>
+            <a:prstDash val="solid"/>
+          </a:ln>
+        </p:spPr>
+      </p:sp>
+      <p:sp>
+        <p:nvSpPr>
+          <p:cNvPr id="28" name="Shape 26"/>
+          <p:cNvSpPr/>
+          <p:nvPr/>
+        </p:nvSpPr>
+        <p:spPr>
+          <a:xfrm>
+            <a:off x="2971800" y="2404872"/>
             <a:ext cx="2834640" cy="402336"/>
           </a:xfrm>
           <a:prstGeom prst="rect">
             <a:avLst/>
           </a:prstGeom>
           <a:solidFill>
-            <a:srgbClr val="F1F5F9"/>
+            <a:srgbClr val="F8FAFC"/>
           </a:solidFill>
           <a:ln w="12700">
             <a:solidFill>
@@ -35387,13 +36954,13 @@
       </p:sp>
       <p:sp>
         <p:nvSpPr>
-          <p:cNvPr id="26" name="Shape 24"/>
-          <p:cNvSpPr/>
-          <p:nvPr/>
-        </p:nvSpPr>
-        <p:spPr>
-          <a:xfrm>
-            <a:off x="5943600" y="1984248"/>
+          <p:cNvPr id="29" name="Shape 27"/>
+          <p:cNvSpPr/>
+          <p:nvPr/>
+        </p:nvSpPr>
+        <p:spPr>
+          <a:xfrm>
+            <a:off x="5943600" y="2404872"/>
             <a:ext cx="2834640" cy="402336"/>
           </a:xfrm>
           <a:prstGeom prst="rect">
@@ -35412,13 +36979,13 @@
       </p:sp>
       <p:sp>
         <p:nvSpPr>
-          <p:cNvPr id="27" name="Text 25"/>
-          <p:cNvSpPr/>
-          <p:nvPr/>
-        </p:nvSpPr>
-        <p:spPr>
-          <a:xfrm>
-            <a:off x="5943600" y="1984248"/>
+          <p:cNvPr id="30" name="Text 28"/>
+          <p:cNvSpPr/>
+          <p:nvPr/>
+        </p:nvSpPr>
+        <p:spPr>
+          <a:xfrm>
+            <a:off x="5943600" y="2404872"/>
             <a:ext cx="2834640" cy="402336"/>
           </a:xfrm>
           <a:prstGeom prst="rect">
@@ -35443,7 +37010,7 @@
                 <a:ea typeface="Trebuchet MS" pitchFamily="34" charset="-122"/>
                 <a:cs typeface="Trebuchet MS" pitchFamily="34" charset="-120"/>
               </a:rPr>
-              <a:t>-ly</a:t>
+              <a:t>-ion</a:t>
             </a:r>
             <a:endParaRPr lang="en-US" sz="1300" dirty="0"/>
           </a:p>
@@ -35451,20 +37018,20 @@
       </p:sp>
       <p:sp>
         <p:nvSpPr>
-          <p:cNvPr id="28" name="Shape 26"/>
-          <p:cNvSpPr/>
-          <p:nvPr/>
-        </p:nvSpPr>
-        <p:spPr>
-          <a:xfrm>
-            <a:off x="365760" y="2404872"/>
+          <p:cNvPr id="31" name="Shape 29"/>
+          <p:cNvSpPr/>
+          <p:nvPr/>
+        </p:nvSpPr>
+        <p:spPr>
+          <a:xfrm>
+            <a:off x="365760" y="2825496"/>
             <a:ext cx="2468880" cy="402336"/>
           </a:xfrm>
           <a:prstGeom prst="rect">
             <a:avLst/>
           </a:prstGeom>
           <a:solidFill>
-            <a:srgbClr val="DDD6FE"/>
+            <a:srgbClr val="F1F5F9"/>
           </a:solidFill>
           <a:ln w="12700">
             <a:solidFill>
@@ -35476,14 +37043,64 @@
       </p:sp>
       <p:sp>
         <p:nvSpPr>
-          <p:cNvPr id="29" name="Text 27"/>
-          <p:cNvSpPr/>
-          <p:nvPr/>
-        </p:nvSpPr>
-        <p:spPr>
-          <a:xfrm>
-            <a:off x="365760" y="2404872"/>
-            <a:ext cx="2468880" cy="402336"/>
+          <p:cNvPr id="32" name="Shape 30"/>
+          <p:cNvSpPr/>
+          <p:nvPr/>
+        </p:nvSpPr>
+        <p:spPr>
+          <a:xfrm>
+            <a:off x="2971800" y="2825496"/>
+            <a:ext cx="2834640" cy="402336"/>
+          </a:xfrm>
+          <a:prstGeom prst="rect">
+            <a:avLst/>
+          </a:prstGeom>
+          <a:solidFill>
+            <a:srgbClr val="F1F5F9"/>
+          </a:solidFill>
+          <a:ln w="12700">
+            <a:solidFill>
+              <a:srgbClr val="E2E8F0"/>
+            </a:solidFill>
+            <a:prstDash val="solid"/>
+          </a:ln>
+        </p:spPr>
+      </p:sp>
+      <p:sp>
+        <p:nvSpPr>
+          <p:cNvPr id="33" name="Shape 31"/>
+          <p:cNvSpPr/>
+          <p:nvPr/>
+        </p:nvSpPr>
+        <p:spPr>
+          <a:xfrm>
+            <a:off x="5943600" y="2825496"/>
+            <a:ext cx="2834640" cy="402336"/>
+          </a:xfrm>
+          <a:prstGeom prst="rect">
+            <a:avLst/>
+          </a:prstGeom>
+          <a:solidFill>
+            <a:srgbClr val="FCE7F3"/>
+          </a:solidFill>
+          <a:ln w="12700">
+            <a:solidFill>
+              <a:srgbClr val="E2E8F0"/>
+            </a:solidFill>
+            <a:prstDash val="solid"/>
+          </a:ln>
+        </p:spPr>
+      </p:sp>
+      <p:sp>
+        <p:nvSpPr>
+          <p:cNvPr id="34" name="Text 32"/>
+          <p:cNvSpPr/>
+          <p:nvPr/>
+        </p:nvSpPr>
+        <p:spPr>
+          <a:xfrm>
+            <a:off x="5943600" y="2825496"/>
+            <a:ext cx="2834640" cy="402336"/>
           </a:xfrm>
           <a:prstGeom prst="rect">
             <a:avLst/>
@@ -35501,13 +37118,13 @@
             <a:r>
               <a:rPr lang="en-US" sz="1300" b="1" dirty="0">
                 <a:solidFill>
-                  <a:srgbClr val="4C1D95"/>
+                  <a:srgbClr val="9D174D"/>
                 </a:solidFill>
                 <a:latin typeface="Trebuchet MS" pitchFamily="34" charset="0"/>
                 <a:ea typeface="Trebuchet MS" pitchFamily="34" charset="-122"/>
                 <a:cs typeface="Trebuchet MS" pitchFamily="34" charset="-120"/>
               </a:rPr>
-              <a:t>un-</a:t>
+              <a:t>-ive</a:t>
             </a:r>
             <a:endParaRPr lang="en-US" sz="1300" dirty="0"/>
           </a:p>
@@ -35515,13 +37132,38 @@
       </p:sp>
       <p:sp>
         <p:nvSpPr>
-          <p:cNvPr id="30" name="Shape 28"/>
-          <p:cNvSpPr/>
-          <p:nvPr/>
-        </p:nvSpPr>
-        <p:spPr>
-          <a:xfrm>
-            <a:off x="2971800" y="2404872"/>
+          <p:cNvPr id="35" name="Shape 33"/>
+          <p:cNvSpPr/>
+          <p:nvPr/>
+        </p:nvSpPr>
+        <p:spPr>
+          <a:xfrm>
+            <a:off x="365760" y="3246120"/>
+            <a:ext cx="2468880" cy="402336"/>
+          </a:xfrm>
+          <a:prstGeom prst="rect">
+            <a:avLst/>
+          </a:prstGeom>
+          <a:solidFill>
+            <a:srgbClr val="F8FAFC"/>
+          </a:solidFill>
+          <a:ln w="12700">
+            <a:solidFill>
+              <a:srgbClr val="E2E8F0"/>
+            </a:solidFill>
+            <a:prstDash val="solid"/>
+          </a:ln>
+        </p:spPr>
+      </p:sp>
+      <p:sp>
+        <p:nvSpPr>
+          <p:cNvPr id="36" name="Shape 34"/>
+          <p:cNvSpPr/>
+          <p:nvPr/>
+        </p:nvSpPr>
+        <p:spPr>
+          <a:xfrm>
+            <a:off x="2971800" y="3246120"/>
             <a:ext cx="2834640" cy="402336"/>
           </a:xfrm>
           <a:prstGeom prst="rect">
@@ -35540,13 +37182,13 @@
       </p:sp>
       <p:sp>
         <p:nvSpPr>
-          <p:cNvPr id="31" name="Shape 29"/>
-          <p:cNvSpPr/>
-          <p:nvPr/>
-        </p:nvSpPr>
-        <p:spPr>
-          <a:xfrm>
-            <a:off x="5943600" y="2404872"/>
+          <p:cNvPr id="37" name="Shape 35"/>
+          <p:cNvSpPr/>
+          <p:nvPr/>
+        </p:nvSpPr>
+        <p:spPr>
+          <a:xfrm>
+            <a:off x="5943600" y="3246120"/>
             <a:ext cx="2834640" cy="402336"/>
           </a:xfrm>
           <a:prstGeom prst="rect">
@@ -35565,13 +37207,13 @@
       </p:sp>
       <p:sp>
         <p:nvSpPr>
-          <p:cNvPr id="32" name="Text 30"/>
-          <p:cNvSpPr/>
-          <p:nvPr/>
-        </p:nvSpPr>
-        <p:spPr>
-          <a:xfrm>
-            <a:off x="5943600" y="2404872"/>
+          <p:cNvPr id="38" name="Text 36"/>
+          <p:cNvSpPr/>
+          <p:nvPr/>
+        </p:nvSpPr>
+        <p:spPr>
+          <a:xfrm>
+            <a:off x="5943600" y="3246120"/>
             <a:ext cx="2834640" cy="402336"/>
           </a:xfrm>
           <a:prstGeom prst="rect">
@@ -35596,7 +37238,7 @@
                 <a:ea typeface="Trebuchet MS" pitchFamily="34" charset="-122"/>
                 <a:cs typeface="Trebuchet MS" pitchFamily="34" charset="-120"/>
               </a:rPr>
-              <a:t>-ness</a:t>
+              <a:t>-ly</a:t>
             </a:r>
             <a:endParaRPr lang="en-US" sz="1300" dirty="0"/>
           </a:p>
@@ -35604,20 +37246,20 @@
       </p:sp>
       <p:sp>
         <p:nvSpPr>
-          <p:cNvPr id="33" name="Shape 31"/>
-          <p:cNvSpPr/>
-          <p:nvPr/>
-        </p:nvSpPr>
-        <p:spPr>
-          <a:xfrm>
-            <a:off x="365760" y="2825496"/>
+          <p:cNvPr id="39" name="Shape 37"/>
+          <p:cNvSpPr/>
+          <p:nvPr/>
+        </p:nvSpPr>
+        <p:spPr>
+          <a:xfrm>
+            <a:off x="365760" y="3666744"/>
             <a:ext cx="2468880" cy="402336"/>
           </a:xfrm>
           <a:prstGeom prst="rect">
             <a:avLst/>
           </a:prstGeom>
           <a:solidFill>
-            <a:srgbClr val="DDD6FE"/>
+            <a:srgbClr val="F1F5F9"/>
           </a:solidFill>
           <a:ln w="12700">
             <a:solidFill>
@@ -35629,14 +37271,64 @@
       </p:sp>
       <p:sp>
         <p:nvSpPr>
-          <p:cNvPr id="34" name="Text 32"/>
-          <p:cNvSpPr/>
-          <p:nvPr/>
-        </p:nvSpPr>
-        <p:spPr>
-          <a:xfrm>
-            <a:off x="365760" y="2825496"/>
-            <a:ext cx="2468880" cy="402336"/>
+          <p:cNvPr id="40" name="Shape 38"/>
+          <p:cNvSpPr/>
+          <p:nvPr/>
+        </p:nvSpPr>
+        <p:spPr>
+          <a:xfrm>
+            <a:off x="2971800" y="3666744"/>
+            <a:ext cx="2834640" cy="402336"/>
+          </a:xfrm>
+          <a:prstGeom prst="rect">
+            <a:avLst/>
+          </a:prstGeom>
+          <a:solidFill>
+            <a:srgbClr val="F1F5F9"/>
+          </a:solidFill>
+          <a:ln w="12700">
+            <a:solidFill>
+              <a:srgbClr val="E2E8F0"/>
+            </a:solidFill>
+            <a:prstDash val="solid"/>
+          </a:ln>
+        </p:spPr>
+      </p:sp>
+      <p:sp>
+        <p:nvSpPr>
+          <p:cNvPr id="41" name="Shape 39"/>
+          <p:cNvSpPr/>
+          <p:nvPr/>
+        </p:nvSpPr>
+        <p:spPr>
+          <a:xfrm>
+            <a:off x="5943600" y="3666744"/>
+            <a:ext cx="2834640" cy="402336"/>
+          </a:xfrm>
+          <a:prstGeom prst="rect">
+            <a:avLst/>
+          </a:prstGeom>
+          <a:solidFill>
+            <a:srgbClr val="FCE7F3"/>
+          </a:solidFill>
+          <a:ln w="12700">
+            <a:solidFill>
+              <a:srgbClr val="E2E8F0"/>
+            </a:solidFill>
+            <a:prstDash val="solid"/>
+          </a:ln>
+        </p:spPr>
+      </p:sp>
+      <p:sp>
+        <p:nvSpPr>
+          <p:cNvPr id="42" name="Text 40"/>
+          <p:cNvSpPr/>
+          <p:nvPr/>
+        </p:nvSpPr>
+        <p:spPr>
+          <a:xfrm>
+            <a:off x="5943600" y="3666744"/>
+            <a:ext cx="2834640" cy="402336"/>
           </a:xfrm>
           <a:prstGeom prst="rect">
             <a:avLst/>
@@ -35654,13 +37346,13 @@
             <a:r>
               <a:rPr lang="en-US" sz="1300" b="1" dirty="0">
                 <a:solidFill>
-                  <a:srgbClr val="4C1D95"/>
+                  <a:srgbClr val="9D174D"/>
                 </a:solidFill>
                 <a:latin typeface="Trebuchet MS" pitchFamily="34" charset="0"/>
                 <a:ea typeface="Trebuchet MS" pitchFamily="34" charset="-122"/>
                 <a:cs typeface="Trebuchet MS" pitchFamily="34" charset="-120"/>
               </a:rPr>
-              <a:t>over-</a:t>
+              <a:t>-ness</a:t>
             </a:r>
             <a:endParaRPr lang="en-US" sz="1300" dirty="0"/>
           </a:p>
@@ -35668,280 +37360,236 @@
       </p:sp>
       <p:sp>
         <p:nvSpPr>
-          <p:cNvPr id="35" name="Shape 33"/>
-          <p:cNvSpPr/>
-          <p:nvPr/>
-        </p:nvSpPr>
-        <p:spPr>
-          <a:xfrm>
-            <a:off x="2971800" y="2825496"/>
-            <a:ext cx="2834640" cy="402336"/>
-          </a:xfrm>
-          <a:prstGeom prst="rect">
-            <a:avLst/>
-          </a:prstGeom>
-          <a:solidFill>
-            <a:srgbClr val="F1F5F9"/>
-          </a:solidFill>
-          <a:ln w="12700">
-            <a:solidFill>
-              <a:srgbClr val="E2E8F0"/>
-            </a:solidFill>
-            <a:prstDash val="solid"/>
-          </a:ln>
-        </p:spPr>
-      </p:sp>
-      <p:sp>
-        <p:nvSpPr>
-          <p:cNvPr id="36" name="Shape 34"/>
-          <p:cNvSpPr/>
-          <p:nvPr/>
-        </p:nvSpPr>
-        <p:spPr>
-          <a:xfrm>
-            <a:off x="5943600" y="2825496"/>
-            <a:ext cx="2834640" cy="402336"/>
-          </a:xfrm>
-          <a:prstGeom prst="rect">
-            <a:avLst/>
-          </a:prstGeom>
-          <a:solidFill>
-            <a:srgbClr val="FCE7F3"/>
-          </a:solidFill>
-          <a:ln w="12700">
-            <a:solidFill>
-              <a:srgbClr val="E2E8F0"/>
-            </a:solidFill>
-            <a:prstDash val="solid"/>
-          </a:ln>
-        </p:spPr>
-      </p:sp>
-      <p:sp>
-        <p:nvSpPr>
-          <p:cNvPr id="37" name="Text 35"/>
-          <p:cNvSpPr/>
-          <p:nvPr/>
-        </p:nvSpPr>
-        <p:spPr>
-          <a:xfrm>
-            <a:off x="5943600" y="2825496"/>
-            <a:ext cx="2834640" cy="402336"/>
-          </a:xfrm>
-          <a:prstGeom prst="rect">
-            <a:avLst/>
-          </a:prstGeom>
-          <a:noFill/>
-          <a:ln/>
-        </p:spPr>
-        <p:txBody>
-          <a:bodyPr wrap="square" lIns="0" tIns="0" rIns="0" bIns="0" rtlCol="0" anchor="ctr"/>
-          <a:lstStyle/>
-          <a:p>
-            <a:pPr algn="ctr" indent="0" marL="0">
-              <a:buNone/>
-            </a:pPr>
-            <a:r>
-              <a:rPr lang="en-US" sz="1300" b="1" dirty="0">
-                <a:solidFill>
-                  <a:srgbClr val="9D174D"/>
+          <p:cNvPr id="43" name="Text 41"/>
+          <p:cNvSpPr/>
+          <p:nvPr/>
+        </p:nvSpPr>
+        <p:spPr>
+          <a:xfrm>
+            <a:off x="365760" y="3611880"/>
+            <a:ext cx="1828800" cy="347472"/>
+          </a:xfrm>
+          <a:prstGeom prst="rect">
+            <a:avLst/>
+          </a:prstGeom>
+          <a:noFill/>
+          <a:ln/>
+        </p:spPr>
+        <p:txBody>
+          <a:bodyPr wrap="square" lIns="0" tIns="0" rIns="0" bIns="0" rtlCol="0" anchor="ctr"/>
+          <a:lstStyle/>
+          <a:p>
+            <a:pPr algn="l" indent="0" marL="0">
+              <a:buNone/>
+            </a:pPr>
+            <a:r>
+              <a:rPr lang="en-US" sz="1200" b="1" dirty="0">
+                <a:solidFill>
+                  <a:srgbClr val="0F172A"/>
                 </a:solidFill>
                 <a:latin typeface="Trebuchet MS" pitchFamily="34" charset="0"/>
                 <a:ea typeface="Trebuchet MS" pitchFamily="34" charset="-122"/>
                 <a:cs typeface="Trebuchet MS" pitchFamily="34" charset="-120"/>
               </a:rPr>
-              <a:t>-ed</a:t>
-            </a:r>
-            <a:endParaRPr lang="en-US" sz="1300" dirty="0"/>
-          </a:p>
-        </p:txBody>
-      </p:sp>
-      <p:sp>
-        <p:nvSpPr>
-          <p:cNvPr id="38" name="Shape 36"/>
-          <p:cNvSpPr/>
-          <p:nvPr/>
-        </p:nvSpPr>
-        <p:spPr>
-          <a:xfrm>
-            <a:off x="365760" y="3246120"/>
-            <a:ext cx="2468880" cy="402336"/>
-          </a:xfrm>
-          <a:prstGeom prst="rect">
-            <a:avLst/>
-          </a:prstGeom>
-          <a:solidFill>
-            <a:srgbClr val="DDD6FE"/>
-          </a:solidFill>
-          <a:ln w="12700">
-            <a:solidFill>
-              <a:srgbClr val="E2E8F0"/>
-            </a:solidFill>
-            <a:prstDash val="solid"/>
-          </a:ln>
-        </p:spPr>
-      </p:sp>
-      <p:sp>
-        <p:nvSpPr>
-          <p:cNvPr id="39" name="Text 37"/>
-          <p:cNvSpPr/>
-          <p:nvPr/>
-        </p:nvSpPr>
-        <p:spPr>
-          <a:xfrm>
-            <a:off x="365760" y="3246120"/>
-            <a:ext cx="2468880" cy="402336"/>
-          </a:xfrm>
-          <a:prstGeom prst="rect">
-            <a:avLst/>
-          </a:prstGeom>
-          <a:noFill/>
-          <a:ln/>
-        </p:spPr>
-        <p:txBody>
-          <a:bodyPr wrap="square" lIns="0" tIns="0" rIns="0" bIns="0" rtlCol="0" anchor="ctr"/>
-          <a:lstStyle/>
-          <a:p>
-            <a:pPr algn="ctr" indent="0" marL="0">
-              <a:buNone/>
-            </a:pPr>
-            <a:r>
-              <a:rPr lang="en-US" sz="1300" b="1" dirty="0">
-                <a:solidFill>
-                  <a:srgbClr val="4C1D95"/>
+              <a:t>Sample words:</a:t>
+            </a:r>
+            <a:endParaRPr lang="en-US" sz="1200" dirty="0"/>
+          </a:p>
+        </p:txBody>
+      </p:sp>
+      <p:sp>
+        <p:nvSpPr>
+          <p:cNvPr id="44" name="Shape 42"/>
+          <p:cNvSpPr/>
+          <p:nvPr/>
+        </p:nvSpPr>
+        <p:spPr>
+          <a:xfrm>
+            <a:off x="365760" y="4023360"/>
+            <a:ext cx="2011680" cy="402336"/>
+          </a:xfrm>
+          <a:prstGeom prst="rect">
+            <a:avLst>
+              <a:gd name="adj" fmla="val 13636"/>
+            </a:avLst>
+          </a:prstGeom>
+          <a:solidFill>
+            <a:srgbClr val="EEF2FF"/>
+          </a:solidFill>
+          <a:ln w="12700">
+            <a:solidFill>
+              <a:srgbClr val="6366F1"/>
+            </a:solidFill>
+            <a:prstDash val="solid"/>
+          </a:ln>
+        </p:spPr>
+      </p:sp>
+      <p:sp>
+        <p:nvSpPr>
+          <p:cNvPr id="45" name="Text 43"/>
+          <p:cNvSpPr/>
+          <p:nvPr/>
+        </p:nvSpPr>
+        <p:spPr>
+          <a:xfrm>
+            <a:off x="365760" y="4023360"/>
+            <a:ext cx="2011680" cy="402336"/>
+          </a:xfrm>
+          <a:prstGeom prst="rect">
+            <a:avLst/>
+          </a:prstGeom>
+          <a:noFill/>
+          <a:ln/>
+        </p:spPr>
+        <p:txBody>
+          <a:bodyPr wrap="square" lIns="0" tIns="0" rIns="0" bIns="0" rtlCol="0" anchor="ctr"/>
+          <a:lstStyle/>
+          <a:p>
+            <a:pPr algn="ctr" indent="0" marL="0">
+              <a:buNone/>
+            </a:pPr>
+            <a:r>
+              <a:rPr lang="en-US" sz="1200" b="1" dirty="0">
+                <a:solidFill>
+                  <a:srgbClr val="4338CA"/>
                 </a:solidFill>
                 <a:latin typeface="Trebuchet MS" pitchFamily="34" charset="0"/>
                 <a:ea typeface="Trebuchet MS" pitchFamily="34" charset="-122"/>
                 <a:cs typeface="Trebuchet MS" pitchFamily="34" charset="-120"/>
               </a:rPr>
-              <a:t>self-</a:t>
-            </a:r>
-            <a:endParaRPr lang="en-US" sz="1300" dirty="0"/>
-          </a:p>
-        </p:txBody>
-      </p:sp>
-      <p:sp>
-        <p:nvSpPr>
-          <p:cNvPr id="40" name="Shape 38"/>
-          <p:cNvSpPr/>
-          <p:nvPr/>
-        </p:nvSpPr>
-        <p:spPr>
-          <a:xfrm>
-            <a:off x="2971800" y="3246120"/>
-            <a:ext cx="2834640" cy="402336"/>
-          </a:xfrm>
-          <a:prstGeom prst="rect">
-            <a:avLst/>
-          </a:prstGeom>
-          <a:solidFill>
-            <a:srgbClr val="F8FAFC"/>
-          </a:solidFill>
-          <a:ln w="12700">
-            <a:solidFill>
-              <a:srgbClr val="E2E8F0"/>
-            </a:solidFill>
-            <a:prstDash val="solid"/>
-          </a:ln>
-        </p:spPr>
-      </p:sp>
-      <p:sp>
-        <p:nvSpPr>
-          <p:cNvPr id="41" name="Shape 39"/>
-          <p:cNvSpPr/>
-          <p:nvPr/>
-        </p:nvSpPr>
-        <p:spPr>
-          <a:xfrm>
-            <a:off x="5943600" y="3246120"/>
-            <a:ext cx="2834640" cy="402336"/>
-          </a:xfrm>
-          <a:prstGeom prst="rect">
-            <a:avLst/>
-          </a:prstGeom>
-          <a:solidFill>
-            <a:srgbClr val="FCE7F3"/>
-          </a:solidFill>
-          <a:ln w="12700">
-            <a:solidFill>
-              <a:srgbClr val="E2E8F0"/>
-            </a:solidFill>
-            <a:prstDash val="solid"/>
-          </a:ln>
-        </p:spPr>
-      </p:sp>
-      <p:sp>
-        <p:nvSpPr>
-          <p:cNvPr id="42" name="Text 40"/>
-          <p:cNvSpPr/>
-          <p:nvPr/>
-        </p:nvSpPr>
-        <p:spPr>
-          <a:xfrm>
-            <a:off x="5943600" y="3246120"/>
-            <a:ext cx="2834640" cy="402336"/>
-          </a:xfrm>
-          <a:prstGeom prst="rect">
-            <a:avLst/>
-          </a:prstGeom>
-          <a:noFill/>
-          <a:ln/>
-        </p:spPr>
-        <p:txBody>
-          <a:bodyPr wrap="square" lIns="0" tIns="0" rIns="0" bIns="0" rtlCol="0" anchor="ctr"/>
-          <a:lstStyle/>
-          <a:p>
-            <a:pPr algn="ctr" indent="0" marL="0">
-              <a:buNone/>
-            </a:pPr>
-            <a:r>
-              <a:rPr lang="en-US" sz="1300" b="1" dirty="0">
-                <a:solidFill>
-                  <a:srgbClr val="9D174D"/>
+              <a:t>correct</a:t>
+            </a:r>
+            <a:endParaRPr lang="en-US" sz="1200" dirty="0"/>
+          </a:p>
+        </p:txBody>
+      </p:sp>
+      <p:sp>
+        <p:nvSpPr>
+          <p:cNvPr id="46" name="Shape 44"/>
+          <p:cNvSpPr/>
+          <p:nvPr/>
+        </p:nvSpPr>
+        <p:spPr>
+          <a:xfrm>
+            <a:off x="2542032" y="4023360"/>
+            <a:ext cx="2011680" cy="402336"/>
+          </a:xfrm>
+          <a:prstGeom prst="rect">
+            <a:avLst>
+              <a:gd name="adj" fmla="val 13636"/>
+            </a:avLst>
+          </a:prstGeom>
+          <a:solidFill>
+            <a:srgbClr val="EEF2FF"/>
+          </a:solidFill>
+          <a:ln w="12700">
+            <a:solidFill>
+              <a:srgbClr val="6366F1"/>
+            </a:solidFill>
+            <a:prstDash val="solid"/>
+          </a:ln>
+        </p:spPr>
+      </p:sp>
+      <p:sp>
+        <p:nvSpPr>
+          <p:cNvPr id="47" name="Text 45"/>
+          <p:cNvSpPr/>
+          <p:nvPr/>
+        </p:nvSpPr>
+        <p:spPr>
+          <a:xfrm>
+            <a:off x="2542032" y="4023360"/>
+            <a:ext cx="2011680" cy="402336"/>
+          </a:xfrm>
+          <a:prstGeom prst="rect">
+            <a:avLst/>
+          </a:prstGeom>
+          <a:noFill/>
+          <a:ln/>
+        </p:spPr>
+        <p:txBody>
+          <a:bodyPr wrap="square" lIns="0" tIns="0" rIns="0" bIns="0" rtlCol="0" anchor="ctr"/>
+          <a:lstStyle/>
+          <a:p>
+            <a:pPr algn="ctr" indent="0" marL="0">
+              <a:buNone/>
+            </a:pPr>
+            <a:r>
+              <a:rPr lang="en-US" sz="1200" b="1" dirty="0">
+                <a:solidFill>
+                  <a:srgbClr val="4338CA"/>
                 </a:solidFill>
                 <a:latin typeface="Trebuchet MS" pitchFamily="34" charset="0"/>
                 <a:ea typeface="Trebuchet MS" pitchFamily="34" charset="-122"/>
                 <a:cs typeface="Trebuchet MS" pitchFamily="34" charset="-120"/>
               </a:rPr>
-              <a:t>-or</a:t>
-            </a:r>
-            <a:endParaRPr lang="en-US" sz="1300" dirty="0"/>
-          </a:p>
-        </p:txBody>
-      </p:sp>
-      <p:sp>
-        <p:nvSpPr>
-          <p:cNvPr id="43" name="Text 41"/>
-          <p:cNvSpPr/>
-          <p:nvPr/>
-        </p:nvSpPr>
-        <p:spPr>
-          <a:xfrm>
-            <a:off x="365760" y="3611880"/>
-            <a:ext cx="1828800" cy="347472"/>
-          </a:xfrm>
-          <a:prstGeom prst="rect">
-            <a:avLst/>
-          </a:prstGeom>
-          <a:noFill/>
-          <a:ln/>
-        </p:spPr>
-        <p:txBody>
-          <a:bodyPr wrap="square" lIns="0" tIns="0" rIns="0" bIns="0" rtlCol="0" anchor="ctr"/>
-          <a:lstStyle/>
-          <a:p>
-            <a:pPr algn="l" indent="0" marL="0">
+              <a:t>corrects</a:t>
+            </a:r>
+            <a:endParaRPr lang="en-US" sz="1200" dirty="0"/>
+          </a:p>
+        </p:txBody>
+      </p:sp>
+      <p:sp>
+        <p:nvSpPr>
+          <p:cNvPr id="48" name="Shape 46"/>
+          <p:cNvSpPr/>
+          <p:nvPr/>
+        </p:nvSpPr>
+        <p:spPr>
+          <a:xfrm>
+            <a:off x="4718304" y="4023360"/>
+            <a:ext cx="2011680" cy="402336"/>
+          </a:xfrm>
+          <a:prstGeom prst="rect">
+            <a:avLst>
+              <a:gd name="adj" fmla="val 13636"/>
+            </a:avLst>
+          </a:prstGeom>
+          <a:solidFill>
+            <a:srgbClr val="EEF2FF"/>
+          </a:solidFill>
+          <a:ln w="12700">
+            <a:solidFill>
+              <a:srgbClr val="6366F1"/>
+            </a:solidFill>
+            <a:prstDash val="solid"/>
+          </a:ln>
+        </p:spPr>
+      </p:sp>
+      <p:sp>
+        <p:nvSpPr>
+          <p:cNvPr id="49" name="Text 47"/>
+          <p:cNvSpPr/>
+          <p:nvPr/>
+        </p:nvSpPr>
+        <p:spPr>
+          <a:xfrm>
+            <a:off x="4718304" y="4023360"/>
+            <a:ext cx="2011680" cy="402336"/>
+          </a:xfrm>
+          <a:prstGeom prst="rect">
+            <a:avLst/>
+          </a:prstGeom>
+          <a:noFill/>
+          <a:ln/>
+        </p:spPr>
+        <p:txBody>
+          <a:bodyPr wrap="square" lIns="0" tIns="0" rIns="0" bIns="0" rtlCol="0" anchor="ctr"/>
+          <a:lstStyle/>
+          <a:p>
+            <a:pPr algn="ctr" indent="0" marL="0">
               <a:buNone/>
             </a:pPr>
             <a:r>
               <a:rPr lang="en-US" sz="1200" b="1" dirty="0">
                 <a:solidFill>
-                  <a:srgbClr val="0F172A"/>
+                  <a:srgbClr val="4338CA"/>
                 </a:solidFill>
                 <a:latin typeface="Trebuchet MS" pitchFamily="34" charset="0"/>
                 <a:ea typeface="Trebuchet MS" pitchFamily="34" charset="-122"/>
                 <a:cs typeface="Trebuchet MS" pitchFamily="34" charset="-120"/>
               </a:rPr>
-              <a:t>Sample words:</a:t>
+              <a:t>corrected</a:t>
             </a:r>
             <a:endParaRPr lang="en-US" sz="1200" dirty="0"/>
           </a:p>
@@ -35949,13 +37597,13 @@
       </p:sp>
       <p:sp>
         <p:nvSpPr>
-          <p:cNvPr id="44" name="Shape 42"/>
-          <p:cNvSpPr/>
-          <p:nvPr/>
-        </p:nvSpPr>
-        <p:spPr>
-          <a:xfrm>
-            <a:off x="365760" y="4023360"/>
+          <p:cNvPr id="50" name="Shape 48"/>
+          <p:cNvSpPr/>
+          <p:nvPr/>
+        </p:nvSpPr>
+        <p:spPr>
+          <a:xfrm>
+            <a:off x="6894576" y="4023360"/>
             <a:ext cx="2011680" cy="402336"/>
           </a:xfrm>
           <a:prstGeom prst="rect">
@@ -35976,13 +37624,13 @@
       </p:sp>
       <p:sp>
         <p:nvSpPr>
-          <p:cNvPr id="45" name="Text 43"/>
-          <p:cNvSpPr/>
-          <p:nvPr/>
-        </p:nvSpPr>
-        <p:spPr>
-          <a:xfrm>
-            <a:off x="365760" y="4023360"/>
+          <p:cNvPr id="51" name="Text 49"/>
+          <p:cNvSpPr/>
+          <p:nvPr/>
+        </p:nvSpPr>
+        <p:spPr>
+          <a:xfrm>
+            <a:off x="6894576" y="4023360"/>
             <a:ext cx="2011680" cy="402336"/>
           </a:xfrm>
           <a:prstGeom prst="rect">
@@ -36007,7 +37655,7 @@
                 <a:ea typeface="Trebuchet MS" pitchFamily="34" charset="-122"/>
                 <a:cs typeface="Trebuchet MS" pitchFamily="34" charset="-120"/>
               </a:rPr>
-              <a:t>correct</a:t>
+              <a:t>correctly</a:t>
             </a:r>
             <a:endParaRPr lang="en-US" sz="1200" dirty="0"/>
           </a:p>
@@ -36015,13 +37663,13 @@
       </p:sp>
       <p:sp>
         <p:nvSpPr>
-          <p:cNvPr id="46" name="Shape 44"/>
-          <p:cNvSpPr/>
-          <p:nvPr/>
-        </p:nvSpPr>
-        <p:spPr>
-          <a:xfrm>
-            <a:off x="2542032" y="4023360"/>
+          <p:cNvPr id="52" name="Shape 50"/>
+          <p:cNvSpPr/>
+          <p:nvPr/>
+        </p:nvSpPr>
+        <p:spPr>
+          <a:xfrm>
+            <a:off x="365760" y="4498848"/>
             <a:ext cx="2011680" cy="402336"/>
           </a:xfrm>
           <a:prstGeom prst="rect">
@@ -36042,13 +37690,13 @@
       </p:sp>
       <p:sp>
         <p:nvSpPr>
-          <p:cNvPr id="47" name="Text 45"/>
-          <p:cNvSpPr/>
-          <p:nvPr/>
-        </p:nvSpPr>
-        <p:spPr>
-          <a:xfrm>
-            <a:off x="2542032" y="4023360"/>
+          <p:cNvPr id="53" name="Text 51"/>
+          <p:cNvSpPr/>
+          <p:nvPr/>
+        </p:nvSpPr>
+        <p:spPr>
+          <a:xfrm>
+            <a:off x="365760" y="4498848"/>
             <a:ext cx="2011680" cy="402336"/>
           </a:xfrm>
           <a:prstGeom prst="rect">
@@ -36081,13 +37729,13 @@
       </p:sp>
       <p:sp>
         <p:nvSpPr>
-          <p:cNvPr id="48" name="Shape 46"/>
-          <p:cNvSpPr/>
-          <p:nvPr/>
-        </p:nvSpPr>
-        <p:spPr>
-          <a:xfrm>
-            <a:off x="4718304" y="4023360"/>
+          <p:cNvPr id="54" name="Shape 52"/>
+          <p:cNvSpPr/>
+          <p:nvPr/>
+        </p:nvSpPr>
+        <p:spPr>
+          <a:xfrm>
+            <a:off x="2542032" y="4498848"/>
             <a:ext cx="2011680" cy="402336"/>
           </a:xfrm>
           <a:prstGeom prst="rect">
@@ -36108,13 +37756,13 @@
       </p:sp>
       <p:sp>
         <p:nvSpPr>
-          <p:cNvPr id="49" name="Text 47"/>
-          <p:cNvSpPr/>
-          <p:nvPr/>
-        </p:nvSpPr>
-        <p:spPr>
-          <a:xfrm>
-            <a:off x="4718304" y="4023360"/>
+          <p:cNvPr id="55" name="Text 53"/>
+          <p:cNvSpPr/>
+          <p:nvPr/>
+        </p:nvSpPr>
+        <p:spPr>
+          <a:xfrm>
+            <a:off x="2542032" y="4498848"/>
             <a:ext cx="2011680" cy="402336"/>
           </a:xfrm>
           <a:prstGeom prst="rect">
@@ -36139,7 +37787,7 @@
                 <a:ea typeface="Trebuchet MS" pitchFamily="34" charset="-122"/>
                 <a:cs typeface="Trebuchet MS" pitchFamily="34" charset="-120"/>
               </a:rPr>
-              <a:t>correction</a:t>
+              <a:t>correcting</a:t>
             </a:r>
             <a:endParaRPr lang="en-US" sz="1200" dirty="0"/>
           </a:p>
@@ -36147,13 +37795,13 @@
       </p:sp>
       <p:sp>
         <p:nvSpPr>
-          <p:cNvPr id="50" name="Shape 48"/>
-          <p:cNvSpPr/>
-          <p:nvPr/>
-        </p:nvSpPr>
-        <p:spPr>
-          <a:xfrm>
-            <a:off x="6894576" y="4023360"/>
+          <p:cNvPr id="56" name="Shape 54"/>
+          <p:cNvSpPr/>
+          <p:nvPr/>
+        </p:nvSpPr>
+        <p:spPr>
+          <a:xfrm>
+            <a:off x="4718304" y="4498848"/>
             <a:ext cx="2011680" cy="402336"/>
           </a:xfrm>
           <a:prstGeom prst="rect">
@@ -36174,13 +37822,13 @@
       </p:sp>
       <p:sp>
         <p:nvSpPr>
-          <p:cNvPr id="51" name="Text 49"/>
-          <p:cNvSpPr/>
-          <p:nvPr/>
-        </p:nvSpPr>
-        <p:spPr>
-          <a:xfrm>
-            <a:off x="6894576" y="4023360"/>
+          <p:cNvPr id="57" name="Text 55"/>
+          <p:cNvSpPr/>
+          <p:nvPr/>
+        </p:nvSpPr>
+        <p:spPr>
+          <a:xfrm>
+            <a:off x="4718304" y="4498848"/>
             <a:ext cx="2011680" cy="402336"/>
           </a:xfrm>
           <a:prstGeom prst="rect">
@@ -36205,271 +37853,7 @@
                 <a:ea typeface="Trebuchet MS" pitchFamily="34" charset="-122"/>
                 <a:cs typeface="Trebuchet MS" pitchFamily="34" charset="-120"/>
               </a:rPr>
-              <a:t>correctly</a:t>
-            </a:r>
-            <a:endParaRPr lang="en-US" sz="1200" dirty="0"/>
-          </a:p>
-        </p:txBody>
-      </p:sp>
-      <p:sp>
-        <p:nvSpPr>
-          <p:cNvPr id="52" name="Shape 50"/>
-          <p:cNvSpPr/>
-          <p:nvPr/>
-        </p:nvSpPr>
-        <p:spPr>
-          <a:xfrm>
-            <a:off x="365760" y="4498848"/>
-            <a:ext cx="2011680" cy="402336"/>
-          </a:xfrm>
-          <a:prstGeom prst="rect">
-            <a:avLst>
-              <a:gd name="adj" fmla="val 13636"/>
-            </a:avLst>
-          </a:prstGeom>
-          <a:solidFill>
-            <a:srgbClr val="EEF2FF"/>
-          </a:solidFill>
-          <a:ln w="12700">
-            <a:solidFill>
-              <a:srgbClr val="6366F1"/>
-            </a:solidFill>
-            <a:prstDash val="solid"/>
-          </a:ln>
-        </p:spPr>
-      </p:sp>
-      <p:sp>
-        <p:nvSpPr>
-          <p:cNvPr id="53" name="Text 51"/>
-          <p:cNvSpPr/>
-          <p:nvPr/>
-        </p:nvSpPr>
-        <p:spPr>
-          <a:xfrm>
-            <a:off x="365760" y="4498848"/>
-            <a:ext cx="2011680" cy="402336"/>
-          </a:xfrm>
-          <a:prstGeom prst="rect">
-            <a:avLst/>
-          </a:prstGeom>
-          <a:noFill/>
-          <a:ln/>
-        </p:spPr>
-        <p:txBody>
-          <a:bodyPr wrap="square" lIns="0" tIns="0" rIns="0" bIns="0" rtlCol="0" anchor="ctr"/>
-          <a:lstStyle/>
-          <a:p>
-            <a:pPr algn="ctr" indent="0" marL="0">
-              <a:buNone/>
-            </a:pPr>
-            <a:r>
-              <a:rPr lang="en-US" sz="1200" b="1" dirty="0">
-                <a:solidFill>
-                  <a:srgbClr val="4338CA"/>
-                </a:solidFill>
-                <a:latin typeface="Trebuchet MS" pitchFamily="34" charset="0"/>
-                <a:ea typeface="Trebuchet MS" pitchFamily="34" charset="-122"/>
-                <a:cs typeface="Trebuchet MS" pitchFamily="34" charset="-120"/>
-              </a:rPr>
-              <a:t>corrector</a:t>
-            </a:r>
-            <a:endParaRPr lang="en-US" sz="1200" dirty="0"/>
-          </a:p>
-        </p:txBody>
-      </p:sp>
-      <p:sp>
-        <p:nvSpPr>
-          <p:cNvPr id="54" name="Shape 52"/>
-          <p:cNvSpPr/>
-          <p:nvPr/>
-        </p:nvSpPr>
-        <p:spPr>
-          <a:xfrm>
-            <a:off x="2542032" y="4498848"/>
-            <a:ext cx="2011680" cy="402336"/>
-          </a:xfrm>
-          <a:prstGeom prst="rect">
-            <a:avLst>
-              <a:gd name="adj" fmla="val 13636"/>
-            </a:avLst>
-          </a:prstGeom>
-          <a:solidFill>
-            <a:srgbClr val="EEF2FF"/>
-          </a:solidFill>
-          <a:ln w="12700">
-            <a:solidFill>
-              <a:srgbClr val="6366F1"/>
-            </a:solidFill>
-            <a:prstDash val="solid"/>
-          </a:ln>
-        </p:spPr>
-      </p:sp>
-      <p:sp>
-        <p:nvSpPr>
-          <p:cNvPr id="55" name="Text 53"/>
-          <p:cNvSpPr/>
-          <p:nvPr/>
-        </p:nvSpPr>
-        <p:spPr>
-          <a:xfrm>
-            <a:off x="2542032" y="4498848"/>
-            <a:ext cx="2011680" cy="402336"/>
-          </a:xfrm>
-          <a:prstGeom prst="rect">
-            <a:avLst/>
-          </a:prstGeom>
-          <a:noFill/>
-          <a:ln/>
-        </p:spPr>
-        <p:txBody>
-          <a:bodyPr wrap="square" lIns="0" tIns="0" rIns="0" bIns="0" rtlCol="0" anchor="ctr"/>
-          <a:lstStyle/>
-          <a:p>
-            <a:pPr algn="ctr" indent="0" marL="0">
-              <a:buNone/>
-            </a:pPr>
-            <a:r>
-              <a:rPr lang="en-US" sz="1200" b="1" dirty="0">
-                <a:solidFill>
-                  <a:srgbClr val="4338CA"/>
-                </a:solidFill>
-                <a:latin typeface="Trebuchet MS" pitchFamily="34" charset="0"/>
-                <a:ea typeface="Trebuchet MS" pitchFamily="34" charset="-122"/>
-                <a:cs typeface="Trebuchet MS" pitchFamily="34" charset="-120"/>
-              </a:rPr>
-              <a:t>incorrectly</a:t>
-            </a:r>
-            <a:endParaRPr lang="en-US" sz="1200" dirty="0"/>
-          </a:p>
-        </p:txBody>
-      </p:sp>
-      <p:sp>
-        <p:nvSpPr>
-          <p:cNvPr id="56" name="Shape 54"/>
-          <p:cNvSpPr/>
-          <p:nvPr/>
-        </p:nvSpPr>
-        <p:spPr>
-          <a:xfrm>
-            <a:off x="4718304" y="4498848"/>
-            <a:ext cx="2011680" cy="402336"/>
-          </a:xfrm>
-          <a:prstGeom prst="rect">
-            <a:avLst>
-              <a:gd name="adj" fmla="val 13636"/>
-            </a:avLst>
-          </a:prstGeom>
-          <a:solidFill>
-            <a:srgbClr val="EEF2FF"/>
-          </a:solidFill>
-          <a:ln w="12700">
-            <a:solidFill>
-              <a:srgbClr val="6366F1"/>
-            </a:solidFill>
-            <a:prstDash val="solid"/>
-          </a:ln>
-        </p:spPr>
-      </p:sp>
-      <p:sp>
-        <p:nvSpPr>
-          <p:cNvPr id="57" name="Text 55"/>
-          <p:cNvSpPr/>
-          <p:nvPr/>
-        </p:nvSpPr>
-        <p:spPr>
-          <a:xfrm>
-            <a:off x="4718304" y="4498848"/>
-            <a:ext cx="2011680" cy="402336"/>
-          </a:xfrm>
-          <a:prstGeom prst="rect">
-            <a:avLst/>
-          </a:prstGeom>
-          <a:noFill/>
-          <a:ln/>
-        </p:spPr>
-        <p:txBody>
-          <a:bodyPr wrap="square" lIns="0" tIns="0" rIns="0" bIns="0" rtlCol="0" anchor="ctr"/>
-          <a:lstStyle/>
-          <a:p>
-            <a:pPr algn="ctr" indent="0" marL="0">
-              <a:buNone/>
-            </a:pPr>
-            <a:r>
-              <a:rPr lang="en-US" sz="1200" b="1" dirty="0">
-                <a:solidFill>
-                  <a:srgbClr val="4338CA"/>
-                </a:solidFill>
-                <a:latin typeface="Trebuchet MS" pitchFamily="34" charset="0"/>
-                <a:ea typeface="Trebuchet MS" pitchFamily="34" charset="-122"/>
-                <a:cs typeface="Trebuchet MS" pitchFamily="34" charset="-120"/>
-              </a:rPr>
               <a:t>correctness</a:t>
-            </a:r>
-            <a:endParaRPr lang="en-US" sz="1200" dirty="0"/>
-          </a:p>
-        </p:txBody>
-      </p:sp>
-      <p:sp>
-        <p:nvSpPr>
-          <p:cNvPr id="58" name="Shape 56"/>
-          <p:cNvSpPr/>
-          <p:nvPr/>
-        </p:nvSpPr>
-        <p:spPr>
-          <a:xfrm>
-            <a:off x="6894576" y="4498848"/>
-            <a:ext cx="2011680" cy="402336"/>
-          </a:xfrm>
-          <a:prstGeom prst="rect">
-            <a:avLst>
-              <a:gd name="adj" fmla="val 13636"/>
-            </a:avLst>
-          </a:prstGeom>
-          <a:solidFill>
-            <a:srgbClr val="EEF2FF"/>
-          </a:solidFill>
-          <a:ln w="12700">
-            <a:solidFill>
-              <a:srgbClr val="6366F1"/>
-            </a:solidFill>
-            <a:prstDash val="solid"/>
-          </a:ln>
-        </p:spPr>
-      </p:sp>
-      <p:sp>
-        <p:nvSpPr>
-          <p:cNvPr id="59" name="Text 57"/>
-          <p:cNvSpPr/>
-          <p:nvPr/>
-        </p:nvSpPr>
-        <p:spPr>
-          <a:xfrm>
-            <a:off x="6894576" y="4498848"/>
-            <a:ext cx="2011680" cy="402336"/>
-          </a:xfrm>
-          <a:prstGeom prst="rect">
-            <a:avLst/>
-          </a:prstGeom>
-          <a:noFill/>
-          <a:ln/>
-        </p:spPr>
-        <p:txBody>
-          <a:bodyPr wrap="square" lIns="0" tIns="0" rIns="0" bIns="0" rtlCol="0" anchor="ctr"/>
-          <a:lstStyle/>
-          <a:p>
-            <a:pPr algn="ctr" indent="0" marL="0">
-              <a:buNone/>
-            </a:pPr>
-            <a:r>
-              <a:rPr lang="en-US" sz="1200" b="1" dirty="0">
-                <a:solidFill>
-                  <a:srgbClr val="4338CA"/>
-                </a:solidFill>
-                <a:latin typeface="Trebuchet MS" pitchFamily="34" charset="0"/>
-                <a:ea typeface="Trebuchet MS" pitchFamily="34" charset="-122"/>
-                <a:cs typeface="Trebuchet MS" pitchFamily="34" charset="-120"/>
-              </a:rPr>
-              <a:t>self-correct</a:t>
             </a:r>
             <a:endParaRPr lang="en-US" sz="1200" dirty="0"/>
           </a:p>
@@ -36761,7 +38145,7 @@
                 <a:ea typeface="Calibri" pitchFamily="34" charset="-122"/>
                 <a:cs typeface="Calibri" pitchFamily="34" charset="-120"/>
               </a:rPr>
-              <a:t>Word Labs  •  wordlabs.app  •  Root: 'correct' = right, accurate, free from error</a:t>
+              <a:t>Word Labs  •  wordlabs.app  •  Root: 'correct' = right; accurate</a:t>
             </a:r>
             <a:endParaRPr lang="en-US" sz="800" dirty="0"/>
           </a:p>
@@ -36925,7 +38309,7 @@
                 <a:ea typeface="Calibri" pitchFamily="34" charset="-122"/>
                 <a:cs typeface="Calibri" pitchFamily="34" charset="-120"/>
               </a:rPr>
-              <a:t>The core part of a word carrying its basic meaning. For example, 'correct' means 'right, accurate, free from error'.</a:t>
+              <a:t>The core part of a word carrying its basic meaning. For example, 'correct' means 'right; accurate'.</a:t>
             </a:r>
             <a:endParaRPr lang="en-US" sz="1350" dirty="0"/>
           </a:p>
@@ -37545,7 +38929,7 @@
                 <a:ea typeface="Calibri" pitchFamily="34" charset="-122"/>
                 <a:cs typeface="Calibri" pitchFamily="34" charset="-120"/>
               </a:rPr>
-              <a:t>Word Labs  •  wordlabs.app  •  Root: 'correct' = right, accurate, free from error</a:t>
+              <a:t>Word Labs  •  wordlabs.app  •  Root: 'correct' = right; accurate</a:t>
             </a:r>
             <a:endParaRPr lang="en-US" sz="800" dirty="0"/>
           </a:p>
@@ -37657,7 +39041,7 @@
                 <a:ea typeface="Calibri" pitchFamily="34" charset="-122"/>
                 <a:cs typeface="Calibri" pitchFamily="34" charset="-120"/>
               </a:rPr>
-              <a:t>1.  The suffix '-ly' can be added to 'correct' to make the word 'correctly'.</a:t>
+              <a:t>1.  'correct' means 'extremely tall and narrow'.</a:t>
             </a:r>
             <a:endParaRPr lang="en-US" sz="1300" dirty="0"/>
           </a:p>
@@ -37680,11 +39064,11 @@
             </a:avLst>
           </a:prstGeom>
           <a:solidFill>
-            <a:srgbClr val="DCFCE7"/>
-          </a:solidFill>
-          <a:ln w="12700">
-            <a:solidFill>
-              <a:srgbClr val="16A34A"/>
+            <a:srgbClr val="FEE2E2"/>
+          </a:solidFill>
+          <a:ln w="12700">
+            <a:solidFill>
+              <a:srgbClr val="DC2626"/>
             </a:solidFill>
             <a:prstDash val="solid"/>
           </a:ln>
@@ -37717,13 +39101,13 @@
             <a:r>
               <a:rPr lang="en-US" sz="1100" b="1" dirty="0">
                 <a:solidFill>
-                  <a:srgbClr val="16A34A"/>
+                  <a:srgbClr val="DC2626"/>
                 </a:solidFill>
                 <a:latin typeface="Trebuchet MS" pitchFamily="34" charset="0"/>
                 <a:ea typeface="Trebuchet MS" pitchFamily="34" charset="-122"/>
                 <a:cs typeface="Trebuchet MS" pitchFamily="34" charset="-120"/>
               </a:rPr>
-              <a:t>TRUE</a:t>
+              <a:t>FALSE</a:t>
             </a:r>
             <a:endParaRPr lang="en-US" sz="1100" dirty="0"/>
           </a:p>
@@ -37796,7 +39180,7 @@
                 <a:ea typeface="Calibri" pitchFamily="34" charset="-122"/>
                 <a:cs typeface="Calibri" pitchFamily="34" charset="-120"/>
               </a:rPr>
-              <a:t>2.  The word 'correction' means to make something wrong.</a:t>
+              <a:t>2.  'correct' means 'right; accurate'.</a:t>
             </a:r>
             <a:endParaRPr lang="en-US" sz="1300" dirty="0"/>
           </a:p>
@@ -37819,11 +39203,11 @@
             </a:avLst>
           </a:prstGeom>
           <a:solidFill>
-            <a:srgbClr val="FEE2E2"/>
-          </a:solidFill>
-          <a:ln w="12700">
-            <a:solidFill>
-              <a:srgbClr val="DC2626"/>
+            <a:srgbClr val="DCFCE7"/>
+          </a:solidFill>
+          <a:ln w="12700">
+            <a:solidFill>
+              <a:srgbClr val="16A34A"/>
             </a:solidFill>
             <a:prstDash val="solid"/>
           </a:ln>
@@ -37856,13 +39240,13 @@
             <a:r>
               <a:rPr lang="en-US" sz="1100" b="1" dirty="0">
                 <a:solidFill>
-                  <a:srgbClr val="DC2626"/>
+                  <a:srgbClr val="16A34A"/>
                 </a:solidFill>
                 <a:latin typeface="Trebuchet MS" pitchFamily="34" charset="0"/>
                 <a:ea typeface="Trebuchet MS" pitchFamily="34" charset="-122"/>
                 <a:cs typeface="Trebuchet MS" pitchFamily="34" charset="-120"/>
               </a:rPr>
-              <a:t>FALSE</a:t>
+              <a:t>TRUE</a:t>
             </a:r>
             <a:endParaRPr lang="en-US" sz="1100" dirty="0"/>
           </a:p>
@@ -37935,7 +39319,7 @@
                 <a:ea typeface="Calibri" pitchFamily="34" charset="-122"/>
                 <a:cs typeface="Calibri" pitchFamily="34" charset="-120"/>
               </a:rPr>
-              <a:t>3.  The root 'correct' means right or free from error.</a:t>
+              <a:t>3.  'corrects' means 'sings a happy tune'.</a:t>
             </a:r>
             <a:endParaRPr lang="en-US" sz="1300" dirty="0"/>
           </a:p>
@@ -37958,11 +39342,11 @@
             </a:avLst>
           </a:prstGeom>
           <a:solidFill>
-            <a:srgbClr val="DCFCE7"/>
-          </a:solidFill>
-          <a:ln w="12700">
-            <a:solidFill>
-              <a:srgbClr val="16A34A"/>
+            <a:srgbClr val="FEE2E2"/>
+          </a:solidFill>
+          <a:ln w="12700">
+            <a:solidFill>
+              <a:srgbClr val="DC2626"/>
             </a:solidFill>
             <a:prstDash val="solid"/>
           </a:ln>
@@ -37995,13 +39379,13 @@
             <a:r>
               <a:rPr lang="en-US" sz="1100" b="1" dirty="0">
                 <a:solidFill>
-                  <a:srgbClr val="16A34A"/>
+                  <a:srgbClr val="DC2626"/>
                 </a:solidFill>
                 <a:latin typeface="Trebuchet MS" pitchFamily="34" charset="0"/>
                 <a:ea typeface="Trebuchet MS" pitchFamily="34" charset="-122"/>
                 <a:cs typeface="Trebuchet MS" pitchFamily="34" charset="-120"/>
               </a:rPr>
-              <a:t>TRUE</a:t>
+              <a:t>FALSE</a:t>
             </a:r>
             <a:endParaRPr lang="en-US" sz="1100" dirty="0"/>
           </a:p>
@@ -38074,7 +39458,7 @@
                 <a:ea typeface="Calibri" pitchFamily="34" charset="-122"/>
                 <a:cs typeface="Calibri" pitchFamily="34" charset="-120"/>
               </a:rPr>
-              <a:t>4.  The word 'incorrect' uses a prefix that means 'not'.</a:t>
+              <a:t>4.  'corrects' means 'fixes a mistake or puts something right'.</a:t>
             </a:r>
             <a:endParaRPr lang="en-US" sz="1300" dirty="0"/>
           </a:p>
@@ -38213,7 +39597,7 @@
                 <a:ea typeface="Calibri" pitchFamily="34" charset="-122"/>
                 <a:cs typeface="Calibri" pitchFamily="34" charset="-120"/>
               </a:rPr>
-              <a:t>5.  The root 'correct' comes from Greek.</a:t>
+              <a:t>5.  'correct' means 'free from mistakes; right or accurate'.</a:t>
             </a:r>
             <a:endParaRPr lang="en-US" sz="1300" dirty="0"/>
           </a:p>
@@ -38236,11 +39620,11 @@
             </a:avLst>
           </a:prstGeom>
           <a:solidFill>
-            <a:srgbClr val="FEE2E2"/>
-          </a:solidFill>
-          <a:ln w="12700">
-            <a:solidFill>
-              <a:srgbClr val="DC2626"/>
+            <a:srgbClr val="DCFCE7"/>
+          </a:solidFill>
+          <a:ln w="12700">
+            <a:solidFill>
+              <a:srgbClr val="16A34A"/>
             </a:solidFill>
             <a:prstDash val="solid"/>
           </a:ln>
@@ -38273,13 +39657,13 @@
             <a:r>
               <a:rPr lang="en-US" sz="1100" b="1" dirty="0">
                 <a:solidFill>
-                  <a:srgbClr val="DC2626"/>
+                  <a:srgbClr val="16A34A"/>
                 </a:solidFill>
                 <a:latin typeface="Trebuchet MS" pitchFamily="34" charset="0"/>
                 <a:ea typeface="Trebuchet MS" pitchFamily="34" charset="-122"/>
                 <a:cs typeface="Trebuchet MS" pitchFamily="34" charset="-120"/>
               </a:rPr>
-              <a:t>FALSE</a:t>
+              <a:t>TRUE</a:t>
             </a:r>
             <a:endParaRPr lang="en-US" sz="1100" dirty="0"/>
           </a:p>
@@ -38571,7 +39955,7 @@
                 <a:ea typeface="Calibri" pitchFamily="34" charset="-122"/>
                 <a:cs typeface="Calibri" pitchFamily="34" charset="-120"/>
               </a:rPr>
-              <a:t>Word Labs  •  wordlabs.app  •  Root: 'correct' = right, accurate, free from error</a:t>
+              <a:t>Word Labs  •  wordlabs.app  •  Root: 'correct' = right; accurate</a:t>
             </a:r>
             <a:endParaRPr lang="en-US" sz="800" dirty="0"/>
           </a:p>
@@ -38708,7 +40092,7 @@
                 <a:ea typeface="Trebuchet MS" pitchFamily="34" charset="-122"/>
                 <a:cs typeface="Trebuchet MS" pitchFamily="34" charset="-120"/>
               </a:rPr>
-              <a:t>right, accurate, free from error</a:t>
+              <a:t>right; accurate</a:t>
             </a:r>
             <a:endParaRPr lang="en-US" sz="2000" dirty="0"/>
           </a:p>
@@ -38747,7 +40131,7 @@
                 <a:ea typeface="Calibri" pitchFamily="34" charset="-122"/>
                 <a:cs typeface="Calibri" pitchFamily="34" charset="-120"/>
               </a:rPr>
-              <a:t>Origin: Latin: correctus</a:t>
+              <a:t>Origin: Anglo-Saxon (Old English) root</a:t>
             </a:r>
             <a:endParaRPr lang="en-US" sz="1100" dirty="0"/>
           </a:p>
@@ -38918,7 +40302,7 @@
                 <a:ea typeface="Trebuchet MS" pitchFamily="34" charset="-122"/>
                 <a:cs typeface="Trebuchet MS" pitchFamily="34" charset="-120"/>
               </a:rPr>
-              <a:t>incorrect</a:t>
+              <a:t>corrects</a:t>
             </a:r>
             <a:endParaRPr lang="en-US" sz="1300" dirty="0"/>
           </a:p>
@@ -38984,7 +40368,7 @@
                 <a:ea typeface="Trebuchet MS" pitchFamily="34" charset="-122"/>
                 <a:cs typeface="Trebuchet MS" pitchFamily="34" charset="-120"/>
               </a:rPr>
-              <a:t>correction</a:t>
+              <a:t>corrected</a:t>
             </a:r>
             <a:endParaRPr lang="en-US" sz="1300" dirty="0"/>
           </a:p>
@@ -39116,7 +40500,7 @@
                 <a:ea typeface="Trebuchet MS" pitchFamily="34" charset="-122"/>
                 <a:cs typeface="Trebuchet MS" pitchFamily="34" charset="-120"/>
               </a:rPr>
-              <a:t>corrector</a:t>
+              <a:t>incorrect</a:t>
             </a:r>
             <a:endParaRPr lang="en-US" sz="1300" dirty="0"/>
           </a:p>
@@ -39182,7 +40566,7 @@
                 <a:ea typeface="Trebuchet MS" pitchFamily="34" charset="-122"/>
                 <a:cs typeface="Trebuchet MS" pitchFamily="34" charset="-120"/>
               </a:rPr>
-              <a:t>incorrectly</a:t>
+              <a:t>correcting</a:t>
             </a:r>
             <a:endParaRPr lang="en-US" sz="1300" dirty="0"/>
           </a:p>
@@ -39540,7 +40924,7 @@
                 <a:ea typeface="Calibri" pitchFamily="34" charset="-122"/>
                 <a:cs typeface="Calibri" pitchFamily="34" charset="-120"/>
               </a:rPr>
-              <a:t>Word Labs  •  wordlabs.app  •  Root: 'correct' = right, accurate, free from error</a:t>
+              <a:t>Word Labs  •  wordlabs.app  •  Root: 'correct' = right; accurate</a:t>
             </a:r>
             <a:endParaRPr lang="en-US" sz="800" dirty="0"/>
           </a:p>
@@ -39969,7 +41353,7 @@
                 <a:ea typeface="Trebuchet MS" pitchFamily="34" charset="-122"/>
                 <a:cs typeface="Trebuchet MS" pitchFamily="34" charset="-120"/>
               </a:rPr>
-              <a:t>-ion</a:t>
+              <a:t>-ed</a:t>
             </a:r>
             <a:endParaRPr lang="en-US" sz="1300" dirty="0"/>
           </a:p>
@@ -39990,7 +41374,7 @@
             <a:avLst/>
           </a:prstGeom>
           <a:solidFill>
-            <a:srgbClr val="DDD6FE"/>
+            <a:srgbClr val="F1F5F9"/>
           </a:solidFill>
           <a:ln w="12700">
             <a:solidFill>
@@ -40002,18 +41386,68 @@
       </p:sp>
       <p:sp>
         <p:nvSpPr>
-          <p:cNvPr id="24" name="Text 22"/>
-          <p:cNvSpPr/>
-          <p:nvPr/>
-        </p:nvSpPr>
-        <p:spPr>
-          <a:xfrm>
-            <a:off x="640080" y="2212848"/>
+          <p:cNvPr id="24" name="Shape 22"/>
+          <p:cNvSpPr/>
+          <p:nvPr/>
+        </p:nvSpPr>
+        <p:spPr>
+          <a:xfrm>
+            <a:off x="3291840" y="2212848"/>
+            <a:ext cx="1645920" cy="420624"/>
+          </a:xfrm>
+          <a:prstGeom prst="rect">
+            <a:avLst/>
+          </a:prstGeom>
+          <a:solidFill>
+            <a:srgbClr val="F1F5F9"/>
+          </a:solidFill>
+          <a:ln w="12700">
+            <a:solidFill>
+              <a:srgbClr val="E5E7EB"/>
+            </a:solidFill>
+            <a:prstDash val="solid"/>
+          </a:ln>
+        </p:spPr>
+      </p:sp>
+      <p:sp>
+        <p:nvSpPr>
+          <p:cNvPr id="25" name="Shape 23"/>
+          <p:cNvSpPr/>
+          <p:nvPr/>
+        </p:nvSpPr>
+        <p:spPr>
+          <a:xfrm>
+            <a:off x="5943600" y="2212848"/>
             <a:ext cx="1463040" cy="420624"/>
           </a:xfrm>
           <a:prstGeom prst="rect">
             <a:avLst/>
           </a:prstGeom>
+          <a:solidFill>
+            <a:srgbClr val="FCE7F3"/>
+          </a:solidFill>
+          <a:ln w="12700">
+            <a:solidFill>
+              <a:srgbClr val="E5E7EB"/>
+            </a:solidFill>
+            <a:prstDash val="solid"/>
+          </a:ln>
+        </p:spPr>
+      </p:sp>
+      <p:sp>
+        <p:nvSpPr>
+          <p:cNvPr id="26" name="Text 24"/>
+          <p:cNvSpPr/>
+          <p:nvPr/>
+        </p:nvSpPr>
+        <p:spPr>
+          <a:xfrm>
+            <a:off x="5943600" y="2212848"/>
+            <a:ext cx="1463040" cy="420624"/>
+          </a:xfrm>
+          <a:prstGeom prst="rect">
+            <a:avLst/>
+          </a:prstGeom>
           <a:noFill/>
           <a:ln/>
         </p:spPr>
@@ -40027,13 +41461,13 @@
             <a:r>
               <a:rPr lang="en-US" sz="1300" b="1" dirty="0">
                 <a:solidFill>
-                  <a:srgbClr val="4C1D95"/>
+                  <a:srgbClr val="9D174D"/>
                 </a:solidFill>
                 <a:latin typeface="Trebuchet MS" pitchFamily="34" charset="0"/>
                 <a:ea typeface="Trebuchet MS" pitchFamily="34" charset="-122"/>
                 <a:cs typeface="Trebuchet MS" pitchFamily="34" charset="-120"/>
               </a:rPr>
-              <a:t>re-</a:t>
+              <a:t>-ing</a:t>
             </a:r>
             <a:endParaRPr lang="en-US" sz="1300" dirty="0"/>
           </a:p>
@@ -40041,20 +41475,45 @@
       </p:sp>
       <p:sp>
         <p:nvSpPr>
-          <p:cNvPr id="25" name="Shape 23"/>
-          <p:cNvSpPr/>
-          <p:nvPr/>
-        </p:nvSpPr>
-        <p:spPr>
-          <a:xfrm>
-            <a:off x="3291840" y="2212848"/>
+          <p:cNvPr id="27" name="Shape 25"/>
+          <p:cNvSpPr/>
+          <p:nvPr/>
+        </p:nvSpPr>
+        <p:spPr>
+          <a:xfrm>
+            <a:off x="640080" y="2670048"/>
+            <a:ext cx="1463040" cy="420624"/>
+          </a:xfrm>
+          <a:prstGeom prst="rect">
+            <a:avLst/>
+          </a:prstGeom>
+          <a:solidFill>
+            <a:srgbClr val="F8FAFC"/>
+          </a:solidFill>
+          <a:ln w="12700">
+            <a:solidFill>
+              <a:srgbClr val="E5E7EB"/>
+            </a:solidFill>
+            <a:prstDash val="solid"/>
+          </a:ln>
+        </p:spPr>
+      </p:sp>
+      <p:sp>
+        <p:nvSpPr>
+          <p:cNvPr id="28" name="Shape 26"/>
+          <p:cNvSpPr/>
+          <p:nvPr/>
+        </p:nvSpPr>
+        <p:spPr>
+          <a:xfrm>
+            <a:off x="3291840" y="2670048"/>
             <a:ext cx="1645920" cy="420624"/>
           </a:xfrm>
           <a:prstGeom prst="rect">
             <a:avLst/>
           </a:prstGeom>
           <a:solidFill>
-            <a:srgbClr val="F1F5F9"/>
+            <a:srgbClr val="F8FAFC"/>
           </a:solidFill>
           <a:ln w="12700">
             <a:solidFill>
@@ -40066,13 +41525,13 @@
       </p:sp>
       <p:sp>
         <p:nvSpPr>
-          <p:cNvPr id="26" name="Shape 24"/>
-          <p:cNvSpPr/>
-          <p:nvPr/>
-        </p:nvSpPr>
-        <p:spPr>
-          <a:xfrm>
-            <a:off x="5943600" y="2212848"/>
+          <p:cNvPr id="29" name="Shape 27"/>
+          <p:cNvSpPr/>
+          <p:nvPr/>
+        </p:nvSpPr>
+        <p:spPr>
+          <a:xfrm>
+            <a:off x="5943600" y="2670048"/>
             <a:ext cx="1463040" cy="420624"/>
           </a:xfrm>
           <a:prstGeom prst="rect">
@@ -40091,13 +41550,13 @@
       </p:sp>
       <p:sp>
         <p:nvSpPr>
-          <p:cNvPr id="27" name="Text 25"/>
-          <p:cNvSpPr/>
-          <p:nvPr/>
-        </p:nvSpPr>
-        <p:spPr>
-          <a:xfrm>
-            <a:off x="5943600" y="2212848"/>
+          <p:cNvPr id="30" name="Text 28"/>
+          <p:cNvSpPr/>
+          <p:nvPr/>
+        </p:nvSpPr>
+        <p:spPr>
+          <a:xfrm>
+            <a:off x="5943600" y="2670048"/>
             <a:ext cx="1463040" cy="420624"/>
           </a:xfrm>
           <a:prstGeom prst="rect">
@@ -40122,7 +41581,7 @@
                 <a:ea typeface="Trebuchet MS" pitchFamily="34" charset="-122"/>
                 <a:cs typeface="Trebuchet MS" pitchFamily="34" charset="-120"/>
               </a:rPr>
-              <a:t>-ly</a:t>
+              <a:t>-ion</a:t>
             </a:r>
             <a:endParaRPr lang="en-US" sz="1300" dirty="0"/>
           </a:p>
@@ -40130,20 +41589,20 @@
       </p:sp>
       <p:sp>
         <p:nvSpPr>
-          <p:cNvPr id="28" name="Shape 26"/>
-          <p:cNvSpPr/>
-          <p:nvPr/>
-        </p:nvSpPr>
-        <p:spPr>
-          <a:xfrm>
-            <a:off x="640080" y="2670048"/>
+          <p:cNvPr id="31" name="Shape 29"/>
+          <p:cNvSpPr/>
+          <p:nvPr/>
+        </p:nvSpPr>
+        <p:spPr>
+          <a:xfrm>
+            <a:off x="640080" y="3127248"/>
             <a:ext cx="1463040" cy="420624"/>
           </a:xfrm>
           <a:prstGeom prst="rect">
             <a:avLst/>
           </a:prstGeom>
           <a:solidFill>
-            <a:srgbClr val="DDD6FE"/>
+            <a:srgbClr val="F1F5F9"/>
           </a:solidFill>
           <a:ln w="12700">
             <a:solidFill>
@@ -40155,18 +41614,68 @@
       </p:sp>
       <p:sp>
         <p:nvSpPr>
-          <p:cNvPr id="29" name="Text 27"/>
-          <p:cNvSpPr/>
-          <p:nvPr/>
-        </p:nvSpPr>
-        <p:spPr>
-          <a:xfrm>
-            <a:off x="640080" y="2670048"/>
+          <p:cNvPr id="32" name="Shape 30"/>
+          <p:cNvSpPr/>
+          <p:nvPr/>
+        </p:nvSpPr>
+        <p:spPr>
+          <a:xfrm>
+            <a:off x="3291840" y="3127248"/>
+            <a:ext cx="1645920" cy="420624"/>
+          </a:xfrm>
+          <a:prstGeom prst="rect">
+            <a:avLst/>
+          </a:prstGeom>
+          <a:solidFill>
+            <a:srgbClr val="F1F5F9"/>
+          </a:solidFill>
+          <a:ln w="12700">
+            <a:solidFill>
+              <a:srgbClr val="E5E7EB"/>
+            </a:solidFill>
+            <a:prstDash val="solid"/>
+          </a:ln>
+        </p:spPr>
+      </p:sp>
+      <p:sp>
+        <p:nvSpPr>
+          <p:cNvPr id="33" name="Shape 31"/>
+          <p:cNvSpPr/>
+          <p:nvPr/>
+        </p:nvSpPr>
+        <p:spPr>
+          <a:xfrm>
+            <a:off x="5943600" y="3127248"/>
             <a:ext cx="1463040" cy="420624"/>
           </a:xfrm>
           <a:prstGeom prst="rect">
             <a:avLst/>
           </a:prstGeom>
+          <a:solidFill>
+            <a:srgbClr val="FCE7F3"/>
+          </a:solidFill>
+          <a:ln w="12700">
+            <a:solidFill>
+              <a:srgbClr val="E5E7EB"/>
+            </a:solidFill>
+            <a:prstDash val="solid"/>
+          </a:ln>
+        </p:spPr>
+      </p:sp>
+      <p:sp>
+        <p:nvSpPr>
+          <p:cNvPr id="34" name="Text 32"/>
+          <p:cNvSpPr/>
+          <p:nvPr/>
+        </p:nvSpPr>
+        <p:spPr>
+          <a:xfrm>
+            <a:off x="5943600" y="3127248"/>
+            <a:ext cx="1463040" cy="420624"/>
+          </a:xfrm>
+          <a:prstGeom prst="rect">
+            <a:avLst/>
+          </a:prstGeom>
           <a:noFill/>
           <a:ln/>
         </p:spPr>
@@ -40180,13 +41689,13 @@
             <a:r>
               <a:rPr lang="en-US" sz="1300" b="1" dirty="0">
                 <a:solidFill>
-                  <a:srgbClr val="4C1D95"/>
+                  <a:srgbClr val="9D174D"/>
                 </a:solidFill>
                 <a:latin typeface="Trebuchet MS" pitchFamily="34" charset="0"/>
                 <a:ea typeface="Trebuchet MS" pitchFamily="34" charset="-122"/>
                 <a:cs typeface="Trebuchet MS" pitchFamily="34" charset="-120"/>
               </a:rPr>
-              <a:t>un-</a:t>
+              <a:t>-ive</a:t>
             </a:r>
             <a:endParaRPr lang="en-US" sz="1300" dirty="0"/>
           </a:p>
@@ -40194,13 +41703,38 @@
       </p:sp>
       <p:sp>
         <p:nvSpPr>
-          <p:cNvPr id="30" name="Shape 28"/>
-          <p:cNvSpPr/>
-          <p:nvPr/>
-        </p:nvSpPr>
-        <p:spPr>
-          <a:xfrm>
-            <a:off x="3291840" y="2670048"/>
+          <p:cNvPr id="35" name="Shape 33"/>
+          <p:cNvSpPr/>
+          <p:nvPr/>
+        </p:nvSpPr>
+        <p:spPr>
+          <a:xfrm>
+            <a:off x="640080" y="3584448"/>
+            <a:ext cx="1463040" cy="420624"/>
+          </a:xfrm>
+          <a:prstGeom prst="rect">
+            <a:avLst/>
+          </a:prstGeom>
+          <a:solidFill>
+            <a:srgbClr val="F8FAFC"/>
+          </a:solidFill>
+          <a:ln w="12700">
+            <a:solidFill>
+              <a:srgbClr val="E5E7EB"/>
+            </a:solidFill>
+            <a:prstDash val="solid"/>
+          </a:ln>
+        </p:spPr>
+      </p:sp>
+      <p:sp>
+        <p:nvSpPr>
+          <p:cNvPr id="36" name="Shape 34"/>
+          <p:cNvSpPr/>
+          <p:nvPr/>
+        </p:nvSpPr>
+        <p:spPr>
+          <a:xfrm>
+            <a:off x="3291840" y="3584448"/>
             <a:ext cx="1645920" cy="420624"/>
           </a:xfrm>
           <a:prstGeom prst="rect">
@@ -40219,13 +41753,13 @@
       </p:sp>
       <p:sp>
         <p:nvSpPr>
-          <p:cNvPr id="31" name="Shape 29"/>
-          <p:cNvSpPr/>
-          <p:nvPr/>
-        </p:nvSpPr>
-        <p:spPr>
-          <a:xfrm>
-            <a:off x="5943600" y="2670048"/>
+          <p:cNvPr id="37" name="Shape 35"/>
+          <p:cNvSpPr/>
+          <p:nvPr/>
+        </p:nvSpPr>
+        <p:spPr>
+          <a:xfrm>
+            <a:off x="5943600" y="3584448"/>
             <a:ext cx="1463040" cy="420624"/>
           </a:xfrm>
           <a:prstGeom prst="rect">
@@ -40244,13 +41778,13 @@
       </p:sp>
       <p:sp>
         <p:nvSpPr>
-          <p:cNvPr id="32" name="Text 30"/>
-          <p:cNvSpPr/>
-          <p:nvPr/>
-        </p:nvSpPr>
-        <p:spPr>
-          <a:xfrm>
-            <a:off x="5943600" y="2670048"/>
+          <p:cNvPr id="38" name="Text 36"/>
+          <p:cNvSpPr/>
+          <p:nvPr/>
+        </p:nvSpPr>
+        <p:spPr>
+          <a:xfrm>
+            <a:off x="5943600" y="3584448"/>
             <a:ext cx="1463040" cy="420624"/>
           </a:xfrm>
           <a:prstGeom prst="rect">
@@ -40275,7 +41809,7 @@
                 <a:ea typeface="Trebuchet MS" pitchFamily="34" charset="-122"/>
                 <a:cs typeface="Trebuchet MS" pitchFamily="34" charset="-120"/>
               </a:rPr>
-              <a:t>-ness</a:t>
+              <a:t>-ly</a:t>
             </a:r>
             <a:endParaRPr lang="en-US" sz="1300" dirty="0"/>
           </a:p>
@@ -40283,20 +41817,20 @@
       </p:sp>
       <p:sp>
         <p:nvSpPr>
-          <p:cNvPr id="33" name="Shape 31"/>
-          <p:cNvSpPr/>
-          <p:nvPr/>
-        </p:nvSpPr>
-        <p:spPr>
-          <a:xfrm>
-            <a:off x="640080" y="3127248"/>
+          <p:cNvPr id="39" name="Shape 37"/>
+          <p:cNvSpPr/>
+          <p:nvPr/>
+        </p:nvSpPr>
+        <p:spPr>
+          <a:xfrm>
+            <a:off x="640080" y="4041648"/>
             <a:ext cx="1463040" cy="420624"/>
           </a:xfrm>
           <a:prstGeom prst="rect">
             <a:avLst/>
           </a:prstGeom>
           <a:solidFill>
-            <a:srgbClr val="DDD6FE"/>
+            <a:srgbClr val="F1F5F9"/>
           </a:solidFill>
           <a:ln w="12700">
             <a:solidFill>
@@ -40308,18 +41842,68 @@
       </p:sp>
       <p:sp>
         <p:nvSpPr>
-          <p:cNvPr id="34" name="Text 32"/>
-          <p:cNvSpPr/>
-          <p:nvPr/>
-        </p:nvSpPr>
-        <p:spPr>
-          <a:xfrm>
-            <a:off x="640080" y="3127248"/>
+          <p:cNvPr id="40" name="Shape 38"/>
+          <p:cNvSpPr/>
+          <p:nvPr/>
+        </p:nvSpPr>
+        <p:spPr>
+          <a:xfrm>
+            <a:off x="3291840" y="4041648"/>
+            <a:ext cx="1645920" cy="420624"/>
+          </a:xfrm>
+          <a:prstGeom prst="rect">
+            <a:avLst/>
+          </a:prstGeom>
+          <a:solidFill>
+            <a:srgbClr val="F1F5F9"/>
+          </a:solidFill>
+          <a:ln w="12700">
+            <a:solidFill>
+              <a:srgbClr val="E5E7EB"/>
+            </a:solidFill>
+            <a:prstDash val="solid"/>
+          </a:ln>
+        </p:spPr>
+      </p:sp>
+      <p:sp>
+        <p:nvSpPr>
+          <p:cNvPr id="41" name="Shape 39"/>
+          <p:cNvSpPr/>
+          <p:nvPr/>
+        </p:nvSpPr>
+        <p:spPr>
+          <a:xfrm>
+            <a:off x="5943600" y="4041648"/>
             <a:ext cx="1463040" cy="420624"/>
           </a:xfrm>
           <a:prstGeom prst="rect">
             <a:avLst/>
           </a:prstGeom>
+          <a:solidFill>
+            <a:srgbClr val="FCE7F3"/>
+          </a:solidFill>
+          <a:ln w="12700">
+            <a:solidFill>
+              <a:srgbClr val="E5E7EB"/>
+            </a:solidFill>
+            <a:prstDash val="solid"/>
+          </a:ln>
+        </p:spPr>
+      </p:sp>
+      <p:sp>
+        <p:nvSpPr>
+          <p:cNvPr id="42" name="Text 40"/>
+          <p:cNvSpPr/>
+          <p:nvPr/>
+        </p:nvSpPr>
+        <p:spPr>
+          <a:xfrm>
+            <a:off x="5943600" y="4041648"/>
+            <a:ext cx="1463040" cy="420624"/>
+          </a:xfrm>
+          <a:prstGeom prst="rect">
+            <a:avLst/>
+          </a:prstGeom>
           <a:noFill/>
           <a:ln/>
         </p:spPr>
@@ -40333,13 +41917,13 @@
             <a:r>
               <a:rPr lang="en-US" sz="1300" b="1" dirty="0">
                 <a:solidFill>
-                  <a:srgbClr val="4C1D95"/>
+                  <a:srgbClr val="9D174D"/>
                 </a:solidFill>
                 <a:latin typeface="Trebuchet MS" pitchFamily="34" charset="0"/>
                 <a:ea typeface="Trebuchet MS" pitchFamily="34" charset="-122"/>
                 <a:cs typeface="Trebuchet MS" pitchFamily="34" charset="-120"/>
               </a:rPr>
-              <a:t>over-</a:t>
+              <a:t>-ness</a:t>
             </a:r>
             <a:endParaRPr lang="en-US" sz="1300" dirty="0"/>
           </a:p>
@@ -40347,255 +41931,13 @@
       </p:sp>
       <p:sp>
         <p:nvSpPr>
-          <p:cNvPr id="35" name="Shape 33"/>
-          <p:cNvSpPr/>
-          <p:nvPr/>
-        </p:nvSpPr>
-        <p:spPr>
-          <a:xfrm>
-            <a:off x="3291840" y="3127248"/>
-            <a:ext cx="1645920" cy="420624"/>
-          </a:xfrm>
-          <a:prstGeom prst="rect">
-            <a:avLst/>
-          </a:prstGeom>
-          <a:solidFill>
-            <a:srgbClr val="F1F5F9"/>
-          </a:solidFill>
-          <a:ln w="12700">
-            <a:solidFill>
-              <a:srgbClr val="E5E7EB"/>
-            </a:solidFill>
-            <a:prstDash val="solid"/>
-          </a:ln>
-        </p:spPr>
-      </p:sp>
-      <p:sp>
-        <p:nvSpPr>
-          <p:cNvPr id="36" name="Shape 34"/>
-          <p:cNvSpPr/>
-          <p:nvPr/>
-        </p:nvSpPr>
-        <p:spPr>
-          <a:xfrm>
-            <a:off x="5943600" y="3127248"/>
-            <a:ext cx="1463040" cy="420624"/>
-          </a:xfrm>
-          <a:prstGeom prst="rect">
-            <a:avLst/>
-          </a:prstGeom>
-          <a:solidFill>
-            <a:srgbClr val="FCE7F3"/>
-          </a:solidFill>
-          <a:ln w="12700">
-            <a:solidFill>
-              <a:srgbClr val="E5E7EB"/>
-            </a:solidFill>
-            <a:prstDash val="solid"/>
-          </a:ln>
-        </p:spPr>
-      </p:sp>
-      <p:sp>
-        <p:nvSpPr>
-          <p:cNvPr id="37" name="Text 35"/>
-          <p:cNvSpPr/>
-          <p:nvPr/>
-        </p:nvSpPr>
-        <p:spPr>
-          <a:xfrm>
-            <a:off x="5943600" y="3127248"/>
-            <a:ext cx="1463040" cy="420624"/>
-          </a:xfrm>
-          <a:prstGeom prst="rect">
-            <a:avLst/>
-          </a:prstGeom>
-          <a:noFill/>
-          <a:ln/>
-        </p:spPr>
-        <p:txBody>
-          <a:bodyPr wrap="square" lIns="0" tIns="0" rIns="0" bIns="0" rtlCol="0" anchor="ctr"/>
-          <a:lstStyle/>
-          <a:p>
-            <a:pPr algn="ctr" indent="0" marL="0">
-              <a:buNone/>
-            </a:pPr>
-            <a:r>
-              <a:rPr lang="en-US" sz="1300" b="1" dirty="0">
-                <a:solidFill>
-                  <a:srgbClr val="9D174D"/>
-                </a:solidFill>
-                <a:latin typeface="Trebuchet MS" pitchFamily="34" charset="0"/>
-                <a:ea typeface="Trebuchet MS" pitchFamily="34" charset="-122"/>
-                <a:cs typeface="Trebuchet MS" pitchFamily="34" charset="-120"/>
-              </a:rPr>
-              <a:t>-ed</a:t>
-            </a:r>
-            <a:endParaRPr lang="en-US" sz="1300" dirty="0"/>
-          </a:p>
-        </p:txBody>
-      </p:sp>
-      <p:sp>
-        <p:nvSpPr>
-          <p:cNvPr id="38" name="Shape 36"/>
-          <p:cNvSpPr/>
-          <p:nvPr/>
-        </p:nvSpPr>
-        <p:spPr>
-          <a:xfrm>
-            <a:off x="640080" y="3584448"/>
-            <a:ext cx="1463040" cy="420624"/>
-          </a:xfrm>
-          <a:prstGeom prst="rect">
-            <a:avLst/>
-          </a:prstGeom>
-          <a:solidFill>
-            <a:srgbClr val="DDD6FE"/>
-          </a:solidFill>
-          <a:ln w="12700">
-            <a:solidFill>
-              <a:srgbClr val="E5E7EB"/>
-            </a:solidFill>
-            <a:prstDash val="solid"/>
-          </a:ln>
-        </p:spPr>
-      </p:sp>
-      <p:sp>
-        <p:nvSpPr>
-          <p:cNvPr id="39" name="Text 37"/>
-          <p:cNvSpPr/>
-          <p:nvPr/>
-        </p:nvSpPr>
-        <p:spPr>
-          <a:xfrm>
-            <a:off x="640080" y="3584448"/>
-            <a:ext cx="1463040" cy="420624"/>
-          </a:xfrm>
-          <a:prstGeom prst="rect">
-            <a:avLst/>
-          </a:prstGeom>
-          <a:noFill/>
-          <a:ln/>
-        </p:spPr>
-        <p:txBody>
-          <a:bodyPr wrap="square" lIns="0" tIns="0" rIns="0" bIns="0" rtlCol="0" anchor="ctr"/>
-          <a:lstStyle/>
-          <a:p>
-            <a:pPr algn="ctr" indent="0" marL="0">
-              <a:buNone/>
-            </a:pPr>
-            <a:r>
-              <a:rPr lang="en-US" sz="1300" b="1" dirty="0">
-                <a:solidFill>
-                  <a:srgbClr val="4C1D95"/>
-                </a:solidFill>
-                <a:latin typeface="Trebuchet MS" pitchFamily="34" charset="0"/>
-                <a:ea typeface="Trebuchet MS" pitchFamily="34" charset="-122"/>
-                <a:cs typeface="Trebuchet MS" pitchFamily="34" charset="-120"/>
-              </a:rPr>
-              <a:t>self-</a:t>
-            </a:r>
-            <a:endParaRPr lang="en-US" sz="1300" dirty="0"/>
-          </a:p>
-        </p:txBody>
-      </p:sp>
-      <p:sp>
-        <p:nvSpPr>
-          <p:cNvPr id="40" name="Shape 38"/>
-          <p:cNvSpPr/>
-          <p:nvPr/>
-        </p:nvSpPr>
-        <p:spPr>
-          <a:xfrm>
-            <a:off x="3291840" y="3584448"/>
-            <a:ext cx="1645920" cy="420624"/>
-          </a:xfrm>
-          <a:prstGeom prst="rect">
-            <a:avLst/>
-          </a:prstGeom>
-          <a:solidFill>
-            <a:srgbClr val="F8FAFC"/>
-          </a:solidFill>
-          <a:ln w="12700">
-            <a:solidFill>
-              <a:srgbClr val="E5E7EB"/>
-            </a:solidFill>
-            <a:prstDash val="solid"/>
-          </a:ln>
-        </p:spPr>
-      </p:sp>
-      <p:sp>
-        <p:nvSpPr>
-          <p:cNvPr id="41" name="Shape 39"/>
-          <p:cNvSpPr/>
-          <p:nvPr/>
-        </p:nvSpPr>
-        <p:spPr>
-          <a:xfrm>
-            <a:off x="5943600" y="3584448"/>
-            <a:ext cx="1463040" cy="420624"/>
-          </a:xfrm>
-          <a:prstGeom prst="rect">
-            <a:avLst/>
-          </a:prstGeom>
-          <a:solidFill>
-            <a:srgbClr val="FCE7F3"/>
-          </a:solidFill>
-          <a:ln w="12700">
-            <a:solidFill>
-              <a:srgbClr val="E5E7EB"/>
-            </a:solidFill>
-            <a:prstDash val="solid"/>
-          </a:ln>
-        </p:spPr>
-      </p:sp>
-      <p:sp>
-        <p:nvSpPr>
-          <p:cNvPr id="42" name="Text 40"/>
-          <p:cNvSpPr/>
-          <p:nvPr/>
-        </p:nvSpPr>
-        <p:spPr>
-          <a:xfrm>
-            <a:off x="5943600" y="3584448"/>
-            <a:ext cx="1463040" cy="420624"/>
-          </a:xfrm>
-          <a:prstGeom prst="rect">
-            <a:avLst/>
-          </a:prstGeom>
-          <a:noFill/>
-          <a:ln/>
-        </p:spPr>
-        <p:txBody>
-          <a:bodyPr wrap="square" lIns="0" tIns="0" rIns="0" bIns="0" rtlCol="0" anchor="ctr"/>
-          <a:lstStyle/>
-          <a:p>
-            <a:pPr algn="ctr" indent="0" marL="0">
-              <a:buNone/>
-            </a:pPr>
-            <a:r>
-              <a:rPr lang="en-US" sz="1300" b="1" dirty="0">
-                <a:solidFill>
-                  <a:srgbClr val="9D174D"/>
-                </a:solidFill>
-                <a:latin typeface="Trebuchet MS" pitchFamily="34" charset="0"/>
-                <a:ea typeface="Trebuchet MS" pitchFamily="34" charset="-122"/>
-                <a:cs typeface="Trebuchet MS" pitchFamily="34" charset="-120"/>
-              </a:rPr>
-              <a:t>-or</a:t>
-            </a:r>
-            <a:endParaRPr lang="en-US" sz="1300" dirty="0"/>
-          </a:p>
-        </p:txBody>
-      </p:sp>
-      <p:sp>
-        <p:nvSpPr>
           <p:cNvPr id="43" name="Text 41"/>
           <p:cNvSpPr/>
           <p:nvPr/>
         </p:nvSpPr>
         <p:spPr>
           <a:xfrm>
-            <a:off x="365760" y="4178808"/>
+            <a:off x="365760" y="4636008"/>
             <a:ext cx="1097280" cy="420624"/>
           </a:xfrm>
           <a:prstGeom prst="rect">
@@ -40634,7 +41976,7 @@
         </p:nvSpPr>
         <p:spPr>
           <a:xfrm>
-            <a:off x="1508760" y="4178808"/>
+            <a:off x="1508760" y="4636008"/>
             <a:ext cx="822960" cy="420624"/>
           </a:xfrm>
           <a:prstGeom prst="rect">
@@ -40668,7 +42010,7 @@
         </p:nvSpPr>
         <p:spPr>
           <a:xfrm>
-            <a:off x="1508760" y="4178808"/>
+            <a:off x="1508760" y="4636008"/>
             <a:ext cx="822960" cy="420624"/>
           </a:xfrm>
           <a:prstGeom prst="rect">
@@ -40707,7 +42049,7 @@
         </p:nvSpPr>
         <p:spPr>
           <a:xfrm>
-            <a:off x="2359152" y="4178808"/>
+            <a:off x="2359152" y="4636008"/>
             <a:ext cx="320040" cy="420624"/>
           </a:xfrm>
           <a:prstGeom prst="rect">
@@ -40746,7 +42088,7 @@
         </p:nvSpPr>
         <p:spPr>
           <a:xfrm>
-            <a:off x="2706624" y="4178808"/>
+            <a:off x="2706624" y="4636008"/>
             <a:ext cx="1682496" cy="420624"/>
           </a:xfrm>
           <a:prstGeom prst="rect">
@@ -40780,7 +42122,7 @@
         </p:nvSpPr>
         <p:spPr>
           <a:xfrm>
-            <a:off x="2706624" y="4178808"/>
+            <a:off x="2706624" y="4636008"/>
             <a:ext cx="1682496" cy="420624"/>
           </a:xfrm>
           <a:prstGeom prst="rect">
@@ -40819,7 +42161,7 @@
         </p:nvSpPr>
         <p:spPr>
           <a:xfrm>
-            <a:off x="4416552" y="4178808"/>
+            <a:off x="4416552" y="4636008"/>
             <a:ext cx="320040" cy="420624"/>
           </a:xfrm>
           <a:prstGeom prst="rect">
@@ -40858,8 +42200,8 @@
         </p:nvSpPr>
         <p:spPr>
           <a:xfrm>
-            <a:off x="4764024" y="4178808"/>
-            <a:ext cx="950976" cy="420624"/>
+            <a:off x="4764024" y="4636008"/>
+            <a:ext cx="822960" cy="420624"/>
           </a:xfrm>
           <a:prstGeom prst="rect">
             <a:avLst>
@@ -40892,8 +42234,8 @@
         </p:nvSpPr>
         <p:spPr>
           <a:xfrm>
-            <a:off x="4764024" y="4178808"/>
-            <a:ext cx="950976" cy="420624"/>
+            <a:off x="4764024" y="4636008"/>
+            <a:ext cx="822960" cy="420624"/>
           </a:xfrm>
           <a:prstGeom prst="rect">
             <a:avLst/>
@@ -40917,7 +42259,7 @@
                 <a:ea typeface="Trebuchet MS" pitchFamily="34" charset="-122"/>
                 <a:cs typeface="Trebuchet MS" pitchFamily="34" charset="-120"/>
               </a:rPr>
-              <a:t>-ion</a:t>
+              <a:t>-ed</a:t>
             </a:r>
             <a:endParaRPr lang="en-US" sz="1300" dirty="0"/>
           </a:p>
@@ -40931,7 +42273,7 @@
         </p:nvSpPr>
         <p:spPr>
           <a:xfrm>
-            <a:off x="5788152" y="4178808"/>
+            <a:off x="5660136" y="4636008"/>
             <a:ext cx="365760" cy="420624"/>
           </a:xfrm>
           <a:prstGeom prst="rect">
@@ -40970,7 +42312,7 @@
         </p:nvSpPr>
         <p:spPr>
           <a:xfrm>
-            <a:off x="6199632" y="4178808"/>
+            <a:off x="6071616" y="4636008"/>
             <a:ext cx="2194560" cy="420624"/>
           </a:xfrm>
           <a:prstGeom prst="rect">
@@ -40997,7 +42339,7 @@
         </p:nvSpPr>
         <p:spPr>
           <a:xfrm>
-            <a:off x="6199632" y="4178808"/>
+            <a:off x="6071616" y="4636008"/>
             <a:ext cx="2194560" cy="420624"/>
           </a:xfrm>
           <a:prstGeom prst="rect">
@@ -41314,7 +42656,7 @@
                 <a:ea typeface="Calibri" pitchFamily="34" charset="-122"/>
                 <a:cs typeface="Calibri" pitchFamily="34" charset="-120"/>
               </a:rPr>
-              <a:t>Word Labs  •  wordlabs.app  •  Root: 'correct' = right, accurate, free from error</a:t>
+              <a:t>Word Labs  •  wordlabs.app  •  Root: 'correct' = right; accurate</a:t>
             </a:r>
             <a:endParaRPr lang="en-US" sz="800" dirty="0"/>
           </a:p>
@@ -41492,7 +42834,7 @@
                 <a:ea typeface="Calibri" pitchFamily="34" charset="-122"/>
                 <a:cs typeface="Calibri" pitchFamily="34" charset="-120"/>
               </a:rPr>
-              <a:t>The quality of being right or free from errors.</a:t>
+              <a:t>the quality of being right or accurate</a:t>
             </a:r>
             <a:endParaRPr lang="en-US" sz="1200" dirty="0"/>
           </a:p>
@@ -41565,7 +42907,7 @@
                 <a:ea typeface="Trebuchet MS" pitchFamily="34" charset="-122"/>
                 <a:cs typeface="Trebuchet MS" pitchFamily="34" charset="-120"/>
               </a:rPr>
-              <a:t>incorrect</a:t>
+              <a:t>corrects</a:t>
             </a:r>
             <a:endParaRPr lang="en-US" sz="1200" dirty="0"/>
           </a:p>
@@ -41631,7 +42973,7 @@
                 <a:ea typeface="Calibri" pitchFamily="34" charset="-122"/>
                 <a:cs typeface="Calibri" pitchFamily="34" charset="-120"/>
               </a:rPr>
-              <a:t>Doing something in the right way, without mistakes.</a:t>
+              <a:t>in a way that is right or accurate</a:t>
             </a:r>
             <a:endParaRPr lang="en-US" sz="1200" dirty="0"/>
           </a:p>
@@ -41704,7 +43046,7 @@
                 <a:ea typeface="Trebuchet MS" pitchFamily="34" charset="-122"/>
                 <a:cs typeface="Trebuchet MS" pitchFamily="34" charset="-120"/>
               </a:rPr>
-              <a:t>correction</a:t>
+              <a:t>corrected</a:t>
             </a:r>
             <a:endParaRPr lang="en-US" sz="1200" dirty="0"/>
           </a:p>
@@ -41770,7 +43112,7 @@
                 <a:ea typeface="Calibri" pitchFamily="34" charset="-122"/>
                 <a:cs typeface="Calibri" pitchFamily="34" charset="-120"/>
               </a:rPr>
-              <a:t>Doing something in the wrong way, making a mistake.</a:t>
+              <a:t>in the process of making something right or free from mistakes</a:t>
             </a:r>
             <a:endParaRPr lang="en-US" sz="1200" dirty="0"/>
           </a:p>
@@ -41909,7 +43251,7 @@
                 <a:ea typeface="Calibri" pitchFamily="34" charset="-122"/>
                 <a:cs typeface="Calibri" pitchFamily="34" charset="-120"/>
               </a:rPr>
-              <a:t>A person or tool that fixes mistakes.</a:t>
+              <a:t>not correct or wrong</a:t>
             </a:r>
             <a:endParaRPr lang="en-US" sz="1200" dirty="0"/>
           </a:p>
@@ -41982,7 +43324,7 @@
                 <a:ea typeface="Trebuchet MS" pitchFamily="34" charset="-122"/>
                 <a:cs typeface="Trebuchet MS" pitchFamily="34" charset="-120"/>
               </a:rPr>
-              <a:t>corrector</a:t>
+              <a:t>incorrect</a:t>
             </a:r>
             <a:endParaRPr lang="en-US" sz="1200" dirty="0"/>
           </a:p>
@@ -42048,7 +43390,7 @@
                 <a:ea typeface="Calibri" pitchFamily="34" charset="-122"/>
                 <a:cs typeface="Calibri" pitchFamily="34" charset="-120"/>
               </a:rPr>
-              <a:t>Something that has no mistakes and is right or accurate.</a:t>
+              <a:t>free from mistakes; right or accurate</a:t>
             </a:r>
             <a:endParaRPr lang="en-US" sz="1200" dirty="0"/>
           </a:p>
@@ -42121,7 +43463,7 @@
                 <a:ea typeface="Trebuchet MS" pitchFamily="34" charset="-122"/>
                 <a:cs typeface="Trebuchet MS" pitchFamily="34" charset="-120"/>
               </a:rPr>
-              <a:t>incorrectly</a:t>
+              <a:t>correcting</a:t>
             </a:r>
             <a:endParaRPr lang="en-US" sz="1200" dirty="0"/>
           </a:p>
@@ -42187,7 +43529,7 @@
                 <a:ea typeface="Calibri" pitchFamily="34" charset="-122"/>
                 <a:cs typeface="Calibri" pitchFamily="34" charset="-120"/>
               </a:rPr>
-              <a:t>A change made to fix a mistake in something.</a:t>
+              <a:t>made right or free from mistakes</a:t>
             </a:r>
             <a:endParaRPr lang="en-US" sz="1200" dirty="0"/>
           </a:p>
@@ -42326,7 +43668,7 @@
                 <a:ea typeface="Calibri" pitchFamily="34" charset="-122"/>
                 <a:cs typeface="Calibri" pitchFamily="34" charset="-120"/>
               </a:rPr>
-              <a:t>Something that has a mistake or is not right.</a:t>
+              <a:t>fixes a mistake or puts something right</a:t>
             </a:r>
             <a:endParaRPr lang="en-US" sz="1200" dirty="0"/>
           </a:p>
@@ -42618,7 +43960,7 @@
                 <a:ea typeface="Calibri" pitchFamily="34" charset="-122"/>
                 <a:cs typeface="Calibri" pitchFamily="34" charset="-120"/>
               </a:rPr>
-              <a:t>Word Labs  •  wordlabs.app  •  Root: 'correct' = right, accurate, free from error</a:t>
+              <a:t>Word Labs  •  wordlabs.app  •  Root: 'correct' = right; accurate</a:t>
             </a:r>
             <a:endParaRPr lang="en-US" sz="800" dirty="0"/>
           </a:p>
@@ -42821,7 +44163,7 @@
                 <a:ea typeface="Calibri" pitchFamily="34" charset="-122"/>
                 <a:cs typeface="Calibri" pitchFamily="34" charset="-120"/>
               </a:rPr>
-              <a:t>Please check your work carefully and correct any mistakes before you hand it in.</a:t>
+              <a:t>She gave the correct answer to every question.</a:t>
             </a:r>
             <a:endParaRPr lang="en-US" sz="1500" dirty="0"/>
           </a:p>
@@ -42985,7 +44327,7 @@
                 <a:ea typeface="Calibri" pitchFamily="34" charset="-122"/>
                 <a:cs typeface="Calibri" pitchFamily="34" charset="-120"/>
               </a:rPr>
-              <a:t>The teacher wrote a correction in red pen next to the wrong answer.</a:t>
+              <a:t>The teacher corrects our spelling tests every Friday.</a:t>
             </a:r>
             <a:endParaRPr lang="en-US" sz="1500" dirty="0"/>
           </a:p>
@@ -43149,7 +44491,7 @@
                 <a:ea typeface="Calibri" pitchFamily="34" charset="-122"/>
                 <a:cs typeface="Calibri" pitchFamily="34" charset="-120"/>
               </a:rPr>
-              <a:t>Maya answered every question correctly and was very proud of herself.</a:t>
+              <a:t>The teacher corrected the spelling mistakes in my essay.</a:t>
             </a:r>
             <a:endParaRPr lang="en-US" sz="1500" dirty="0"/>
           </a:p>
